--- a/05_Website_Angular/docs/Linaw-PH-Video-Presentation.pptx
+++ b/05_Website_Angular/docs/Linaw-PH-Video-Presentation.pptx
@@ -6,7 +6,7 @@
   </p:sldMasterIdLst>
   <p:sldIdLst>
     <p:sldId id="256" r:id="rId7"/>
-    <p:sldId id="257" r:id="rId8"/>
+    <p:sldId id="257" r:id="rId9"/>
     <p:sldId id="258" r:id="rId10"/>
     <p:sldId id="259" r:id="rId11"/>
     <p:sldId id="260" r:id="rId12"/>
@@ -20,11 +20,6 @@
     <p:sldId id="268" r:id="rId20"/>
     <p:sldId id="269" r:id="rId21"/>
     <p:sldId id="270" r:id="rId22"/>
-    <p:sldId id="271" r:id="rId23"/>
-    <p:sldId id="272" r:id="rId24"/>
-    <p:sldId id="273" r:id="rId25"/>
-    <p:sldId id="274" r:id="rId26"/>
-    <p:sldId id="275" r:id="rId27"/>
   </p:sldIdLst>
   <p:sldSz cx="12191695" cy="6858000" type="screen4x3"/>
   <p:notesSz cx="6858000" cy="9144000"/>
@@ -521,7 +516,7 @@
           <a:lstStyle/>
           <a:p>
             <a:r>
-              <a:t>Open here. Say the sentence, pause, then move. This is the whole study in one line and the panel should hear it before any number.</a:t>
+              <a:t>TIME: 20-25 sec. SAY: 'Good day. We are Garcia, Santos and Talens, BS Information Technology, Web Development track, School of Computing, Holy Angel University. Our capstone is Linaw PH — a free web-based resume builder and ATS-inspired job matching system for job seekers and partner companies in the Philippines, developed with our partner company Clark Outsourcing.' VISUAL: title card only. TRANSITION: cut straight to the problem — no extra preamble.</a:t>
             </a:r>
           </a:p>
         </p:txBody>
@@ -591,7 +586,7 @@
           <a:lstStyle/>
           <a:p>
             <a:r>
-              <a:t>Verification is what the system does correctly; validation is whether respondents found it good. Keep the two apart — a panelist may test whether you know the difference.</a:t>
+              <a:t>TIME: 75-90 sec. SAY: 'We used a quantitative descriptive design — we're measuring how widely a problem is shared and how highly the system is rated, using closed survey questions, not interviews. We built the system using Waterfall, on purpose: the evaluation needed one finished system that every respondent rates, and an agile, constantly-changing build would have given different people different versions to judge. Five survey instruments went to three groups — job seekers, HR staff, and IT experts — some before the system existed and some after. And before any of that, we ran two hundred thirty-two automated tests and about a hundred twenty browser walkthroughs, so correctness was checked by testing, not left for respondents to discover.' VISUAL: bullets on screen. TRANSITION: 'Here is what those respondents actually said.'</a:t>
             </a:r>
           </a:p>
         </p:txBody>
@@ -661,7 +656,7 @@
           <a:lstStyle/>
           <a:p>
             <a:r>
-              <a:t>Say the n values out loud. Hiding a small n is what draws the question; stating it first removes it.</a:t>
+              <a:t>TIME: 75-90 sec. SAY: 'The people who actually used the system rated it good across the board — 4.28 from job seekers, 4.22 from HR. The IT experts, who inspected the code rather than using it day to day, rated it higher, 4.80. We also ran a System Usability Scale, the one published, industry-standard instrument in our study — we scored 74.7, above the typical average of 68. And on the items we asked twice, before and after using the system, worry about computer screening dropped from 3.93 to 2.65 — a large, statistically significant improvement.' VISUAL: table full-screen. TRANSITION: 'Does that mean we hit every goal we set out to hit?'</a:t>
             </a:r>
           </a:p>
         </p:txBody>
@@ -731,7 +726,7 @@
           <a:lstStyle/>
           <a:p>
             <a:r>
-              <a:t>The SUS is the only published instrument in the study and the only figure comparable to systems outside it. 74.7 is above the conventional average and below the eighty read as excellent.</a:t>
+              <a:t>TIME: 50-60 sec. SAY: 'Six of our eight objectives are directly supported by respondent data. Two are not — nobody rated the administrator account, because none of our three respondent groups uses it, and no instrument specifically asked whether a low-experience user found the system usable. We say that plainly rather than assume it. That is what an honest capstone looks like.' VISUAL: table on screen. TRANSITION: 'So who actually benefits, and where are the real limits?'</a:t>
             </a:r>
           </a:p>
         </p:txBody>
@@ -801,7 +796,7 @@
           <a:lstStyle/>
           <a:p>
             <a:r>
-              <a:t>Be first to say what this does not show: no control group, one session, and the two groups are compared as independent samples because no linking identifier was collected. The change is real; the cause is not established.</a:t>
+              <a:t>TIME: 55-65 sec. SAY: 'Job seekers get a completely free tool that produces a resume screening software can actually read. Our partner company gets applications that arrive already scored against its own stated requirements. Our contribution to research is a fully transparent, documented scoring formula — nothing hidden, nothing learned by a black-box model. But we're direct about the limits: one partner company, one short session per respondent, no control group. And we do not claim the system saves recruiters time — that was the one claim our own data does not support, and we say so rather than hide it.' VISUAL: bullets. TRANSITION: 'So, to close —'</a:t>
             </a:r>
           </a:p>
         </p:txBody>
@@ -871,7 +866,7 @@
           <a:lstStyle/>
           <a:p>
             <a:r>
-              <a:t>Four of ten spotted, unprompted, that the experience component measures duration rather than relevance. That is a correct reading of our formula and it became a recommendation, not a defence.</a:t>
+              <a:t>TIME: 45-55 sec. SAY: 'Our conclusion: the two-sided hiring problem we set out to study is real, and Linaw PH's transparency and human-control design is its most strongly supported result — stronger than any claim about saving time, which we don't make. Going forward, we recommend adding a relevance measure to the experience score, making the weight control easier to find, and testing this at more than one company.' VISUAL: bullets. TRANSITION: to the closing summary slide.</a:t>
             </a:r>
           </a:p>
         </p:txBody>
@@ -941,287 +936,7 @@
           <a:lstStyle/>
           <a:p>
             <a:r>
-              <a:t>Note the asymmetry out loud: the people who inspected the system rated it higher than the people who used it. Where they disagree, the lower figure is the one produced by the people the system is for.</a:t>
-            </a:r>
-          </a:p>
-        </p:txBody>
-      </p:sp>
-      <p:sp>
-        <p:nvSpPr>
-          <p:cNvPr id="4" name="Slide Number Placeholder 3"/>
-          <p:cNvSpPr>
-            <a:spLocks noGrp="1"/>
-          </p:cNvSpPr>
-          <p:nvPr>
-            <p:ph type="sldNum" idx="5" sz="quarter"/>
-          </p:nvPr>
-        </p:nvSpPr>
-        <p:spPr/>
-      </p:sp>
-    </p:spTree>
-  </p:cSld>
-  <p:clrMapOvr>
-    <a:masterClrMapping/>
-  </p:clrMapOvr>
-</p:notes>
-</file>
-
-<file path=ppt/notesSlides/notesSlide16.xml><?xml version="1.0" encoding="utf-8"?>
-<p:notes xmlns:a="http://schemas.openxmlformats.org/drawingml/2006/main" xmlns:p="http://schemas.openxmlformats.org/presentationml/2006/main" xmlns:r="http://schemas.openxmlformats.org/officeDocument/2006/relationships">
-  <p:cSld>
-    <p:spTree>
-      <p:nvGrpSpPr>
-        <p:cNvPr id="1" name=""/>
-        <p:cNvGrpSpPr/>
-        <p:nvPr/>
-      </p:nvGrpSpPr>
-      <p:grpSpPr>
-        <a:xfrm>
-          <a:off x="0" y="0"/>
-          <a:ext cx="0" cy="0"/>
-          <a:chOff x="0" y="0"/>
-          <a:chExt cx="0" cy="0"/>
-        </a:xfrm>
-      </p:grpSpPr>
-      <p:sp>
-        <p:nvSpPr>
-          <p:cNvPr id="2" name="Slide Image Placeholder 1"/>
-          <p:cNvSpPr>
-            <a:spLocks noGrp="1"/>
-          </p:cNvSpPr>
-          <p:nvPr>
-            <p:ph type="sldImg" idx="2"/>
-          </p:nvPr>
-        </p:nvSpPr>
-        <p:spPr/>
-      </p:sp>
-      <p:sp>
-        <p:nvSpPr>
-          <p:cNvPr id="3" name="Notes Placeholder 2"/>
-          <p:cNvSpPr>
-            <a:spLocks noGrp="1"/>
-          </p:cNvSpPr>
-          <p:nvPr>
-            <p:ph type="body" idx="3" sz="quarter"/>
-          </p:nvPr>
-        </p:nvSpPr>
-        <p:spPr/>
-        <p:txBody>
-          <a:bodyPr/>
-          <a:lstStyle/>
-          <a:p>
-            <a:r>
-              <a:t>This is the slide to leave up longest. The pattern is the finding: everyone who used it says good, only the panel that inspected it says excellent.</a:t>
-            </a:r>
-          </a:p>
-        </p:txBody>
-      </p:sp>
-      <p:sp>
-        <p:nvSpPr>
-          <p:cNvPr id="4" name="Slide Number Placeholder 3"/>
-          <p:cNvSpPr>
-            <a:spLocks noGrp="1"/>
-          </p:cNvSpPr>
-          <p:nvPr>
-            <p:ph type="sldNum" idx="5" sz="quarter"/>
-          </p:nvPr>
-        </p:nvSpPr>
-        <p:spPr/>
-      </p:sp>
-    </p:spTree>
-  </p:cSld>
-  <p:clrMapOvr>
-    <a:masterClrMapping/>
-  </p:clrMapOvr>
-</p:notes>
-</file>
-
-<file path=ppt/notesSlides/notesSlide17.xml><?xml version="1.0" encoding="utf-8"?>
-<p:notes xmlns:a="http://schemas.openxmlformats.org/drawingml/2006/main" xmlns:p="http://schemas.openxmlformats.org/presentationml/2006/main" xmlns:r="http://schemas.openxmlformats.org/officeDocument/2006/relationships">
-  <p:cSld>
-    <p:spTree>
-      <p:nvGrpSpPr>
-        <p:cNvPr id="1" name=""/>
-        <p:cNvGrpSpPr/>
-        <p:nvPr/>
-      </p:nvGrpSpPr>
-      <p:grpSpPr>
-        <a:xfrm>
-          <a:off x="0" y="0"/>
-          <a:ext cx="0" cy="0"/>
-          <a:chOff x="0" y="0"/>
-          <a:chExt cx="0" cy="0"/>
-        </a:xfrm>
-      </p:grpSpPr>
-      <p:sp>
-        <p:nvSpPr>
-          <p:cNvPr id="2" name="Slide Image Placeholder 1"/>
-          <p:cNvSpPr>
-            <a:spLocks noGrp="1"/>
-          </p:cNvSpPr>
-          <p:nvPr>
-            <p:ph type="sldImg" idx="2"/>
-          </p:nvPr>
-        </p:nvSpPr>
-        <p:spPr/>
-      </p:sp>
-      <p:sp>
-        <p:nvSpPr>
-          <p:cNvPr id="3" name="Notes Placeholder 2"/>
-          <p:cNvSpPr>
-            <a:spLocks noGrp="1"/>
-          </p:cNvSpPr>
-          <p:nvPr>
-            <p:ph type="body" idx="3" sz="quarter"/>
-          </p:nvPr>
-        </p:nvSpPr>
-        <p:spPr/>
-        <p:txBody>
-          <a:bodyPr/>
-          <a:lstStyle/>
-          <a:p>
-            <a:r>
-              <a:t>If you only get through one slide of Chapter 5, make it this one.</a:t>
-            </a:r>
-          </a:p>
-        </p:txBody>
-      </p:sp>
-      <p:sp>
-        <p:nvSpPr>
-          <p:cNvPr id="4" name="Slide Number Placeholder 3"/>
-          <p:cNvSpPr>
-            <a:spLocks noGrp="1"/>
-          </p:cNvSpPr>
-          <p:nvPr>
-            <p:ph type="sldNum" idx="5" sz="quarter"/>
-          </p:nvPr>
-        </p:nvSpPr>
-        <p:spPr/>
-      </p:sp>
-    </p:spTree>
-  </p:cSld>
-  <p:clrMapOvr>
-    <a:masterClrMapping/>
-  </p:clrMapOvr>
-</p:notes>
-</file>
-
-<file path=ppt/notesSlides/notesSlide18.xml><?xml version="1.0" encoding="utf-8"?>
-<p:notes xmlns:a="http://schemas.openxmlformats.org/drawingml/2006/main" xmlns:p="http://schemas.openxmlformats.org/presentationml/2006/main" xmlns:r="http://schemas.openxmlformats.org/officeDocument/2006/relationships">
-  <p:cSld>
-    <p:spTree>
-      <p:nvGrpSpPr>
-        <p:cNvPr id="1" name=""/>
-        <p:cNvGrpSpPr/>
-        <p:nvPr/>
-      </p:nvGrpSpPr>
-      <p:grpSpPr>
-        <a:xfrm>
-          <a:off x="0" y="0"/>
-          <a:ext cx="0" cy="0"/>
-          <a:chOff x="0" y="0"/>
-          <a:chExt cx="0" cy="0"/>
-        </a:xfrm>
-      </p:grpSpPr>
-      <p:sp>
-        <p:nvSpPr>
-          <p:cNvPr id="2" name="Slide Image Placeholder 1"/>
-          <p:cNvSpPr>
-            <a:spLocks noGrp="1"/>
-          </p:cNvSpPr>
-          <p:nvPr>
-            <p:ph type="sldImg" idx="2"/>
-          </p:nvPr>
-        </p:nvSpPr>
-        <p:spPr/>
-      </p:sp>
-      <p:sp>
-        <p:nvSpPr>
-          <p:cNvPr id="3" name="Notes Placeholder 2"/>
-          <p:cNvSpPr>
-            <a:spLocks noGrp="1"/>
-          </p:cNvSpPr>
-          <p:nvPr>
-            <p:ph type="body" idx="3" sz="quarter"/>
-          </p:nvPr>
-        </p:nvSpPr>
-        <p:spPr/>
-        <p:txBody>
-          <a:bodyPr/>
-          <a:lstStyle/>
-          <a:p>
-            <a:r>
-              <a:t>Every recommendation here is tied to a specific finding. That is what makes them defensible rather than generic.</a:t>
-            </a:r>
-          </a:p>
-        </p:txBody>
-      </p:sp>
-      <p:sp>
-        <p:nvSpPr>
-          <p:cNvPr id="4" name="Slide Number Placeholder 3"/>
-          <p:cNvSpPr>
-            <a:spLocks noGrp="1"/>
-          </p:cNvSpPr>
-          <p:nvPr>
-            <p:ph type="sldNum" idx="5" sz="quarter"/>
-          </p:nvPr>
-        </p:nvSpPr>
-        <p:spPr/>
-      </p:sp>
-    </p:spTree>
-  </p:cSld>
-  <p:clrMapOvr>
-    <a:masterClrMapping/>
-  </p:clrMapOvr>
-</p:notes>
-</file>
-
-<file path=ppt/notesSlides/notesSlide19.xml><?xml version="1.0" encoding="utf-8"?>
-<p:notes xmlns:a="http://schemas.openxmlformats.org/drawingml/2006/main" xmlns:p="http://schemas.openxmlformats.org/presentationml/2006/main" xmlns:r="http://schemas.openxmlformats.org/officeDocument/2006/relationships">
-  <p:cSld>
-    <p:spTree>
-      <p:nvGrpSpPr>
-        <p:cNvPr id="1" name=""/>
-        <p:cNvGrpSpPr/>
-        <p:nvPr/>
-      </p:nvGrpSpPr>
-      <p:grpSpPr>
-        <a:xfrm>
-          <a:off x="0" y="0"/>
-          <a:ext cx="0" cy="0"/>
-          <a:chOff x="0" y="0"/>
-          <a:chExt cx="0" cy="0"/>
-        </a:xfrm>
-      </p:grpSpPr>
-      <p:sp>
-        <p:nvSpPr>
-          <p:cNvPr id="2" name="Slide Image Placeholder 1"/>
-          <p:cNvSpPr>
-            <a:spLocks noGrp="1"/>
-          </p:cNvSpPr>
-          <p:nvPr>
-            <p:ph type="sldImg" idx="2"/>
-          </p:nvPr>
-        </p:nvSpPr>
-        <p:spPr/>
-      </p:sp>
-      <p:sp>
-        <p:nvSpPr>
-          <p:cNvPr id="3" name="Notes Placeholder 2"/>
-          <p:cNvSpPr>
-            <a:spLocks noGrp="1"/>
-          </p:cNvSpPr>
-          <p:nvPr>
-            <p:ph type="body" idx="3" sz="quarter"/>
-          </p:nvPr>
-        </p:nvSpPr>
-        <p:spPr/>
-        <p:txBody>
-          <a:bodyPr/>
-          <a:lstStyle/>
-          <a:p>
-            <a:r>
-              <a:t>Close on this. Then thank the panel and the partner company by name.</a:t>
+              <a:t>TIME: 25-35 sec. SAY: 'A two-sided hiring problem, a transparent scoring system, built and tested end to end, rated good to excellent by everyone who touched it, with an honest account of its limits. Thank you for watching.' VISUAL: closing card. END OF VIDEO.</a:t>
             </a:r>
           </a:p>
         </p:txBody>
@@ -1291,77 +1006,7 @@
           <a:lstStyle/>
           <a:p>
             <a:r>
-              <a:t>The point to land: we did not assume the problem. We measured it on both sides, separately, before a line of the system existed. The two accounts agree.</a:t>
-            </a:r>
-          </a:p>
-        </p:txBody>
-      </p:sp>
-      <p:sp>
-        <p:nvSpPr>
-          <p:cNvPr id="4" name="Slide Number Placeholder 3"/>
-          <p:cNvSpPr>
-            <a:spLocks noGrp="1"/>
-          </p:cNvSpPr>
-          <p:nvPr>
-            <p:ph type="sldNum" idx="5" sz="quarter"/>
-          </p:nvPr>
-        </p:nvSpPr>
-        <p:spPr/>
-      </p:sp>
-    </p:spTree>
-  </p:cSld>
-  <p:clrMapOvr>
-    <a:masterClrMapping/>
-  </p:clrMapOvr>
-</p:notes>
-</file>
-
-<file path=ppt/notesSlides/notesSlide20.xml><?xml version="1.0" encoding="utf-8"?>
-<p:notes xmlns:a="http://schemas.openxmlformats.org/drawingml/2006/main" xmlns:p="http://schemas.openxmlformats.org/presentationml/2006/main" xmlns:r="http://schemas.openxmlformats.org/officeDocument/2006/relationships">
-  <p:cSld>
-    <p:spTree>
-      <p:nvGrpSpPr>
-        <p:cNvPr id="1" name=""/>
-        <p:cNvGrpSpPr/>
-        <p:nvPr/>
-      </p:nvGrpSpPr>
-      <p:grpSpPr>
-        <a:xfrm>
-          <a:off x="0" y="0"/>
-          <a:ext cx="0" cy="0"/>
-          <a:chOff x="0" y="0"/>
-          <a:chExt cx="0" cy="0"/>
-        </a:xfrm>
-      </p:grpSpPr>
-      <p:sp>
-        <p:nvSpPr>
-          <p:cNvPr id="2" name="Slide Image Placeholder 1"/>
-          <p:cNvSpPr>
-            <a:spLocks noGrp="1"/>
-          </p:cNvSpPr>
-          <p:nvPr>
-            <p:ph type="sldImg" idx="2"/>
-          </p:nvPr>
-        </p:nvSpPr>
-        <p:spPr/>
-      </p:sp>
-      <p:sp>
-        <p:nvSpPr>
-          <p:cNvPr id="3" name="Notes Placeholder 2"/>
-          <p:cNvSpPr>
-            <a:spLocks noGrp="1"/>
-          </p:cNvSpPr>
-          <p:nvPr>
-            <p:ph type="body" idx="3" sz="quarter"/>
-          </p:nvPr>
-        </p:nvSpPr>
-        <p:spPr/>
-        <p:txBody>
-          <a:bodyPr/>
-          <a:lstStyle/>
-          <a:p>
-            <a:r>
-              <a:t>Title card for the recording. Hold about four seconds. Then cut to the next slide and start speaking — no verbal reading of the title.</a:t>
+              <a:t>TIME: 75-90 sec. SAY: 'New job seekers face two problems at once. Their resumes are hard for both software and people to read, and when they get rejected, nobody tells them why. On the other side, recruiters at our partner company, Clark Outsourcing, screen applications mostly by hand and told us formatting gets in their way more than anything else. We didn't assume this problem — we surveyed 46 job seekers and 11 HR staff before building anything, separately, and neither group saw the other's answers. They described the same problem from opposite ends.' VISUAL: the three stat cards on screen while narrating. TRANSITION: 'So here is what we built to fix it.'</a:t>
             </a:r>
           </a:p>
         </p:txBody>
@@ -1431,7 +1076,7 @@
           <a:lstStyle/>
           <a:p>
             <a:r>
-              <a:t>Panels reward a team that names its own weakest premise first. Say it plainly and move on; do not over-defend.</a:t>
+              <a:t>TIME: 50-60 sec. SAY: 'We built Linaw PH, a free system with two sides. Job seekers get a guided builder that produces a resume screening software can actually read. Recruiters get that same resume already scored and ranked against what their posting asks for. We chose a rule-based formula on purpose, not machine learning — because an applicant deserves to know exactly why they got a number, and a model we can't fully explain can't be shown to the person it judges.' VISUAL: simple before/after split — unstructured resume vs structured score breakdown, if a graphic is available; otherwise stay on the bullets. TRANSITION: 'Here's exactly who this is for and what it does.'</a:t>
             </a:r>
           </a:p>
         </p:txBody>
@@ -1501,7 +1146,7 @@
           <a:lstStyle/>
           <a:p>
             <a:r>
-              <a:t>Walk left to right in about twenty seconds. Do not read the boxes aloud — point at the three columns and say what each is for.</a:t>
+              <a:t>TIME: 70-85 sec. SAY: 'The system serves three account types. Job seekers build resumes and apply. Recruiters post openings, review ranked applicants, and manage the hiring pipeline. An administrator — our research team — approves recruiter access and keeps departments routed correctly. Our scope is one partner company for this evaluation, Clark Outsourcing in Clark Freeport Zone, though the system itself is built to support more than one.' VISUAL: the table stays up the whole time. TRANSITION: 'Let's look at the features that matter most.'</a:t>
             </a:r>
           </a:p>
         </p:txBody>
@@ -1571,7 +1216,7 @@
           <a:lstStyle/>
           <a:p>
             <a:r>
-              <a:t>Keep this to forty seconds. The demo carries the detail; this slide is only the shape of the thing.</a:t>
+              <a:t>TIME: 70-85 sec. SAY: 'Four features carry the whole system. The guided builder — three resume formats, fourteen designs, all parser-safe. The matching score — transparent, adjustable per job posting, and shown in full to the applicant. The system never auto-rejects — if there's no strong match it still shows the score honestly and suggests related openings. And every application moves through nine tracked stages with a full audit trail, so nothing happens invisibly.' VISUAL: screenshots of the builder and the score breakdown if available. TRANSITION: 'Here's how those pieces actually connect end to end.'</a:t>
             </a:r>
           </a:p>
         </p:txBody>
@@ -1641,7 +1286,7 @@
           <a:lstStyle/>
           <a:p>
             <a:r>
-              <a:t>If asked why rule-based rather than AI: because we have to be able to explain every number to the applicant it belongs to, and a model we cannot explain cannot be shown to them.</a:t>
+              <a:t>TIME: 45-55 sec. SAY: 'On the job seeker side: register, verify your email, build your resume step by step, then browse postings and see your match score before you even apply. On the recruiter side: once approved, they create a posting, optionally adjust the scoring weights, then get a ranked list of every applicant with a full score breakdown, and manage status from there. Both paths meet at the same database record — the application.' VISUAL: the two-column flow stays on screen. TRANSITION: 'That flow runs on a specific technology stack — quickly, what's under the hood.'</a:t>
             </a:r>
           </a:p>
         </p:txBody>
@@ -1711,7 +1356,7 @@
           <a:lstStyle/>
           <a:p>
             <a:r>
-              <a:t>This is a small feature that panels like, because it shows the matching is engineered rather than string comparison.</a:t>
+              <a:t>TIME: 45-55 sec. SAY: 'In simple terms: Angular builds what you see on screen. Node with TypeScript runs the logic behind it — checking logins, computing scores. PostgreSQL stores everything — users, resumes, postings, applications. We used the same language, TypeScript, on both the browser side and the server side specifically so the scoring formula is written once, not copy-pasted twice where it could quietly go out of sync.' VISUAL: stay on the three-layer text; a simple boxes-and-arrows diagram works if you have one. TRANSITION: 'Here's how that data is actually organised.'</a:t>
             </a:r>
           </a:p>
         </p:txBody>
@@ -1781,7 +1426,7 @@
           <a:lstStyle/>
           <a:p>
             <a:r>
-              <a:t>The line at the bottom is the one to say out loud. It is the study's central design commitment and the answer to the fairness question before it is asked.</a:t>
+              <a:t>TIME: 40-50 sec. SAY: 'This is the actual database, twenty-four tables. The important relationships: one user has many resumes; one posting has many applications; every application links one applicant, one resume and one posting, with its score and full status history recorded. Nothing about a hiring decision is invisible or untracked.' VISUAL: full ERD on screen, zoom into the applications/match_scores area if recording lets you. TRANSITION: 'Enough diagrams — let's see it running.'</a:t>
             </a:r>
           </a:p>
         </p:txBody>
@@ -1851,7 +1496,7 @@
           <a:lstStyle/>
           <a:p>
             <a:r>
-              <a:t>Do not read tables aloud. Point out application_status_history: every status change is recorded with the account that made it, which is what makes the audit trail real rather than claimed.</a:t>
+              <a:t>TIME: 3.5-4.5 min — THIS IS THE LONGEST SLIDE. Keep it on screen while you screen-share/switch to the live system; do not click back to this slide until the demo is done. FULL STEP-BY-STEP SCRIPT IS IN THE COMPANION DEMO SCRIPT DOCUMENT — follow it exactly for what to click and what to say at each step. The one sentence to repeat during the demo: 'Notice the applicant and the recruiter are looking at the exact same score and the exact same reasons.' That single sentence is the whole research problem being solved on screen. TRANSITION after demo: 'Now — how do we know this actually works, and how do we know it's any good?'</a:t>
             </a:r>
           </a:p>
         </p:txBody>
@@ -4935,7 +4580,7 @@
                 </a:solidFill>
                 <a:latin typeface="Calibri"/>
               </a:rPr>
-              <a:t>CAPSTONE PROJECT · VIDEO PRESENTATION</a:t>
+              <a:t>CAPSTONE VIDEO PRESENTATION</a:t>
             </a:r>
           </a:p>
           <a:p>
@@ -4990,7 +4635,7 @@
                 </a:solidFill>
                 <a:latin typeface="Calibri"/>
               </a:rPr>
-              <a:t>A free web-based resume builder and ATS-inspired job matching system for job seekers and partner companies</a:t>
+              <a:t>A Web-Based Resume Builder and ATS-Inspired Job Matching System for Job Seekers and Partner Companies in the Philippines</a:t>
             </a:r>
           </a:p>
         </p:txBody>
@@ -5045,7 +4690,7 @@
                 </a:solidFill>
                 <a:latin typeface="Calibri"/>
               </a:rPr>
-              <a:t>School of Computing, Holy Angel University  ·  Angeles City, Pampanga</a:t>
+              <a:t>BS Information Technology, Web Development  ·  School of Computing, Holy Angel University</a:t>
             </a:r>
           </a:p>
           <a:p>
@@ -5061,7 +4706,7 @@
                 </a:solidFill>
                 <a:latin typeface="Calibri"/>
               </a:rPr>
-              <a:t>Industry partner: Clark Outsourcing, Clark Freeport Zone</a:t>
+              <a:t>Adviser: Dr. Jeanky Salenga-Mendez  ·  Partner company: Clark Outsourcing, Clark Freeport Zone</a:t>
             </a:r>
           </a:p>
         </p:txBody>
@@ -5118,7 +4763,7 @@
                 </a:solidFill>
                 <a:latin typeface="Calibri"/>
               </a:rPr>
-              <a:t>THE DATA</a:t>
+              <a:t>METHODOLOGY</a:t>
             </a:r>
           </a:p>
         </p:txBody>
@@ -5157,7 +4802,298 @@
                 </a:solidFill>
                 <a:latin typeface="Calibri"/>
               </a:rPr>
-              <a:t>The database behind it</a:t>
+              <a:t>Methodology and Development</a:t>
+            </a:r>
+          </a:p>
+        </p:txBody>
+      </p:sp>
+      <p:sp>
+        <p:nvSpPr>
+          <p:cNvPr id="4" name="Rectangle 3"/>
+          <p:cNvSpPr/>
+          <p:nvPr/>
+        </p:nvSpPr>
+        <p:spPr>
+          <a:xfrm>
+            <a:off x="658368" y="1316736"/>
+            <a:ext cx="10881360" cy="20320"/>
+          </a:xfrm>
+          <a:prstGeom prst="rect">
+            <a:avLst/>
+          </a:prstGeom>
+          <a:solidFill>
+            <a:srgbClr val="C3CEE6"/>
+          </a:solidFill>
+          <a:ln>
+            <a:noFill/>
+          </a:ln>
+          <a:effectLst/>
+        </p:spPr>
+        <p:style>
+          <a:lnRef idx="1">
+            <a:schemeClr val="accent1"/>
+          </a:lnRef>
+          <a:fillRef idx="3">
+            <a:schemeClr val="accent1"/>
+          </a:fillRef>
+          <a:effectRef idx="2">
+            <a:schemeClr val="accent1"/>
+          </a:effectRef>
+          <a:fontRef idx="minor">
+            <a:schemeClr val="lt1"/>
+          </a:fontRef>
+        </p:style>
+        <p:txBody>
+          <a:bodyPr rtlCol="0" anchor="ctr"/>
+          <a:lstStyle/>
+          <a:p>
+            <a:pPr algn="ctr"/>
+          </a:p>
+        </p:txBody>
+      </p:sp>
+      <p:sp>
+        <p:nvSpPr>
+          <p:cNvPr id="5" name="TextBox 4"/>
+          <p:cNvSpPr txBox="1"/>
+          <p:nvPr/>
+        </p:nvSpPr>
+        <p:spPr>
+          <a:xfrm>
+            <a:off x="658368" y="1645920"/>
+            <a:ext cx="10881360" cy="4389120"/>
+          </a:xfrm>
+          <a:prstGeom prst="rect">
+            <a:avLst/>
+          </a:prstGeom>
+          <a:noFill/>
+        </p:spPr>
+        <p:txBody>
+          <a:bodyPr wrap="square" lIns="0" rIns="0" tIns="0" bIns="0" anchor="t">
+            <a:spAutoFit/>
+          </a:bodyPr>
+          <a:lstStyle/>
+          <a:p>
+            <a:pPr algn="l">
+              <a:spcAft>
+                <a:spcPts val="300"/>
+              </a:spcAft>
+            </a:pPr>
+            <a:r>
+              <a:rPr sz="1800" b="1" i="0">
+                <a:solidFill>
+                  <a:srgbClr val="1F3160"/>
+                </a:solidFill>
+                <a:latin typeface="Calibri"/>
+              </a:rPr>
+              <a:t>Quantitative descriptive design</a:t>
+            </a:r>
+          </a:p>
+          <a:p>
+            <a:pPr>
+              <a:spcAft>
+                <a:spcPts val="1300"/>
+              </a:spcAft>
+            </a:pPr>
+            <a:r>
+              <a:rPr sz="1500" b="0" i="0">
+                <a:solidFill>
+                  <a:srgbClr val="5A6B8C"/>
+                </a:solidFill>
+                <a:latin typeface="Calibri"/>
+              </a:rPr>
+              <a:t>We measure how widely a difficulty is shared and how highly the finished system is rated — not why, using closed survey items only.</a:t>
+            </a:r>
+          </a:p>
+          <a:p>
+            <a:pPr>
+              <a:spcAft>
+                <a:spcPts val="300"/>
+              </a:spcAft>
+            </a:pPr>
+            <a:r>
+              <a:rPr sz="1800" b="1" i="0">
+                <a:solidFill>
+                  <a:srgbClr val="1F3160"/>
+                </a:solidFill>
+                <a:latin typeface="Calibri"/>
+              </a:rPr>
+              <a:t>Waterfall development</a:t>
+            </a:r>
+          </a:p>
+          <a:p>
+            <a:pPr>
+              <a:spcAft>
+                <a:spcPts val="1300"/>
+              </a:spcAft>
+            </a:pPr>
+            <a:r>
+              <a:rPr sz="1500" b="0" i="0">
+                <a:solidFill>
+                  <a:srgbClr val="5A6B8C"/>
+                </a:solidFill>
+                <a:latin typeface="Calibri"/>
+              </a:rPr>
+              <a:t>The evaluation needed one finished, unchanging system rated by every respondent — an iterative build would have given different people different versions to judge.</a:t>
+            </a:r>
+          </a:p>
+          <a:p>
+            <a:pPr>
+              <a:spcAft>
+                <a:spcPts val="300"/>
+              </a:spcAft>
+            </a:pPr>
+            <a:r>
+              <a:rPr sz="1800" b="1" i="0">
+                <a:solidFill>
+                  <a:srgbClr val="1F3160"/>
+                </a:solidFill>
+                <a:latin typeface="Calibri"/>
+              </a:rPr>
+              <a:t>Five instruments, three respondent groups</a:t>
+            </a:r>
+          </a:p>
+          <a:p>
+            <a:pPr>
+              <a:spcAft>
+                <a:spcPts val="1300"/>
+              </a:spcAft>
+            </a:pPr>
+            <a:r>
+              <a:rPr sz="1500" b="0" i="0">
+                <a:solidFill>
+                  <a:srgbClr val="5A6B8C"/>
+                </a:solidFill>
+                <a:latin typeface="Calibri"/>
+              </a:rPr>
+              <a:t>46 job seekers and 11 then 10 HR staff, before and after using the system; 3 IT experts inspected the finished build and its source code.</a:t>
+            </a:r>
+          </a:p>
+          <a:p>
+            <a:pPr>
+              <a:spcAft>
+                <a:spcPts val="300"/>
+              </a:spcAft>
+            </a:pPr>
+            <a:r>
+              <a:rPr sz="1800" b="1" i="0">
+                <a:solidFill>
+                  <a:srgbClr val="1F3160"/>
+                </a:solidFill>
+                <a:latin typeface="Calibri"/>
+              </a:rPr>
+              <a:t>Verified before it was ever evaluated</a:t>
+            </a:r>
+          </a:p>
+          <a:p>
+            <a:pPr>
+              <a:spcAft>
+                <a:spcPts val="1300"/>
+              </a:spcAft>
+            </a:pPr>
+            <a:r>
+              <a:rPr sz="1500" b="0" i="0">
+                <a:solidFill>
+                  <a:srgbClr val="5A6B8C"/>
+                </a:solidFill>
+                <a:latin typeface="Calibri"/>
+              </a:rPr>
+              <a:t>232 automated tests across eleven suites, plus roughly 120 scripted browser checks, all passing before a single respondent touched the system.</a:t>
+            </a:r>
+          </a:p>
+        </p:txBody>
+      </p:sp>
+    </p:spTree>
+  </p:cSld>
+  <p:clrMapOvr>
+    <a:masterClrMapping/>
+  </p:clrMapOvr>
+</p:sld>
+</file>
+
+<file path=ppt/slides/slide11.xml><?xml version="1.0" encoding="utf-8"?>
+<p:sld xmlns:a="http://schemas.openxmlformats.org/drawingml/2006/main" xmlns:p="http://schemas.openxmlformats.org/presentationml/2006/main" xmlns:r="http://schemas.openxmlformats.org/officeDocument/2006/relationships">
+  <p:cSld>
+    <p:spTree>
+      <p:nvGrpSpPr>
+        <p:cNvPr id="1" name=""/>
+        <p:cNvGrpSpPr/>
+        <p:nvPr/>
+      </p:nvGrpSpPr>
+      <p:grpSpPr/>
+      <p:sp>
+        <p:nvSpPr>
+          <p:cNvPr id="2" name="TextBox 1"/>
+          <p:cNvSpPr txBox="1"/>
+          <p:nvPr/>
+        </p:nvSpPr>
+        <p:spPr>
+          <a:xfrm>
+            <a:off x="658368" y="384048"/>
+            <a:ext cx="10881360" cy="274320"/>
+          </a:xfrm>
+          <a:prstGeom prst="rect">
+            <a:avLst/>
+          </a:prstGeom>
+          <a:noFill/>
+        </p:spPr>
+        <p:txBody>
+          <a:bodyPr wrap="square" lIns="0" rIns="0" tIns="0" bIns="0" anchor="t">
+            <a:spAutoFit/>
+          </a:bodyPr>
+          <a:lstStyle/>
+          <a:p>
+            <a:pPr algn="l">
+              <a:spcAft>
+                <a:spcPts val="200"/>
+              </a:spcAft>
+            </a:pPr>
+            <a:r>
+              <a:rPr sz="1200" b="1" i="0">
+                <a:solidFill>
+                  <a:srgbClr val="2F4B8F"/>
+                </a:solidFill>
+                <a:latin typeface="Calibri"/>
+              </a:rPr>
+              <a:t>RESULTS</a:t>
+            </a:r>
+          </a:p>
+        </p:txBody>
+      </p:sp>
+      <p:sp>
+        <p:nvSpPr>
+          <p:cNvPr id="3" name="TextBox 2"/>
+          <p:cNvSpPr txBox="1"/>
+          <p:nvPr/>
+        </p:nvSpPr>
+        <p:spPr>
+          <a:xfrm>
+            <a:off x="658368" y="658368"/>
+            <a:ext cx="10881360" cy="685800"/>
+          </a:xfrm>
+          <a:prstGeom prst="rect">
+            <a:avLst/>
+          </a:prstGeom>
+          <a:noFill/>
+        </p:spPr>
+        <p:txBody>
+          <a:bodyPr wrap="square" lIns="0" rIns="0" tIns="0" bIns="0" anchor="t">
+            <a:spAutoFit/>
+          </a:bodyPr>
+          <a:lstStyle/>
+          <a:p>
+            <a:pPr algn="l">
+              <a:spcAft>
+                <a:spcPts val="200"/>
+              </a:spcAft>
+            </a:pPr>
+            <a:r>
+              <a:rPr sz="3100" b="1" i="0">
+                <a:solidFill>
+                  <a:srgbClr val="1F3160"/>
+                </a:solidFill>
+                <a:latin typeface="Calibri"/>
+              </a:rPr>
+              <a:t>Results and Evaluation</a:t>
             </a:r>
           </a:p>
         </p:txBody>
@@ -5196,7 +5132,7 @@
                 </a:solidFill>
                 <a:latin typeface="Calibri"/>
               </a:rPr>
-              <a:t>24 tables, 30 foreign keys. Figure 5 of the manuscript.</a:t>
+              <a:t>All in the 'good' band or above, on a scale fixed before any data was collected.</a:t>
             </a:r>
           </a:p>
         </p:txBody>
@@ -5245,823 +5181,6 @@
           </a:p>
         </p:txBody>
       </p:sp>
-      <p:pic>
-        <p:nvPicPr>
-          <p:cNvPr id="6" name="Picture 5" descr="new_fig5.png"/>
-          <p:cNvPicPr>
-            <a:picLocks noChangeAspect="1"/>
-          </p:cNvPicPr>
-          <p:nvPr/>
-        </p:nvPicPr>
-        <p:blipFill>
-          <a:blip r:embed="rId2"/>
-          <a:stretch>
-            <a:fillRect/>
-          </a:stretch>
-        </p:blipFill>
-        <p:spPr>
-          <a:xfrm>
-            <a:off x="2180698" y="2048256"/>
-            <a:ext cx="7836699" cy="4325112"/>
-          </a:xfrm>
-          <a:prstGeom prst="rect">
-            <a:avLst/>
-          </a:prstGeom>
-        </p:spPr>
-      </p:pic>
-      <p:sp>
-        <p:nvSpPr>
-          <p:cNvPr id="7" name="TextBox 6"/>
-          <p:cNvSpPr txBox="1"/>
-          <p:nvPr/>
-        </p:nvSpPr>
-        <p:spPr>
-          <a:xfrm>
-            <a:off x="658368" y="6291072"/>
-            <a:ext cx="10881360" cy="365760"/>
-          </a:xfrm>
-          <a:prstGeom prst="rect">
-            <a:avLst/>
-          </a:prstGeom>
-          <a:noFill/>
-        </p:spPr>
-        <p:txBody>
-          <a:bodyPr wrap="square" lIns="0" rIns="0" tIns="0" bIns="0" anchor="t">
-            <a:spAutoFit/>
-          </a:bodyPr>
-          <a:lstStyle/>
-          <a:p>
-            <a:pPr algn="ctr">
-              <a:spcAft>
-                <a:spcPts val="0"/>
-              </a:spcAft>
-            </a:pPr>
-            <a:r>
-              <a:rPr sz="1250" b="0" i="1">
-                <a:solidFill>
-                  <a:srgbClr val="5A6B8C"/>
-                </a:solidFill>
-                <a:latin typeface="Calibri"/>
-              </a:rPr>
-              <a:t>Generated from db/linaw_ph.sql — the schema the deployed system actually runs on.</a:t>
-            </a:r>
-          </a:p>
-        </p:txBody>
-      </p:sp>
-    </p:spTree>
-  </p:cSld>
-  <p:clrMapOvr>
-    <a:masterClrMapping/>
-  </p:clrMapOvr>
-</p:sld>
-</file>
-
-<file path=ppt/slides/slide11.xml><?xml version="1.0" encoding="utf-8"?>
-<p:sld xmlns:a="http://schemas.openxmlformats.org/drawingml/2006/main" xmlns:p="http://schemas.openxmlformats.org/presentationml/2006/main" xmlns:r="http://schemas.openxmlformats.org/officeDocument/2006/relationships">
-  <p:cSld>
-    <p:spTree>
-      <p:nvGrpSpPr>
-        <p:cNvPr id="1" name=""/>
-        <p:cNvGrpSpPr/>
-        <p:nvPr/>
-      </p:nvGrpSpPr>
-      <p:grpSpPr/>
-      <p:sp>
-        <p:nvSpPr>
-          <p:cNvPr id="2" name="TextBox 1"/>
-          <p:cNvSpPr txBox="1"/>
-          <p:nvPr/>
-        </p:nvSpPr>
-        <p:spPr>
-          <a:xfrm>
-            <a:off x="658368" y="384048"/>
-            <a:ext cx="10881360" cy="274320"/>
-          </a:xfrm>
-          <a:prstGeom prst="rect">
-            <a:avLst/>
-          </a:prstGeom>
-          <a:noFill/>
-        </p:spPr>
-        <p:txBody>
-          <a:bodyPr wrap="square" lIns="0" rIns="0" tIns="0" bIns="0" anchor="t">
-            <a:spAutoFit/>
-          </a:bodyPr>
-          <a:lstStyle/>
-          <a:p>
-            <a:pPr algn="l">
-              <a:spcAft>
-                <a:spcPts val="200"/>
-              </a:spcAft>
-            </a:pPr>
-            <a:r>
-              <a:rPr sz="1200" b="1" i="0">
-                <a:solidFill>
-                  <a:srgbClr val="2F4B8F"/>
-                </a:solidFill>
-                <a:latin typeface="Calibri"/>
-              </a:rPr>
-              <a:t>VERIFICATION</a:t>
-            </a:r>
-          </a:p>
-        </p:txBody>
-      </p:sp>
-      <p:sp>
-        <p:nvSpPr>
-          <p:cNvPr id="3" name="TextBox 2"/>
-          <p:cNvSpPr txBox="1"/>
-          <p:nvPr/>
-        </p:nvSpPr>
-        <p:spPr>
-          <a:xfrm>
-            <a:off x="658368" y="658368"/>
-            <a:ext cx="10881360" cy="685800"/>
-          </a:xfrm>
-          <a:prstGeom prst="rect">
-            <a:avLst/>
-          </a:prstGeom>
-          <a:noFill/>
-        </p:spPr>
-        <p:txBody>
-          <a:bodyPr wrap="square" lIns="0" rIns="0" tIns="0" bIns="0" anchor="t">
-            <a:spAutoFit/>
-          </a:bodyPr>
-          <a:lstStyle/>
-          <a:p>
-            <a:pPr algn="l">
-              <a:spcAft>
-                <a:spcPts val="200"/>
-              </a:spcAft>
-            </a:pPr>
-            <a:r>
-              <a:rPr sz="3100" b="1" i="0">
-                <a:solidFill>
-                  <a:srgbClr val="1F3160"/>
-                </a:solidFill>
-                <a:latin typeface="Calibri"/>
-              </a:rPr>
-              <a:t>How we tested it before anyone rated it</a:t>
-            </a:r>
-          </a:p>
-        </p:txBody>
-      </p:sp>
-      <p:sp>
-        <p:nvSpPr>
-          <p:cNvPr id="4" name="TextBox 3"/>
-          <p:cNvSpPr txBox="1"/>
-          <p:nvPr/>
-        </p:nvSpPr>
-        <p:spPr>
-          <a:xfrm>
-            <a:off x="658368" y="1389888"/>
-            <a:ext cx="10881360" cy="365760"/>
-          </a:xfrm>
-          <a:prstGeom prst="rect">
-            <a:avLst/>
-          </a:prstGeom>
-          <a:noFill/>
-        </p:spPr>
-        <p:txBody>
-          <a:bodyPr wrap="square" lIns="0" rIns="0" tIns="0" bIns="0" anchor="t">
-            <a:spAutoFit/>
-          </a:bodyPr>
-          <a:lstStyle/>
-          <a:p>
-            <a:pPr algn="l">
-              <a:spcAft>
-                <a:spcPts val="0"/>
-              </a:spcAft>
-            </a:pPr>
-            <a:r>
-              <a:rPr sz="1500" b="0" i="1">
-                <a:solidFill>
-                  <a:srgbClr val="5A6B8C"/>
-                </a:solidFill>
-                <a:latin typeface="Calibri"/>
-              </a:rPr>
-              <a:t>Three levels, and they answer different questions.</a:t>
-            </a:r>
-          </a:p>
-        </p:txBody>
-      </p:sp>
-      <p:sp>
-        <p:nvSpPr>
-          <p:cNvPr id="5" name="Rectangle 4"/>
-          <p:cNvSpPr/>
-          <p:nvPr/>
-        </p:nvSpPr>
-        <p:spPr>
-          <a:xfrm>
-            <a:off x="658368" y="1792224"/>
-            <a:ext cx="10881360" cy="20320"/>
-          </a:xfrm>
-          <a:prstGeom prst="rect">
-            <a:avLst/>
-          </a:prstGeom>
-          <a:solidFill>
-            <a:srgbClr val="C3CEE6"/>
-          </a:solidFill>
-          <a:ln>
-            <a:noFill/>
-          </a:ln>
-          <a:effectLst/>
-        </p:spPr>
-        <p:style>
-          <a:lnRef idx="1">
-            <a:schemeClr val="accent1"/>
-          </a:lnRef>
-          <a:fillRef idx="3">
-            <a:schemeClr val="accent1"/>
-          </a:fillRef>
-          <a:effectRef idx="2">
-            <a:schemeClr val="accent1"/>
-          </a:effectRef>
-          <a:fontRef idx="minor">
-            <a:schemeClr val="lt1"/>
-          </a:fontRef>
-        </p:style>
-        <p:txBody>
-          <a:bodyPr rtlCol="0" anchor="ctr"/>
-          <a:lstStyle/>
-          <a:p>
-            <a:pPr algn="ctr"/>
-          </a:p>
-        </p:txBody>
-      </p:sp>
-      <p:sp>
-        <p:nvSpPr>
-          <p:cNvPr id="6" name="Rounded Rectangle 5"/>
-          <p:cNvSpPr/>
-          <p:nvPr/>
-        </p:nvSpPr>
-        <p:spPr>
-          <a:xfrm>
-            <a:off x="658368" y="2121408"/>
-            <a:ext cx="3456432" cy="2148840"/>
-          </a:xfrm>
-          <a:prstGeom prst="roundRect">
-            <a:avLst>
-              <a:gd name="adj" fmla="val 4000"/>
-            </a:avLst>
-          </a:prstGeom>
-          <a:solidFill>
-            <a:srgbClr val="DCE4F5"/>
-          </a:solidFill>
-          <a:ln w="12700">
-            <a:solidFill>
-              <a:srgbClr val="C3CEE6"/>
-            </a:solidFill>
-          </a:ln>
-          <a:effectLst/>
-        </p:spPr>
-        <p:style>
-          <a:lnRef idx="1">
-            <a:schemeClr val="accent1"/>
-          </a:lnRef>
-          <a:fillRef idx="3">
-            <a:schemeClr val="accent1"/>
-          </a:fillRef>
-          <a:effectRef idx="2">
-            <a:schemeClr val="accent1"/>
-          </a:effectRef>
-          <a:fontRef idx="minor">
-            <a:schemeClr val="lt1"/>
-          </a:fontRef>
-        </p:style>
-        <p:txBody>
-          <a:bodyPr rtlCol="0" anchor="ctr"/>
-          <a:lstStyle/>
-          <a:p>
-            <a:pPr algn="ctr"/>
-          </a:p>
-        </p:txBody>
-      </p:sp>
-      <p:sp>
-        <p:nvSpPr>
-          <p:cNvPr id="7" name="TextBox 6"/>
-          <p:cNvSpPr txBox="1"/>
-          <p:nvPr/>
-        </p:nvSpPr>
-        <p:spPr>
-          <a:xfrm>
-            <a:off x="859536" y="2377440"/>
-            <a:ext cx="3054096" cy="1737360"/>
-          </a:xfrm>
-          <a:prstGeom prst="rect">
-            <a:avLst/>
-          </a:prstGeom>
-          <a:noFill/>
-        </p:spPr>
-        <p:txBody>
-          <a:bodyPr wrap="square" lIns="0" rIns="0" tIns="0" bIns="0" anchor="t">
-            <a:spAutoFit/>
-          </a:bodyPr>
-          <a:lstStyle/>
-          <a:p>
-            <a:pPr algn="ctr">
-              <a:spcAft>
-                <a:spcPts val="200"/>
-              </a:spcAft>
-            </a:pPr>
-            <a:r>
-              <a:rPr sz="4200" b="1" i="0">
-                <a:solidFill>
-                  <a:srgbClr val="1F3160"/>
-                </a:solidFill>
-                <a:latin typeface="Calibri"/>
-              </a:rPr>
-              <a:t>232</a:t>
-            </a:r>
-          </a:p>
-          <a:p>
-            <a:pPr algn="ctr">
-              <a:spcAft>
-                <a:spcPts val="600"/>
-              </a:spcAft>
-            </a:pPr>
-            <a:r>
-              <a:rPr sz="1400" b="1" i="0">
-                <a:solidFill>
-                  <a:srgbClr val="2F4B8F"/>
-                </a:solidFill>
-                <a:latin typeface="Calibri"/>
-              </a:rPr>
-              <a:t>AUTOMATED TESTS</a:t>
-            </a:r>
-          </a:p>
-          <a:p>
-            <a:pPr algn="ctr">
-              <a:spcAft>
-                <a:spcPts val="0"/>
-              </a:spcAft>
-            </a:pPr>
-            <a:r>
-              <a:rPr sz="1250" b="0" i="0">
-                <a:solidFill>
-                  <a:srgbClr val="5A6B8C"/>
-                </a:solidFill>
-                <a:latin typeface="Calibri"/>
-              </a:rPr>
-              <a:t>across eleven suites</a:t>
-            </a:r>
-          </a:p>
-        </p:txBody>
-      </p:sp>
-      <p:sp>
-        <p:nvSpPr>
-          <p:cNvPr id="8" name="Rounded Rectangle 7"/>
-          <p:cNvSpPr/>
-          <p:nvPr/>
-        </p:nvSpPr>
-        <p:spPr>
-          <a:xfrm>
-            <a:off x="4370832" y="2121408"/>
-            <a:ext cx="3456432" cy="2148840"/>
-          </a:xfrm>
-          <a:prstGeom prst="roundRect">
-            <a:avLst>
-              <a:gd name="adj" fmla="val 4000"/>
-            </a:avLst>
-          </a:prstGeom>
-          <a:solidFill>
-            <a:srgbClr val="DCE4F5"/>
-          </a:solidFill>
-          <a:ln w="12700">
-            <a:solidFill>
-              <a:srgbClr val="C3CEE6"/>
-            </a:solidFill>
-          </a:ln>
-          <a:effectLst/>
-        </p:spPr>
-        <p:style>
-          <a:lnRef idx="1">
-            <a:schemeClr val="accent1"/>
-          </a:lnRef>
-          <a:fillRef idx="3">
-            <a:schemeClr val="accent1"/>
-          </a:fillRef>
-          <a:effectRef idx="2">
-            <a:schemeClr val="accent1"/>
-          </a:effectRef>
-          <a:fontRef idx="minor">
-            <a:schemeClr val="lt1"/>
-          </a:fontRef>
-        </p:style>
-        <p:txBody>
-          <a:bodyPr rtlCol="0" anchor="ctr"/>
-          <a:lstStyle/>
-          <a:p>
-            <a:pPr algn="ctr"/>
-          </a:p>
-        </p:txBody>
-      </p:sp>
-      <p:sp>
-        <p:nvSpPr>
-          <p:cNvPr id="9" name="TextBox 8"/>
-          <p:cNvSpPr txBox="1"/>
-          <p:nvPr/>
-        </p:nvSpPr>
-        <p:spPr>
-          <a:xfrm>
-            <a:off x="4572000" y="2377440"/>
-            <a:ext cx="3054096" cy="1737360"/>
-          </a:xfrm>
-          <a:prstGeom prst="rect">
-            <a:avLst/>
-          </a:prstGeom>
-          <a:noFill/>
-        </p:spPr>
-        <p:txBody>
-          <a:bodyPr wrap="square" lIns="0" rIns="0" tIns="0" bIns="0" anchor="t">
-            <a:spAutoFit/>
-          </a:bodyPr>
-          <a:lstStyle/>
-          <a:p>
-            <a:pPr algn="ctr">
-              <a:spcAft>
-                <a:spcPts val="200"/>
-              </a:spcAft>
-            </a:pPr>
-            <a:r>
-              <a:rPr sz="4200" b="1" i="0">
-                <a:solidFill>
-                  <a:srgbClr val="1F3160"/>
-                </a:solidFill>
-                <a:latin typeface="Calibri"/>
-              </a:rPr>
-              <a:t>~120</a:t>
-            </a:r>
-          </a:p>
-          <a:p>
-            <a:pPr algn="ctr">
-              <a:spcAft>
-                <a:spcPts val="600"/>
-              </a:spcAft>
-            </a:pPr>
-            <a:r>
-              <a:rPr sz="1400" b="1" i="0">
-                <a:solidFill>
-                  <a:srgbClr val="2F4B8F"/>
-                </a:solidFill>
-                <a:latin typeface="Calibri"/>
-              </a:rPr>
-              <a:t>BROWSER CHECKS</a:t>
-            </a:r>
-          </a:p>
-          <a:p>
-            <a:pPr algn="ctr">
-              <a:spcAft>
-                <a:spcPts val="0"/>
-              </a:spcAft>
-            </a:pPr>
-            <a:r>
-              <a:rPr sz="1250" b="0" i="0">
-                <a:solidFill>
-                  <a:srgbClr val="5A6B8C"/>
-                </a:solidFill>
-                <a:latin typeface="Calibri"/>
-              </a:rPr>
-              <a:t>scripted walkthroughs</a:t>
-            </a:r>
-          </a:p>
-        </p:txBody>
-      </p:sp>
-      <p:sp>
-        <p:nvSpPr>
-          <p:cNvPr id="10" name="Rounded Rectangle 9"/>
-          <p:cNvSpPr/>
-          <p:nvPr/>
-        </p:nvSpPr>
-        <p:spPr>
-          <a:xfrm>
-            <a:off x="8083296" y="2121408"/>
-            <a:ext cx="3456432" cy="2148840"/>
-          </a:xfrm>
-          <a:prstGeom prst="roundRect">
-            <a:avLst>
-              <a:gd name="adj" fmla="val 4000"/>
-            </a:avLst>
-          </a:prstGeom>
-          <a:solidFill>
-            <a:srgbClr val="DCE4F5"/>
-          </a:solidFill>
-          <a:ln w="12700">
-            <a:solidFill>
-              <a:srgbClr val="C3CEE6"/>
-            </a:solidFill>
-          </a:ln>
-          <a:effectLst/>
-        </p:spPr>
-        <p:style>
-          <a:lnRef idx="1">
-            <a:schemeClr val="accent1"/>
-          </a:lnRef>
-          <a:fillRef idx="3">
-            <a:schemeClr val="accent1"/>
-          </a:fillRef>
-          <a:effectRef idx="2">
-            <a:schemeClr val="accent1"/>
-          </a:effectRef>
-          <a:fontRef idx="minor">
-            <a:schemeClr val="lt1"/>
-          </a:fontRef>
-        </p:style>
-        <p:txBody>
-          <a:bodyPr rtlCol="0" anchor="ctr"/>
-          <a:lstStyle/>
-          <a:p>
-            <a:pPr algn="ctr"/>
-          </a:p>
-        </p:txBody>
-      </p:sp>
-      <p:sp>
-        <p:nvSpPr>
-          <p:cNvPr id="11" name="TextBox 10"/>
-          <p:cNvSpPr txBox="1"/>
-          <p:nvPr/>
-        </p:nvSpPr>
-        <p:spPr>
-          <a:xfrm>
-            <a:off x="8284464" y="2377440"/>
-            <a:ext cx="3054096" cy="1737360"/>
-          </a:xfrm>
-          <a:prstGeom prst="rect">
-            <a:avLst/>
-          </a:prstGeom>
-          <a:noFill/>
-        </p:spPr>
-        <p:txBody>
-          <a:bodyPr wrap="square" lIns="0" rIns="0" tIns="0" bIns="0" anchor="t">
-            <a:spAutoFit/>
-          </a:bodyPr>
-          <a:lstStyle/>
-          <a:p>
-            <a:pPr algn="ctr">
-              <a:spcAft>
-                <a:spcPts val="200"/>
-              </a:spcAft>
-            </a:pPr>
-            <a:r>
-              <a:rPr sz="4200" b="1" i="0">
-                <a:solidFill>
-                  <a:srgbClr val="1F3160"/>
-                </a:solidFill>
-                <a:latin typeface="Calibri"/>
-              </a:rPr>
-              <a:t>5</a:t>
-            </a:r>
-          </a:p>
-          <a:p>
-            <a:pPr algn="ctr">
-              <a:spcAft>
-                <a:spcPts val="600"/>
-              </a:spcAft>
-            </a:pPr>
-            <a:r>
-              <a:rPr sz="1400" b="1" i="0">
-                <a:solidFill>
-                  <a:srgbClr val="2F4B8F"/>
-                </a:solidFill>
-                <a:latin typeface="Calibri"/>
-              </a:rPr>
-              <a:t>RESPONDENT INSTRUMENTS</a:t>
-            </a:r>
-          </a:p>
-          <a:p>
-            <a:pPr algn="ctr">
-              <a:spcAft>
-                <a:spcPts val="0"/>
-              </a:spcAft>
-            </a:pPr>
-            <a:r>
-              <a:rPr sz="1250" b="0" i="0">
-                <a:solidFill>
-                  <a:srgbClr val="5A6B8C"/>
-                </a:solidFill>
-                <a:latin typeface="Calibri"/>
-              </a:rPr>
-              <a:t>job seekers, HR, IT experts</a:t>
-            </a:r>
-          </a:p>
-        </p:txBody>
-      </p:sp>
-      <p:sp>
-        <p:nvSpPr>
-          <p:cNvPr id="12" name="TextBox 11"/>
-          <p:cNvSpPr txBox="1"/>
-          <p:nvPr/>
-        </p:nvSpPr>
-        <p:spPr>
-          <a:xfrm>
-            <a:off x="658368" y="4590288"/>
-            <a:ext cx="10881360" cy="1097280"/>
-          </a:xfrm>
-          <a:prstGeom prst="rect">
-            <a:avLst/>
-          </a:prstGeom>
-          <a:noFill/>
-        </p:spPr>
-        <p:txBody>
-          <a:bodyPr wrap="square" lIns="0" rIns="0" tIns="0" bIns="0" anchor="t">
-            <a:spAutoFit/>
-          </a:bodyPr>
-          <a:lstStyle/>
-          <a:p>
-            <a:pPr algn="l">
-              <a:spcAft>
-                <a:spcPts val="0"/>
-              </a:spcAft>
-            </a:pPr>
-            <a:r>
-              <a:rPr sz="1500" b="0" i="0">
-                <a:solidFill>
-                  <a:srgbClr val="1A1A2E"/>
-                </a:solidFill>
-                <a:latin typeface="Calibri"/>
-              </a:rPr>
-              <a:t>The engine suite alone holds 61 tests, including both-sides parity: the browser's copy of the formula and the server's must return the same score for the same input, or the suite fails.</a:t>
-            </a:r>
-          </a:p>
-        </p:txBody>
-      </p:sp>
-    </p:spTree>
-  </p:cSld>
-  <p:clrMapOvr>
-    <a:masterClrMapping/>
-  </p:clrMapOvr>
-</p:sld>
-</file>
-
-<file path=ppt/slides/slide12.xml><?xml version="1.0" encoding="utf-8"?>
-<p:sld xmlns:a="http://schemas.openxmlformats.org/drawingml/2006/main" xmlns:p="http://schemas.openxmlformats.org/presentationml/2006/main" xmlns:r="http://schemas.openxmlformats.org/officeDocument/2006/relationships">
-  <p:cSld>
-    <p:spTree>
-      <p:nvGrpSpPr>
-        <p:cNvPr id="1" name=""/>
-        <p:cNvGrpSpPr/>
-        <p:nvPr/>
-      </p:nvGrpSpPr>
-      <p:grpSpPr/>
-      <p:sp>
-        <p:nvSpPr>
-          <p:cNvPr id="2" name="TextBox 1"/>
-          <p:cNvSpPr txBox="1"/>
-          <p:nvPr/>
-        </p:nvSpPr>
-        <p:spPr>
-          <a:xfrm>
-            <a:off x="658368" y="384048"/>
-            <a:ext cx="10881360" cy="274320"/>
-          </a:xfrm>
-          <a:prstGeom prst="rect">
-            <a:avLst/>
-          </a:prstGeom>
-          <a:noFill/>
-        </p:spPr>
-        <p:txBody>
-          <a:bodyPr wrap="square" lIns="0" rIns="0" tIns="0" bIns="0" anchor="t">
-            <a:spAutoFit/>
-          </a:bodyPr>
-          <a:lstStyle/>
-          <a:p>
-            <a:pPr algn="l">
-              <a:spcAft>
-                <a:spcPts val="200"/>
-              </a:spcAft>
-            </a:pPr>
-            <a:r>
-              <a:rPr sz="1200" b="1" i="0">
-                <a:solidFill>
-                  <a:srgbClr val="2F4B8F"/>
-                </a:solidFill>
-                <a:latin typeface="Calibri"/>
-              </a:rPr>
-              <a:t>THE STUDY</a:t>
-            </a:r>
-          </a:p>
-        </p:txBody>
-      </p:sp>
-      <p:sp>
-        <p:nvSpPr>
-          <p:cNvPr id="3" name="TextBox 2"/>
-          <p:cNvSpPr txBox="1"/>
-          <p:nvPr/>
-        </p:nvSpPr>
-        <p:spPr>
-          <a:xfrm>
-            <a:off x="658368" y="658368"/>
-            <a:ext cx="10881360" cy="685800"/>
-          </a:xfrm>
-          <a:prstGeom prst="rect">
-            <a:avLst/>
-          </a:prstGeom>
-          <a:noFill/>
-        </p:spPr>
-        <p:txBody>
-          <a:bodyPr wrap="square" lIns="0" rIns="0" tIns="0" bIns="0" anchor="t">
-            <a:spAutoFit/>
-          </a:bodyPr>
-          <a:lstStyle/>
-          <a:p>
-            <a:pPr algn="l">
-              <a:spcAft>
-                <a:spcPts val="200"/>
-              </a:spcAft>
-            </a:pPr>
-            <a:r>
-              <a:rPr sz="3100" b="1" i="0">
-                <a:solidFill>
-                  <a:srgbClr val="1F3160"/>
-                </a:solidFill>
-                <a:latin typeface="Calibri"/>
-              </a:rPr>
-              <a:t>How the study was designed</a:t>
-            </a:r>
-          </a:p>
-        </p:txBody>
-      </p:sp>
-      <p:sp>
-        <p:nvSpPr>
-          <p:cNvPr id="4" name="TextBox 3"/>
-          <p:cNvSpPr txBox="1"/>
-          <p:nvPr/>
-        </p:nvSpPr>
-        <p:spPr>
-          <a:xfrm>
-            <a:off x="658368" y="1389888"/>
-            <a:ext cx="10881360" cy="365760"/>
-          </a:xfrm>
-          <a:prstGeom prst="rect">
-            <a:avLst/>
-          </a:prstGeom>
-          <a:noFill/>
-        </p:spPr>
-        <p:txBody>
-          <a:bodyPr wrap="square" lIns="0" rIns="0" tIns="0" bIns="0" anchor="t">
-            <a:spAutoFit/>
-          </a:bodyPr>
-          <a:lstStyle/>
-          <a:p>
-            <a:pPr algn="l">
-              <a:spcAft>
-                <a:spcPts val="0"/>
-              </a:spcAft>
-            </a:pPr>
-            <a:r>
-              <a:rPr sz="1500" b="0" i="1">
-                <a:solidFill>
-                  <a:srgbClr val="5A6B8C"/>
-                </a:solidFill>
-                <a:latin typeface="Calibri"/>
-              </a:rPr>
-              <a:t>Quantitative descriptive. Purposive sampling. A and B before the system existed; C, D and E after.</a:t>
-            </a:r>
-          </a:p>
-        </p:txBody>
-      </p:sp>
-      <p:sp>
-        <p:nvSpPr>
-          <p:cNvPr id="5" name="Rectangle 4"/>
-          <p:cNvSpPr/>
-          <p:nvPr/>
-        </p:nvSpPr>
-        <p:spPr>
-          <a:xfrm>
-            <a:off x="658368" y="1792224"/>
-            <a:ext cx="10881360" cy="20320"/>
-          </a:xfrm>
-          <a:prstGeom prst="rect">
-            <a:avLst/>
-          </a:prstGeom>
-          <a:solidFill>
-            <a:srgbClr val="C3CEE6"/>
-          </a:solidFill>
-          <a:ln>
-            <a:noFill/>
-          </a:ln>
-          <a:effectLst/>
-        </p:spPr>
-        <p:style>
-          <a:lnRef idx="1">
-            <a:schemeClr val="accent1"/>
-          </a:lnRef>
-          <a:fillRef idx="3">
-            <a:schemeClr val="accent1"/>
-          </a:fillRef>
-          <a:effectRef idx="2">
-            <a:schemeClr val="accent1"/>
-          </a:effectRef>
-          <a:fontRef idx="minor">
-            <a:schemeClr val="lt1"/>
-          </a:fontRef>
-        </p:style>
-        <p:txBody>
-          <a:bodyPr rtlCol="0" anchor="ctr"/>
-          <a:lstStyle/>
-          <a:p>
-            <a:pPr algn="ctr"/>
-          </a:p>
-        </p:txBody>
-      </p:sp>
       <p:graphicFrame>
         <p:nvGraphicFramePr>
           <p:cNvPr id="6" name="Table 5"/>
@@ -6072,7 +5191,7 @@
         </p:nvGraphicFramePr>
         <p:xfrm>
           <a:off x="658368" y="2103120"/>
-          <a:ext cx="10881355" cy="2139696"/>
+          <a:ext cx="10881358" cy="1792224"/>
         </p:xfrm>
         <a:graphic>
           <a:graphicData uri="http://schemas.openxmlformats.org/drawingml/2006/table">
@@ -6081,3543 +5200,12 @@
                 <a:tableStyleId>{5C22544A-7EE6-4342-B048-85BDC9FD1C3A}</a:tableStyleId>
               </a:tblPr>
               <a:tblGrid>
-                <a:gridCol w="2590799"/>
-                <a:gridCol w="3454399"/>
-                <a:gridCol w="1209039"/>
-                <a:gridCol w="2072639"/>
-                <a:gridCol w="1554479"/>
+                <a:gridCol w="3746041"/>
+                <a:gridCol w="2497361"/>
+                <a:gridCol w="2497361"/>
+                <a:gridCol w="2140595"/>
               </a:tblGrid>
-              <a:tr h="356616">
-                <a:tc>
-                  <a:txBody>
-                    <a:bodyPr/>
-                    <a:lstStyle/>
-                    <a:p>
-                      <a:r>
-                        <a:rPr sz="1400" b="1">
-                          <a:solidFill>
-                            <a:srgbClr val="FFFFFF"/>
-                          </a:solidFill>
-                          <a:latin typeface="Calibri"/>
-                        </a:rPr>
-                        <a:t>Respondents</a:t>
-                      </a:r>
-                    </a:p>
-                  </a:txBody>
-                  <a:tcPr anchor="ctr" marL="100584">
-                    <a:solidFill>
-                      <a:srgbClr val="1F3160"/>
-                    </a:solidFill>
-                  </a:tcPr>
-                </a:tc>
-                <a:tc>
-                  <a:txBody>
-                    <a:bodyPr/>
-                    <a:lstStyle/>
-                    <a:p>
-                      <a:r>
-                        <a:rPr sz="1400" b="1">
-                          <a:solidFill>
-                            <a:srgbClr val="FFFFFF"/>
-                          </a:solidFill>
-                          <a:latin typeface="Calibri"/>
-                        </a:rPr>
-                        <a:t>Instrument</a:t>
-                      </a:r>
-                    </a:p>
-                  </a:txBody>
-                  <a:tcPr anchor="ctr" marL="100584">
-                    <a:solidFill>
-                      <a:srgbClr val="1F3160"/>
-                    </a:solidFill>
-                  </a:tcPr>
-                </a:tc>
-                <a:tc>
-                  <a:txBody>
-                    <a:bodyPr/>
-                    <a:lstStyle/>
-                    <a:p>
-                      <a:r>
-                        <a:rPr sz="1400" b="1">
-                          <a:solidFill>
-                            <a:srgbClr val="FFFFFF"/>
-                          </a:solidFill>
-                          <a:latin typeface="Calibri"/>
-                        </a:rPr>
-                        <a:t>n</a:t>
-                      </a:r>
-                    </a:p>
-                  </a:txBody>
-                  <a:tcPr anchor="ctr" marL="100584">
-                    <a:solidFill>
-                      <a:srgbClr val="1F3160"/>
-                    </a:solidFill>
-                  </a:tcPr>
-                </a:tc>
-                <a:tc>
-                  <a:txBody>
-                    <a:bodyPr/>
-                    <a:lstStyle/>
-                    <a:p>
-                      <a:r>
-                        <a:rPr sz="1400" b="1">
-                          <a:solidFill>
-                            <a:srgbClr val="FFFFFF"/>
-                          </a:solidFill>
-                          <a:latin typeface="Calibri"/>
-                        </a:rPr>
-                        <a:t>When</a:t>
-                      </a:r>
-                    </a:p>
-                  </a:txBody>
-                  <a:tcPr anchor="ctr" marL="100584">
-                    <a:solidFill>
-                      <a:srgbClr val="1F3160"/>
-                    </a:solidFill>
-                  </a:tcPr>
-                </a:tc>
-                <a:tc>
-                  <a:txBody>
-                    <a:bodyPr/>
-                    <a:lstStyle/>
-                    <a:p>
-                      <a:r>
-                        <a:rPr sz="1400" b="1">
-                          <a:solidFill>
-                            <a:srgbClr val="FFFFFF"/>
-                          </a:solidFill>
-                          <a:latin typeface="Calibri"/>
-                        </a:rPr>
-                        <a:t>Answers</a:t>
-                      </a:r>
-                    </a:p>
-                  </a:txBody>
-                  <a:tcPr anchor="ctr" marL="100584">
-                    <a:solidFill>
-                      <a:srgbClr val="1F3160"/>
-                    </a:solidFill>
-                  </a:tcPr>
-                </a:tc>
-              </a:tr>
-              <a:tr h="356616">
-                <a:tc>
-                  <a:txBody>
-                    <a:bodyPr/>
-                    <a:lstStyle/>
-                    <a:p>
-                      <a:r>
-                        <a:rPr sz="1400">
-                          <a:solidFill>
-                            <a:srgbClr val="1A1A2E"/>
-                          </a:solidFill>
-                          <a:latin typeface="Calibri"/>
-                        </a:rPr>
-                        <a:t>Job seekers</a:t>
-                      </a:r>
-                    </a:p>
-                  </a:txBody>
-                  <a:tcPr anchor="ctr" marL="100584">
-                    <a:solidFill>
-                      <a:srgbClr val="FFFFFF"/>
-                    </a:solidFill>
-                  </a:tcPr>
-                </a:tc>
-                <a:tc>
-                  <a:txBody>
-                    <a:bodyPr/>
-                    <a:lstStyle/>
-                    <a:p>
-                      <a:pPr algn="ctr"/>
-                      <a:r>
-                        <a:rPr sz="1400">
-                          <a:solidFill>
-                            <a:srgbClr val="1A1A2E"/>
-                          </a:solidFill>
-                          <a:latin typeface="Calibri"/>
-                        </a:rPr>
-                        <a:t>A — Survey (Part 1)</a:t>
-                      </a:r>
-                    </a:p>
-                  </a:txBody>
-                  <a:tcPr anchor="ctr" marL="100584">
-                    <a:solidFill>
-                      <a:srgbClr val="FFFFFF"/>
-                    </a:solidFill>
-                  </a:tcPr>
-                </a:tc>
-                <a:tc>
-                  <a:txBody>
-                    <a:bodyPr/>
-                    <a:lstStyle/>
-                    <a:p>
-                      <a:pPr algn="ctr"/>
-                      <a:r>
-                        <a:rPr sz="1400">
-                          <a:solidFill>
-                            <a:srgbClr val="1A1A2E"/>
-                          </a:solidFill>
-                          <a:latin typeface="Calibri"/>
-                        </a:rPr>
-                        <a:t>46 of 103</a:t>
-                      </a:r>
-                    </a:p>
-                  </a:txBody>
-                  <a:tcPr anchor="ctr" marL="100584">
-                    <a:solidFill>
-                      <a:srgbClr val="FFFFFF"/>
-                    </a:solidFill>
-                  </a:tcPr>
-                </a:tc>
-                <a:tc>
-                  <a:txBody>
-                    <a:bodyPr/>
-                    <a:lstStyle/>
-                    <a:p>
-                      <a:pPr algn="ctr"/>
-                      <a:r>
-                        <a:rPr sz="1400">
-                          <a:solidFill>
-                            <a:srgbClr val="1A1A2E"/>
-                          </a:solidFill>
-                          <a:latin typeface="Calibri"/>
-                        </a:rPr>
-                        <a:t>9–22 Aug 2026</a:t>
-                      </a:r>
-                    </a:p>
-                  </a:txBody>
-                  <a:tcPr anchor="ctr" marL="100584">
-                    <a:solidFill>
-                      <a:srgbClr val="FFFFFF"/>
-                    </a:solidFill>
-                  </a:tcPr>
-                </a:tc>
-                <a:tc>
-                  <a:txBody>
-                    <a:bodyPr/>
-                    <a:lstStyle/>
-                    <a:p>
-                      <a:pPr algn="ctr"/>
-                      <a:r>
-                        <a:rPr sz="1400">
-                          <a:solidFill>
-                            <a:srgbClr val="1A1A2E"/>
-                          </a:solidFill>
-                          <a:latin typeface="Calibri"/>
-                        </a:rPr>
-                        <a:t>RQ 1 and 2</a:t>
-                      </a:r>
-                    </a:p>
-                  </a:txBody>
-                  <a:tcPr anchor="ctr" marL="100584">
-                    <a:solidFill>
-                      <a:srgbClr val="FFFFFF"/>
-                    </a:solidFill>
-                  </a:tcPr>
-                </a:tc>
-              </a:tr>
-              <a:tr h="356616">
-                <a:tc>
-                  <a:txBody>
-                    <a:bodyPr/>
-                    <a:lstStyle/>
-                    <a:p>
-                      <a:r>
-                        <a:rPr sz="1400">
-                          <a:solidFill>
-                            <a:srgbClr val="1A1A2E"/>
-                          </a:solidFill>
-                          <a:latin typeface="Calibri"/>
-                        </a:rPr>
-                        <a:t>HR personnel</a:t>
-                      </a:r>
-                    </a:p>
-                  </a:txBody>
-                  <a:tcPr anchor="ctr" marL="100584">
-                    <a:solidFill>
-                      <a:srgbClr val="F3F6FC"/>
-                    </a:solidFill>
-                  </a:tcPr>
-                </a:tc>
-                <a:tc>
-                  <a:txBody>
-                    <a:bodyPr/>
-                    <a:lstStyle/>
-                    <a:p>
-                      <a:pPr algn="ctr"/>
-                      <a:r>
-                        <a:rPr sz="1400">
-                          <a:solidFill>
-                            <a:srgbClr val="1A1A2E"/>
-                          </a:solidFill>
-                          <a:latin typeface="Calibri"/>
-                        </a:rPr>
-                        <a:t>B — Survey (Part 1)</a:t>
-                      </a:r>
-                    </a:p>
-                  </a:txBody>
-                  <a:tcPr anchor="ctr" marL="100584">
-                    <a:solidFill>
-                      <a:srgbClr val="F3F6FC"/>
-                    </a:solidFill>
-                  </a:tcPr>
-                </a:tc>
-                <a:tc>
-                  <a:txBody>
-                    <a:bodyPr/>
-                    <a:lstStyle/>
-                    <a:p>
-                      <a:pPr algn="ctr"/>
-                      <a:r>
-                        <a:rPr sz="1400">
-                          <a:solidFill>
-                            <a:srgbClr val="1A1A2E"/>
-                          </a:solidFill>
-                          <a:latin typeface="Calibri"/>
-                        </a:rPr>
-                        <a:t>11</a:t>
-                      </a:r>
-                    </a:p>
-                  </a:txBody>
-                  <a:tcPr anchor="ctr" marL="100584">
-                    <a:solidFill>
-                      <a:srgbClr val="F3F6FC"/>
-                    </a:solidFill>
-                  </a:tcPr>
-                </a:tc>
-                <a:tc>
-                  <a:txBody>
-                    <a:bodyPr/>
-                    <a:lstStyle/>
-                    <a:p>
-                      <a:pPr algn="ctr"/>
-                      <a:r>
-                        <a:rPr sz="1400">
-                          <a:solidFill>
-                            <a:srgbClr val="1A1A2E"/>
-                          </a:solidFill>
-                          <a:latin typeface="Calibri"/>
-                        </a:rPr>
-                        <a:t>9–22 Aug 2026</a:t>
-                      </a:r>
-                    </a:p>
-                  </a:txBody>
-                  <a:tcPr anchor="ctr" marL="100584">
-                    <a:solidFill>
-                      <a:srgbClr val="F3F6FC"/>
-                    </a:solidFill>
-                  </a:tcPr>
-                </a:tc>
-                <a:tc>
-                  <a:txBody>
-                    <a:bodyPr/>
-                    <a:lstStyle/>
-                    <a:p>
-                      <a:pPr algn="ctr"/>
-                      <a:r>
-                        <a:rPr sz="1400">
-                          <a:solidFill>
-                            <a:srgbClr val="1A1A2E"/>
-                          </a:solidFill>
-                          <a:latin typeface="Calibri"/>
-                        </a:rPr>
-                        <a:t>RQ 3</a:t>
-                      </a:r>
-                    </a:p>
-                  </a:txBody>
-                  <a:tcPr anchor="ctr" marL="100584">
-                    <a:solidFill>
-                      <a:srgbClr val="F3F6FC"/>
-                    </a:solidFill>
-                  </a:tcPr>
-                </a:tc>
-              </a:tr>
-              <a:tr h="356616">
-                <a:tc>
-                  <a:txBody>
-                    <a:bodyPr/>
-                    <a:lstStyle/>
-                    <a:p>
-                      <a:r>
-                        <a:rPr sz="1400">
-                          <a:solidFill>
-                            <a:srgbClr val="1A1A2E"/>
-                          </a:solidFill>
-                          <a:latin typeface="Calibri"/>
-                        </a:rPr>
-                        <a:t>Job seekers</a:t>
-                      </a:r>
-                    </a:p>
-                  </a:txBody>
-                  <a:tcPr anchor="ctr" marL="100584">
-                    <a:solidFill>
-                      <a:srgbClr val="FFFFFF"/>
-                    </a:solidFill>
-                  </a:tcPr>
-                </a:tc>
-                <a:tc>
-                  <a:txBody>
-                    <a:bodyPr/>
-                    <a:lstStyle/>
-                    <a:p>
-                      <a:pPr algn="ctr"/>
-                      <a:r>
-                        <a:rPr sz="1400">
-                          <a:solidFill>
-                            <a:srgbClr val="1A1A2E"/>
-                          </a:solidFill>
-                          <a:latin typeface="Calibri"/>
-                        </a:rPr>
-                        <a:t>C — Survey (Part 2)</a:t>
-                      </a:r>
-                    </a:p>
-                  </a:txBody>
-                  <a:tcPr anchor="ctr" marL="100584">
-                    <a:solidFill>
-                      <a:srgbClr val="FFFFFF"/>
-                    </a:solidFill>
-                  </a:tcPr>
-                </a:tc>
-                <a:tc>
-                  <a:txBody>
-                    <a:bodyPr/>
-                    <a:lstStyle/>
-                    <a:p>
-                      <a:pPr algn="ctr"/>
-                      <a:r>
-                        <a:rPr sz="1400">
-                          <a:solidFill>
-                            <a:srgbClr val="1A1A2E"/>
-                          </a:solidFill>
-                          <a:latin typeface="Calibri"/>
-                        </a:rPr>
-                        <a:t>46</a:t>
-                      </a:r>
-                    </a:p>
-                  </a:txBody>
-                  <a:tcPr anchor="ctr" marL="100584">
-                    <a:solidFill>
-                      <a:srgbClr val="FFFFFF"/>
-                    </a:solidFill>
-                  </a:tcPr>
-                </a:tc>
-                <a:tc>
-                  <a:txBody>
-                    <a:bodyPr/>
-                    <a:lstStyle/>
-                    <a:p>
-                      <a:pPr algn="ctr"/>
-                      <a:r>
-                        <a:rPr sz="1400">
-                          <a:solidFill>
-                            <a:srgbClr val="1A1A2E"/>
-                          </a:solidFill>
-                          <a:latin typeface="Calibri"/>
-                        </a:rPr>
-                        <a:t>5–6 Sep 2026</a:t>
-                      </a:r>
-                    </a:p>
-                  </a:txBody>
-                  <a:tcPr anchor="ctr" marL="100584">
-                    <a:solidFill>
-                      <a:srgbClr val="FFFFFF"/>
-                    </a:solidFill>
-                  </a:tcPr>
-                </a:tc>
-                <a:tc>
-                  <a:txBody>
-                    <a:bodyPr/>
-                    <a:lstStyle/>
-                    <a:p>
-                      <a:pPr algn="ctr"/>
-                      <a:r>
-                        <a:rPr sz="1400">
-                          <a:solidFill>
-                            <a:srgbClr val="1A1A2E"/>
-                          </a:solidFill>
-                          <a:latin typeface="Calibri"/>
-                        </a:rPr>
-                        <a:t>RQ 4</a:t>
-                      </a:r>
-                    </a:p>
-                  </a:txBody>
-                  <a:tcPr anchor="ctr" marL="100584">
-                    <a:solidFill>
-                      <a:srgbClr val="FFFFFF"/>
-                    </a:solidFill>
-                  </a:tcPr>
-                </a:tc>
-              </a:tr>
-              <a:tr h="356616">
-                <a:tc>
-                  <a:txBody>
-                    <a:bodyPr/>
-                    <a:lstStyle/>
-                    <a:p>
-                      <a:r>
-                        <a:rPr sz="1400">
-                          <a:solidFill>
-                            <a:srgbClr val="1A1A2E"/>
-                          </a:solidFill>
-                          <a:latin typeface="Calibri"/>
-                        </a:rPr>
-                        <a:t>HR personnel</a:t>
-                      </a:r>
-                    </a:p>
-                  </a:txBody>
-                  <a:tcPr anchor="ctr" marL="100584">
-                    <a:solidFill>
-                      <a:srgbClr val="F3F6FC"/>
-                    </a:solidFill>
-                  </a:tcPr>
-                </a:tc>
-                <a:tc>
-                  <a:txBody>
-                    <a:bodyPr/>
-                    <a:lstStyle/>
-                    <a:p>
-                      <a:pPr algn="ctr"/>
-                      <a:r>
-                        <a:rPr sz="1400">
-                          <a:solidFill>
-                            <a:srgbClr val="1A1A2E"/>
-                          </a:solidFill>
-                          <a:latin typeface="Calibri"/>
-                        </a:rPr>
-                        <a:t>D — Survey (Part 2)</a:t>
-                      </a:r>
-                    </a:p>
-                  </a:txBody>
-                  <a:tcPr anchor="ctr" marL="100584">
-                    <a:solidFill>
-                      <a:srgbClr val="F3F6FC"/>
-                    </a:solidFill>
-                  </a:tcPr>
-                </a:tc>
-                <a:tc>
-                  <a:txBody>
-                    <a:bodyPr/>
-                    <a:lstStyle/>
-                    <a:p>
-                      <a:pPr algn="ctr"/>
-                      <a:r>
-                        <a:rPr sz="1400">
-                          <a:solidFill>
-                            <a:srgbClr val="1A1A2E"/>
-                          </a:solidFill>
-                          <a:latin typeface="Calibri"/>
-                        </a:rPr>
-                        <a:t>10</a:t>
-                      </a:r>
-                    </a:p>
-                  </a:txBody>
-                  <a:tcPr anchor="ctr" marL="100584">
-                    <a:solidFill>
-                      <a:srgbClr val="F3F6FC"/>
-                    </a:solidFill>
-                  </a:tcPr>
-                </a:tc>
-                <a:tc>
-                  <a:txBody>
-                    <a:bodyPr/>
-                    <a:lstStyle/>
-                    <a:p>
-                      <a:pPr algn="ctr"/>
-                      <a:r>
-                        <a:rPr sz="1400">
-                          <a:solidFill>
-                            <a:srgbClr val="1A1A2E"/>
-                          </a:solidFill>
-                          <a:latin typeface="Calibri"/>
-                        </a:rPr>
-                        <a:t>after completion</a:t>
-                      </a:r>
-                    </a:p>
-                  </a:txBody>
-                  <a:tcPr anchor="ctr" marL="100584">
-                    <a:solidFill>
-                      <a:srgbClr val="F3F6FC"/>
-                    </a:solidFill>
-                  </a:tcPr>
-                </a:tc>
-                <a:tc>
-                  <a:txBody>
-                    <a:bodyPr/>
-                    <a:lstStyle/>
-                    <a:p>
-                      <a:pPr algn="ctr"/>
-                      <a:r>
-                        <a:rPr sz="1400">
-                          <a:solidFill>
-                            <a:srgbClr val="1A1A2E"/>
-                          </a:solidFill>
-                          <a:latin typeface="Calibri"/>
-                        </a:rPr>
-                        <a:t>RQ 5</a:t>
-                      </a:r>
-                    </a:p>
-                  </a:txBody>
-                  <a:tcPr anchor="ctr" marL="100584">
-                    <a:solidFill>
-                      <a:srgbClr val="F3F6FC"/>
-                    </a:solidFill>
-                  </a:tcPr>
-                </a:tc>
-              </a:tr>
-              <a:tr h="356616">
-                <a:tc>
-                  <a:txBody>
-                    <a:bodyPr/>
-                    <a:lstStyle/>
-                    <a:p>
-                      <a:r>
-                        <a:rPr sz="1400">
-                          <a:solidFill>
-                            <a:srgbClr val="1A1A2E"/>
-                          </a:solidFill>
-                          <a:latin typeface="Calibri"/>
-                        </a:rPr>
-                        <a:t>IT experts</a:t>
-                      </a:r>
-                    </a:p>
-                  </a:txBody>
-                  <a:tcPr anchor="ctr" marL="100584">
-                    <a:solidFill>
-                      <a:srgbClr val="FFFFFF"/>
-                    </a:solidFill>
-                  </a:tcPr>
-                </a:tc>
-                <a:tc>
-                  <a:txBody>
-                    <a:bodyPr/>
-                    <a:lstStyle/>
-                    <a:p>
-                      <a:pPr algn="ctr"/>
-                      <a:r>
-                        <a:rPr sz="1400">
-                          <a:solidFill>
-                            <a:srgbClr val="1A1A2E"/>
-                          </a:solidFill>
-                          <a:latin typeface="Calibri"/>
-                        </a:rPr>
-                        <a:t>E — Expert evaluation</a:t>
-                      </a:r>
-                    </a:p>
-                  </a:txBody>
-                  <a:tcPr anchor="ctr" marL="100584">
-                    <a:solidFill>
-                      <a:srgbClr val="FFFFFF"/>
-                    </a:solidFill>
-                  </a:tcPr>
-                </a:tc>
-                <a:tc>
-                  <a:txBody>
-                    <a:bodyPr/>
-                    <a:lstStyle/>
-                    <a:p>
-                      <a:pPr algn="ctr"/>
-                      <a:r>
-                        <a:rPr sz="1400">
-                          <a:solidFill>
-                            <a:srgbClr val="1A1A2E"/>
-                          </a:solidFill>
-                          <a:latin typeface="Calibri"/>
-                        </a:rPr>
-                        <a:t>3</a:t>
-                      </a:r>
-                    </a:p>
-                  </a:txBody>
-                  <a:tcPr anchor="ctr" marL="100584">
-                    <a:solidFill>
-                      <a:srgbClr val="FFFFFF"/>
-                    </a:solidFill>
-                  </a:tcPr>
-                </a:tc>
-                <a:tc>
-                  <a:txBody>
-                    <a:bodyPr/>
-                    <a:lstStyle/>
-                    <a:p>
-                      <a:pPr algn="ctr"/>
-                      <a:r>
-                        <a:rPr sz="1400">
-                          <a:solidFill>
-                            <a:srgbClr val="1A1A2E"/>
-                          </a:solidFill>
-                          <a:latin typeface="Calibri"/>
-                        </a:rPr>
-                        <a:t>3–4 Sep 2026</a:t>
-                      </a:r>
-                    </a:p>
-                  </a:txBody>
-                  <a:tcPr anchor="ctr" marL="100584">
-                    <a:solidFill>
-                      <a:srgbClr val="FFFFFF"/>
-                    </a:solidFill>
-                  </a:tcPr>
-                </a:tc>
-                <a:tc>
-                  <a:txBody>
-                    <a:bodyPr/>
-                    <a:lstStyle/>
-                    <a:p>
-                      <a:pPr algn="ctr"/>
-                      <a:r>
-                        <a:rPr sz="1400">
-                          <a:solidFill>
-                            <a:srgbClr val="1A1A2E"/>
-                          </a:solidFill>
-                          <a:latin typeface="Calibri"/>
-                        </a:rPr>
-                        <a:t>RQ 6</a:t>
-                      </a:r>
-                    </a:p>
-                  </a:txBody>
-                  <a:tcPr anchor="ctr" marL="100584">
-                    <a:solidFill>
-                      <a:srgbClr val="FFFFFF"/>
-                    </a:solidFill>
-                  </a:tcPr>
-                </a:tc>
-              </a:tr>
-            </a:tbl>
-          </a:graphicData>
-        </a:graphic>
-      </p:graphicFrame>
-    </p:spTree>
-  </p:cSld>
-  <p:clrMapOvr>
-    <a:masterClrMapping/>
-  </p:clrMapOvr>
-</p:sld>
-</file>
-
-<file path=ppt/slides/slide13.xml><?xml version="1.0" encoding="utf-8"?>
-<p:sld xmlns:a="http://schemas.openxmlformats.org/drawingml/2006/main" xmlns:p="http://schemas.openxmlformats.org/presentationml/2006/main" xmlns:r="http://schemas.openxmlformats.org/officeDocument/2006/relationships">
-  <p:cSld>
-    <p:spTree>
-      <p:nvGrpSpPr>
-        <p:cNvPr id="1" name=""/>
-        <p:cNvGrpSpPr/>
-        <p:nvPr/>
-      </p:nvGrpSpPr>
-      <p:grpSpPr/>
-      <p:sp>
-        <p:nvSpPr>
-          <p:cNvPr id="2" name="TextBox 1"/>
-          <p:cNvSpPr txBox="1"/>
-          <p:nvPr/>
-        </p:nvSpPr>
-        <p:spPr>
-          <a:xfrm>
-            <a:off x="658368" y="384048"/>
-            <a:ext cx="10881360" cy="274320"/>
-          </a:xfrm>
-          <a:prstGeom prst="rect">
-            <a:avLst/>
-          </a:prstGeom>
-          <a:noFill/>
-        </p:spPr>
-        <p:txBody>
-          <a:bodyPr wrap="square" lIns="0" rIns="0" tIns="0" bIns="0" anchor="t">
-            <a:spAutoFit/>
-          </a:bodyPr>
-          <a:lstStyle/>
-          <a:p>
-            <a:pPr algn="l">
-              <a:spcAft>
-                <a:spcPts val="200"/>
-              </a:spcAft>
-            </a:pPr>
-            <a:r>
-              <a:rPr sz="1200" b="1" i="0">
-                <a:solidFill>
-                  <a:srgbClr val="2F4B8F"/>
-                </a:solidFill>
-                <a:latin typeface="Calibri"/>
-              </a:rPr>
-              <a:t>RESULTS · JOB SEEKERS</a:t>
-            </a:r>
-          </a:p>
-        </p:txBody>
-      </p:sp>
-      <p:sp>
-        <p:nvSpPr>
-          <p:cNvPr id="3" name="TextBox 2"/>
-          <p:cNvSpPr txBox="1"/>
-          <p:nvPr/>
-        </p:nvSpPr>
-        <p:spPr>
-          <a:xfrm>
-            <a:off x="658368" y="658368"/>
-            <a:ext cx="10881360" cy="685800"/>
-          </a:xfrm>
-          <a:prstGeom prst="rect">
-            <a:avLst/>
-          </a:prstGeom>
-          <a:noFill/>
-        </p:spPr>
-        <p:txBody>
-          <a:bodyPr wrap="square" lIns="0" rIns="0" tIns="0" bIns="0" anchor="t">
-            <a:spAutoFit/>
-          </a:bodyPr>
-          <a:lstStyle/>
-          <a:p>
-            <a:pPr algn="l">
-              <a:spcAft>
-                <a:spcPts val="200"/>
-              </a:spcAft>
-            </a:pPr>
-            <a:r>
-              <a:rPr sz="3100" b="1" i="0">
-                <a:solidFill>
-                  <a:srgbClr val="1F3160"/>
-                </a:solidFill>
-                <a:latin typeface="Calibri"/>
-              </a:rPr>
-              <a:t>Instrument C — forty-six job seekers rated the finished system</a:t>
-            </a:r>
-          </a:p>
-        </p:txBody>
-      </p:sp>
-      <p:sp>
-        <p:nvSpPr>
-          <p:cNvPr id="4" name="TextBox 3"/>
-          <p:cNvSpPr txBox="1"/>
-          <p:nvPr/>
-        </p:nvSpPr>
-        <p:spPr>
-          <a:xfrm>
-            <a:off x="658368" y="1389888"/>
-            <a:ext cx="10881360" cy="365760"/>
-          </a:xfrm>
-          <a:prstGeom prst="rect">
-            <a:avLst/>
-          </a:prstGeom>
-          <a:noFill/>
-        </p:spPr>
-        <p:txBody>
-          <a:bodyPr wrap="square" lIns="0" rIns="0" tIns="0" bIns="0" anchor="t">
-            <a:spAutoFit/>
-          </a:bodyPr>
-          <a:lstStyle/>
-          <a:p>
-            <a:pPr algn="l">
-              <a:spcAft>
-                <a:spcPts val="0"/>
-              </a:spcAft>
-            </a:pPr>
-            <a:r>
-              <a:rPr sz="1500" b="0" i="1">
-                <a:solidFill>
-                  <a:srgbClr val="5A6B8C"/>
-                </a:solidFill>
-                <a:latin typeface="Calibri"/>
-              </a:rPr>
-              <a:t>Against a five-point interpretation scale declared before any data was collected.</a:t>
-            </a:r>
-          </a:p>
-        </p:txBody>
-      </p:sp>
-      <p:sp>
-        <p:nvSpPr>
-          <p:cNvPr id="5" name="Rectangle 4"/>
-          <p:cNvSpPr/>
-          <p:nvPr/>
-        </p:nvSpPr>
-        <p:spPr>
-          <a:xfrm>
-            <a:off x="658368" y="1792224"/>
-            <a:ext cx="10881360" cy="20320"/>
-          </a:xfrm>
-          <a:prstGeom prst="rect">
-            <a:avLst/>
-          </a:prstGeom>
-          <a:solidFill>
-            <a:srgbClr val="C3CEE6"/>
-          </a:solidFill>
-          <a:ln>
-            <a:noFill/>
-          </a:ln>
-          <a:effectLst/>
-        </p:spPr>
-        <p:style>
-          <a:lnRef idx="1">
-            <a:schemeClr val="accent1"/>
-          </a:lnRef>
-          <a:fillRef idx="3">
-            <a:schemeClr val="accent1"/>
-          </a:fillRef>
-          <a:effectRef idx="2">
-            <a:schemeClr val="accent1"/>
-          </a:effectRef>
-          <a:fontRef idx="minor">
-            <a:schemeClr val="lt1"/>
-          </a:fontRef>
-        </p:style>
-        <p:txBody>
-          <a:bodyPr rtlCol="0" anchor="ctr"/>
-          <a:lstStyle/>
-          <a:p>
-            <a:pPr algn="ctr"/>
-          </a:p>
-        </p:txBody>
-      </p:sp>
-      <p:sp>
-        <p:nvSpPr>
-          <p:cNvPr id="6" name="Rounded Rectangle 5"/>
-          <p:cNvSpPr/>
-          <p:nvPr/>
-        </p:nvSpPr>
-        <p:spPr>
-          <a:xfrm>
-            <a:off x="658368" y="2121408"/>
-            <a:ext cx="2528316" cy="2148840"/>
-          </a:xfrm>
-          <a:prstGeom prst="roundRect">
-            <a:avLst>
-              <a:gd name="adj" fmla="val 4000"/>
-            </a:avLst>
-          </a:prstGeom>
-          <a:solidFill>
-            <a:srgbClr val="DCE4F5"/>
-          </a:solidFill>
-          <a:ln w="12700">
-            <a:solidFill>
-              <a:srgbClr val="C3CEE6"/>
-            </a:solidFill>
-          </a:ln>
-          <a:effectLst/>
-        </p:spPr>
-        <p:style>
-          <a:lnRef idx="1">
-            <a:schemeClr val="accent1"/>
-          </a:lnRef>
-          <a:fillRef idx="3">
-            <a:schemeClr val="accent1"/>
-          </a:fillRef>
-          <a:effectRef idx="2">
-            <a:schemeClr val="accent1"/>
-          </a:effectRef>
-          <a:fontRef idx="minor">
-            <a:schemeClr val="lt1"/>
-          </a:fontRef>
-        </p:style>
-        <p:txBody>
-          <a:bodyPr rtlCol="0" anchor="ctr"/>
-          <a:lstStyle/>
-          <a:p>
-            <a:pPr algn="ctr"/>
-          </a:p>
-        </p:txBody>
-      </p:sp>
-      <p:sp>
-        <p:nvSpPr>
-          <p:cNvPr id="7" name="TextBox 6"/>
-          <p:cNvSpPr txBox="1"/>
-          <p:nvPr/>
-        </p:nvSpPr>
-        <p:spPr>
-          <a:xfrm>
-            <a:off x="859536" y="2377440"/>
-            <a:ext cx="2125980" cy="1737360"/>
-          </a:xfrm>
-          <a:prstGeom prst="rect">
-            <a:avLst/>
-          </a:prstGeom>
-          <a:noFill/>
-        </p:spPr>
-        <p:txBody>
-          <a:bodyPr wrap="square" lIns="0" rIns="0" tIns="0" bIns="0" anchor="t">
-            <a:spAutoFit/>
-          </a:bodyPr>
-          <a:lstStyle/>
-          <a:p>
-            <a:pPr algn="ctr">
-              <a:spcAft>
-                <a:spcPts val="200"/>
-              </a:spcAft>
-            </a:pPr>
-            <a:r>
-              <a:rPr sz="4200" b="1" i="0">
-                <a:solidFill>
-                  <a:srgbClr val="1F3160"/>
-                </a:solidFill>
-                <a:latin typeface="Calibri"/>
-              </a:rPr>
-              <a:t>4.30</a:t>
-            </a:r>
-          </a:p>
-          <a:p>
-            <a:pPr algn="ctr">
-              <a:spcAft>
-                <a:spcPts val="600"/>
-              </a:spcAft>
-            </a:pPr>
-            <a:r>
-              <a:rPr sz="1400" b="1" i="0">
-                <a:solidFill>
-                  <a:srgbClr val="2F4B8F"/>
-                </a:solidFill>
-                <a:latin typeface="Calibri"/>
-              </a:rPr>
-              <a:t>FUNCTIONAL SUITABILITY</a:t>
-            </a:r>
-          </a:p>
-          <a:p>
-            <a:pPr algn="ctr">
-              <a:spcAft>
-                <a:spcPts val="0"/>
-              </a:spcAft>
-            </a:pPr>
-            <a:r>
-              <a:rPr sz="1250" b="0" i="0">
-                <a:solidFill>
-                  <a:srgbClr val="5A6B8C"/>
-                </a:solidFill>
-                <a:latin typeface="Calibri"/>
-              </a:rPr>
-              <a:t>good band</a:t>
-            </a:r>
-          </a:p>
-        </p:txBody>
-      </p:sp>
-      <p:sp>
-        <p:nvSpPr>
-          <p:cNvPr id="8" name="Rounded Rectangle 7"/>
-          <p:cNvSpPr/>
-          <p:nvPr/>
-        </p:nvSpPr>
-        <p:spPr>
-          <a:xfrm>
-            <a:off x="3442716" y="2121408"/>
-            <a:ext cx="2528316" cy="2148840"/>
-          </a:xfrm>
-          <a:prstGeom prst="roundRect">
-            <a:avLst>
-              <a:gd name="adj" fmla="val 4000"/>
-            </a:avLst>
-          </a:prstGeom>
-          <a:solidFill>
-            <a:srgbClr val="DCE4F5"/>
-          </a:solidFill>
-          <a:ln w="12700">
-            <a:solidFill>
-              <a:srgbClr val="C3CEE6"/>
-            </a:solidFill>
-          </a:ln>
-          <a:effectLst/>
-        </p:spPr>
-        <p:style>
-          <a:lnRef idx="1">
-            <a:schemeClr val="accent1"/>
-          </a:lnRef>
-          <a:fillRef idx="3">
-            <a:schemeClr val="accent1"/>
-          </a:fillRef>
-          <a:effectRef idx="2">
-            <a:schemeClr val="accent1"/>
-          </a:effectRef>
-          <a:fontRef idx="minor">
-            <a:schemeClr val="lt1"/>
-          </a:fontRef>
-        </p:style>
-        <p:txBody>
-          <a:bodyPr rtlCol="0" anchor="ctr"/>
-          <a:lstStyle/>
-          <a:p>
-            <a:pPr algn="ctr"/>
-          </a:p>
-        </p:txBody>
-      </p:sp>
-      <p:sp>
-        <p:nvSpPr>
-          <p:cNvPr id="9" name="TextBox 8"/>
-          <p:cNvSpPr txBox="1"/>
-          <p:nvPr/>
-        </p:nvSpPr>
-        <p:spPr>
-          <a:xfrm>
-            <a:off x="3643884" y="2377440"/>
-            <a:ext cx="2125980" cy="1737360"/>
-          </a:xfrm>
-          <a:prstGeom prst="rect">
-            <a:avLst/>
-          </a:prstGeom>
-          <a:noFill/>
-        </p:spPr>
-        <p:txBody>
-          <a:bodyPr wrap="square" lIns="0" rIns="0" tIns="0" bIns="0" anchor="t">
-            <a:spAutoFit/>
-          </a:bodyPr>
-          <a:lstStyle/>
-          <a:p>
-            <a:pPr algn="ctr">
-              <a:spcAft>
-                <a:spcPts val="200"/>
-              </a:spcAft>
-            </a:pPr>
-            <a:r>
-              <a:rPr sz="4200" b="1" i="0">
-                <a:solidFill>
-                  <a:srgbClr val="1F3160"/>
-                </a:solidFill>
-                <a:latin typeface="Calibri"/>
-              </a:rPr>
-              <a:t>4.28</a:t>
-            </a:r>
-          </a:p>
-          <a:p>
-            <a:pPr algn="ctr">
-              <a:spcAft>
-                <a:spcPts val="600"/>
-              </a:spcAft>
-            </a:pPr>
-            <a:r>
-              <a:rPr sz="1400" b="1" i="0">
-                <a:solidFill>
-                  <a:srgbClr val="2F4B8F"/>
-                </a:solidFill>
-                <a:latin typeface="Calibri"/>
-              </a:rPr>
-              <a:t>USABILITY</a:t>
-            </a:r>
-          </a:p>
-          <a:p>
-            <a:pPr algn="ctr">
-              <a:spcAft>
-                <a:spcPts val="0"/>
-              </a:spcAft>
-            </a:pPr>
-            <a:r>
-              <a:rPr sz="1250" b="0" i="0">
-                <a:solidFill>
-                  <a:srgbClr val="5A6B8C"/>
-                </a:solidFill>
-                <a:latin typeface="Calibri"/>
-              </a:rPr>
-              <a:t>good band</a:t>
-            </a:r>
-          </a:p>
-        </p:txBody>
-      </p:sp>
-      <p:sp>
-        <p:nvSpPr>
-          <p:cNvPr id="10" name="Rounded Rectangle 9"/>
-          <p:cNvSpPr/>
-          <p:nvPr/>
-        </p:nvSpPr>
-        <p:spPr>
-          <a:xfrm>
-            <a:off x="6227064" y="2121408"/>
-            <a:ext cx="2528316" cy="2148840"/>
-          </a:xfrm>
-          <a:prstGeom prst="roundRect">
-            <a:avLst>
-              <a:gd name="adj" fmla="val 4000"/>
-            </a:avLst>
-          </a:prstGeom>
-          <a:solidFill>
-            <a:srgbClr val="DCE4F5"/>
-          </a:solidFill>
-          <a:ln w="12700">
-            <a:solidFill>
-              <a:srgbClr val="C3CEE6"/>
-            </a:solidFill>
-          </a:ln>
-          <a:effectLst/>
-        </p:spPr>
-        <p:style>
-          <a:lnRef idx="1">
-            <a:schemeClr val="accent1"/>
-          </a:lnRef>
-          <a:fillRef idx="3">
-            <a:schemeClr val="accent1"/>
-          </a:fillRef>
-          <a:effectRef idx="2">
-            <a:schemeClr val="accent1"/>
-          </a:effectRef>
-          <a:fontRef idx="minor">
-            <a:schemeClr val="lt1"/>
-          </a:fontRef>
-        </p:style>
-        <p:txBody>
-          <a:bodyPr rtlCol="0" anchor="ctr"/>
-          <a:lstStyle/>
-          <a:p>
-            <a:pPr algn="ctr"/>
-          </a:p>
-        </p:txBody>
-      </p:sp>
-      <p:sp>
-        <p:nvSpPr>
-          <p:cNvPr id="11" name="TextBox 10"/>
-          <p:cNvSpPr txBox="1"/>
-          <p:nvPr/>
-        </p:nvSpPr>
-        <p:spPr>
-          <a:xfrm>
-            <a:off x="6428232" y="2377440"/>
-            <a:ext cx="2125980" cy="1737360"/>
-          </a:xfrm>
-          <a:prstGeom prst="rect">
-            <a:avLst/>
-          </a:prstGeom>
-          <a:noFill/>
-        </p:spPr>
-        <p:txBody>
-          <a:bodyPr wrap="square" lIns="0" rIns="0" tIns="0" bIns="0" anchor="t">
-            <a:spAutoFit/>
-          </a:bodyPr>
-          <a:lstStyle/>
-          <a:p>
-            <a:pPr algn="ctr">
-              <a:spcAft>
-                <a:spcPts val="200"/>
-              </a:spcAft>
-            </a:pPr>
-            <a:r>
-              <a:rPr sz="4200" b="1" i="0">
-                <a:solidFill>
-                  <a:srgbClr val="1F3160"/>
-                </a:solidFill>
-                <a:latin typeface="Calibri"/>
-              </a:rPr>
-              <a:t>4.23</a:t>
-            </a:r>
-          </a:p>
-          <a:p>
-            <a:pPr algn="ctr">
-              <a:spcAft>
-                <a:spcPts val="600"/>
-              </a:spcAft>
-            </a:pPr>
-            <a:r>
-              <a:rPr sz="1400" b="1" i="0">
-                <a:solidFill>
-                  <a:srgbClr val="2F4B8F"/>
-                </a:solidFill>
-                <a:latin typeface="Calibri"/>
-              </a:rPr>
-              <a:t>RELIABILITY</a:t>
-            </a:r>
-          </a:p>
-          <a:p>
-            <a:pPr algn="ctr">
-              <a:spcAft>
-                <a:spcPts val="0"/>
-              </a:spcAft>
-            </a:pPr>
-            <a:r>
-              <a:rPr sz="1250" b="0" i="0">
-                <a:solidFill>
-                  <a:srgbClr val="5A6B8C"/>
-                </a:solidFill>
-                <a:latin typeface="Calibri"/>
-              </a:rPr>
-              <a:t>good band</a:t>
-            </a:r>
-          </a:p>
-        </p:txBody>
-      </p:sp>
-      <p:sp>
-        <p:nvSpPr>
-          <p:cNvPr id="12" name="Rounded Rectangle 11"/>
-          <p:cNvSpPr/>
-          <p:nvPr/>
-        </p:nvSpPr>
-        <p:spPr>
-          <a:xfrm>
-            <a:off x="9011412" y="2121408"/>
-            <a:ext cx="2528316" cy="2148840"/>
-          </a:xfrm>
-          <a:prstGeom prst="roundRect">
-            <a:avLst>
-              <a:gd name="adj" fmla="val 4000"/>
-            </a:avLst>
-          </a:prstGeom>
-          <a:solidFill>
-            <a:srgbClr val="DCE4F5"/>
-          </a:solidFill>
-          <a:ln w="12700">
-            <a:solidFill>
-              <a:srgbClr val="C3CEE6"/>
-            </a:solidFill>
-          </a:ln>
-          <a:effectLst/>
-        </p:spPr>
-        <p:style>
-          <a:lnRef idx="1">
-            <a:schemeClr val="accent1"/>
-          </a:lnRef>
-          <a:fillRef idx="3">
-            <a:schemeClr val="accent1"/>
-          </a:fillRef>
-          <a:effectRef idx="2">
-            <a:schemeClr val="accent1"/>
-          </a:effectRef>
-          <a:fontRef idx="minor">
-            <a:schemeClr val="lt1"/>
-          </a:fontRef>
-        </p:style>
-        <p:txBody>
-          <a:bodyPr rtlCol="0" anchor="ctr"/>
-          <a:lstStyle/>
-          <a:p>
-            <a:pPr algn="ctr"/>
-          </a:p>
-        </p:txBody>
-      </p:sp>
-      <p:sp>
-        <p:nvSpPr>
-          <p:cNvPr id="13" name="TextBox 12"/>
-          <p:cNvSpPr txBox="1"/>
-          <p:nvPr/>
-        </p:nvSpPr>
-        <p:spPr>
-          <a:xfrm>
-            <a:off x="9212580" y="2377440"/>
-            <a:ext cx="2125980" cy="1737360"/>
-          </a:xfrm>
-          <a:prstGeom prst="rect">
-            <a:avLst/>
-          </a:prstGeom>
-          <a:noFill/>
-        </p:spPr>
-        <p:txBody>
-          <a:bodyPr wrap="square" lIns="0" rIns="0" tIns="0" bIns="0" anchor="t">
-            <a:spAutoFit/>
-          </a:bodyPr>
-          <a:lstStyle/>
-          <a:p>
-            <a:pPr algn="ctr">
-              <a:spcAft>
-                <a:spcPts val="200"/>
-              </a:spcAft>
-            </a:pPr>
-            <a:r>
-              <a:rPr sz="4200" b="1" i="0">
-                <a:solidFill>
-                  <a:srgbClr val="1F3160"/>
-                </a:solidFill>
-                <a:latin typeface="Calibri"/>
-              </a:rPr>
-              <a:t>74.7</a:t>
-            </a:r>
-          </a:p>
-          <a:p>
-            <a:pPr algn="ctr">
-              <a:spcAft>
-                <a:spcPts val="600"/>
-              </a:spcAft>
-            </a:pPr>
-            <a:r>
-              <a:rPr sz="1400" b="1" i="0">
-                <a:solidFill>
-                  <a:srgbClr val="2F4B8F"/>
-                </a:solidFill>
-                <a:latin typeface="Calibri"/>
-              </a:rPr>
-              <a:t>SYSTEM USABILITY SCALE</a:t>
-            </a:r>
-          </a:p>
-          <a:p>
-            <a:pPr algn="ctr">
-              <a:spcAft>
-                <a:spcPts val="0"/>
-              </a:spcAft>
-            </a:pPr>
-            <a:r>
-              <a:rPr sz="1250" b="0" i="0">
-                <a:solidFill>
-                  <a:srgbClr val="5A6B8C"/>
-                </a:solidFill>
-                <a:latin typeface="Calibri"/>
-              </a:rPr>
-              <a:t>42 of 46 above 68</a:t>
-            </a:r>
-          </a:p>
-        </p:txBody>
-      </p:sp>
-      <p:sp>
-        <p:nvSpPr>
-          <p:cNvPr id="14" name="TextBox 13"/>
-          <p:cNvSpPr txBox="1"/>
-          <p:nvPr/>
-        </p:nvSpPr>
-        <p:spPr>
-          <a:xfrm>
-            <a:off x="658368" y="4590288"/>
-            <a:ext cx="10881360" cy="1097280"/>
-          </a:xfrm>
-          <a:prstGeom prst="rect">
-            <a:avLst/>
-          </a:prstGeom>
-          <a:noFill/>
-        </p:spPr>
-        <p:txBody>
-          <a:bodyPr wrap="square" lIns="0" rIns="0" tIns="0" bIns="0" anchor="t">
-            <a:spAutoFit/>
-          </a:bodyPr>
-          <a:lstStyle/>
-          <a:p>
-            <a:pPr algn="l">
-              <a:spcAft>
-                <a:spcPts val="0"/>
-              </a:spcAft>
-            </a:pPr>
-            <a:r>
-              <a:rPr sz="1500" b="0" i="0">
-                <a:solidFill>
-                  <a:srgbClr val="1A1A2E"/>
-                </a:solidFill>
-                <a:latin typeface="Calibri"/>
-              </a:rPr>
-              <a:t>All three sit in the 3.50–4.49 band the scale reads as agree, described as good. None reaches the 4.50 the top band needs — and we say that rather than calling the result excellent.</a:t>
-            </a:r>
-          </a:p>
-        </p:txBody>
-      </p:sp>
-    </p:spTree>
-  </p:cSld>
-  <p:clrMapOvr>
-    <a:masterClrMapping/>
-  </p:clrMapOvr>
-</p:sld>
-</file>
-
-<file path=ppt/slides/slide14.xml><?xml version="1.0" encoding="utf-8"?>
-<p:sld xmlns:a="http://schemas.openxmlformats.org/drawingml/2006/main" xmlns:p="http://schemas.openxmlformats.org/presentationml/2006/main" xmlns:r="http://schemas.openxmlformats.org/officeDocument/2006/relationships">
-  <p:cSld>
-    <p:spTree>
-      <p:nvGrpSpPr>
-        <p:cNvPr id="1" name=""/>
-        <p:cNvGrpSpPr/>
-        <p:nvPr/>
-      </p:nvGrpSpPr>
-      <p:grpSpPr/>
-      <p:sp>
-        <p:nvSpPr>
-          <p:cNvPr id="2" name="TextBox 1"/>
-          <p:cNvSpPr txBox="1"/>
-          <p:nvPr/>
-        </p:nvSpPr>
-        <p:spPr>
-          <a:xfrm>
-            <a:off x="658368" y="384048"/>
-            <a:ext cx="10881360" cy="274320"/>
-          </a:xfrm>
-          <a:prstGeom prst="rect">
-            <a:avLst/>
-          </a:prstGeom>
-          <a:noFill/>
-        </p:spPr>
-        <p:txBody>
-          <a:bodyPr wrap="square" lIns="0" rIns="0" tIns="0" bIns="0" anchor="t">
-            <a:spAutoFit/>
-          </a:bodyPr>
-          <a:lstStyle/>
-          <a:p>
-            <a:pPr algn="l">
-              <a:spcAft>
-                <a:spcPts val="200"/>
-              </a:spcAft>
-            </a:pPr>
-            <a:r>
-              <a:rPr sz="1200" b="1" i="0">
-                <a:solidFill>
-                  <a:srgbClr val="2F4B8F"/>
-                </a:solidFill>
-                <a:latin typeface="Calibri"/>
-              </a:rPr>
-              <a:t>RESULTS · CHANGE</a:t>
-            </a:r>
-          </a:p>
-        </p:txBody>
-      </p:sp>
-      <p:sp>
-        <p:nvSpPr>
-          <p:cNvPr id="3" name="TextBox 2"/>
-          <p:cNvSpPr txBox="1"/>
-          <p:nvPr/>
-        </p:nvSpPr>
-        <p:spPr>
-          <a:xfrm>
-            <a:off x="658368" y="658368"/>
-            <a:ext cx="10881360" cy="685800"/>
-          </a:xfrm>
-          <a:prstGeom prst="rect">
-            <a:avLst/>
-          </a:prstGeom>
-          <a:noFill/>
-        </p:spPr>
-        <p:txBody>
-          <a:bodyPr wrap="square" lIns="0" rIns="0" tIns="0" bIns="0" anchor="t">
-            <a:spAutoFit/>
-          </a:bodyPr>
-          <a:lstStyle/>
-          <a:p>
-            <a:pPr algn="l">
-              <a:spcAft>
-                <a:spcPts val="200"/>
-              </a:spcAft>
-            </a:pPr>
-            <a:r>
-              <a:rPr sz="3100" b="1" i="0">
-                <a:solidFill>
-                  <a:srgbClr val="1F3160"/>
-                </a:solidFill>
-                <a:latin typeface="Calibri"/>
-              </a:rPr>
-              <a:t>What moved between the two administrations</a:t>
-            </a:r>
-          </a:p>
-        </p:txBody>
-      </p:sp>
-      <p:sp>
-        <p:nvSpPr>
-          <p:cNvPr id="4" name="TextBox 3"/>
-          <p:cNvSpPr txBox="1"/>
-          <p:nvPr/>
-        </p:nvSpPr>
-        <p:spPr>
-          <a:xfrm>
-            <a:off x="658368" y="1389888"/>
-            <a:ext cx="10881360" cy="365760"/>
-          </a:xfrm>
-          <a:prstGeom prst="rect">
-            <a:avLst/>
-          </a:prstGeom>
-          <a:noFill/>
-        </p:spPr>
-        <p:txBody>
-          <a:bodyPr wrap="square" lIns="0" rIns="0" tIns="0" bIns="0" anchor="t">
-            <a:spAutoFit/>
-          </a:bodyPr>
-          <a:lstStyle/>
-          <a:p>
-            <a:pPr algn="l">
-              <a:spcAft>
-                <a:spcPts val="0"/>
-              </a:spcAft>
-            </a:pPr>
-            <a:r>
-              <a:rPr sz="1500" b="0" i="1">
-                <a:solidFill>
-                  <a:srgbClr val="5A6B8C"/>
-                </a:solidFill>
-                <a:latin typeface="Calibri"/>
-              </a:rPr>
-              <a:t>Wilcoxon rank-sum (Mann-Whitney U), two-tailed. Both administrations n = 46.</a:t>
-            </a:r>
-          </a:p>
-        </p:txBody>
-      </p:sp>
-      <p:sp>
-        <p:nvSpPr>
-          <p:cNvPr id="5" name="Rectangle 4"/>
-          <p:cNvSpPr/>
-          <p:nvPr/>
-        </p:nvSpPr>
-        <p:spPr>
-          <a:xfrm>
-            <a:off x="658368" y="1792224"/>
-            <a:ext cx="10881360" cy="20320"/>
-          </a:xfrm>
-          <a:prstGeom prst="rect">
-            <a:avLst/>
-          </a:prstGeom>
-          <a:solidFill>
-            <a:srgbClr val="C3CEE6"/>
-          </a:solidFill>
-          <a:ln>
-            <a:noFill/>
-          </a:ln>
-          <a:effectLst/>
-        </p:spPr>
-        <p:style>
-          <a:lnRef idx="1">
-            <a:schemeClr val="accent1"/>
-          </a:lnRef>
-          <a:fillRef idx="3">
-            <a:schemeClr val="accent1"/>
-          </a:fillRef>
-          <a:effectRef idx="2">
-            <a:schemeClr val="accent1"/>
-          </a:effectRef>
-          <a:fontRef idx="minor">
-            <a:schemeClr val="lt1"/>
-          </a:fontRef>
-        </p:style>
-        <p:txBody>
-          <a:bodyPr rtlCol="0" anchor="ctr"/>
-          <a:lstStyle/>
-          <a:p>
-            <a:pPr algn="ctr"/>
-          </a:p>
-        </p:txBody>
-      </p:sp>
-      <p:graphicFrame>
-        <p:nvGraphicFramePr>
-          <p:cNvPr id="6" name="Table 5"/>
-          <p:cNvGraphicFramePr>
-            <a:graphicFrameLocks noGrp="1"/>
-          </p:cNvGraphicFramePr>
-          <p:nvPr/>
-        </p:nvGraphicFramePr>
-        <p:xfrm>
-          <a:off x="658368" y="2103120"/>
-          <a:ext cx="10881359" cy="1444752"/>
-        </p:xfrm>
-        <a:graphic>
-          <a:graphicData uri="http://schemas.openxmlformats.org/drawingml/2006/table">
-            <a:tbl>
-              <a:tblPr firstRow="1" bandRow="1">
-                <a:tableStyleId>{5C22544A-7EE6-4342-B048-85BDC9FD1C3A}</a:tableStyleId>
-              </a:tblPr>
-              <a:tblGrid>
-                <a:gridCol w="4777182"/>
-                <a:gridCol w="1326995"/>
-                <a:gridCol w="1326995"/>
-                <a:gridCol w="1326995"/>
-                <a:gridCol w="2123192"/>
-              </a:tblGrid>
-              <a:tr h="361188">
-                <a:tc>
-                  <a:txBody>
-                    <a:bodyPr/>
-                    <a:lstStyle/>
-                    <a:p>
-                      <a:r>
-                        <a:rPr sz="1400" b="1">
-                          <a:solidFill>
-                            <a:srgbClr val="FFFFFF"/>
-                          </a:solidFill>
-                          <a:latin typeface="Calibri"/>
-                        </a:rPr>
-                        <a:t>Item</a:t>
-                      </a:r>
-                    </a:p>
-                  </a:txBody>
-                  <a:tcPr anchor="ctr" marL="100584">
-                    <a:solidFill>
-                      <a:srgbClr val="1F3160"/>
-                    </a:solidFill>
-                  </a:tcPr>
-                </a:tc>
-                <a:tc>
-                  <a:txBody>
-                    <a:bodyPr/>
-                    <a:lstStyle/>
-                    <a:p>
-                      <a:r>
-                        <a:rPr sz="1400" b="1">
-                          <a:solidFill>
-                            <a:srgbClr val="FFFFFF"/>
-                          </a:solidFill>
-                          <a:latin typeface="Calibri"/>
-                        </a:rPr>
-                        <a:t>Before</a:t>
-                      </a:r>
-                    </a:p>
-                  </a:txBody>
-                  <a:tcPr anchor="ctr" marL="100584">
-                    <a:solidFill>
-                      <a:srgbClr val="1F3160"/>
-                    </a:solidFill>
-                  </a:tcPr>
-                </a:tc>
-                <a:tc>
-                  <a:txBody>
-                    <a:bodyPr/>
-                    <a:lstStyle/>
-                    <a:p>
-                      <a:r>
-                        <a:rPr sz="1400" b="1">
-                          <a:solidFill>
-                            <a:srgbClr val="FFFFFF"/>
-                          </a:solidFill>
-                          <a:latin typeface="Calibri"/>
-                        </a:rPr>
-                        <a:t>After</a:t>
-                      </a:r>
-                    </a:p>
-                  </a:txBody>
-                  <a:tcPr anchor="ctr" marL="100584">
-                    <a:solidFill>
-                      <a:srgbClr val="1F3160"/>
-                    </a:solidFill>
-                  </a:tcPr>
-                </a:tc>
-                <a:tc>
-                  <a:txBody>
-                    <a:bodyPr/>
-                    <a:lstStyle/>
-                    <a:p>
-                      <a:r>
-                        <a:rPr sz="1400" b="1">
-                          <a:solidFill>
-                            <a:srgbClr val="FFFFFF"/>
-                          </a:solidFill>
-                          <a:latin typeface="Calibri"/>
-                        </a:rPr>
-                        <a:t>p</a:t>
-                      </a:r>
-                    </a:p>
-                  </a:txBody>
-                  <a:tcPr anchor="ctr" marL="100584">
-                    <a:solidFill>
-                      <a:srgbClr val="1F3160"/>
-                    </a:solidFill>
-                  </a:tcPr>
-                </a:tc>
-                <a:tc>
-                  <a:txBody>
-                    <a:bodyPr/>
-                    <a:lstStyle/>
-                    <a:p>
-                      <a:r>
-                        <a:rPr sz="1400" b="1">
-                          <a:solidFill>
-                            <a:srgbClr val="FFFFFF"/>
-                          </a:solidFill>
-                          <a:latin typeface="Calibri"/>
-                        </a:rPr>
-                        <a:t>Effect</a:t>
-                      </a:r>
-                    </a:p>
-                  </a:txBody>
-                  <a:tcPr anchor="ctr" marL="100584">
-                    <a:solidFill>
-                      <a:srgbClr val="1F3160"/>
-                    </a:solidFill>
-                  </a:tcPr>
-                </a:tc>
-              </a:tr>
-              <a:tr h="361188">
-                <a:tc>
-                  <a:txBody>
-                    <a:bodyPr/>
-                    <a:lstStyle/>
-                    <a:p>
-                      <a:r>
-                        <a:rPr sz="1400">
-                          <a:solidFill>
-                            <a:srgbClr val="1A1A2E"/>
-                          </a:solidFill>
-                          <a:latin typeface="Calibri"/>
-                        </a:rPr>
-                        <a:t>Worry a computer rejects the resume first</a:t>
-                      </a:r>
-                    </a:p>
-                  </a:txBody>
-                  <a:tcPr anchor="ctr" marL="100584">
-                    <a:solidFill>
-                      <a:srgbClr val="FFFFFF"/>
-                    </a:solidFill>
-                  </a:tcPr>
-                </a:tc>
-                <a:tc>
-                  <a:txBody>
-                    <a:bodyPr/>
-                    <a:lstStyle/>
-                    <a:p>
-                      <a:pPr algn="ctr"/>
-                      <a:r>
-                        <a:rPr sz="1400">
-                          <a:solidFill>
-                            <a:srgbClr val="1A1A2E"/>
-                          </a:solidFill>
-                          <a:latin typeface="Calibri"/>
-                        </a:rPr>
-                        <a:t>3.93</a:t>
-                      </a:r>
-                    </a:p>
-                  </a:txBody>
-                  <a:tcPr anchor="ctr" marL="100584">
-                    <a:solidFill>
-                      <a:srgbClr val="FFFFFF"/>
-                    </a:solidFill>
-                  </a:tcPr>
-                </a:tc>
-                <a:tc>
-                  <a:txBody>
-                    <a:bodyPr/>
-                    <a:lstStyle/>
-                    <a:p>
-                      <a:pPr algn="ctr"/>
-                      <a:r>
-                        <a:rPr sz="1400">
-                          <a:solidFill>
-                            <a:srgbClr val="1A1A2E"/>
-                          </a:solidFill>
-                          <a:latin typeface="Calibri"/>
-                        </a:rPr>
-                        <a:t>2.65</a:t>
-                      </a:r>
-                    </a:p>
-                  </a:txBody>
-                  <a:tcPr anchor="ctr" marL="100584">
-                    <a:solidFill>
-                      <a:srgbClr val="FFFFFF"/>
-                    </a:solidFill>
-                  </a:tcPr>
-                </a:tc>
-                <a:tc>
-                  <a:txBody>
-                    <a:bodyPr/>
-                    <a:lstStyle/>
-                    <a:p>
-                      <a:pPr algn="ctr"/>
-                      <a:r>
-                        <a:rPr sz="1400">
-                          <a:solidFill>
-                            <a:srgbClr val="1A1A2E"/>
-                          </a:solidFill>
-                          <a:latin typeface="Calibri"/>
-                        </a:rPr>
-                        <a:t>&lt; .001</a:t>
-                      </a:r>
-                    </a:p>
-                  </a:txBody>
-                  <a:tcPr anchor="ctr" marL="100584">
-                    <a:solidFill>
-                      <a:srgbClr val="FFFFFF"/>
-                    </a:solidFill>
-                  </a:tcPr>
-                </a:tc>
-                <a:tc>
-                  <a:txBody>
-                    <a:bodyPr/>
-                    <a:lstStyle/>
-                    <a:p>
-                      <a:pPr algn="ctr"/>
-                      <a:r>
-                        <a:rPr sz="1400">
-                          <a:solidFill>
-                            <a:srgbClr val="1A1A2E"/>
-                          </a:solidFill>
-                          <a:latin typeface="Calibri"/>
-                        </a:rPr>
-                        <a:t>r = -0.53, large</a:t>
-                      </a:r>
-                    </a:p>
-                  </a:txBody>
-                  <a:tcPr anchor="ctr" marL="100584">
-                    <a:solidFill>
-                      <a:srgbClr val="FFFFFF"/>
-                    </a:solidFill>
-                  </a:tcPr>
-                </a:tc>
-              </a:tr>
-              <a:tr h="361188">
-                <a:tc>
-                  <a:txBody>
-                    <a:bodyPr/>
-                    <a:lstStyle/>
-                    <a:p>
-                      <a:r>
-                        <a:rPr sz="1400">
-                          <a:solidFill>
-                            <a:srgbClr val="1A1A2E"/>
-                          </a:solidFill>
-                          <a:latin typeface="Calibri"/>
-                        </a:rPr>
-                        <a:t>Cannot tell from a posting whether qualified</a:t>
-                      </a:r>
-                    </a:p>
-                  </a:txBody>
-                  <a:tcPr anchor="ctr" marL="100584">
-                    <a:solidFill>
-                      <a:srgbClr val="F3F6FC"/>
-                    </a:solidFill>
-                  </a:tcPr>
-                </a:tc>
-                <a:tc>
-                  <a:txBody>
-                    <a:bodyPr/>
-                    <a:lstStyle/>
-                    <a:p>
-                      <a:pPr algn="ctr"/>
-                      <a:r>
-                        <a:rPr sz="1400">
-                          <a:solidFill>
-                            <a:srgbClr val="1A1A2E"/>
-                          </a:solidFill>
-                          <a:latin typeface="Calibri"/>
-                        </a:rPr>
-                        <a:t>3.96</a:t>
-                      </a:r>
-                    </a:p>
-                  </a:txBody>
-                  <a:tcPr anchor="ctr" marL="100584">
-                    <a:solidFill>
-                      <a:srgbClr val="F3F6FC"/>
-                    </a:solidFill>
-                  </a:tcPr>
-                </a:tc>
-                <a:tc>
-                  <a:txBody>
-                    <a:bodyPr/>
-                    <a:lstStyle/>
-                    <a:p>
-                      <a:pPr algn="ctr"/>
-                      <a:r>
-                        <a:rPr sz="1400">
-                          <a:solidFill>
-                            <a:srgbClr val="1A1A2E"/>
-                          </a:solidFill>
-                          <a:latin typeface="Calibri"/>
-                        </a:rPr>
-                        <a:t>3.43</a:t>
-                      </a:r>
-                    </a:p>
-                  </a:txBody>
-                  <a:tcPr anchor="ctr" marL="100584">
-                    <a:solidFill>
-                      <a:srgbClr val="F3F6FC"/>
-                    </a:solidFill>
-                  </a:tcPr>
-                </a:tc>
-                <a:tc>
-                  <a:txBody>
-                    <a:bodyPr/>
-                    <a:lstStyle/>
-                    <a:p>
-                      <a:pPr algn="ctr"/>
-                      <a:r>
-                        <a:rPr sz="1400">
-                          <a:solidFill>
-                            <a:srgbClr val="1A1A2E"/>
-                          </a:solidFill>
-                          <a:latin typeface="Calibri"/>
-                        </a:rPr>
-                        <a:t>.037</a:t>
-                      </a:r>
-                    </a:p>
-                  </a:txBody>
-                  <a:tcPr anchor="ctr" marL="100584">
-                    <a:solidFill>
-                      <a:srgbClr val="F3F6FC"/>
-                    </a:solidFill>
-                  </a:tcPr>
-                </a:tc>
-                <a:tc>
-                  <a:txBody>
-                    <a:bodyPr/>
-                    <a:lstStyle/>
-                    <a:p>
-                      <a:pPr algn="ctr"/>
-                      <a:r>
-                        <a:rPr sz="1400">
-                          <a:solidFill>
-                            <a:srgbClr val="1A1A2E"/>
-                          </a:solidFill>
-                          <a:latin typeface="Calibri"/>
-                        </a:rPr>
-                        <a:t>r = -0.24, small</a:t>
-                      </a:r>
-                    </a:p>
-                  </a:txBody>
-                  <a:tcPr anchor="ctr" marL="100584">
-                    <a:solidFill>
-                      <a:srgbClr val="F3F6FC"/>
-                    </a:solidFill>
-                  </a:tcPr>
-                </a:tc>
-              </a:tr>
-              <a:tr h="361188">
-                <a:tc>
-                  <a:txBody>
-                    <a:bodyPr/>
-                    <a:lstStyle/>
-                    <a:p>
-                      <a:r>
-                        <a:rPr sz="1400">
-                          <a:solidFill>
-                            <a:srgbClr val="1A1A2E"/>
-                          </a:solidFill>
-                          <a:latin typeface="Calibri"/>
-                        </a:rPr>
-                        <a:t>Wants to see the same score the employer sees</a:t>
-                      </a:r>
-                    </a:p>
-                  </a:txBody>
-                  <a:tcPr anchor="ctr" marL="100584">
-                    <a:solidFill>
-                      <a:srgbClr val="FFFFFF"/>
-                    </a:solidFill>
-                  </a:tcPr>
-                </a:tc>
-                <a:tc>
-                  <a:txBody>
-                    <a:bodyPr/>
-                    <a:lstStyle/>
-                    <a:p>
-                      <a:pPr algn="ctr"/>
-                      <a:r>
-                        <a:rPr sz="1400">
-                          <a:solidFill>
-                            <a:srgbClr val="1A1A2E"/>
-                          </a:solidFill>
-                          <a:latin typeface="Calibri"/>
-                        </a:rPr>
-                        <a:t>4.43</a:t>
-                      </a:r>
-                    </a:p>
-                  </a:txBody>
-                  <a:tcPr anchor="ctr" marL="100584">
-                    <a:solidFill>
-                      <a:srgbClr val="FFFFFF"/>
-                    </a:solidFill>
-                  </a:tcPr>
-                </a:tc>
-                <a:tc>
-                  <a:txBody>
-                    <a:bodyPr/>
-                    <a:lstStyle/>
-                    <a:p>
-                      <a:pPr algn="ctr"/>
-                      <a:r>
-                        <a:rPr sz="1400">
-                          <a:solidFill>
-                            <a:srgbClr val="1A1A2E"/>
-                          </a:solidFill>
-                          <a:latin typeface="Calibri"/>
-                        </a:rPr>
-                        <a:t>4.04</a:t>
-                      </a:r>
-                    </a:p>
-                  </a:txBody>
-                  <a:tcPr anchor="ctr" marL="100584">
-                    <a:solidFill>
-                      <a:srgbClr val="FFFFFF"/>
-                    </a:solidFill>
-                  </a:tcPr>
-                </a:tc>
-                <a:tc>
-                  <a:txBody>
-                    <a:bodyPr/>
-                    <a:lstStyle/>
-                    <a:p>
-                      <a:pPr algn="ctr"/>
-                      <a:r>
-                        <a:rPr sz="1400">
-                          <a:solidFill>
-                            <a:srgbClr val="1A1A2E"/>
-                          </a:solidFill>
-                          <a:latin typeface="Calibri"/>
-                        </a:rPr>
-                        <a:t>—</a:t>
-                      </a:r>
-                    </a:p>
-                  </a:txBody>
-                  <a:tcPr anchor="ctr" marL="100584">
-                    <a:solidFill>
-                      <a:srgbClr val="FFFFFF"/>
-                    </a:solidFill>
-                  </a:tcPr>
-                </a:tc>
-                <a:tc>
-                  <a:txBody>
-                    <a:bodyPr/>
-                    <a:lstStyle/>
-                    <a:p>
-                      <a:pPr algn="ctr"/>
-                      <a:r>
-                        <a:rPr sz="1400">
-                          <a:solidFill>
-                            <a:srgbClr val="1A1A2E"/>
-                          </a:solidFill>
-                          <a:latin typeface="Calibri"/>
-                        </a:rPr>
-                        <a:t>not compared</a:t>
-                      </a:r>
-                    </a:p>
-                  </a:txBody>
-                  <a:tcPr anchor="ctr" marL="100584">
-                    <a:solidFill>
-                      <a:srgbClr val="FFFFFF"/>
-                    </a:solidFill>
-                  </a:tcPr>
-                </a:tc>
-              </a:tr>
-            </a:tbl>
-          </a:graphicData>
-        </a:graphic>
-      </p:graphicFrame>
-    </p:spTree>
-  </p:cSld>
-  <p:clrMapOvr>
-    <a:masterClrMapping/>
-  </p:clrMapOvr>
-</p:sld>
-</file>
-
-<file path=ppt/slides/slide15.xml><?xml version="1.0" encoding="utf-8"?>
-<p:sld xmlns:a="http://schemas.openxmlformats.org/drawingml/2006/main" xmlns:p="http://schemas.openxmlformats.org/presentationml/2006/main" xmlns:r="http://schemas.openxmlformats.org/officeDocument/2006/relationships">
-  <p:cSld>
-    <p:spTree>
-      <p:nvGrpSpPr>
-        <p:cNvPr id="1" name=""/>
-        <p:cNvGrpSpPr/>
-        <p:nvPr/>
-      </p:nvGrpSpPr>
-      <p:grpSpPr/>
-      <p:sp>
-        <p:nvSpPr>
-          <p:cNvPr id="2" name="TextBox 1"/>
-          <p:cNvSpPr txBox="1"/>
-          <p:nvPr/>
-        </p:nvSpPr>
-        <p:spPr>
-          <a:xfrm>
-            <a:off x="658368" y="384048"/>
-            <a:ext cx="10881360" cy="274320"/>
-          </a:xfrm>
-          <a:prstGeom prst="rect">
-            <a:avLst/>
-          </a:prstGeom>
-          <a:noFill/>
-        </p:spPr>
-        <p:txBody>
-          <a:bodyPr wrap="square" lIns="0" rIns="0" tIns="0" bIns="0" anchor="t">
-            <a:spAutoFit/>
-          </a:bodyPr>
-          <a:lstStyle/>
-          <a:p>
-            <a:pPr algn="l">
-              <a:spcAft>
-                <a:spcPts val="200"/>
-              </a:spcAft>
-            </a:pPr>
-            <a:r>
-              <a:rPr sz="1200" b="1" i="0">
-                <a:solidFill>
-                  <a:srgbClr val="2F4B8F"/>
-                </a:solidFill>
-                <a:latin typeface="Calibri"/>
-              </a:rPr>
-              <a:t>RESULTS · RECRUITERS</a:t>
-            </a:r>
-          </a:p>
-        </p:txBody>
-      </p:sp>
-      <p:sp>
-        <p:nvSpPr>
-          <p:cNvPr id="3" name="TextBox 2"/>
-          <p:cNvSpPr txBox="1"/>
-          <p:nvPr/>
-        </p:nvSpPr>
-        <p:spPr>
-          <a:xfrm>
-            <a:off x="658368" y="658368"/>
-            <a:ext cx="10881360" cy="685800"/>
-          </a:xfrm>
-          <a:prstGeom prst="rect">
-            <a:avLst/>
-          </a:prstGeom>
-          <a:noFill/>
-        </p:spPr>
-        <p:txBody>
-          <a:bodyPr wrap="square" lIns="0" rIns="0" tIns="0" bIns="0" anchor="t">
-            <a:spAutoFit/>
-          </a:bodyPr>
-          <a:lstStyle/>
-          <a:p>
-            <a:pPr algn="l">
-              <a:spcAft>
-                <a:spcPts val="200"/>
-              </a:spcAft>
-            </a:pPr>
-            <a:r>
-              <a:rPr sz="3100" b="1" i="0">
-                <a:solidFill>
-                  <a:srgbClr val="1F3160"/>
-                </a:solidFill>
-                <a:latin typeface="Calibri"/>
-              </a:rPr>
-              <a:t>Instrument D — ten recruiters used it to do their job</a:t>
-            </a:r>
-          </a:p>
-        </p:txBody>
-      </p:sp>
-      <p:sp>
-        <p:nvSpPr>
-          <p:cNvPr id="4" name="TextBox 3"/>
-          <p:cNvSpPr txBox="1"/>
-          <p:nvPr/>
-        </p:nvSpPr>
-        <p:spPr>
-          <a:xfrm>
-            <a:off x="658368" y="1389888"/>
-            <a:ext cx="10881360" cy="365760"/>
-          </a:xfrm>
-          <a:prstGeom prst="rect">
-            <a:avLst/>
-          </a:prstGeom>
-          <a:noFill/>
-        </p:spPr>
-        <p:txBody>
-          <a:bodyPr wrap="square" lIns="0" rIns="0" tIns="0" bIns="0" anchor="t">
-            <a:spAutoFit/>
-          </a:bodyPr>
-          <a:lstStyle/>
-          <a:p>
-            <a:pPr algn="l">
-              <a:spcAft>
-                <a:spcPts val="0"/>
-              </a:spcAft>
-            </a:pPr>
-            <a:r>
-              <a:rPr sz="1500" b="0" i="1">
-                <a:solidFill>
-                  <a:srgbClr val="5A6B8C"/>
-                </a:solidFill>
-                <a:latin typeface="Calibri"/>
-              </a:rPr>
-              <a:t>Every one of the ten completed every task on the sheet.</a:t>
-            </a:r>
-          </a:p>
-        </p:txBody>
-      </p:sp>
-      <p:sp>
-        <p:nvSpPr>
-          <p:cNvPr id="5" name="Rectangle 4"/>
-          <p:cNvSpPr/>
-          <p:nvPr/>
-        </p:nvSpPr>
-        <p:spPr>
-          <a:xfrm>
-            <a:off x="658368" y="1792224"/>
-            <a:ext cx="10881360" cy="20320"/>
-          </a:xfrm>
-          <a:prstGeom prst="rect">
-            <a:avLst/>
-          </a:prstGeom>
-          <a:solidFill>
-            <a:srgbClr val="C3CEE6"/>
-          </a:solidFill>
-          <a:ln>
-            <a:noFill/>
-          </a:ln>
-          <a:effectLst/>
-        </p:spPr>
-        <p:style>
-          <a:lnRef idx="1">
-            <a:schemeClr val="accent1"/>
-          </a:lnRef>
-          <a:fillRef idx="3">
-            <a:schemeClr val="accent1"/>
-          </a:fillRef>
-          <a:effectRef idx="2">
-            <a:schemeClr val="accent1"/>
-          </a:effectRef>
-          <a:fontRef idx="minor">
-            <a:schemeClr val="lt1"/>
-          </a:fontRef>
-        </p:style>
-        <p:txBody>
-          <a:bodyPr rtlCol="0" anchor="ctr"/>
-          <a:lstStyle/>
-          <a:p>
-            <a:pPr algn="ctr"/>
-          </a:p>
-        </p:txBody>
-      </p:sp>
-      <p:sp>
-        <p:nvSpPr>
-          <p:cNvPr id="6" name="Rounded Rectangle 5"/>
-          <p:cNvSpPr/>
-          <p:nvPr/>
-        </p:nvSpPr>
-        <p:spPr>
-          <a:xfrm>
-            <a:off x="658368" y="2121408"/>
-            <a:ext cx="2528316" cy="2148840"/>
-          </a:xfrm>
-          <a:prstGeom prst="roundRect">
-            <a:avLst>
-              <a:gd name="adj" fmla="val 4000"/>
-            </a:avLst>
-          </a:prstGeom>
-          <a:solidFill>
-            <a:srgbClr val="DCE4F5"/>
-          </a:solidFill>
-          <a:ln w="12700">
-            <a:solidFill>
-              <a:srgbClr val="C3CEE6"/>
-            </a:solidFill>
-          </a:ln>
-          <a:effectLst/>
-        </p:spPr>
-        <p:style>
-          <a:lnRef idx="1">
-            <a:schemeClr val="accent1"/>
-          </a:lnRef>
-          <a:fillRef idx="3">
-            <a:schemeClr val="accent1"/>
-          </a:fillRef>
-          <a:effectRef idx="2">
-            <a:schemeClr val="accent1"/>
-          </a:effectRef>
-          <a:fontRef idx="minor">
-            <a:schemeClr val="lt1"/>
-          </a:fontRef>
-        </p:style>
-        <p:txBody>
-          <a:bodyPr rtlCol="0" anchor="ctr"/>
-          <a:lstStyle/>
-          <a:p>
-            <a:pPr algn="ctr"/>
-          </a:p>
-        </p:txBody>
-      </p:sp>
-      <p:sp>
-        <p:nvSpPr>
-          <p:cNvPr id="7" name="TextBox 6"/>
-          <p:cNvSpPr txBox="1"/>
-          <p:nvPr/>
-        </p:nvSpPr>
-        <p:spPr>
-          <a:xfrm>
-            <a:off x="859536" y="2377440"/>
-            <a:ext cx="2125980" cy="1737360"/>
-          </a:xfrm>
-          <a:prstGeom prst="rect">
-            <a:avLst/>
-          </a:prstGeom>
-          <a:noFill/>
-        </p:spPr>
-        <p:txBody>
-          <a:bodyPr wrap="square" lIns="0" rIns="0" tIns="0" bIns="0" anchor="t">
-            <a:spAutoFit/>
-          </a:bodyPr>
-          <a:lstStyle/>
-          <a:p>
-            <a:pPr algn="ctr">
-              <a:spcAft>
-                <a:spcPts val="200"/>
-              </a:spcAft>
-            </a:pPr>
-            <a:r>
-              <a:rPr sz="4200" b="1" i="0">
-                <a:solidFill>
-                  <a:srgbClr val="1F3160"/>
-                </a:solidFill>
-                <a:latin typeface="Calibri"/>
-              </a:rPr>
-              <a:t>4.17</a:t>
-            </a:r>
-          </a:p>
-          <a:p>
-            <a:pPr algn="ctr">
-              <a:spcAft>
-                <a:spcPts val="600"/>
-              </a:spcAft>
-            </a:pPr>
-            <a:r>
-              <a:rPr sz="1400" b="1" i="0">
-                <a:solidFill>
-                  <a:srgbClr val="2F4B8F"/>
-                </a:solidFill>
-                <a:latin typeface="Calibri"/>
-              </a:rPr>
-              <a:t>FUNCTIONAL SUITABILITY</a:t>
-            </a:r>
-          </a:p>
-          <a:p>
-            <a:pPr algn="ctr">
-              <a:spcAft>
-                <a:spcPts val="0"/>
-              </a:spcAft>
-            </a:pPr>
-            <a:r>
-              <a:rPr sz="1250" b="0" i="0">
-                <a:solidFill>
-                  <a:srgbClr val="5A6B8C"/>
-                </a:solidFill>
-                <a:latin typeface="Calibri"/>
-              </a:rPr>
-              <a:t>good band</a:t>
-            </a:r>
-          </a:p>
-        </p:txBody>
-      </p:sp>
-      <p:sp>
-        <p:nvSpPr>
-          <p:cNvPr id="8" name="Rounded Rectangle 7"/>
-          <p:cNvSpPr/>
-          <p:nvPr/>
-        </p:nvSpPr>
-        <p:spPr>
-          <a:xfrm>
-            <a:off x="3442716" y="2121408"/>
-            <a:ext cx="2528316" cy="2148840"/>
-          </a:xfrm>
-          <a:prstGeom prst="roundRect">
-            <a:avLst>
-              <a:gd name="adj" fmla="val 4000"/>
-            </a:avLst>
-          </a:prstGeom>
-          <a:solidFill>
-            <a:srgbClr val="DCE4F5"/>
-          </a:solidFill>
-          <a:ln w="12700">
-            <a:solidFill>
-              <a:srgbClr val="C3CEE6"/>
-            </a:solidFill>
-          </a:ln>
-          <a:effectLst/>
-        </p:spPr>
-        <p:style>
-          <a:lnRef idx="1">
-            <a:schemeClr val="accent1"/>
-          </a:lnRef>
-          <a:fillRef idx="3">
-            <a:schemeClr val="accent1"/>
-          </a:fillRef>
-          <a:effectRef idx="2">
-            <a:schemeClr val="accent1"/>
-          </a:effectRef>
-          <a:fontRef idx="minor">
-            <a:schemeClr val="lt1"/>
-          </a:fontRef>
-        </p:style>
-        <p:txBody>
-          <a:bodyPr rtlCol="0" anchor="ctr"/>
-          <a:lstStyle/>
-          <a:p>
-            <a:pPr algn="ctr"/>
-          </a:p>
-        </p:txBody>
-      </p:sp>
-      <p:sp>
-        <p:nvSpPr>
-          <p:cNvPr id="9" name="TextBox 8"/>
-          <p:cNvSpPr txBox="1"/>
-          <p:nvPr/>
-        </p:nvSpPr>
-        <p:spPr>
-          <a:xfrm>
-            <a:off x="3643884" y="2377440"/>
-            <a:ext cx="2125980" cy="1737360"/>
-          </a:xfrm>
-          <a:prstGeom prst="rect">
-            <a:avLst/>
-          </a:prstGeom>
-          <a:noFill/>
-        </p:spPr>
-        <p:txBody>
-          <a:bodyPr wrap="square" lIns="0" rIns="0" tIns="0" bIns="0" anchor="t">
-            <a:spAutoFit/>
-          </a:bodyPr>
-          <a:lstStyle/>
-          <a:p>
-            <a:pPr algn="ctr">
-              <a:spcAft>
-                <a:spcPts val="200"/>
-              </a:spcAft>
-            </a:pPr>
-            <a:r>
-              <a:rPr sz="4200" b="1" i="0">
-                <a:solidFill>
-                  <a:srgbClr val="1F3160"/>
-                </a:solidFill>
-                <a:latin typeface="Calibri"/>
-              </a:rPr>
-              <a:t>4.22</a:t>
-            </a:r>
-          </a:p>
-          <a:p>
-            <a:pPr algn="ctr">
-              <a:spcAft>
-                <a:spcPts val="600"/>
-              </a:spcAft>
-            </a:pPr>
-            <a:r>
-              <a:rPr sz="1400" b="1" i="0">
-                <a:solidFill>
-                  <a:srgbClr val="2F4B8F"/>
-                </a:solidFill>
-                <a:latin typeface="Calibri"/>
-              </a:rPr>
-              <a:t>USABILITY</a:t>
-            </a:r>
-          </a:p>
-          <a:p>
-            <a:pPr algn="ctr">
-              <a:spcAft>
-                <a:spcPts val="0"/>
-              </a:spcAft>
-            </a:pPr>
-            <a:r>
-              <a:rPr sz="1250" b="0" i="0">
-                <a:solidFill>
-                  <a:srgbClr val="5A6B8C"/>
-                </a:solidFill>
-                <a:latin typeface="Calibri"/>
-              </a:rPr>
-              <a:t>good band</a:t>
-            </a:r>
-          </a:p>
-        </p:txBody>
-      </p:sp>
-      <p:sp>
-        <p:nvSpPr>
-          <p:cNvPr id="10" name="Rounded Rectangle 9"/>
-          <p:cNvSpPr/>
-          <p:nvPr/>
-        </p:nvSpPr>
-        <p:spPr>
-          <a:xfrm>
-            <a:off x="6227064" y="2121408"/>
-            <a:ext cx="2528316" cy="2148840"/>
-          </a:xfrm>
-          <a:prstGeom prst="roundRect">
-            <a:avLst>
-              <a:gd name="adj" fmla="val 4000"/>
-            </a:avLst>
-          </a:prstGeom>
-          <a:solidFill>
-            <a:srgbClr val="DCE4F5"/>
-          </a:solidFill>
-          <a:ln w="12700">
-            <a:solidFill>
-              <a:srgbClr val="C3CEE6"/>
-            </a:solidFill>
-          </a:ln>
-          <a:effectLst/>
-        </p:spPr>
-        <p:style>
-          <a:lnRef idx="1">
-            <a:schemeClr val="accent1"/>
-          </a:lnRef>
-          <a:fillRef idx="3">
-            <a:schemeClr val="accent1"/>
-          </a:fillRef>
-          <a:effectRef idx="2">
-            <a:schemeClr val="accent1"/>
-          </a:effectRef>
-          <a:fontRef idx="minor">
-            <a:schemeClr val="lt1"/>
-          </a:fontRef>
-        </p:style>
-        <p:txBody>
-          <a:bodyPr rtlCol="0" anchor="ctr"/>
-          <a:lstStyle/>
-          <a:p>
-            <a:pPr algn="ctr"/>
-          </a:p>
-        </p:txBody>
-      </p:sp>
-      <p:sp>
-        <p:nvSpPr>
-          <p:cNvPr id="11" name="TextBox 10"/>
-          <p:cNvSpPr txBox="1"/>
-          <p:nvPr/>
-        </p:nvSpPr>
-        <p:spPr>
-          <a:xfrm>
-            <a:off x="6428232" y="2377440"/>
-            <a:ext cx="2125980" cy="1737360"/>
-          </a:xfrm>
-          <a:prstGeom prst="rect">
-            <a:avLst/>
-          </a:prstGeom>
-          <a:noFill/>
-        </p:spPr>
-        <p:txBody>
-          <a:bodyPr wrap="square" lIns="0" rIns="0" tIns="0" bIns="0" anchor="t">
-            <a:spAutoFit/>
-          </a:bodyPr>
-          <a:lstStyle/>
-          <a:p>
-            <a:pPr algn="ctr">
-              <a:spcAft>
-                <a:spcPts val="200"/>
-              </a:spcAft>
-            </a:pPr>
-            <a:r>
-              <a:rPr sz="4200" b="1" i="0">
-                <a:solidFill>
-                  <a:srgbClr val="1F3160"/>
-                </a:solidFill>
-                <a:latin typeface="Calibri"/>
-              </a:rPr>
-              <a:t>4.33</a:t>
-            </a:r>
-          </a:p>
-          <a:p>
-            <a:pPr algn="ctr">
-              <a:spcAft>
-                <a:spcPts val="600"/>
-              </a:spcAft>
-            </a:pPr>
-            <a:r>
-              <a:rPr sz="1400" b="1" i="0">
-                <a:solidFill>
-                  <a:srgbClr val="2F4B8F"/>
-                </a:solidFill>
-                <a:latin typeface="Calibri"/>
-              </a:rPr>
-              <a:t>RELIABILITY</a:t>
-            </a:r>
-          </a:p>
-          <a:p>
-            <a:pPr algn="ctr">
-              <a:spcAft>
-                <a:spcPts val="0"/>
-              </a:spcAft>
-            </a:pPr>
-            <a:r>
-              <a:rPr sz="1250" b="0" i="0">
-                <a:solidFill>
-                  <a:srgbClr val="5A6B8C"/>
-                </a:solidFill>
-                <a:latin typeface="Calibri"/>
-              </a:rPr>
-              <a:t>good band</a:t>
-            </a:r>
-          </a:p>
-        </p:txBody>
-      </p:sp>
-      <p:sp>
-        <p:nvSpPr>
-          <p:cNvPr id="12" name="Rounded Rectangle 11"/>
-          <p:cNvSpPr/>
-          <p:nvPr/>
-        </p:nvSpPr>
-        <p:spPr>
-          <a:xfrm>
-            <a:off x="9011412" y="2121408"/>
-            <a:ext cx="2528316" cy="2148840"/>
-          </a:xfrm>
-          <a:prstGeom prst="roundRect">
-            <a:avLst>
-              <a:gd name="adj" fmla="val 4000"/>
-            </a:avLst>
-          </a:prstGeom>
-          <a:solidFill>
-            <a:srgbClr val="DCE4F5"/>
-          </a:solidFill>
-          <a:ln w="12700">
-            <a:solidFill>
-              <a:srgbClr val="C3CEE6"/>
-            </a:solidFill>
-          </a:ln>
-          <a:effectLst/>
-        </p:spPr>
-        <p:style>
-          <a:lnRef idx="1">
-            <a:schemeClr val="accent1"/>
-          </a:lnRef>
-          <a:fillRef idx="3">
-            <a:schemeClr val="accent1"/>
-          </a:fillRef>
-          <a:effectRef idx="2">
-            <a:schemeClr val="accent1"/>
-          </a:effectRef>
-          <a:fontRef idx="minor">
-            <a:schemeClr val="lt1"/>
-          </a:fontRef>
-        </p:style>
-        <p:txBody>
-          <a:bodyPr rtlCol="0" anchor="ctr"/>
-          <a:lstStyle/>
-          <a:p>
-            <a:pPr algn="ctr"/>
-          </a:p>
-        </p:txBody>
-      </p:sp>
-      <p:sp>
-        <p:nvSpPr>
-          <p:cNvPr id="13" name="TextBox 12"/>
-          <p:cNvSpPr txBox="1"/>
-          <p:nvPr/>
-        </p:nvSpPr>
-        <p:spPr>
-          <a:xfrm>
-            <a:off x="9212580" y="2377440"/>
-            <a:ext cx="2125980" cy="1737360"/>
-          </a:xfrm>
-          <a:prstGeom prst="rect">
-            <a:avLst/>
-          </a:prstGeom>
-          <a:noFill/>
-        </p:spPr>
-        <p:txBody>
-          <a:bodyPr wrap="square" lIns="0" rIns="0" tIns="0" bIns="0" anchor="t">
-            <a:spAutoFit/>
-          </a:bodyPr>
-          <a:lstStyle/>
-          <a:p>
-            <a:pPr algn="ctr">
-              <a:spcAft>
-                <a:spcPts val="200"/>
-              </a:spcAft>
-            </a:pPr>
-            <a:r>
-              <a:rPr sz="4200" b="1" i="0">
-                <a:solidFill>
-                  <a:srgbClr val="1F3160"/>
-                </a:solidFill>
-                <a:latin typeface="Calibri"/>
-              </a:rPr>
-              <a:t>10 / 10</a:t>
-            </a:r>
-          </a:p>
-          <a:p>
-            <a:pPr algn="ctr">
-              <a:spcAft>
-                <a:spcPts val="600"/>
-              </a:spcAft>
-            </a:pPr>
-            <a:r>
-              <a:rPr sz="1400" b="1" i="0">
-                <a:solidFill>
-                  <a:srgbClr val="2F4B8F"/>
-                </a:solidFill>
-                <a:latin typeface="Calibri"/>
-              </a:rPr>
-              <a:t>PLACED OUR TOP PICK IN THEIR OWN TOP 3</a:t>
-            </a:r>
-          </a:p>
-          <a:p>
-            <a:pPr algn="ctr">
-              <a:spcAft>
-                <a:spcPts val="0"/>
-              </a:spcAft>
-            </a:pPr>
-            <a:r>
-              <a:rPr sz="1250" b="0" i="0">
-                <a:solidFill>
-                  <a:srgbClr val="5A6B8C"/>
-                </a:solidFill>
-                <a:latin typeface="Calibri"/>
-              </a:rPr>
-              <a:t>five placed it first</a:t>
-            </a:r>
-          </a:p>
-        </p:txBody>
-      </p:sp>
-      <p:sp>
-        <p:nvSpPr>
-          <p:cNvPr id="14" name="TextBox 13"/>
-          <p:cNvSpPr txBox="1"/>
-          <p:nvPr/>
-        </p:nvSpPr>
-        <p:spPr>
-          <a:xfrm>
-            <a:off x="658368" y="4590288"/>
-            <a:ext cx="10881360" cy="1097280"/>
-          </a:xfrm>
-          <a:prstGeom prst="rect">
-            <a:avLst/>
-          </a:prstGeom>
-          <a:noFill/>
-        </p:spPr>
-        <p:txBody>
-          <a:bodyPr wrap="square" lIns="0" rIns="0" tIns="0" bIns="0" anchor="t">
-            <a:spAutoFit/>
-          </a:bodyPr>
-          <a:lstStyle/>
-          <a:p>
-            <a:pPr algn="l">
-              <a:spcAft>
-                <a:spcPts val="0"/>
-              </a:spcAft>
-            </a:pPr>
-            <a:r>
-              <a:rPr sz="1500" b="0" i="0">
-                <a:solidFill>
-                  <a:srgbClr val="1A1A2E"/>
-                </a:solidFill>
-                <a:latin typeface="Calibri"/>
-              </a:rPr>
-              <a:t>Trust in the ordering drew a mean of 4.00 with a standard deviation of 0.00 — all ten selected 4, none selected 3 or 5. The joint-lowest of the fourteen quality items, at 4.00, is that the ranked list was quicker than current practice: the item that most directly tests the time claim.</a:t>
-            </a:r>
-          </a:p>
-        </p:txBody>
-      </p:sp>
-    </p:spTree>
-  </p:cSld>
-  <p:clrMapOvr>
-    <a:masterClrMapping/>
-  </p:clrMapOvr>
-</p:sld>
-</file>
-
-<file path=ppt/slides/slide16.xml><?xml version="1.0" encoding="utf-8"?>
-<p:sld xmlns:a="http://schemas.openxmlformats.org/drawingml/2006/main" xmlns:p="http://schemas.openxmlformats.org/presentationml/2006/main" xmlns:r="http://schemas.openxmlformats.org/officeDocument/2006/relationships">
-  <p:cSld>
-    <p:spTree>
-      <p:nvGrpSpPr>
-        <p:cNvPr id="1" name=""/>
-        <p:cNvGrpSpPr/>
-        <p:nvPr/>
-      </p:nvGrpSpPr>
-      <p:grpSpPr/>
-      <p:sp>
-        <p:nvSpPr>
-          <p:cNvPr id="2" name="TextBox 1"/>
-          <p:cNvSpPr txBox="1"/>
-          <p:nvPr/>
-        </p:nvSpPr>
-        <p:spPr>
-          <a:xfrm>
-            <a:off x="658368" y="384048"/>
-            <a:ext cx="10881360" cy="274320"/>
-          </a:xfrm>
-          <a:prstGeom prst="rect">
-            <a:avLst/>
-          </a:prstGeom>
-          <a:noFill/>
-        </p:spPr>
-        <p:txBody>
-          <a:bodyPr wrap="square" lIns="0" rIns="0" tIns="0" bIns="0" anchor="t">
-            <a:spAutoFit/>
-          </a:bodyPr>
-          <a:lstStyle/>
-          <a:p>
-            <a:pPr algn="l">
-              <a:spcAft>
-                <a:spcPts val="200"/>
-              </a:spcAft>
-            </a:pPr>
-            <a:r>
-              <a:rPr sz="1200" b="1" i="0">
-                <a:solidFill>
-                  <a:srgbClr val="2F4B8F"/>
-                </a:solidFill>
-                <a:latin typeface="Calibri"/>
-              </a:rPr>
-              <a:t>RESULTS · EXPERTS</a:t>
-            </a:r>
-          </a:p>
-        </p:txBody>
-      </p:sp>
-      <p:sp>
-        <p:nvSpPr>
-          <p:cNvPr id="3" name="TextBox 2"/>
-          <p:cNvSpPr txBox="1"/>
-          <p:nvPr/>
-        </p:nvSpPr>
-        <p:spPr>
-          <a:xfrm>
-            <a:off x="658368" y="658368"/>
-            <a:ext cx="10881360" cy="685800"/>
-          </a:xfrm>
-          <a:prstGeom prst="rect">
-            <a:avLst/>
-          </a:prstGeom>
-          <a:noFill/>
-        </p:spPr>
-        <p:txBody>
-          <a:bodyPr wrap="square" lIns="0" rIns="0" tIns="0" bIns="0" anchor="t">
-            <a:spAutoFit/>
-          </a:bodyPr>
-          <a:lstStyle/>
-          <a:p>
-            <a:pPr algn="l">
-              <a:spcAft>
-                <a:spcPts val="200"/>
-              </a:spcAft>
-            </a:pPr>
-            <a:r>
-              <a:rPr sz="3100" b="1" i="0">
-                <a:solidFill>
-                  <a:srgbClr val="1F3160"/>
-                </a:solidFill>
-                <a:latin typeface="Calibri"/>
-              </a:rPr>
-              <a:t>Instrument E — three IT practitioners inspected it</a:t>
-            </a:r>
-          </a:p>
-        </p:txBody>
-      </p:sp>
-      <p:sp>
-        <p:nvSpPr>
-          <p:cNvPr id="4" name="TextBox 3"/>
-          <p:cNvSpPr txBox="1"/>
-          <p:nvPr/>
-        </p:nvSpPr>
-        <p:spPr>
-          <a:xfrm>
-            <a:off x="658368" y="1389888"/>
-            <a:ext cx="10881360" cy="365760"/>
-          </a:xfrm>
-          <a:prstGeom prst="rect">
-            <a:avLst/>
-          </a:prstGeom>
-          <a:noFill/>
-        </p:spPr>
-        <p:txBody>
-          <a:bodyPr wrap="square" lIns="0" rIns="0" tIns="0" bIns="0" anchor="t">
-            <a:spAutoFit/>
-          </a:bodyPr>
-          <a:lstStyle/>
-          <a:p>
-            <a:pPr algn="l">
-              <a:spcAft>
-                <a:spcPts val="0"/>
-              </a:spcAft>
-            </a:pPr>
-            <a:r>
-              <a:rPr sz="1500" b="0" i="1">
-                <a:solidFill>
-                  <a:srgbClr val="5A6B8C"/>
-                </a:solidFill>
-                <a:latin typeface="Calibri"/>
-              </a:rPr>
-              <a:t>Two of the three also read the source code, the schema and the API layer.</a:t>
-            </a:r>
-          </a:p>
-        </p:txBody>
-      </p:sp>
-      <p:sp>
-        <p:nvSpPr>
-          <p:cNvPr id="5" name="Rectangle 4"/>
-          <p:cNvSpPr/>
-          <p:nvPr/>
-        </p:nvSpPr>
-        <p:spPr>
-          <a:xfrm>
-            <a:off x="658368" y="1792224"/>
-            <a:ext cx="10881360" cy="20320"/>
-          </a:xfrm>
-          <a:prstGeom prst="rect">
-            <a:avLst/>
-          </a:prstGeom>
-          <a:solidFill>
-            <a:srgbClr val="C3CEE6"/>
-          </a:solidFill>
-          <a:ln>
-            <a:noFill/>
-          </a:ln>
-          <a:effectLst/>
-        </p:spPr>
-        <p:style>
-          <a:lnRef idx="1">
-            <a:schemeClr val="accent1"/>
-          </a:lnRef>
-          <a:fillRef idx="3">
-            <a:schemeClr val="accent1"/>
-          </a:fillRef>
-          <a:effectRef idx="2">
-            <a:schemeClr val="accent1"/>
-          </a:effectRef>
-          <a:fontRef idx="minor">
-            <a:schemeClr val="lt1"/>
-          </a:fontRef>
-        </p:style>
-        <p:txBody>
-          <a:bodyPr rtlCol="0" anchor="ctr"/>
-          <a:lstStyle/>
-          <a:p>
-            <a:pPr algn="ctr"/>
-          </a:p>
-        </p:txBody>
-      </p:sp>
-      <p:sp>
-        <p:nvSpPr>
-          <p:cNvPr id="6" name="Rounded Rectangle 5"/>
-          <p:cNvSpPr/>
-          <p:nvPr/>
-        </p:nvSpPr>
-        <p:spPr>
-          <a:xfrm>
-            <a:off x="658368" y="2121408"/>
-            <a:ext cx="3456432" cy="2148840"/>
-          </a:xfrm>
-          <a:prstGeom prst="roundRect">
-            <a:avLst>
-              <a:gd name="adj" fmla="val 4000"/>
-            </a:avLst>
-          </a:prstGeom>
-          <a:solidFill>
-            <a:srgbClr val="DCE4F5"/>
-          </a:solidFill>
-          <a:ln w="12700">
-            <a:solidFill>
-              <a:srgbClr val="C3CEE6"/>
-            </a:solidFill>
-          </a:ln>
-          <a:effectLst/>
-        </p:spPr>
-        <p:style>
-          <a:lnRef idx="1">
-            <a:schemeClr val="accent1"/>
-          </a:lnRef>
-          <a:fillRef idx="3">
-            <a:schemeClr val="accent1"/>
-          </a:fillRef>
-          <a:effectRef idx="2">
-            <a:schemeClr val="accent1"/>
-          </a:effectRef>
-          <a:fontRef idx="minor">
-            <a:schemeClr val="lt1"/>
-          </a:fontRef>
-        </p:style>
-        <p:txBody>
-          <a:bodyPr rtlCol="0" anchor="ctr"/>
-          <a:lstStyle/>
-          <a:p>
-            <a:pPr algn="ctr"/>
-          </a:p>
-        </p:txBody>
-      </p:sp>
-      <p:sp>
-        <p:nvSpPr>
-          <p:cNvPr id="7" name="TextBox 6"/>
-          <p:cNvSpPr txBox="1"/>
-          <p:nvPr/>
-        </p:nvSpPr>
-        <p:spPr>
-          <a:xfrm>
-            <a:off x="859536" y="2377440"/>
-            <a:ext cx="3054096" cy="1737360"/>
-          </a:xfrm>
-          <a:prstGeom prst="rect">
-            <a:avLst/>
-          </a:prstGeom>
-          <a:noFill/>
-        </p:spPr>
-        <p:txBody>
-          <a:bodyPr wrap="square" lIns="0" rIns="0" tIns="0" bIns="0" anchor="t">
-            <a:spAutoFit/>
-          </a:bodyPr>
-          <a:lstStyle/>
-          <a:p>
-            <a:pPr algn="ctr">
-              <a:spcAft>
-                <a:spcPts val="200"/>
-              </a:spcAft>
-            </a:pPr>
-            <a:r>
-              <a:rPr sz="4200" b="1" i="0">
-                <a:solidFill>
-                  <a:srgbClr val="1F3160"/>
-                </a:solidFill>
-                <a:latin typeface="Calibri"/>
-              </a:rPr>
-              <a:t>4.80</a:t>
-            </a:r>
-          </a:p>
-          <a:p>
-            <a:pPr algn="ctr">
-              <a:spcAft>
-                <a:spcPts val="600"/>
-              </a:spcAft>
-            </a:pPr>
-            <a:r>
-              <a:rPr sz="1400" b="1" i="0">
-                <a:solidFill>
-                  <a:srgbClr val="2F4B8F"/>
-                </a:solidFill>
-                <a:latin typeface="Calibri"/>
-              </a:rPr>
-              <a:t>OVERALL</a:t>
-            </a:r>
-          </a:p>
-          <a:p>
-            <a:pPr algn="ctr">
-              <a:spcAft>
-                <a:spcPts val="0"/>
-              </a:spcAft>
-            </a:pPr>
-            <a:r>
-              <a:rPr sz="1250" b="0" i="0">
-                <a:solidFill>
-                  <a:srgbClr val="5A6B8C"/>
-                </a:solidFill>
-                <a:latin typeface="Calibri"/>
-              </a:rPr>
-              <a:t>strongly agree</a:t>
-            </a:r>
-          </a:p>
-        </p:txBody>
-      </p:sp>
-      <p:sp>
-        <p:nvSpPr>
-          <p:cNvPr id="8" name="Rounded Rectangle 7"/>
-          <p:cNvSpPr/>
-          <p:nvPr/>
-        </p:nvSpPr>
-        <p:spPr>
-          <a:xfrm>
-            <a:off x="4370832" y="2121408"/>
-            <a:ext cx="3456432" cy="2148840"/>
-          </a:xfrm>
-          <a:prstGeom prst="roundRect">
-            <a:avLst>
-              <a:gd name="adj" fmla="val 4000"/>
-            </a:avLst>
-          </a:prstGeom>
-          <a:solidFill>
-            <a:srgbClr val="DCE4F5"/>
-          </a:solidFill>
-          <a:ln w="12700">
-            <a:solidFill>
-              <a:srgbClr val="C3CEE6"/>
-            </a:solidFill>
-          </a:ln>
-          <a:effectLst/>
-        </p:spPr>
-        <p:style>
-          <a:lnRef idx="1">
-            <a:schemeClr val="accent1"/>
-          </a:lnRef>
-          <a:fillRef idx="3">
-            <a:schemeClr val="accent1"/>
-          </a:fillRef>
-          <a:effectRef idx="2">
-            <a:schemeClr val="accent1"/>
-          </a:effectRef>
-          <a:fontRef idx="minor">
-            <a:schemeClr val="lt1"/>
-          </a:fontRef>
-        </p:style>
-        <p:txBody>
-          <a:bodyPr rtlCol="0" anchor="ctr"/>
-          <a:lstStyle/>
-          <a:p>
-            <a:pPr algn="ctr"/>
-          </a:p>
-        </p:txBody>
-      </p:sp>
-      <p:sp>
-        <p:nvSpPr>
-          <p:cNvPr id="9" name="TextBox 8"/>
-          <p:cNvSpPr txBox="1"/>
-          <p:nvPr/>
-        </p:nvSpPr>
-        <p:spPr>
-          <a:xfrm>
-            <a:off x="4572000" y="2377440"/>
-            <a:ext cx="3054096" cy="1737360"/>
-          </a:xfrm>
-          <a:prstGeom prst="rect">
-            <a:avLst/>
-          </a:prstGeom>
-          <a:noFill/>
-        </p:spPr>
-        <p:txBody>
-          <a:bodyPr wrap="square" lIns="0" rIns="0" tIns="0" bIns="0" anchor="t">
-            <a:spAutoFit/>
-          </a:bodyPr>
-          <a:lstStyle/>
-          <a:p>
-            <a:pPr algn="ctr">
-              <a:spcAft>
-                <a:spcPts val="200"/>
-              </a:spcAft>
-            </a:pPr>
-            <a:r>
-              <a:rPr sz="4200" b="1" i="0">
-                <a:solidFill>
-                  <a:srgbClr val="1F3160"/>
-                </a:solidFill>
-                <a:latin typeface="Calibri"/>
-              </a:rPr>
-              <a:t>4.89</a:t>
-            </a:r>
-          </a:p>
-          <a:p>
-            <a:pPr algn="ctr">
-              <a:spcAft>
-                <a:spcPts val="600"/>
-              </a:spcAft>
-            </a:pPr>
-            <a:r>
-              <a:rPr sz="1400" b="1" i="0">
-                <a:solidFill>
-                  <a:srgbClr val="2F4B8F"/>
-                </a:solidFill>
-                <a:latin typeface="Calibri"/>
-              </a:rPr>
-              <a:t>SECURITY</a:t>
-            </a:r>
-          </a:p>
-          <a:p>
-            <a:pPr algn="ctr">
-              <a:spcAft>
-                <a:spcPts val="0"/>
-              </a:spcAft>
-            </a:pPr>
-            <a:r>
-              <a:rPr sz="1250" b="0" i="0">
-                <a:solidFill>
-                  <a:srgbClr val="5A6B8C"/>
-                </a:solidFill>
-                <a:latin typeface="Calibri"/>
-              </a:rPr>
-              <a:t>highest dimension</a:t>
-            </a:r>
-          </a:p>
-        </p:txBody>
-      </p:sp>
-      <p:sp>
-        <p:nvSpPr>
-          <p:cNvPr id="10" name="Rounded Rectangle 9"/>
-          <p:cNvSpPr/>
-          <p:nvPr/>
-        </p:nvSpPr>
-        <p:spPr>
-          <a:xfrm>
-            <a:off x="8083296" y="2121408"/>
-            <a:ext cx="3456432" cy="2148840"/>
-          </a:xfrm>
-          <a:prstGeom prst="roundRect">
-            <a:avLst>
-              <a:gd name="adj" fmla="val 4000"/>
-            </a:avLst>
-          </a:prstGeom>
-          <a:solidFill>
-            <a:srgbClr val="DCE4F5"/>
-          </a:solidFill>
-          <a:ln w="12700">
-            <a:solidFill>
-              <a:srgbClr val="C3CEE6"/>
-            </a:solidFill>
-          </a:ln>
-          <a:effectLst/>
-        </p:spPr>
-        <p:style>
-          <a:lnRef idx="1">
-            <a:schemeClr val="accent1"/>
-          </a:lnRef>
-          <a:fillRef idx="3">
-            <a:schemeClr val="accent1"/>
-          </a:fillRef>
-          <a:effectRef idx="2">
-            <a:schemeClr val="accent1"/>
-          </a:effectRef>
-          <a:fontRef idx="minor">
-            <a:schemeClr val="lt1"/>
-          </a:fontRef>
-        </p:style>
-        <p:txBody>
-          <a:bodyPr rtlCol="0" anchor="ctr"/>
-          <a:lstStyle/>
-          <a:p>
-            <a:pPr algn="ctr"/>
-          </a:p>
-        </p:txBody>
-      </p:sp>
-      <p:sp>
-        <p:nvSpPr>
-          <p:cNvPr id="11" name="TextBox 10"/>
-          <p:cNvSpPr txBox="1"/>
-          <p:nvPr/>
-        </p:nvSpPr>
-        <p:spPr>
-          <a:xfrm>
-            <a:off x="8284464" y="2377440"/>
-            <a:ext cx="3054096" cy="1737360"/>
-          </a:xfrm>
-          <a:prstGeom prst="rect">
-            <a:avLst/>
-          </a:prstGeom>
-          <a:noFill/>
-        </p:spPr>
-        <p:txBody>
-          <a:bodyPr wrap="square" lIns="0" rIns="0" tIns="0" bIns="0" anchor="t">
-            <a:spAutoFit/>
-          </a:bodyPr>
-          <a:lstStyle/>
-          <a:p>
-            <a:pPr algn="ctr">
-              <a:spcAft>
-                <a:spcPts val="200"/>
-              </a:spcAft>
-            </a:pPr>
-            <a:r>
-              <a:rPr sz="4200" b="1" i="0">
-                <a:solidFill>
-                  <a:srgbClr val="1F3160"/>
-                </a:solidFill>
-                <a:latin typeface="Calibri"/>
-              </a:rPr>
-              <a:t>4.67</a:t>
-            </a:r>
-          </a:p>
-          <a:p>
-            <a:pPr algn="ctr">
-              <a:spcAft>
-                <a:spcPts val="600"/>
-              </a:spcAft>
-            </a:pPr>
-            <a:r>
-              <a:rPr sz="1400" b="1" i="0">
-                <a:solidFill>
-                  <a:srgbClr val="2F4B8F"/>
-                </a:solidFill>
-                <a:latin typeface="Calibri"/>
-              </a:rPr>
-              <a:t>USABILITY</a:t>
-            </a:r>
-          </a:p>
-          <a:p>
-            <a:pPr algn="ctr">
-              <a:spcAft>
-                <a:spcPts val="0"/>
-              </a:spcAft>
-            </a:pPr>
-            <a:r>
-              <a:rPr sz="1250" b="0" i="0">
-                <a:solidFill>
-                  <a:srgbClr val="5A6B8C"/>
-                </a:solidFill>
-                <a:latin typeface="Calibri"/>
-              </a:rPr>
-              <a:t>lowest dimension</a:t>
-            </a:r>
-          </a:p>
-        </p:txBody>
-      </p:sp>
-      <p:sp>
-        <p:nvSpPr>
-          <p:cNvPr id="12" name="TextBox 11"/>
-          <p:cNvSpPr txBox="1"/>
-          <p:nvPr/>
-        </p:nvSpPr>
-        <p:spPr>
-          <a:xfrm>
-            <a:off x="658368" y="4590288"/>
-            <a:ext cx="10881360" cy="1097280"/>
-          </a:xfrm>
-          <a:prstGeom prst="rect">
-            <a:avLst/>
-          </a:prstGeom>
-          <a:noFill/>
-        </p:spPr>
-        <p:txBody>
-          <a:bodyPr wrap="square" lIns="0" rIns="0" tIns="0" bIns="0" anchor="t">
-            <a:spAutoFit/>
-          </a:bodyPr>
-          <a:lstStyle/>
-          <a:p>
-            <a:pPr algn="l">
-              <a:spcAft>
-                <a:spcPts val="0"/>
-              </a:spcAft>
-            </a:pPr>
-            <a:r>
-              <a:rPr sz="1500" b="0" i="0">
-                <a:solidFill>
-                  <a:srgbClr val="1A1A2E"/>
-                </a:solidFill>
-                <a:latin typeface="Calibri"/>
-              </a:rPr>
-              <a:t>Three respondents support no inference beyond themselves, and we make none. The security rating rests on inspection: no penetration test, no dependency audit and no independent security review was conducted, and the paper says so at the item.</a:t>
-            </a:r>
-          </a:p>
-        </p:txBody>
-      </p:sp>
-    </p:spTree>
-  </p:cSld>
-  <p:clrMapOvr>
-    <a:masterClrMapping/>
-  </p:clrMapOvr>
-</p:sld>
-</file>
-
-<file path=ppt/slides/slide17.xml><?xml version="1.0" encoding="utf-8"?>
-<p:sld xmlns:a="http://schemas.openxmlformats.org/drawingml/2006/main" xmlns:p="http://schemas.openxmlformats.org/presentationml/2006/main" xmlns:r="http://schemas.openxmlformats.org/officeDocument/2006/relationships">
-  <p:cSld>
-    <p:spTree>
-      <p:nvGrpSpPr>
-        <p:cNvPr id="1" name=""/>
-        <p:cNvGrpSpPr/>
-        <p:nvPr/>
-      </p:nvGrpSpPr>
-      <p:grpSpPr/>
-      <p:sp>
-        <p:nvSpPr>
-          <p:cNvPr id="2" name="TextBox 1"/>
-          <p:cNvSpPr txBox="1"/>
-          <p:nvPr/>
-        </p:nvSpPr>
-        <p:spPr>
-          <a:xfrm>
-            <a:off x="658368" y="384048"/>
-            <a:ext cx="10881360" cy="274320"/>
-          </a:xfrm>
-          <a:prstGeom prst="rect">
-            <a:avLst/>
-          </a:prstGeom>
-          <a:noFill/>
-        </p:spPr>
-        <p:txBody>
-          <a:bodyPr wrap="square" lIns="0" rIns="0" tIns="0" bIns="0" anchor="t">
-            <a:spAutoFit/>
-          </a:bodyPr>
-          <a:lstStyle/>
-          <a:p>
-            <a:pPr algn="l">
-              <a:spcAft>
-                <a:spcPts val="200"/>
-              </a:spcAft>
-            </a:pPr>
-            <a:r>
-              <a:rPr sz="1200" b="1" i="0">
-                <a:solidFill>
-                  <a:srgbClr val="2F4B8F"/>
-                </a:solidFill>
-                <a:latin typeface="Calibri"/>
-              </a:rPr>
-              <a:t>RESULTS · TOGETHER</a:t>
-            </a:r>
-          </a:p>
-        </p:txBody>
-      </p:sp>
-      <p:sp>
-        <p:nvSpPr>
-          <p:cNvPr id="3" name="TextBox 2"/>
-          <p:cNvSpPr txBox="1"/>
-          <p:nvPr/>
-        </p:nvSpPr>
-        <p:spPr>
-          <a:xfrm>
-            <a:off x="658368" y="658368"/>
-            <a:ext cx="10881360" cy="685800"/>
-          </a:xfrm>
-          <a:prstGeom prst="rect">
-            <a:avLst/>
-          </a:prstGeom>
-          <a:noFill/>
-        </p:spPr>
-        <p:txBody>
-          <a:bodyPr wrap="square" lIns="0" rIns="0" tIns="0" bIns="0" anchor="t">
-            <a:spAutoFit/>
-          </a:bodyPr>
-          <a:lstStyle/>
-          <a:p>
-            <a:pPr algn="l">
-              <a:spcAft>
-                <a:spcPts val="200"/>
-              </a:spcAft>
-            </a:pPr>
-            <a:r>
-              <a:rPr sz="3100" b="1" i="0">
-                <a:solidFill>
-                  <a:srgbClr val="1F3160"/>
-                </a:solidFill>
-                <a:latin typeface="Calibri"/>
-              </a:rPr>
-              <a:t>The three evaluations side by side</a:t>
-            </a:r>
-          </a:p>
-        </p:txBody>
-      </p:sp>
-      <p:sp>
-        <p:nvSpPr>
-          <p:cNvPr id="4" name="TextBox 3"/>
-          <p:cNvSpPr txBox="1"/>
-          <p:nvPr/>
-        </p:nvSpPr>
-        <p:spPr>
-          <a:xfrm>
-            <a:off x="658368" y="1389888"/>
-            <a:ext cx="10881360" cy="365760"/>
-          </a:xfrm>
-          <a:prstGeom prst="rect">
-            <a:avLst/>
-          </a:prstGeom>
-          <a:noFill/>
-        </p:spPr>
-        <p:txBody>
-          <a:bodyPr wrap="square" lIns="0" rIns="0" tIns="0" bIns="0" anchor="t">
-            <a:spAutoFit/>
-          </a:bodyPr>
-          <a:lstStyle/>
-          <a:p>
-            <a:pPr algn="l">
-              <a:spcAft>
-                <a:spcPts val="0"/>
-              </a:spcAft>
-            </a:pPr>
-            <a:r>
-              <a:rPr sz="1500" b="0" i="1">
-                <a:solidFill>
-                  <a:srgbClr val="5A6B8C"/>
-                </a:solidFill>
-                <a:latin typeface="Calibri"/>
-              </a:rPr>
-              <a:t>Deliberately not pooled: two groups rated what they used, one rated what it inspected.</a:t>
-            </a:r>
-          </a:p>
-        </p:txBody>
-      </p:sp>
-      <p:sp>
-        <p:nvSpPr>
-          <p:cNvPr id="5" name="Rectangle 4"/>
-          <p:cNvSpPr/>
-          <p:nvPr/>
-        </p:nvSpPr>
-        <p:spPr>
-          <a:xfrm>
-            <a:off x="658368" y="1792224"/>
-            <a:ext cx="10881360" cy="20320"/>
-          </a:xfrm>
-          <a:prstGeom prst="rect">
-            <a:avLst/>
-          </a:prstGeom>
-          <a:solidFill>
-            <a:srgbClr val="C3CEE6"/>
-          </a:solidFill>
-          <a:ln>
-            <a:noFill/>
-          </a:ln>
-          <a:effectLst/>
-        </p:spPr>
-        <p:style>
-          <a:lnRef idx="1">
-            <a:schemeClr val="accent1"/>
-          </a:lnRef>
-          <a:fillRef idx="3">
-            <a:schemeClr val="accent1"/>
-          </a:fillRef>
-          <a:effectRef idx="2">
-            <a:schemeClr val="accent1"/>
-          </a:effectRef>
-          <a:fontRef idx="minor">
-            <a:schemeClr val="lt1"/>
-          </a:fontRef>
-        </p:style>
-        <p:txBody>
-          <a:bodyPr rtlCol="0" anchor="ctr"/>
-          <a:lstStyle/>
-          <a:p>
-            <a:pPr algn="ctr"/>
-          </a:p>
-        </p:txBody>
-      </p:sp>
-      <p:graphicFrame>
-        <p:nvGraphicFramePr>
-          <p:cNvPr id="6" name="Table 5"/>
-          <p:cNvGraphicFramePr>
-            <a:graphicFrameLocks noGrp="1"/>
-          </p:cNvGraphicFramePr>
-          <p:nvPr/>
-        </p:nvGraphicFramePr>
-        <p:xfrm>
-          <a:off x="658368" y="2103120"/>
-          <a:ext cx="10881360" cy="2487168"/>
-        </p:xfrm>
-        <a:graphic>
-          <a:graphicData uri="http://schemas.openxmlformats.org/drawingml/2006/table">
-            <a:tbl>
-              <a:tblPr firstRow="1" bandRow="1">
-                <a:tableStyleId>{5C22544A-7EE6-4342-B048-85BDC9FD1C3A}</a:tableStyleId>
-              </a:tblPr>
-              <a:tblGrid>
-                <a:gridCol w="3989832"/>
-                <a:gridCol w="2357628"/>
-                <a:gridCol w="2357628"/>
-                <a:gridCol w="2176272"/>
-              </a:tblGrid>
-              <a:tr h="355309">
+              <a:tr h="358444">
                 <a:tc>
                   <a:txBody>
                     <a:bodyPr/>
@@ -9652,7 +5240,7 @@
                           </a:solidFill>
                           <a:latin typeface="Calibri"/>
                         </a:rPr>
-                        <a:t>Job seekers (n = 46)</a:t>
+                        <a:t>Job seekers (n=46)</a:t>
                       </a:r>
                     </a:p>
                   </a:txBody>
@@ -9674,7 +5262,7 @@
                           </a:solidFill>
                           <a:latin typeface="Calibri"/>
                         </a:rPr>
-                        <a:t>HR personnel (n = 10)</a:t>
+                        <a:t>HR personnel (n=10)</a:t>
                       </a:r>
                     </a:p>
                   </a:txBody>
@@ -9696,7 +5284,7 @@
                           </a:solidFill>
                           <a:latin typeface="Calibri"/>
                         </a:rPr>
-                        <a:t>IT experts (n = 3)</a:t>
+                        <a:t>IT experts (n=3)</a:t>
                       </a:r>
                     </a:p>
                   </a:txBody>
@@ -9707,7 +5295,7 @@
                   </a:tcPr>
                 </a:tc>
               </a:tr>
-              <a:tr h="355309">
+              <a:tr h="358444">
                 <a:tc>
                   <a:txBody>
                     <a:bodyPr/>
@@ -9800,7 +5388,7 @@
                   </a:tcPr>
                 </a:tc>
               </a:tr>
-              <a:tr h="355309">
+              <a:tr h="358444">
                 <a:tc>
                   <a:txBody>
                     <a:bodyPr/>
@@ -9893,7 +5481,7 @@
                   </a:tcPr>
                 </a:tc>
               </a:tr>
-              <a:tr h="355309">
+              <a:tr h="358444">
                 <a:tc>
                   <a:txBody>
                     <a:bodyPr/>
@@ -9986,193 +5574,7 @@
                   </a:tcPr>
                 </a:tc>
               </a:tr>
-              <a:tr h="355309">
-                <a:tc>
-                  <a:txBody>
-                    <a:bodyPr/>
-                    <a:lstStyle/>
-                    <a:p>
-                      <a:r>
-                        <a:rPr sz="1400">
-                          <a:solidFill>
-                            <a:srgbClr val="1A1A2E"/>
-                          </a:solidFill>
-                          <a:latin typeface="Calibri"/>
-                        </a:rPr>
-                        <a:t>Security</a:t>
-                      </a:r>
-                    </a:p>
-                  </a:txBody>
-                  <a:tcPr anchor="ctr" marL="100584">
-                    <a:solidFill>
-                      <a:srgbClr val="F3F6FC"/>
-                    </a:solidFill>
-                  </a:tcPr>
-                </a:tc>
-                <a:tc>
-                  <a:txBody>
-                    <a:bodyPr/>
-                    <a:lstStyle/>
-                    <a:p>
-                      <a:pPr algn="ctr"/>
-                      <a:r>
-                        <a:rPr sz="1400">
-                          <a:solidFill>
-                            <a:srgbClr val="1A1A2E"/>
-                          </a:solidFill>
-                          <a:latin typeface="Calibri"/>
-                        </a:rPr>
-                        <a:t>—</a:t>
-                      </a:r>
-                    </a:p>
-                  </a:txBody>
-                  <a:tcPr anchor="ctr" marL="100584">
-                    <a:solidFill>
-                      <a:srgbClr val="F3F6FC"/>
-                    </a:solidFill>
-                  </a:tcPr>
-                </a:tc>
-                <a:tc>
-                  <a:txBody>
-                    <a:bodyPr/>
-                    <a:lstStyle/>
-                    <a:p>
-                      <a:pPr algn="ctr"/>
-                      <a:r>
-                        <a:rPr sz="1400">
-                          <a:solidFill>
-                            <a:srgbClr val="1A1A2E"/>
-                          </a:solidFill>
-                          <a:latin typeface="Calibri"/>
-                        </a:rPr>
-                        <a:t>—</a:t>
-                      </a:r>
-                    </a:p>
-                  </a:txBody>
-                  <a:tcPr anchor="ctr" marL="100584">
-                    <a:solidFill>
-                      <a:srgbClr val="F3F6FC"/>
-                    </a:solidFill>
-                  </a:tcPr>
-                </a:tc>
-                <a:tc>
-                  <a:txBody>
-                    <a:bodyPr/>
-                    <a:lstStyle/>
-                    <a:p>
-                      <a:pPr algn="ctr"/>
-                      <a:r>
-                        <a:rPr sz="1400">
-                          <a:solidFill>
-                            <a:srgbClr val="1A1A2E"/>
-                          </a:solidFill>
-                          <a:latin typeface="Calibri"/>
-                        </a:rPr>
-                        <a:t>4.89</a:t>
-                      </a:r>
-                    </a:p>
-                  </a:txBody>
-                  <a:tcPr anchor="ctr" marL="100584">
-                    <a:solidFill>
-                      <a:srgbClr val="F3F6FC"/>
-                    </a:solidFill>
-                  </a:tcPr>
-                </a:tc>
-              </a:tr>
-              <a:tr h="355309">
-                <a:tc>
-                  <a:txBody>
-                    <a:bodyPr/>
-                    <a:lstStyle/>
-                    <a:p>
-                      <a:r>
-                        <a:rPr sz="1400">
-                          <a:solidFill>
-                            <a:srgbClr val="1A1A2E"/>
-                          </a:solidFill>
-                          <a:latin typeface="Calibri"/>
-                        </a:rPr>
-                        <a:t>Maintainability</a:t>
-                      </a:r>
-                    </a:p>
-                  </a:txBody>
-                  <a:tcPr anchor="ctr" marL="100584">
-                    <a:solidFill>
-                      <a:srgbClr val="FFFFFF"/>
-                    </a:solidFill>
-                  </a:tcPr>
-                </a:tc>
-                <a:tc>
-                  <a:txBody>
-                    <a:bodyPr/>
-                    <a:lstStyle/>
-                    <a:p>
-                      <a:pPr algn="ctr"/>
-                      <a:r>
-                        <a:rPr sz="1400">
-                          <a:solidFill>
-                            <a:srgbClr val="1A1A2E"/>
-                          </a:solidFill>
-                          <a:latin typeface="Calibri"/>
-                        </a:rPr>
-                        <a:t>—</a:t>
-                      </a:r>
-                    </a:p>
-                  </a:txBody>
-                  <a:tcPr anchor="ctr" marL="100584">
-                    <a:solidFill>
-                      <a:srgbClr val="FFFFFF"/>
-                    </a:solidFill>
-                  </a:tcPr>
-                </a:tc>
-                <a:tc>
-                  <a:txBody>
-                    <a:bodyPr/>
-                    <a:lstStyle/>
-                    <a:p>
-                      <a:pPr algn="ctr"/>
-                      <a:r>
-                        <a:rPr sz="1400">
-                          <a:solidFill>
-                            <a:srgbClr val="1A1A2E"/>
-                          </a:solidFill>
-                          <a:latin typeface="Calibri"/>
-                        </a:rPr>
-                        <a:t>—</a:t>
-                      </a:r>
-                    </a:p>
-                  </a:txBody>
-                  <a:tcPr anchor="ctr" marL="100584">
-                    <a:solidFill>
-                      <a:srgbClr val="FFFFFF"/>
-                    </a:solidFill>
-                  </a:tcPr>
-                </a:tc>
-                <a:tc>
-                  <a:txBody>
-                    <a:bodyPr/>
-                    <a:lstStyle/>
-                    <a:p>
-                      <a:pPr algn="ctr"/>
-                      <a:r>
-                        <a:rPr sz="1400">
-                          <a:solidFill>
-                            <a:srgbClr val="1A1A2E"/>
-                          </a:solidFill>
-                          <a:latin typeface="Calibri"/>
-                        </a:rPr>
-                        <a:t>4.83</a:t>
-                      </a:r>
-                    </a:p>
-                  </a:txBody>
-                  <a:tcPr anchor="ctr" marL="100584">
-                    <a:solidFill>
-                      <a:srgbClr val="FFFFFF"/>
-                    </a:solidFill>
-                  </a:tcPr>
-                </a:tc>
-              </a:tr>
-              <a:tr h="355314">
+              <a:tr h="358448">
                 <a:tc>
                   <a:txBody>
                     <a:bodyPr/>
@@ -10277,7 +5679,7 @@
 </p:sld>
 </file>
 
-<file path=ppt/slides/slide18.xml><?xml version="1.0" encoding="utf-8"?>
+<file path=ppt/slides/slide12.xml><?xml version="1.0" encoding="utf-8"?>
 <p:sld xmlns:a="http://schemas.openxmlformats.org/drawingml/2006/main" xmlns:p="http://schemas.openxmlformats.org/presentationml/2006/main" xmlns:r="http://schemas.openxmlformats.org/officeDocument/2006/relationships">
   <p:cSld>
     <p:spTree>
@@ -10321,7 +5723,7 @@
                 </a:solidFill>
                 <a:latin typeface="Calibri"/>
               </a:rPr>
-              <a:t>CONCLUSIONS</a:t>
+              <a:t>OBJECTIVES VS RESULTS</a:t>
             </a:r>
           </a:p>
         </p:txBody>
@@ -10360,7 +5762,561 @@
                 </a:solidFill>
                 <a:latin typeface="Calibri"/>
               </a:rPr>
-              <a:t>What the study concludes</a:t>
+              <a:t>Objective Achievement</a:t>
+            </a:r>
+          </a:p>
+        </p:txBody>
+      </p:sp>
+      <p:sp>
+        <p:nvSpPr>
+          <p:cNvPr id="4" name="TextBox 3"/>
+          <p:cNvSpPr txBox="1"/>
+          <p:nvPr/>
+        </p:nvSpPr>
+        <p:spPr>
+          <a:xfrm>
+            <a:off x="658368" y="1389888"/>
+            <a:ext cx="10881360" cy="365760"/>
+          </a:xfrm>
+          <a:prstGeom prst="rect">
+            <a:avLst/>
+          </a:prstGeom>
+          <a:noFill/>
+        </p:spPr>
+        <p:txBody>
+          <a:bodyPr wrap="square" lIns="0" rIns="0" tIns="0" bIns="0" anchor="t">
+            <a:spAutoFit/>
+          </a:bodyPr>
+          <a:lstStyle/>
+          <a:p>
+            <a:pPr algn="l">
+              <a:spcAft>
+                <a:spcPts val="0"/>
+              </a:spcAft>
+            </a:pPr>
+            <a:r>
+              <a:rPr sz="1500" b="0" i="1">
+                <a:solidFill>
+                  <a:srgbClr val="5A6B8C"/>
+                </a:solidFill>
+                <a:latin typeface="Calibri"/>
+              </a:rPr>
+              <a:t>Six of eight objectives have direct respondent evidence; two — the admin account and low-experience accessibility — do not, and we say so.</a:t>
+            </a:r>
+          </a:p>
+        </p:txBody>
+      </p:sp>
+      <p:sp>
+        <p:nvSpPr>
+          <p:cNvPr id="5" name="Rectangle 4"/>
+          <p:cNvSpPr/>
+          <p:nvPr/>
+        </p:nvSpPr>
+        <p:spPr>
+          <a:xfrm>
+            <a:off x="658368" y="1792224"/>
+            <a:ext cx="10881360" cy="20320"/>
+          </a:xfrm>
+          <a:prstGeom prst="rect">
+            <a:avLst/>
+          </a:prstGeom>
+          <a:solidFill>
+            <a:srgbClr val="C3CEE6"/>
+          </a:solidFill>
+          <a:ln>
+            <a:noFill/>
+          </a:ln>
+          <a:effectLst/>
+        </p:spPr>
+        <p:style>
+          <a:lnRef idx="1">
+            <a:schemeClr val="accent1"/>
+          </a:lnRef>
+          <a:fillRef idx="3">
+            <a:schemeClr val="accent1"/>
+          </a:fillRef>
+          <a:effectRef idx="2">
+            <a:schemeClr val="accent1"/>
+          </a:effectRef>
+          <a:fontRef idx="minor">
+            <a:schemeClr val="lt1"/>
+          </a:fontRef>
+        </p:style>
+        <p:txBody>
+          <a:bodyPr rtlCol="0" anchor="ctr"/>
+          <a:lstStyle/>
+          <a:p>
+            <a:pPr algn="ctr"/>
+          </a:p>
+        </p:txBody>
+      </p:sp>
+      <p:graphicFrame>
+        <p:nvGraphicFramePr>
+          <p:cNvPr id="6" name="Table 5"/>
+          <p:cNvGraphicFramePr>
+            <a:graphicFrameLocks noGrp="1"/>
+          </p:cNvGraphicFramePr>
+          <p:nvPr/>
+        </p:nvGraphicFramePr>
+        <p:xfrm>
+          <a:off x="658368" y="2103120"/>
+          <a:ext cx="10881359" cy="1792224"/>
+        </p:xfrm>
+        <a:graphic>
+          <a:graphicData uri="http://schemas.openxmlformats.org/drawingml/2006/table">
+            <a:tbl>
+              <a:tblPr firstRow="1" bandRow="1">
+                <a:tableStyleId>{5C22544A-7EE6-4342-B048-85BDC9FD1C3A}</a:tableStyleId>
+              </a:tblPr>
+              <a:tblGrid>
+                <a:gridCol w="2720340"/>
+                <a:gridCol w="4171187"/>
+                <a:gridCol w="3989832"/>
+              </a:tblGrid>
+              <a:tr h="358444">
+                <a:tc>
+                  <a:txBody>
+                    <a:bodyPr/>
+                    <a:lstStyle/>
+                    <a:p>
+                      <a:r>
+                        <a:rPr sz="1400" b="1">
+                          <a:solidFill>
+                            <a:srgbClr val="FFFFFF"/>
+                          </a:solidFill>
+                          <a:latin typeface="Calibri"/>
+                        </a:rPr>
+                        <a:t>Objective</a:t>
+                      </a:r>
+                    </a:p>
+                  </a:txBody>
+                  <a:tcPr anchor="ctr" marL="100584">
+                    <a:solidFill>
+                      <a:srgbClr val="1F3160"/>
+                    </a:solidFill>
+                  </a:tcPr>
+                </a:tc>
+                <a:tc>
+                  <a:txBody>
+                    <a:bodyPr/>
+                    <a:lstStyle/>
+                    <a:p>
+                      <a:r>
+                        <a:rPr sz="1400" b="1">
+                          <a:solidFill>
+                            <a:srgbClr val="FFFFFF"/>
+                          </a:solidFill>
+                          <a:latin typeface="Calibri"/>
+                        </a:rPr>
+                        <a:t>What we did</a:t>
+                      </a:r>
+                    </a:p>
+                  </a:txBody>
+                  <a:tcPr anchor="ctr" marL="100584">
+                    <a:solidFill>
+                      <a:srgbClr val="1F3160"/>
+                    </a:solidFill>
+                  </a:tcPr>
+                </a:tc>
+                <a:tc>
+                  <a:txBody>
+                    <a:bodyPr/>
+                    <a:lstStyle/>
+                    <a:p>
+                      <a:r>
+                        <a:rPr sz="1400" b="1">
+                          <a:solidFill>
+                            <a:srgbClr val="FFFFFF"/>
+                          </a:solidFill>
+                          <a:latin typeface="Calibri"/>
+                        </a:rPr>
+                        <a:t>Result</a:t>
+                      </a:r>
+                    </a:p>
+                  </a:txBody>
+                  <a:tcPr anchor="ctr" marL="100584">
+                    <a:solidFill>
+                      <a:srgbClr val="1F3160"/>
+                    </a:solidFill>
+                  </a:tcPr>
+                </a:tc>
+              </a:tr>
+              <a:tr h="358444">
+                <a:tc>
+                  <a:txBody>
+                    <a:bodyPr/>
+                    <a:lstStyle/>
+                    <a:p>
+                      <a:r>
+                        <a:rPr sz="1400">
+                          <a:solidFill>
+                            <a:srgbClr val="1A1A2E"/>
+                          </a:solidFill>
+                          <a:latin typeface="Calibri"/>
+                        </a:rPr>
+                        <a:t>Guided resume builder</a:t>
+                      </a:r>
+                    </a:p>
+                  </a:txBody>
+                  <a:tcPr anchor="ctr" marL="100584">
+                    <a:solidFill>
+                      <a:srgbClr val="FFFFFF"/>
+                    </a:solidFill>
+                  </a:tcPr>
+                </a:tc>
+                <a:tc>
+                  <a:txBody>
+                    <a:bodyPr/>
+                    <a:lstStyle/>
+                    <a:p>
+                      <a:pPr algn="ctr"/>
+                      <a:r>
+                        <a:rPr sz="1400">
+                          <a:solidFill>
+                            <a:srgbClr val="1A1A2E"/>
+                          </a:solidFill>
+                          <a:latin typeface="Calibri"/>
+                        </a:rPr>
+                        <a:t>3 formats, 14 designs, step-by-step flow</a:t>
+                      </a:r>
+                    </a:p>
+                  </a:txBody>
+                  <a:tcPr anchor="ctr" marL="100584">
+                    <a:solidFill>
+                      <a:srgbClr val="FFFFFF"/>
+                    </a:solidFill>
+                  </a:tcPr>
+                </a:tc>
+                <a:tc>
+                  <a:txBody>
+                    <a:bodyPr/>
+                    <a:lstStyle/>
+                    <a:p>
+                      <a:pPr algn="ctr"/>
+                      <a:r>
+                        <a:rPr sz="1400">
+                          <a:solidFill>
+                            <a:srgbClr val="1A1A2E"/>
+                          </a:solidFill>
+                          <a:latin typeface="Calibri"/>
+                        </a:rPr>
+                        <a:t>Built and rated 4.30 functional suitability by job seekers</a:t>
+                      </a:r>
+                    </a:p>
+                  </a:txBody>
+                  <a:tcPr anchor="ctr" marL="100584">
+                    <a:solidFill>
+                      <a:srgbClr val="FFFFFF"/>
+                    </a:solidFill>
+                  </a:tcPr>
+                </a:tc>
+              </a:tr>
+              <a:tr h="358444">
+                <a:tc>
+                  <a:txBody>
+                    <a:bodyPr/>
+                    <a:lstStyle/>
+                    <a:p>
+                      <a:r>
+                        <a:rPr sz="1400">
+                          <a:solidFill>
+                            <a:srgbClr val="1A1A2E"/>
+                          </a:solidFill>
+                          <a:latin typeface="Calibri"/>
+                        </a:rPr>
+                        <a:t>Transparent matching</a:t>
+                      </a:r>
+                    </a:p>
+                  </a:txBody>
+                  <a:tcPr anchor="ctr" marL="100584">
+                    <a:solidFill>
+                      <a:srgbClr val="F3F6FC"/>
+                    </a:solidFill>
+                  </a:tcPr>
+                </a:tc>
+                <a:tc>
+                  <a:txBody>
+                    <a:bodyPr/>
+                    <a:lstStyle/>
+                    <a:p>
+                      <a:pPr algn="ctr"/>
+                      <a:r>
+                        <a:rPr sz="1400">
+                          <a:solidFill>
+                            <a:srgbClr val="1A1A2E"/>
+                          </a:solidFill>
+                          <a:latin typeface="Calibri"/>
+                        </a:rPr>
+                        <a:t>Published 50/25/25 formula, shown to both sides</a:t>
+                      </a:r>
+                    </a:p>
+                  </a:txBody>
+                  <a:tcPr anchor="ctr" marL="100584">
+                    <a:solidFill>
+                      <a:srgbClr val="F3F6FC"/>
+                    </a:solidFill>
+                  </a:tcPr>
+                </a:tc>
+                <a:tc>
+                  <a:txBody>
+                    <a:bodyPr/>
+                    <a:lstStyle/>
+                    <a:p>
+                      <a:pPr algn="ctr"/>
+                      <a:r>
+                        <a:rPr sz="1400">
+                          <a:solidFill>
+                            <a:srgbClr val="1A1A2E"/>
+                          </a:solidFill>
+                          <a:latin typeface="Calibri"/>
+                        </a:rPr>
+                        <a:t>Rated 4.64 by HR for explainability — the strongest single finding</a:t>
+                      </a:r>
+                    </a:p>
+                  </a:txBody>
+                  <a:tcPr anchor="ctr" marL="100584">
+                    <a:solidFill>
+                      <a:srgbClr val="F3F6FC"/>
+                    </a:solidFill>
+                  </a:tcPr>
+                </a:tc>
+              </a:tr>
+              <a:tr h="358444">
+                <a:tc>
+                  <a:txBody>
+                    <a:bodyPr/>
+                    <a:lstStyle/>
+                    <a:p>
+                      <a:r>
+                        <a:rPr sz="1400">
+                          <a:solidFill>
+                            <a:srgbClr val="1A1A2E"/>
+                          </a:solidFill>
+                          <a:latin typeface="Calibri"/>
+                        </a:rPr>
+                        <a:t>Never auto-reject</a:t>
+                      </a:r>
+                    </a:p>
+                  </a:txBody>
+                  <a:tcPr anchor="ctr" marL="100584">
+                    <a:solidFill>
+                      <a:srgbClr val="FFFFFF"/>
+                    </a:solidFill>
+                  </a:tcPr>
+                </a:tc>
+                <a:tc>
+                  <a:txBody>
+                    <a:bodyPr/>
+                    <a:lstStyle/>
+                    <a:p>
+                      <a:pPr algn="ctr"/>
+                      <a:r>
+                        <a:rPr sz="1400">
+                          <a:solidFill>
+                            <a:srgbClr val="1A1A2E"/>
+                          </a:solidFill>
+                          <a:latin typeface="Calibri"/>
+                        </a:rPr>
+                        <a:t>No strong match still shows score + related jobs</a:t>
+                      </a:r>
+                    </a:p>
+                  </a:txBody>
+                  <a:tcPr anchor="ctr" marL="100584">
+                    <a:solidFill>
+                      <a:srgbClr val="FFFFFF"/>
+                    </a:solidFill>
+                  </a:tcPr>
+                </a:tc>
+                <a:tc>
+                  <a:txBody>
+                    <a:bodyPr/>
+                    <a:lstStyle/>
+                    <a:p>
+                      <a:pPr algn="ctr"/>
+                      <a:r>
+                        <a:rPr sz="1400">
+                          <a:solidFill>
+                            <a:srgbClr val="1A1A2E"/>
+                          </a:solidFill>
+                          <a:latin typeface="Calibri"/>
+                        </a:rPr>
+                        <a:t>Confirmed by design and by every respondent instrument</a:t>
+                      </a:r>
+                    </a:p>
+                  </a:txBody>
+                  <a:tcPr anchor="ctr" marL="100584">
+                    <a:solidFill>
+                      <a:srgbClr val="FFFFFF"/>
+                    </a:solidFill>
+                  </a:tcPr>
+                </a:tc>
+              </a:tr>
+              <a:tr h="358448">
+                <a:tc>
+                  <a:txBody>
+                    <a:bodyPr/>
+                    <a:lstStyle/>
+                    <a:p>
+                      <a:r>
+                        <a:rPr sz="1400">
+                          <a:solidFill>
+                            <a:srgbClr val="1A1A2E"/>
+                          </a:solidFill>
+                          <a:latin typeface="Calibri"/>
+                        </a:rPr>
+                        <a:t>Accessible to low-experience users</a:t>
+                      </a:r>
+                    </a:p>
+                  </a:txBody>
+                  <a:tcPr anchor="ctr" marL="100584">
+                    <a:solidFill>
+                      <a:srgbClr val="F3F6FC"/>
+                    </a:solidFill>
+                  </a:tcPr>
+                </a:tc>
+                <a:tc>
+                  <a:txBody>
+                    <a:bodyPr/>
+                    <a:lstStyle/>
+                    <a:p>
+                      <a:pPr algn="ctr"/>
+                      <a:r>
+                        <a:rPr sz="1400">
+                          <a:solidFill>
+                            <a:srgbClr val="1A1A2E"/>
+                          </a:solidFill>
+                          <a:latin typeface="Calibri"/>
+                        </a:rPr>
+                        <a:t>Mobile-responsive, light/dark mode, guided tour</a:t>
+                      </a:r>
+                    </a:p>
+                  </a:txBody>
+                  <a:tcPr anchor="ctr" marL="100584">
+                    <a:solidFill>
+                      <a:srgbClr val="F3F6FC"/>
+                    </a:solidFill>
+                  </a:tcPr>
+                </a:tc>
+                <a:tc>
+                  <a:txBody>
+                    <a:bodyPr/>
+                    <a:lstStyle/>
+                    <a:p>
+                      <a:pPr algn="ctr"/>
+                      <a:r>
+                        <a:rPr sz="1400">
+                          <a:solidFill>
+                            <a:srgbClr val="1A1A2E"/>
+                          </a:solidFill>
+                          <a:latin typeface="Calibri"/>
+                        </a:rPr>
+                        <a:t>Built; not directly measured by any instrument — an honest gap</a:t>
+                      </a:r>
+                    </a:p>
+                  </a:txBody>
+                  <a:tcPr anchor="ctr" marL="100584">
+                    <a:solidFill>
+                      <a:srgbClr val="F3F6FC"/>
+                    </a:solidFill>
+                  </a:tcPr>
+                </a:tc>
+              </a:tr>
+            </a:tbl>
+          </a:graphicData>
+        </a:graphic>
+      </p:graphicFrame>
+    </p:spTree>
+  </p:cSld>
+  <p:clrMapOvr>
+    <a:masterClrMapping/>
+  </p:clrMapOvr>
+</p:sld>
+</file>
+
+<file path=ppt/slides/slide13.xml><?xml version="1.0" encoding="utf-8"?>
+<p:sld xmlns:a="http://schemas.openxmlformats.org/drawingml/2006/main" xmlns:p="http://schemas.openxmlformats.org/presentationml/2006/main" xmlns:r="http://schemas.openxmlformats.org/officeDocument/2006/relationships">
+  <p:cSld>
+    <p:spTree>
+      <p:nvGrpSpPr>
+        <p:cNvPr id="1" name=""/>
+        <p:cNvGrpSpPr/>
+        <p:nvPr/>
+      </p:nvGrpSpPr>
+      <p:grpSpPr/>
+      <p:sp>
+        <p:nvSpPr>
+          <p:cNvPr id="2" name="TextBox 1"/>
+          <p:cNvSpPr txBox="1"/>
+          <p:nvPr/>
+        </p:nvSpPr>
+        <p:spPr>
+          <a:xfrm>
+            <a:off x="658368" y="384048"/>
+            <a:ext cx="10881360" cy="274320"/>
+          </a:xfrm>
+          <a:prstGeom prst="rect">
+            <a:avLst/>
+          </a:prstGeom>
+          <a:noFill/>
+        </p:spPr>
+        <p:txBody>
+          <a:bodyPr wrap="square" lIns="0" rIns="0" tIns="0" bIns="0" anchor="t">
+            <a:spAutoFit/>
+          </a:bodyPr>
+          <a:lstStyle/>
+          <a:p>
+            <a:pPr algn="l">
+              <a:spcAft>
+                <a:spcPts val="200"/>
+              </a:spcAft>
+            </a:pPr>
+            <a:r>
+              <a:rPr sz="1200" b="1" i="0">
+                <a:solidFill>
+                  <a:srgbClr val="2F4B8F"/>
+                </a:solidFill>
+                <a:latin typeface="Calibri"/>
+              </a:rPr>
+              <a:t>BENEFITS, LIMITS, CONTRIBUTION</a:t>
+            </a:r>
+          </a:p>
+        </p:txBody>
+      </p:sp>
+      <p:sp>
+        <p:nvSpPr>
+          <p:cNvPr id="3" name="TextBox 2"/>
+          <p:cNvSpPr txBox="1"/>
+          <p:nvPr/>
+        </p:nvSpPr>
+        <p:spPr>
+          <a:xfrm>
+            <a:off x="658368" y="658368"/>
+            <a:ext cx="10881360" cy="685800"/>
+          </a:xfrm>
+          <a:prstGeom prst="rect">
+            <a:avLst/>
+          </a:prstGeom>
+          <a:noFill/>
+        </p:spPr>
+        <p:txBody>
+          <a:bodyPr wrap="square" lIns="0" rIns="0" tIns="0" bIns="0" anchor="t">
+            <a:spAutoFit/>
+          </a:bodyPr>
+          <a:lstStyle/>
+          <a:p>
+            <a:pPr algn="l">
+              <a:spcAft>
+                <a:spcPts val="200"/>
+              </a:spcAft>
+            </a:pPr>
+            <a:r>
+              <a:rPr sz="3100" b="1" i="0">
+                <a:solidFill>
+                  <a:srgbClr val="1F3160"/>
+                </a:solidFill>
+                <a:latin typeface="Calibri"/>
+              </a:rPr>
+              <a:t>Benefits, Limitations, and Contribution</a:t>
             </a:r>
           </a:p>
         </p:txBody>
@@ -10437,13 +6393,13 @@
               </a:spcAft>
             </a:pPr>
             <a:r>
-              <a:rPr sz="1700" b="1" i="0">
+              <a:rPr sz="1800" b="1" i="0">
                 <a:solidFill>
                   <a:srgbClr val="1F3160"/>
                 </a:solidFill>
                 <a:latin typeface="Calibri"/>
               </a:rPr>
-              <a:t>The two-sided problem is confirmed independently</a:t>
+              <a:t>Who benefits</a:t>
             </a:r>
           </a:p>
           <a:p>
@@ -10453,13 +6409,13 @@
               </a:spcAft>
             </a:pPr>
             <a:r>
-              <a:rPr sz="1400" b="0" i="0">
+              <a:rPr sz="1500" b="0" i="0">
                 <a:solidFill>
                   <a:srgbClr val="5A6B8C"/>
                 </a:solidFill>
                 <a:latin typeface="Calibri"/>
               </a:rPr>
-              <a:t>Job seekers and recruiters, measured separately and never shown each other's answers, described the same difficulty from opposite ends.</a:t>
+              <a:t>Job seekers get a free, guided path to an ATS-ready resume. Clark Outsourcing gets applications that arrive pre-scored against its own criteria.</a:t>
             </a:r>
           </a:p>
           <a:p>
@@ -10469,13 +6425,13 @@
               </a:spcAft>
             </a:pPr>
             <a:r>
-              <a:rPr sz="1700" b="1" i="0">
+              <a:rPr sz="1800" b="1" i="0">
                 <a:solidFill>
                   <a:srgbClr val="1F3160"/>
                 </a:solidFill>
                 <a:latin typeface="Calibri"/>
               </a:rPr>
-              <a:t>The design principles are the best-supported outcome</a:t>
+              <a:t>Our contribution</a:t>
             </a:r>
           </a:p>
           <a:p>
@@ -10485,13 +6441,13 @@
               </a:spcAft>
             </a:pPr>
             <a:r>
-              <a:rPr sz="1400" b="0" i="0">
+              <a:rPr sz="1500" b="0" i="0">
                 <a:solidFill>
                   <a:srgbClr val="5A6B8C"/>
                 </a:solidFill>
                 <a:latin typeface="Calibri"/>
               </a:rPr>
-              <a:t>Explainability 4.64 from recruiters, 4.04 from job seekers who had seen it. Human control 4.27. Trust in the ordering, unanimous at 4.</a:t>
+              <a:t>A working, evaluated system plus a fully documented, deterministic scoring formula — no black box, reusable by future researchers.</a:t>
             </a:r>
           </a:p>
           <a:p>
@@ -10501,13 +6457,13 @@
               </a:spcAft>
             </a:pPr>
             <a:r>
-              <a:rPr sz="1700" b="1" i="0">
+              <a:rPr sz="1800" b="1" i="0">
                 <a:solidFill>
                   <a:srgbClr val="1F3160"/>
                 </a:solidFill>
                 <a:latin typeface="Calibri"/>
               </a:rPr>
-              <a:t>The time-saving claim is the weakest line and we do not make it</a:t>
+              <a:t>The honest limits</a:t>
             </a:r>
           </a:p>
           <a:p>
@@ -10517,45 +6473,13 @@
               </a:spcAft>
             </a:pPr>
             <a:r>
-              <a:rPr sz="1400" b="0" i="0">
+              <a:rPr sz="1500" b="0" i="0">
                 <a:solidFill>
                   <a:srgbClr val="5A6B8C"/>
                 </a:solidFill>
                 <a:latin typeface="Calibri"/>
               </a:rPr>
-              <a:t>Neutral at 3.00 before use; the joint-lowest quality item after it. Recruiter trust rests on being shown the working and staying free to disagree, not on speed.</a:t>
-            </a:r>
-          </a:p>
-          <a:p>
-            <a:pPr>
-              <a:spcAft>
-                <a:spcPts val="300"/>
-              </a:spcAft>
-            </a:pPr>
-            <a:r>
-              <a:rPr sz="1700" b="1" i="0">
-                <a:solidFill>
-                  <a:srgbClr val="1F3160"/>
-                </a:solidFill>
-                <a:latin typeface="Calibri"/>
-              </a:rPr>
-              <a:t>Six of eight objectives carry direct respondent evidence</a:t>
-            </a:r>
-          </a:p>
-          <a:p>
-            <a:pPr>
-              <a:spcAft>
-                <a:spcPts val="1300"/>
-              </a:spcAft>
-            </a:pPr>
-            <a:r>
-              <a:rPr sz="1400" b="0" i="0">
-                <a:solidFill>
-                  <a:srgbClr val="5A6B8C"/>
-                </a:solidFill>
-                <a:latin typeface="Calibri"/>
-              </a:rPr>
-              <a:t>The administrator account and low-experience accessibility were not rated by any instrument, and that gap is recorded rather than assumed away.</a:t>
+              <a:t>One partner company, one twenty-to-thirty-minute session, no control group. We do not claim the system saves recruiters time — that specific claim tested neutral to weak across every instrument that measured it.</a:t>
             </a:r>
           </a:p>
         </p:txBody>
@@ -10568,7 +6492,7 @@
 </p:sld>
 </file>
 
-<file path=ppt/slides/slide19.xml><?xml version="1.0" encoding="utf-8"?>
+<file path=ppt/slides/slide14.xml><?xml version="1.0" encoding="utf-8"?>
 <p:sld xmlns:a="http://schemas.openxmlformats.org/drawingml/2006/main" xmlns:p="http://schemas.openxmlformats.org/presentationml/2006/main" xmlns:r="http://schemas.openxmlformats.org/officeDocument/2006/relationships">
   <p:cSld>
     <p:spTree>
@@ -10612,7 +6536,7 @@
                 </a:solidFill>
                 <a:latin typeface="Calibri"/>
               </a:rPr>
-              <a:t>RECOMMENDATIONS</a:t>
+              <a:t>CONCLUSION</a:t>
             </a:r>
           </a:p>
         </p:txBody>
@@ -10651,7 +6575,7 @@
                 </a:solidFill>
                 <a:latin typeface="Calibri"/>
               </a:rPr>
-              <a:t>What should happen next</a:t>
+              <a:t>Conclusion and Recommendations</a:t>
             </a:r>
           </a:p>
         </p:txBody>
@@ -10728,13 +6652,13 @@
               </a:spcAft>
             </a:pPr>
             <a:r>
-              <a:rPr sz="1700" b="1" i="0">
+              <a:rPr sz="1900" b="1" i="0">
                 <a:solidFill>
                   <a:srgbClr val="1F3160"/>
                 </a:solidFill>
                 <a:latin typeface="Calibri"/>
               </a:rPr>
-              <a:t>Give the score a relevance component</a:t>
+              <a:t>The problem is real, confirmed on both sides</a:t>
             </a:r>
           </a:p>
           <a:p>
@@ -10744,13 +6668,13 @@
               </a:spcAft>
             </a:pPr>
             <a:r>
-              <a:rPr sz="1400" b="0" i="0">
+              <a:rPr sz="1600" b="0" i="0">
                 <a:solidFill>
                   <a:srgbClr val="5A6B8C"/>
                 </a:solidFill>
                 <a:latin typeface="Calibri"/>
               </a:rPr>
-              <a:t>Four of ten recruiters identified that experience is measured in months rather than in relevance to the posting. They are right about the formula.</a:t>
+              <a:t>Job seekers and recruiters, surveyed separately and never shown each other's answers, described the same problem independently.</a:t>
             </a:r>
           </a:p>
           <a:p>
@@ -10760,13 +6684,13 @@
               </a:spcAft>
             </a:pPr>
             <a:r>
-              <a:rPr sz="1700" b="1" i="0">
+              <a:rPr sz="1900" b="1" i="0">
                 <a:solidFill>
                   <a:srgbClr val="1F3160"/>
                 </a:solidFill>
                 <a:latin typeface="Calibri"/>
               </a:rPr>
-              <a:t>Make the per-opening weight control easier to find</a:t>
+              <a:t>The system's transparency is its strongest result</a:t>
             </a:r>
           </a:p>
           <a:p>
@@ -10776,13 +6700,13 @@
               </a:spcAft>
             </a:pPr>
             <a:r>
-              <a:rPr sz="1400" b="0" i="0">
+              <a:rPr sz="1600" b="0" i="0">
                 <a:solidFill>
                   <a:srgbClr val="5A6B8C"/>
                 </a:solidFill>
                 <a:latin typeface="Calibri"/>
               </a:rPr>
-              <a:t>Three of ten never noticed it. Eight of eleven in Instrument B said they would want exactly that control.</a:t>
+              <a:t>Explainability and human control scored highest across every instrument — stronger evidence than any time-saving claim.</a:t>
             </a:r>
           </a:p>
           <a:p>
@@ -10792,13 +6716,13 @@
               </a:spcAft>
             </a:pPr>
             <a:r>
-              <a:rPr sz="1700" b="1" i="0">
+              <a:rPr sz="1900" b="1" i="0">
                 <a:solidFill>
                   <a:srgbClr val="1F3160"/>
                 </a:solidFill>
                 <a:latin typeface="Calibri"/>
               </a:rPr>
-              <a:t>Collect an anonymous linking code in future work</a:t>
+              <a:t>What we recommend next</a:t>
             </a:r>
           </a:p>
           <a:p>
@@ -10808,45 +6732,13 @@
               </a:spcAft>
             </a:pPr>
             <a:r>
-              <a:rPr sz="1400" b="0" i="0">
+              <a:rPr sz="1600" b="0" i="0">
                 <a:solidFill>
                   <a:srgbClr val="5A6B8C"/>
                 </a:solidFill>
                 <a:latin typeface="Calibri"/>
               </a:rPr>
-              <a:t>It would let the repeated items be compared as matched pairs, which is a stronger test than the one this study could run.</a:t>
-            </a:r>
-          </a:p>
-          <a:p>
-            <a:pPr>
-              <a:spcAft>
-                <a:spcPts val="300"/>
-              </a:spcAft>
-            </a:pPr>
-            <a:r>
-              <a:rPr sz="1700" b="1" i="0">
-                <a:solidFill>
-                  <a:srgbClr val="1F3160"/>
-                </a:solidFill>
-                <a:latin typeface="Calibri"/>
-              </a:rPr>
-              <a:t>Measure ranking agreement directly, and go beyond one employer</a:t>
-            </a:r>
-          </a:p>
-          <a:p>
-            <a:pPr>
-              <a:spcAft>
-                <a:spcPts val="1300"/>
-              </a:spcAft>
-            </a:pPr>
-            <a:r>
-              <a:rPr sz="1400" b="0" i="0">
-                <a:solidFill>
-                  <a:srgbClr val="5A6B8C"/>
-                </a:solidFill>
-                <a:latin typeface="Calibri"/>
-              </a:rPr>
-              <a:t>Have a recruiter order applicants with no score shown, and compare. And test beyond one BPO and one twenty-minute session.</a:t>
+              <a:t>Add a relevance measure to the experience score; make the per-posting weight control easier to find; extend the evaluation beyond one company and one session.</a:t>
             </a:r>
           </a:p>
         </p:txBody>
@@ -10859,7 +6751,7 @@
 </p:sld>
 </file>
 
-<file path=ppt/slides/slide2.xml><?xml version="1.0" encoding="utf-8"?>
+<file path=ppt/slides/slide15.xml><?xml version="1.0" encoding="utf-8"?>
 <p:sld xmlns:a="http://schemas.openxmlformats.org/drawingml/2006/main" xmlns:p="http://schemas.openxmlformats.org/presentationml/2006/main" xmlns:r="http://schemas.openxmlformats.org/officeDocument/2006/relationships">
   <p:cSld>
     <p:spTree>
@@ -10947,7 +6839,7 @@
                 </a:solidFill>
                 <a:latin typeface="Calibri"/>
               </a:rPr>
-              <a:t>THE PROBLEM</a:t>
+              <a:t>SUMMARY</a:t>
             </a:r>
           </a:p>
           <a:p>
@@ -10963,7 +6855,7 @@
                 </a:solidFill>
                 <a:latin typeface="Calibri"/>
               </a:rPr>
-              <a:t>Two people are stuck on the same hire, and neither can see the other.</a:t>
+              <a:t>Problem → Solution → System → Result → Impact</a:t>
             </a:r>
           </a:p>
           <a:p>
@@ -10979,7 +6871,7 @@
                 </a:solidFill>
                 <a:latin typeface="Calibri"/>
               </a:rPr>
-              <a:t>The applicant cannot tell how they are judged. The recruiter cannot tell what they are missing.</a:t>
+              <a:t>Linaw means clarity. The system doesn't decide who gets hired — it makes the reasoning visible to the person it's about.</a:t>
             </a:r>
           </a:p>
         </p:txBody>
@@ -10992,140 +6884,7 @@
 </p:sld>
 </file>
 
-<file path=ppt/slides/slide20.xml><?xml version="1.0" encoding="utf-8"?>
-<p:sld xmlns:a="http://schemas.openxmlformats.org/drawingml/2006/main" xmlns:p="http://schemas.openxmlformats.org/presentationml/2006/main" xmlns:r="http://schemas.openxmlformats.org/officeDocument/2006/relationships">
-  <p:cSld>
-    <p:spTree>
-      <p:nvGrpSpPr>
-        <p:cNvPr id="1" name=""/>
-        <p:cNvGrpSpPr/>
-        <p:nvPr/>
-      </p:nvGrpSpPr>
-      <p:grpSpPr/>
-      <p:sp>
-        <p:nvSpPr>
-          <p:cNvPr id="2" name="Rectangle 1"/>
-          <p:cNvSpPr/>
-          <p:nvPr/>
-        </p:nvSpPr>
-        <p:spPr>
-          <a:xfrm>
-            <a:off x="0" y="0"/>
-            <a:ext cx="12191695" cy="6858000"/>
-          </a:xfrm>
-          <a:prstGeom prst="rect">
-            <a:avLst/>
-          </a:prstGeom>
-          <a:solidFill>
-            <a:srgbClr val="1F3160"/>
-          </a:solidFill>
-          <a:ln>
-            <a:noFill/>
-          </a:ln>
-          <a:effectLst/>
-        </p:spPr>
-        <p:style>
-          <a:lnRef idx="1">
-            <a:schemeClr val="accent1"/>
-          </a:lnRef>
-          <a:fillRef idx="3">
-            <a:schemeClr val="accent1"/>
-          </a:fillRef>
-          <a:effectRef idx="2">
-            <a:schemeClr val="accent1"/>
-          </a:effectRef>
-          <a:fontRef idx="minor">
-            <a:schemeClr val="lt1"/>
-          </a:fontRef>
-        </p:style>
-        <p:txBody>
-          <a:bodyPr rtlCol="0" anchor="ctr"/>
-          <a:lstStyle/>
-          <a:p>
-            <a:pPr algn="ctr"/>
-          </a:p>
-        </p:txBody>
-      </p:sp>
-      <p:sp>
-        <p:nvSpPr>
-          <p:cNvPr id="3" name="TextBox 2"/>
-          <p:cNvSpPr txBox="1"/>
-          <p:nvPr/>
-        </p:nvSpPr>
-        <p:spPr>
-          <a:xfrm>
-            <a:off x="1188720" y="2011680"/>
-            <a:ext cx="9784080" cy="2926080"/>
-          </a:xfrm>
-          <a:prstGeom prst="rect">
-            <a:avLst/>
-          </a:prstGeom>
-          <a:noFill/>
-        </p:spPr>
-        <p:txBody>
-          <a:bodyPr wrap="square" lIns="0" rIns="0" tIns="0" bIns="0" anchor="ctr">
-            <a:spAutoFit/>
-          </a:bodyPr>
-          <a:lstStyle/>
-          <a:p>
-            <a:pPr algn="ctr">
-              <a:spcAft>
-                <a:spcPts val="1600"/>
-              </a:spcAft>
-            </a:pPr>
-            <a:r>
-              <a:rPr sz="1300" b="1" i="0">
-                <a:solidFill>
-                  <a:srgbClr val="AFC2E8"/>
-                </a:solidFill>
-                <a:latin typeface="Calibri"/>
-              </a:rPr>
-              <a:t>LINAW</a:t>
-            </a:r>
-          </a:p>
-          <a:p>
-            <a:pPr algn="ctr">
-              <a:spcAft>
-                <a:spcPts val="1400"/>
-              </a:spcAft>
-            </a:pPr>
-            <a:r>
-              <a:rPr sz="3400" b="1" i="0">
-                <a:solidFill>
-                  <a:srgbClr val="FFFFFF"/>
-                </a:solidFill>
-                <a:latin typeface="Calibri"/>
-              </a:rPr>
-              <a:t>Linaw means clarity.</a:t>
-            </a:r>
-          </a:p>
-          <a:p>
-            <a:pPr algn="ctr">
-              <a:spcAft>
-                <a:spcPts val="0"/>
-              </a:spcAft>
-            </a:pPr>
-            <a:r>
-              <a:rPr sz="1700" b="0" i="1">
-                <a:solidFill>
-                  <a:srgbClr val="D3DEF2"/>
-                </a:solidFill>
-                <a:latin typeface="Calibri"/>
-              </a:rPr>
-              <a:t>The system does not decide who gets hired. It makes the reasoning visible to the person it is about.</a:t>
-            </a:r>
-          </a:p>
-        </p:txBody>
-      </p:sp>
-    </p:spTree>
-  </p:cSld>
-  <p:clrMapOvr>
-    <a:masterClrMapping/>
-  </p:clrMapOvr>
-</p:sld>
-</file>
-
-<file path=ppt/slides/slide3.xml><?xml version="1.0" encoding="utf-8"?>
+<file path=ppt/slides/slide2.xml><?xml version="1.0" encoding="utf-8"?>
 <p:sld xmlns:a="http://schemas.openxmlformats.org/drawingml/2006/main" xmlns:p="http://schemas.openxmlformats.org/presentationml/2006/main" xmlns:r="http://schemas.openxmlformats.org/officeDocument/2006/relationships">
   <p:cSld>
     <p:spTree>
@@ -11169,7 +6928,7 @@
                 </a:solidFill>
                 <a:latin typeface="Calibri"/>
               </a:rPr>
-              <a:t>CHAPTER 1</a:t>
+              <a:t>THE PROBLEM</a:t>
             </a:r>
           </a:p>
         </p:txBody>
@@ -11208,7 +6967,7 @@
                 </a:solidFill>
                 <a:latin typeface="Calibri"/>
               </a:rPr>
-              <a:t>What the two sides told us, before we built anything</a:t>
+              <a:t>Background and Problem</a:t>
             </a:r>
           </a:p>
         </p:txBody>
@@ -11247,7 +7006,7 @@
                 </a:solidFill>
                 <a:latin typeface="Calibri"/>
               </a:rPr>
-              <a:t>Two instruments, two populations, neither told what the other said.</a:t>
+              <a:t>Measured directly, before the system existed — not assumed.</a:t>
             </a:r>
           </a:p>
         </p:txBody>
@@ -11330,7 +7089,7 @@
                 </a:solidFill>
                 <a:latin typeface="Calibri"/>
               </a:rPr>
-              <a:t>Job seekers (Instrument A, n = 46)</a:t>
+              <a:t>Job seekers can't get past the resume</a:t>
             </a:r>
           </a:p>
           <a:p>
@@ -11346,7 +7105,7 @@
                 </a:solidFill>
                 <a:latin typeface="Calibri"/>
               </a:rPr>
-              <a:t>Formatting a resume is frustrating 4.00 · Not sure what belongs in it 3.46 · Worry a computer rejects it first 3.93 · Cannot tell if they qualify 3.96</a:t>
+              <a:t>Many Filipino job seekers, especially fresh graduates, write resumes without guidance, in layouts automated screening reads poorly. 80.4% have never paid for help with a resume.</a:t>
             </a:r>
           </a:p>
           <a:p>
@@ -11362,7 +7121,7 @@
                 </a:solidFill>
                 <a:latin typeface="Calibri"/>
               </a:rPr>
-              <a:t>The cost barrier is real, not assumed</a:t>
+              <a:t>...and they're told nothing when it fails</a:t>
             </a:r>
           </a:p>
           <a:p>
@@ -11378,7 +7137,7 @@
                 </a:solidFill>
                 <a:latin typeface="Calibri"/>
               </a:rPr>
-              <a:t>80.4% have never paid for help with a resume. Of those who had applied, 48.7% are told why an application failed never or rarely.</a:t>
+              <a:t>Of those who had applied for work, 48.7% are told why an application failed never or rarely.</a:t>
             </a:r>
           </a:p>
           <a:p>
@@ -11394,7 +7153,7 @@
                 </a:solidFill>
                 <a:latin typeface="Calibri"/>
               </a:rPr>
-              <a:t>Recruiters (Instrument B, n = 11)</a:t>
+              <a:t>Recruiters have the mirror problem</a:t>
             </a:r>
           </a:p>
           <a:p>
@@ -11410,7 +7169,7 @@
                 </a:solidFill>
                 <a:latin typeface="Calibri"/>
               </a:rPr>
-              <a:t>Poor formatting hides the information they need 4.64 · A score is only trusted if the working is shown 4.64 · The decision must stay with a person 4.27</a:t>
+              <a:t>HR staff at our partner company screen mostly by hand, and rated poor formatting getting in their way at 4.64 out of 5 — the strongest finding in the whole recruiter survey.</a:t>
             </a:r>
           </a:p>
         </p:txBody>
@@ -11423,7 +7182,7 @@
 </p:sld>
 </file>
 
-<file path=ppt/slides/slide4.xml><?xml version="1.0" encoding="utf-8"?>
+<file path=ppt/slides/slide3.xml><?xml version="1.0" encoding="utf-8"?>
 <p:sld xmlns:a="http://schemas.openxmlformats.org/drawingml/2006/main" xmlns:p="http://schemas.openxmlformats.org/presentationml/2006/main" xmlns:r="http://schemas.openxmlformats.org/officeDocument/2006/relationships">
   <p:cSld>
     <p:spTree>
@@ -11467,7 +7226,7 @@
                 </a:solidFill>
                 <a:latin typeface="Calibri"/>
               </a:rPr>
-              <a:t>THE HONEST PART</a:t>
+              <a:t>THE SOLUTION</a:t>
             </a:r>
           </a:p>
         </p:txBody>
@@ -11506,7 +7265,7 @@
                 </a:solidFill>
                 <a:latin typeface="Calibri"/>
               </a:rPr>
-              <a:t>One finding that does not run our way</a:t>
+              <a:t>What We Developed</a:t>
             </a:r>
           </a:p>
         </p:txBody>
@@ -11545,7 +7304,7 @@
                 </a:solidFill>
                 <a:latin typeface="Calibri"/>
               </a:rPr>
-              <a:t>What recruiters agree about is not speed. It is legibility and explanation.</a:t>
+              <a:t>Linaw means clarity — the system's one design commitment, in one word.</a:t>
             </a:r>
           </a:p>
         </p:txBody>
@@ -11596,62 +7355,14 @@
       </p:sp>
       <p:sp>
         <p:nvSpPr>
-          <p:cNvPr id="6" name="Rounded Rectangle 5"/>
-          <p:cNvSpPr/>
+          <p:cNvPr id="6" name="TextBox 5"/>
+          <p:cNvSpPr txBox="1"/>
           <p:nvPr/>
         </p:nvSpPr>
         <p:spPr>
           <a:xfrm>
-            <a:off x="658368" y="2121408"/>
-            <a:ext cx="3456432" cy="2148840"/>
-          </a:xfrm>
-          <a:prstGeom prst="roundRect">
-            <a:avLst>
-              <a:gd name="adj" fmla="val 4000"/>
-            </a:avLst>
-          </a:prstGeom>
-          <a:solidFill>
-            <a:srgbClr val="DCE4F5"/>
-          </a:solidFill>
-          <a:ln w="12700">
-            <a:solidFill>
-              <a:srgbClr val="C3CEE6"/>
-            </a:solidFill>
-          </a:ln>
-          <a:effectLst/>
-        </p:spPr>
-        <p:style>
-          <a:lnRef idx="1">
-            <a:schemeClr val="accent1"/>
-          </a:lnRef>
-          <a:fillRef idx="3">
-            <a:schemeClr val="accent1"/>
-          </a:fillRef>
-          <a:effectRef idx="2">
-            <a:schemeClr val="accent1"/>
-          </a:effectRef>
-          <a:fontRef idx="minor">
-            <a:schemeClr val="lt1"/>
-          </a:fontRef>
-        </p:style>
-        <p:txBody>
-          <a:bodyPr rtlCol="0" anchor="ctr"/>
-          <a:lstStyle/>
-          <a:p>
-            <a:pPr algn="ctr"/>
-          </a:p>
-        </p:txBody>
-      </p:sp>
-      <p:sp>
-        <p:nvSpPr>
-          <p:cNvPr id="7" name="TextBox 6"/>
-          <p:cNvSpPr txBox="1"/>
-          <p:nvPr/>
-        </p:nvSpPr>
-        <p:spPr>
-          <a:xfrm>
-            <a:off x="859536" y="2377440"/>
-            <a:ext cx="3054096" cy="1737360"/>
+            <a:off x="658368" y="2075688"/>
+            <a:ext cx="10881360" cy="4206240"/>
           </a:xfrm>
           <a:prstGeom prst="rect">
             <a:avLst/>
@@ -11664,328 +7375,67 @@
           </a:bodyPr>
           <a:lstStyle/>
           <a:p>
-            <a:pPr algn="ctr">
-              <a:spcAft>
-                <a:spcPts val="200"/>
-              </a:spcAft>
-            </a:pPr>
-            <a:r>
-              <a:rPr sz="4200" b="1" i="0">
+            <a:pPr algn="l">
+              <a:spcAft>
+                <a:spcPts val="1400"/>
+              </a:spcAft>
+            </a:pPr>
+            <a:r>
+              <a:rPr sz="1900" b="1" i="0">
                 <a:solidFill>
                   <a:srgbClr val="1F3160"/>
                 </a:solidFill>
                 <a:latin typeface="Calibri"/>
               </a:rPr>
-              <a:t>3.00</a:t>
-            </a:r>
-          </a:p>
-          <a:p>
-            <a:pPr algn="ctr">
-              <a:spcAft>
-                <a:spcPts val="600"/>
-              </a:spcAft>
-            </a:pPr>
-            <a:r>
-              <a:rPr sz="1400" b="1" i="0">
-                <a:solidFill>
-                  <a:srgbClr val="2F4B8F"/>
-                </a:solidFill>
-                <a:latin typeface="Calibri"/>
-              </a:rPr>
-              <a:t>SCREENING TAKES TOO LONG</a:t>
-            </a:r>
-          </a:p>
-          <a:p>
-            <a:pPr algn="ctr">
+              <a:t>Linaw PH gives job seekers a guided resume builder and gives recruiters a scored, ranked applicant list — built from the same transparent formula on both sides.</a:t>
+            </a:r>
+          </a:p>
+          <a:p>
+            <a:pPr>
+              <a:spcAft>
+                <a:spcPts val="1000"/>
+              </a:spcAft>
+            </a:pPr>
+            <a:r>
+              <a:rPr sz="1800" b="0" i="0">
+                <a:solidFill>
+                  <a:srgbClr val="1A1A2E"/>
+                </a:solidFill>
+                <a:latin typeface="Calibri"/>
+              </a:rPr>
+              <a:t>•   A rule-based, published score — not a black box. The same resume and posting always give the same result, and the formula is shown to both sides.</a:t>
+            </a:r>
+          </a:p>
+          <a:p>
+            <a:pPr>
+              <a:spcAft>
+                <a:spcPts val="1000"/>
+              </a:spcAft>
+            </a:pPr>
+            <a:r>
+              <a:rPr sz="1800" b="0" i="0">
+                <a:solidFill>
+                  <a:srgbClr val="1A1A2E"/>
+                </a:solidFill>
+                <a:latin typeface="Calibri"/>
+              </a:rPr>
+              <a:t>•   The applicant sees exactly what the recruiter sees — the score, and which required skills their resume is missing.</a:t>
+            </a:r>
+          </a:p>
+          <a:p>
+            <a:pPr>
               <a:spcAft>
                 <a:spcPts val="0"/>
               </a:spcAft>
             </a:pPr>
             <a:r>
-              <a:rPr sz="1250" b="0" i="0">
-                <a:solidFill>
-                  <a:srgbClr val="5A6B8C"/>
-                </a:solidFill>
-                <a:latin typeface="Calibri"/>
-              </a:rPr>
-              <a:t>Instrument B · exactly neutral, SD 1.48</a:t>
-            </a:r>
-          </a:p>
-        </p:txBody>
-      </p:sp>
-      <p:sp>
-        <p:nvSpPr>
-          <p:cNvPr id="8" name="Rounded Rectangle 7"/>
-          <p:cNvSpPr/>
-          <p:nvPr/>
-        </p:nvSpPr>
-        <p:spPr>
-          <a:xfrm>
-            <a:off x="4370832" y="2121408"/>
-            <a:ext cx="3456432" cy="2148840"/>
-          </a:xfrm>
-          <a:prstGeom prst="roundRect">
-            <a:avLst>
-              <a:gd name="adj" fmla="val 4000"/>
-            </a:avLst>
-          </a:prstGeom>
-          <a:solidFill>
-            <a:srgbClr val="DCE4F5"/>
-          </a:solidFill>
-          <a:ln w="12700">
-            <a:solidFill>
-              <a:srgbClr val="C3CEE6"/>
-            </a:solidFill>
-          </a:ln>
-          <a:effectLst/>
-        </p:spPr>
-        <p:style>
-          <a:lnRef idx="1">
-            <a:schemeClr val="accent1"/>
-          </a:lnRef>
-          <a:fillRef idx="3">
-            <a:schemeClr val="accent1"/>
-          </a:fillRef>
-          <a:effectRef idx="2">
-            <a:schemeClr val="accent1"/>
-          </a:effectRef>
-          <a:fontRef idx="minor">
-            <a:schemeClr val="lt1"/>
-          </a:fontRef>
-        </p:style>
-        <p:txBody>
-          <a:bodyPr rtlCol="0" anchor="ctr"/>
-          <a:lstStyle/>
-          <a:p>
-            <a:pPr algn="ctr"/>
-          </a:p>
-        </p:txBody>
-      </p:sp>
-      <p:sp>
-        <p:nvSpPr>
-          <p:cNvPr id="9" name="TextBox 8"/>
-          <p:cNvSpPr txBox="1"/>
-          <p:nvPr/>
-        </p:nvSpPr>
-        <p:spPr>
-          <a:xfrm>
-            <a:off x="4572000" y="2377440"/>
-            <a:ext cx="3054096" cy="1737360"/>
-          </a:xfrm>
-          <a:prstGeom prst="rect">
-            <a:avLst/>
-          </a:prstGeom>
-          <a:noFill/>
-        </p:spPr>
-        <p:txBody>
-          <a:bodyPr wrap="square" lIns="0" rIns="0" tIns="0" bIns="0" anchor="t">
-            <a:spAutoFit/>
-          </a:bodyPr>
-          <a:lstStyle/>
-          <a:p>
-            <a:pPr algn="ctr">
-              <a:spcAft>
-                <a:spcPts val="200"/>
-              </a:spcAft>
-            </a:pPr>
-            <a:r>
-              <a:rPr sz="4200" b="1" i="0">
-                <a:solidFill>
-                  <a:srgbClr val="1F3160"/>
-                </a:solidFill>
-                <a:latin typeface="Calibri"/>
-              </a:rPr>
-              <a:t>3.45</a:t>
-            </a:r>
-          </a:p>
-          <a:p>
-            <a:pPr algn="ctr">
-              <a:spcAft>
-                <a:spcPts val="600"/>
-              </a:spcAft>
-            </a:pPr>
-            <a:r>
-              <a:rPr sz="1400" b="1" i="0">
-                <a:solidFill>
-                  <a:srgbClr val="2F4B8F"/>
-                </a:solidFill>
-                <a:latin typeface="Calibri"/>
-              </a:rPr>
-              <a:t>A SINGLE SCORE WOULD HELP</a:t>
-            </a:r>
-          </a:p>
-          <a:p>
-            <a:pPr algn="ctr">
-              <a:spcAft>
-                <a:spcPts val="0"/>
-              </a:spcAft>
-            </a:pPr>
-            <a:r>
-              <a:rPr sz="1250" b="0" i="0">
-                <a:solidFill>
-                  <a:srgbClr val="5A6B8C"/>
-                </a:solidFill>
-                <a:latin typeface="Calibri"/>
-              </a:rPr>
-              <a:t>Instrument B · widely spread, 1 to 5</a:t>
-            </a:r>
-          </a:p>
-        </p:txBody>
-      </p:sp>
-      <p:sp>
-        <p:nvSpPr>
-          <p:cNvPr id="10" name="Rounded Rectangle 9"/>
-          <p:cNvSpPr/>
-          <p:nvPr/>
-        </p:nvSpPr>
-        <p:spPr>
-          <a:xfrm>
-            <a:off x="8083296" y="2121408"/>
-            <a:ext cx="3456432" cy="2148840"/>
-          </a:xfrm>
-          <a:prstGeom prst="roundRect">
-            <a:avLst>
-              <a:gd name="adj" fmla="val 4000"/>
-            </a:avLst>
-          </a:prstGeom>
-          <a:solidFill>
-            <a:srgbClr val="DCE4F5"/>
-          </a:solidFill>
-          <a:ln w="12700">
-            <a:solidFill>
-              <a:srgbClr val="C3CEE6"/>
-            </a:solidFill>
-          </a:ln>
-          <a:effectLst/>
-        </p:spPr>
-        <p:style>
-          <a:lnRef idx="1">
-            <a:schemeClr val="accent1"/>
-          </a:lnRef>
-          <a:fillRef idx="3">
-            <a:schemeClr val="accent1"/>
-          </a:fillRef>
-          <a:effectRef idx="2">
-            <a:schemeClr val="accent1"/>
-          </a:effectRef>
-          <a:fontRef idx="minor">
-            <a:schemeClr val="lt1"/>
-          </a:fontRef>
-        </p:style>
-        <p:txBody>
-          <a:bodyPr rtlCol="0" anchor="ctr"/>
-          <a:lstStyle/>
-          <a:p>
-            <a:pPr algn="ctr"/>
-          </a:p>
-        </p:txBody>
-      </p:sp>
-      <p:sp>
-        <p:nvSpPr>
-          <p:cNvPr id="11" name="TextBox 10"/>
-          <p:cNvSpPr txBox="1"/>
-          <p:nvPr/>
-        </p:nvSpPr>
-        <p:spPr>
-          <a:xfrm>
-            <a:off x="8284464" y="2377440"/>
-            <a:ext cx="3054096" cy="1737360"/>
-          </a:xfrm>
-          <a:prstGeom prst="rect">
-            <a:avLst/>
-          </a:prstGeom>
-          <a:noFill/>
-        </p:spPr>
-        <p:txBody>
-          <a:bodyPr wrap="square" lIns="0" rIns="0" tIns="0" bIns="0" anchor="t">
-            <a:spAutoFit/>
-          </a:bodyPr>
-          <a:lstStyle/>
-          <a:p>
-            <a:pPr algn="ctr">
-              <a:spcAft>
-                <a:spcPts val="200"/>
-              </a:spcAft>
-            </a:pPr>
-            <a:r>
-              <a:rPr sz="4200" b="1" i="0">
-                <a:solidFill>
-                  <a:srgbClr val="1F3160"/>
-                </a:solidFill>
-                <a:latin typeface="Calibri"/>
-              </a:rPr>
-              <a:t>4.64</a:t>
-            </a:r>
-          </a:p>
-          <a:p>
-            <a:pPr algn="ctr">
-              <a:spcAft>
-                <a:spcPts val="600"/>
-              </a:spcAft>
-            </a:pPr>
-            <a:r>
-              <a:rPr sz="1400" b="1" i="0">
-                <a:solidFill>
-                  <a:srgbClr val="2F4B8F"/>
-                </a:solidFill>
-                <a:latin typeface="Calibri"/>
-              </a:rPr>
-              <a:t>SHOW ME HOW IT WAS CALCULATED</a:t>
-            </a:r>
-          </a:p>
-          <a:p>
-            <a:pPr algn="ctr">
-              <a:spcAft>
-                <a:spcPts val="0"/>
-              </a:spcAft>
-            </a:pPr>
-            <a:r>
-              <a:rPr sz="1250" b="0" i="0">
-                <a:solidFill>
-                  <a:srgbClr val="5A6B8C"/>
-                </a:solidFill>
-                <a:latin typeface="Calibri"/>
-              </a:rPr>
-              <a:t>Instrument B · no response below 4</a:t>
-            </a:r>
-          </a:p>
-        </p:txBody>
-      </p:sp>
-      <p:sp>
-        <p:nvSpPr>
-          <p:cNvPr id="12" name="TextBox 11"/>
-          <p:cNvSpPr txBox="1"/>
-          <p:nvPr/>
-        </p:nvSpPr>
-        <p:spPr>
-          <a:xfrm>
-            <a:off x="658368" y="4590288"/>
-            <a:ext cx="10881360" cy="1097280"/>
-          </a:xfrm>
-          <a:prstGeom prst="rect">
-            <a:avLst/>
-          </a:prstGeom>
-          <a:noFill/>
-        </p:spPr>
-        <p:txBody>
-          <a:bodyPr wrap="square" lIns="0" rIns="0" tIns="0" bIns="0" anchor="t">
-            <a:spAutoFit/>
-          </a:bodyPr>
-          <a:lstStyle/>
-          <a:p>
-            <a:pPr algn="l">
-              <a:spcAft>
-                <a:spcPts val="0"/>
-              </a:spcAft>
-            </a:pPr>
-            <a:r>
-              <a:rPr sz="1500" b="0" i="0">
+              <a:rPr sz="1800" b="0" i="0">
                 <a:solidFill>
                   <a:srgbClr val="1A1A2E"/>
                 </a:solidFill>
                 <a:latin typeface="Calibri"/>
               </a:rPr>
-              <a:t>We report this rather than bury it. The study's motivation rests on the job seeker's side and on the design principles — transparency and human control — not on employer time pressure. That shaped what we claim at the end.</a:t>
+              <a:t>•   The system never rejects anyone automatically. It ranks and explains; a named recruiter always makes the final call.</a:t>
             </a:r>
           </a:p>
         </p:txBody>
@@ -11998,7 +7448,7 @@
 </p:sld>
 </file>
 
-<file path=ppt/slides/slide5.xml><?xml version="1.0" encoding="utf-8"?>
+<file path=ppt/slides/slide4.xml><?xml version="1.0" encoding="utf-8"?>
 <p:sld xmlns:a="http://schemas.openxmlformats.org/drawingml/2006/main" xmlns:p="http://schemas.openxmlformats.org/presentationml/2006/main" xmlns:r="http://schemas.openxmlformats.org/officeDocument/2006/relationships">
   <p:cSld>
     <p:spTree>
@@ -12042,7 +7492,7 @@
                 </a:solidFill>
                 <a:latin typeface="Calibri"/>
               </a:rPr>
-              <a:t>THE FRAMEWORK</a:t>
+              <a:t>OBJECTIVES, SCOPE, USERS</a:t>
             </a:r>
           </a:p>
         </p:txBody>
@@ -12081,7 +7531,7 @@
                 </a:solidFill>
                 <a:latin typeface="Calibri"/>
               </a:rPr>
-              <a:t>How the system is meant to work</a:t>
+              <a:t>Who It's For, and What It Set Out to Do</a:t>
             </a:r>
           </a:p>
         </p:txBody>
@@ -12120,7 +7570,7 @@
                 </a:solidFill>
                 <a:latin typeface="Calibri"/>
               </a:rPr>
-              <a:t>Input–Process–Output. Figure 1 of the manuscript.</a:t>
+              <a:t>Scope: one partner company (Clark Outsourcing) piloted this version; the system is designed to support more.</a:t>
             </a:r>
           </a:p>
         </p:txBody>
@@ -12169,40 +7619,339 @@
           </a:p>
         </p:txBody>
       </p:sp>
-      <p:pic>
-        <p:nvPicPr>
-          <p:cNvPr id="6" name="Picture 5" descr="new_fig1.png"/>
-          <p:cNvPicPr>
-            <a:picLocks noChangeAspect="1"/>
-          </p:cNvPicPr>
+      <p:graphicFrame>
+        <p:nvGraphicFramePr>
+          <p:cNvPr id="6" name="Table 5"/>
+          <p:cNvGraphicFramePr>
+            <a:graphicFrameLocks noGrp="1"/>
+          </p:cNvGraphicFramePr>
           <p:nvPr/>
-        </p:nvPicPr>
-        <p:blipFill>
-          <a:blip r:embed="rId2"/>
-          <a:stretch>
-            <a:fillRect/>
-          </a:stretch>
-        </p:blipFill>
+        </p:nvGraphicFramePr>
+        <p:xfrm>
+          <a:off x="658368" y="2103120"/>
+          <a:ext cx="10881360" cy="1444752"/>
+        </p:xfrm>
+        <a:graphic>
+          <a:graphicData uri="http://schemas.openxmlformats.org/drawingml/2006/table">
+            <a:tbl>
+              <a:tblPr firstRow="1" bandRow="1">
+                <a:tableStyleId>{5C22544A-7EE6-4342-B048-85BDC9FD1C3A}</a:tableStyleId>
+              </a:tblPr>
+              <a:tblGrid>
+                <a:gridCol w="2176272"/>
+                <a:gridCol w="5259324"/>
+                <a:gridCol w="3445764"/>
+              </a:tblGrid>
+              <a:tr h="361188">
+                <a:tc>
+                  <a:txBody>
+                    <a:bodyPr/>
+                    <a:lstStyle/>
+                    <a:p>
+                      <a:r>
+                        <a:rPr sz="1400" b="1">
+                          <a:solidFill>
+                            <a:srgbClr val="FFFFFF"/>
+                          </a:solidFill>
+                          <a:latin typeface="Calibri"/>
+                        </a:rPr>
+                        <a:t>User</a:t>
+                      </a:r>
+                    </a:p>
+                  </a:txBody>
+                  <a:tcPr anchor="ctr" marL="100584">
+                    <a:solidFill>
+                      <a:srgbClr val="1F3160"/>
+                    </a:solidFill>
+                  </a:tcPr>
+                </a:tc>
+                <a:tc>
+                  <a:txBody>
+                    <a:bodyPr/>
+                    <a:lstStyle/>
+                    <a:p>
+                      <a:r>
+                        <a:rPr sz="1400" b="1">
+                          <a:solidFill>
+                            <a:srgbClr val="FFFFFF"/>
+                          </a:solidFill>
+                          <a:latin typeface="Calibri"/>
+                        </a:rPr>
+                        <a:t>What they get</a:t>
+                      </a:r>
+                    </a:p>
+                  </a:txBody>
+                  <a:tcPr anchor="ctr" marL="100584">
+                    <a:solidFill>
+                      <a:srgbClr val="1F3160"/>
+                    </a:solidFill>
+                  </a:tcPr>
+                </a:tc>
+                <a:tc>
+                  <a:txBody>
+                    <a:bodyPr/>
+                    <a:lstStyle/>
+                    <a:p>
+                      <a:r>
+                        <a:rPr sz="1400" b="1">
+                          <a:solidFill>
+                            <a:srgbClr val="FFFFFF"/>
+                          </a:solidFill>
+                          <a:latin typeface="Calibri"/>
+                        </a:rPr>
+                        <a:t>Objective it answers</a:t>
+                      </a:r>
+                    </a:p>
+                  </a:txBody>
+                  <a:tcPr anchor="ctr" marL="100584">
+                    <a:solidFill>
+                      <a:srgbClr val="1F3160"/>
+                    </a:solidFill>
+                  </a:tcPr>
+                </a:tc>
+              </a:tr>
+              <a:tr h="361188">
+                <a:tc>
+                  <a:txBody>
+                    <a:bodyPr/>
+                    <a:lstStyle/>
+                    <a:p>
+                      <a:r>
+                        <a:rPr sz="1400">
+                          <a:solidFill>
+                            <a:srgbClr val="1A1A2E"/>
+                          </a:solidFill>
+                          <a:latin typeface="Calibri"/>
+                        </a:rPr>
+                        <a:t>Job seeker</a:t>
+                      </a:r>
+                    </a:p>
+                  </a:txBody>
+                  <a:tcPr anchor="ctr" marL="100584">
+                    <a:solidFill>
+                      <a:srgbClr val="FFFFFF"/>
+                    </a:solidFill>
+                  </a:tcPr>
+                </a:tc>
+                <a:tc>
+                  <a:txBody>
+                    <a:bodyPr/>
+                    <a:lstStyle/>
+                    <a:p>
+                      <a:pPr algn="ctr"/>
+                      <a:r>
+                        <a:rPr sz="1400">
+                          <a:solidFill>
+                            <a:srgbClr val="1A1A2E"/>
+                          </a:solidFill>
+                          <a:latin typeface="Calibri"/>
+                        </a:rPr>
+                        <a:t>Guided builder, 14 designs, match score with a skills breakdown, application tracking</a:t>
+                      </a:r>
+                    </a:p>
+                  </a:txBody>
+                  <a:tcPr anchor="ctr" marL="100584">
+                    <a:solidFill>
+                      <a:srgbClr val="FFFFFF"/>
+                    </a:solidFill>
+                  </a:tcPr>
+                </a:tc>
+                <a:tc>
+                  <a:txBody>
+                    <a:bodyPr/>
+                    <a:lstStyle/>
+                    <a:p>
+                      <a:pPr algn="ctr"/>
+                      <a:r>
+                        <a:rPr sz="1400">
+                          <a:solidFill>
+                            <a:srgbClr val="1A1A2E"/>
+                          </a:solidFill>
+                          <a:latin typeface="Calibri"/>
+                        </a:rPr>
+                        <a:t>Build a free, guided resume tool</a:t>
+                      </a:r>
+                    </a:p>
+                  </a:txBody>
+                  <a:tcPr anchor="ctr" marL="100584">
+                    <a:solidFill>
+                      <a:srgbClr val="FFFFFF"/>
+                    </a:solidFill>
+                  </a:tcPr>
+                </a:tc>
+              </a:tr>
+              <a:tr h="361188">
+                <a:tc>
+                  <a:txBody>
+                    <a:bodyPr/>
+                    <a:lstStyle/>
+                    <a:p>
+                      <a:r>
+                        <a:rPr sz="1400">
+                          <a:solidFill>
+                            <a:srgbClr val="1A1A2E"/>
+                          </a:solidFill>
+                          <a:latin typeface="Calibri"/>
+                        </a:rPr>
+                        <a:t>Recruiter / HR</a:t>
+                      </a:r>
+                    </a:p>
+                  </a:txBody>
+                  <a:tcPr anchor="ctr" marL="100584">
+                    <a:solidFill>
+                      <a:srgbClr val="F3F6FC"/>
+                    </a:solidFill>
+                  </a:tcPr>
+                </a:tc>
+                <a:tc>
+                  <a:txBody>
+                    <a:bodyPr/>
+                    <a:lstStyle/>
+                    <a:p>
+                      <a:pPr algn="ctr"/>
+                      <a:r>
+                        <a:rPr sz="1400">
+                          <a:solidFill>
+                            <a:srgbClr val="1A1A2E"/>
+                          </a:solidFill>
+                          <a:latin typeface="Calibri"/>
+                        </a:rPr>
+                        <a:t>Company profile, postings with adjustable weights, ranked applicants, status tracking, interview invites</a:t>
+                      </a:r>
+                    </a:p>
+                  </a:txBody>
+                  <a:tcPr anchor="ctr" marL="100584">
+                    <a:solidFill>
+                      <a:srgbClr val="F3F6FC"/>
+                    </a:solidFill>
+                  </a:tcPr>
+                </a:tc>
+                <a:tc>
+                  <a:txBody>
+                    <a:bodyPr/>
+                    <a:lstStyle/>
+                    <a:p>
+                      <a:pPr algn="ctr"/>
+                      <a:r>
+                        <a:rPr sz="1400">
+                          <a:solidFill>
+                            <a:srgbClr val="1A1A2E"/>
+                          </a:solidFill>
+                          <a:latin typeface="Calibri"/>
+                        </a:rPr>
+                        <a:t>Automate scoring without removing human judgement</a:t>
+                      </a:r>
+                    </a:p>
+                  </a:txBody>
+                  <a:tcPr anchor="ctr" marL="100584">
+                    <a:solidFill>
+                      <a:srgbClr val="F3F6FC"/>
+                    </a:solidFill>
+                  </a:tcPr>
+                </a:tc>
+              </a:tr>
+              <a:tr h="361188">
+                <a:tc>
+                  <a:txBody>
+                    <a:bodyPr/>
+                    <a:lstStyle/>
+                    <a:p>
+                      <a:r>
+                        <a:rPr sz="1400">
+                          <a:solidFill>
+                            <a:srgbClr val="1A1A2E"/>
+                          </a:solidFill>
+                          <a:latin typeface="Calibri"/>
+                        </a:rPr>
+                        <a:t>Administrator</a:t>
+                      </a:r>
+                    </a:p>
+                  </a:txBody>
+                  <a:tcPr anchor="ctr" marL="100584">
+                    <a:solidFill>
+                      <a:srgbClr val="FFFFFF"/>
+                    </a:solidFill>
+                  </a:tcPr>
+                </a:tc>
+                <a:tc>
+                  <a:txBody>
+                    <a:bodyPr/>
+                    <a:lstStyle/>
+                    <a:p>
+                      <a:pPr algn="ctr"/>
+                      <a:r>
+                        <a:rPr sz="1400">
+                          <a:solidFill>
+                            <a:srgbClr val="1A1A2E"/>
+                          </a:solidFill>
+                          <a:latin typeface="Calibri"/>
+                        </a:rPr>
+                        <a:t>Approves recruiter access, assigns departments, views anonymised study metrics</a:t>
+                      </a:r>
+                    </a:p>
+                  </a:txBody>
+                  <a:tcPr anchor="ctr" marL="100584">
+                    <a:solidFill>
+                      <a:srgbClr val="FFFFFF"/>
+                    </a:solidFill>
+                  </a:tcPr>
+                </a:tc>
+                <a:tc>
+                  <a:txBody>
+                    <a:bodyPr/>
+                    <a:lstStyle/>
+                    <a:p>
+                      <a:pPr algn="ctr"/>
+                      <a:r>
+                        <a:rPr sz="1400">
+                          <a:solidFill>
+                            <a:srgbClr val="1A1A2E"/>
+                          </a:solidFill>
+                          <a:latin typeface="Calibri"/>
+                        </a:rPr>
+                        <a:t>Keep access controlled and departments routed correctly</a:t>
+                      </a:r>
+                    </a:p>
+                  </a:txBody>
+                  <a:tcPr anchor="ctr" marL="100584">
+                    <a:solidFill>
+                      <a:srgbClr val="FFFFFF"/>
+                    </a:solidFill>
+                  </a:tcPr>
+                </a:tc>
+              </a:tr>
+            </a:tbl>
+          </a:graphicData>
+        </a:graphic>
+      </p:graphicFrame>
+    </p:spTree>
+  </p:cSld>
+  <p:clrMapOvr>
+    <a:masterClrMapping/>
+  </p:clrMapOvr>
+</p:sld>
+</file>
+
+<file path=ppt/slides/slide5.xml><?xml version="1.0" encoding="utf-8"?>
+<p:sld xmlns:a="http://schemas.openxmlformats.org/drawingml/2006/main" xmlns:p="http://schemas.openxmlformats.org/presentationml/2006/main" xmlns:r="http://schemas.openxmlformats.org/officeDocument/2006/relationships">
+  <p:cSld>
+    <p:spTree>
+      <p:nvGrpSpPr>
+        <p:cNvPr id="1" name=""/>
+        <p:cNvGrpSpPr/>
+        <p:nvPr/>
+      </p:nvGrpSpPr>
+      <p:grpSpPr/>
+      <p:sp>
+        <p:nvSpPr>
+          <p:cNvPr id="2" name="TextBox 1"/>
+          <p:cNvSpPr txBox="1"/>
+          <p:nvPr/>
+        </p:nvSpPr>
         <p:spPr>
           <a:xfrm>
-            <a:off x="1837854" y="2048256"/>
-            <a:ext cx="8522388" cy="4325112"/>
-          </a:xfrm>
-          <a:prstGeom prst="rect">
-            <a:avLst/>
-          </a:prstGeom>
-        </p:spPr>
-      </p:pic>
-      <p:sp>
-        <p:nvSpPr>
-          <p:cNvPr id="7" name="TextBox 6"/>
-          <p:cNvSpPr txBox="1"/>
-          <p:nvPr/>
-        </p:nvSpPr>
-        <p:spPr>
-          <a:xfrm>
-            <a:off x="658368" y="6291072"/>
-            <a:ext cx="10881360" cy="365760"/>
+            <a:off x="658368" y="384048"/>
+            <a:ext cx="10881360" cy="274320"/>
           </a:xfrm>
           <a:prstGeom prst="rect">
             <a:avLst/>
@@ -12215,19 +7964,253 @@
           </a:bodyPr>
           <a:lstStyle/>
           <a:p>
-            <a:pPr algn="ctr">
-              <a:spcAft>
-                <a:spcPts val="0"/>
-              </a:spcAft>
-            </a:pPr>
-            <a:r>
-              <a:rPr sz="1250" b="0" i="1">
+            <a:pPr algn="l">
+              <a:spcAft>
+                <a:spcPts val="200"/>
+              </a:spcAft>
+            </a:pPr>
+            <a:r>
+              <a:rPr sz="1200" b="1" i="0">
+                <a:solidFill>
+                  <a:srgbClr val="2F4B8F"/>
+                </a:solidFill>
+                <a:latin typeface="Calibri"/>
+              </a:rPr>
+              <a:t>FEATURES</a:t>
+            </a:r>
+          </a:p>
+        </p:txBody>
+      </p:sp>
+      <p:sp>
+        <p:nvSpPr>
+          <p:cNvPr id="3" name="TextBox 2"/>
+          <p:cNvSpPr txBox="1"/>
+          <p:nvPr/>
+        </p:nvSpPr>
+        <p:spPr>
+          <a:xfrm>
+            <a:off x="658368" y="658368"/>
+            <a:ext cx="10881360" cy="685800"/>
+          </a:xfrm>
+          <a:prstGeom prst="rect">
+            <a:avLst/>
+          </a:prstGeom>
+          <a:noFill/>
+        </p:spPr>
+        <p:txBody>
+          <a:bodyPr wrap="square" lIns="0" rIns="0" tIns="0" bIns="0" anchor="t">
+            <a:spAutoFit/>
+          </a:bodyPr>
+          <a:lstStyle/>
+          <a:p>
+            <a:pPr algn="l">
+              <a:spcAft>
+                <a:spcPts val="200"/>
+              </a:spcAft>
+            </a:pPr>
+            <a:r>
+              <a:rPr sz="3100" b="1" i="0">
+                <a:solidFill>
+                  <a:srgbClr val="1F3160"/>
+                </a:solidFill>
+                <a:latin typeface="Calibri"/>
+              </a:rPr>
+              <a:t>Key System Features</a:t>
+            </a:r>
+          </a:p>
+        </p:txBody>
+      </p:sp>
+      <p:sp>
+        <p:nvSpPr>
+          <p:cNvPr id="4" name="Rectangle 3"/>
+          <p:cNvSpPr/>
+          <p:nvPr/>
+        </p:nvSpPr>
+        <p:spPr>
+          <a:xfrm>
+            <a:off x="658368" y="1316736"/>
+            <a:ext cx="10881360" cy="20320"/>
+          </a:xfrm>
+          <a:prstGeom prst="rect">
+            <a:avLst/>
+          </a:prstGeom>
+          <a:solidFill>
+            <a:srgbClr val="C3CEE6"/>
+          </a:solidFill>
+          <a:ln>
+            <a:noFill/>
+          </a:ln>
+          <a:effectLst/>
+        </p:spPr>
+        <p:style>
+          <a:lnRef idx="1">
+            <a:schemeClr val="accent1"/>
+          </a:lnRef>
+          <a:fillRef idx="3">
+            <a:schemeClr val="accent1"/>
+          </a:fillRef>
+          <a:effectRef idx="2">
+            <a:schemeClr val="accent1"/>
+          </a:effectRef>
+          <a:fontRef idx="minor">
+            <a:schemeClr val="lt1"/>
+          </a:fontRef>
+        </p:style>
+        <p:txBody>
+          <a:bodyPr rtlCol="0" anchor="ctr"/>
+          <a:lstStyle/>
+          <a:p>
+            <a:pPr algn="ctr"/>
+          </a:p>
+        </p:txBody>
+      </p:sp>
+      <p:sp>
+        <p:nvSpPr>
+          <p:cNvPr id="5" name="TextBox 4"/>
+          <p:cNvSpPr txBox="1"/>
+          <p:nvPr/>
+        </p:nvSpPr>
+        <p:spPr>
+          <a:xfrm>
+            <a:off x="658368" y="1645920"/>
+            <a:ext cx="10881360" cy="4389120"/>
+          </a:xfrm>
+          <a:prstGeom prst="rect">
+            <a:avLst/>
+          </a:prstGeom>
+          <a:noFill/>
+        </p:spPr>
+        <p:txBody>
+          <a:bodyPr wrap="square" lIns="0" rIns="0" tIns="0" bIns="0" anchor="t">
+            <a:spAutoFit/>
+          </a:bodyPr>
+          <a:lstStyle/>
+          <a:p>
+            <a:pPr algn="l">
+              <a:spcAft>
+                <a:spcPts val="300"/>
+              </a:spcAft>
+            </a:pPr>
+            <a:r>
+              <a:rPr sz="1800" b="1" i="0">
+                <a:solidFill>
+                  <a:srgbClr val="1F3160"/>
+                </a:solidFill>
+                <a:latin typeface="Calibri"/>
+              </a:rPr>
+              <a:t>Guided resume builder</a:t>
+            </a:r>
+          </a:p>
+          <a:p>
+            <a:pPr>
+              <a:spcAft>
+                <a:spcPts val="1300"/>
+              </a:spcAft>
+            </a:pPr>
+            <a:r>
+              <a:rPr sz="1500" b="0" i="0">
                 <a:solidFill>
                   <a:srgbClr val="5A6B8C"/>
                 </a:solidFill>
                 <a:latin typeface="Calibri"/>
               </a:rPr>
-              <a:t>Structured input makes content legible; an explained score makes the assessment legible.</a:t>
+              <a:t>Three content formats, 14 single-column parser-safe designs. Why it matters: the design never changes how the resume is scored — only how it looks.</a:t>
+            </a:r>
+          </a:p>
+          <a:p>
+            <a:pPr>
+              <a:spcAft>
+                <a:spcPts val="300"/>
+              </a:spcAft>
+            </a:pPr>
+            <a:r>
+              <a:rPr sz="1800" b="1" i="0">
+                <a:solidFill>
+                  <a:srgbClr val="1F3160"/>
+                </a:solidFill>
+                <a:latin typeface="Calibri"/>
+              </a:rPr>
+              <a:t>Transparent matching score</a:t>
+            </a:r>
+          </a:p>
+          <a:p>
+            <a:pPr>
+              <a:spcAft>
+                <a:spcPts val="1300"/>
+              </a:spcAft>
+            </a:pPr>
+            <a:r>
+              <a:rPr sz="1500" b="0" i="0">
+                <a:solidFill>
+                  <a:srgbClr val="5A6B8C"/>
+                </a:solidFill>
+                <a:latin typeface="Calibri"/>
+              </a:rPr>
+              <a:t>50/25/25 skills-education-experience split by default, adjustable per posting. Why it matters: both sides see the same number and the same formula behind it.</a:t>
+            </a:r>
+          </a:p>
+          <a:p>
+            <a:pPr>
+              <a:spcAft>
+                <a:spcPts val="300"/>
+              </a:spcAft>
+            </a:pPr>
+            <a:r>
+              <a:rPr sz="1800" b="1" i="0">
+                <a:solidFill>
+                  <a:srgbClr val="1F3160"/>
+                </a:solidFill>
+                <a:latin typeface="Calibri"/>
+              </a:rPr>
+              <a:t>Never auto-rejects</a:t>
+            </a:r>
+          </a:p>
+          <a:p>
+            <a:pPr>
+              <a:spcAft>
+                <a:spcPts val="1300"/>
+              </a:spcAft>
+            </a:pPr>
+            <a:r>
+              <a:rPr sz="1500" b="0" i="0">
+                <a:solidFill>
+                  <a:srgbClr val="5A6B8C"/>
+                </a:solidFill>
+                <a:latin typeface="Calibri"/>
+              </a:rPr>
+              <a:t>No strong match still returns related openings and a skills gap, not a rejection. Why it matters: this is the system's central design commitment, drawn directly from fairness research.</a:t>
+            </a:r>
+          </a:p>
+          <a:p>
+            <a:pPr>
+              <a:spcAft>
+                <a:spcPts val="300"/>
+              </a:spcAft>
+            </a:pPr>
+            <a:r>
+              <a:rPr sz="1800" b="1" i="0">
+                <a:solidFill>
+                  <a:srgbClr val="1F3160"/>
+                </a:solidFill>
+                <a:latin typeface="Calibri"/>
+              </a:rPr>
+              <a:t>Full status tracking with an audit trail</a:t>
+            </a:r>
+          </a:p>
+          <a:p>
+            <a:pPr>
+              <a:spcAft>
+                <a:spcPts val="1300"/>
+              </a:spcAft>
+            </a:pPr>
+            <a:r>
+              <a:rPr sz="1500" b="0" i="0">
+                <a:solidFill>
+                  <a:srgbClr val="5A6B8C"/>
+                </a:solidFill>
+                <a:latin typeface="Calibri"/>
+              </a:rPr>
+              <a:t>Nine tracked stages, every change recorded with who made it. Why it matters: recruiters and applicants both see the real hiring pipeline, not a black box.</a:t>
             </a:r>
           </a:p>
         </p:txBody>
@@ -12284,7 +8267,7 @@
                 </a:solidFill>
                 <a:latin typeface="Calibri"/>
               </a:rPr>
-              <a:t>THE SYSTEM</a:t>
+              <a:t>SYSTEM FLOW</a:t>
             </a:r>
           </a:p>
         </p:txBody>
@@ -12323,7 +8306,7 @@
                 </a:solidFill>
                 <a:latin typeface="Calibri"/>
               </a:rPr>
-              <a:t>What we built</a:t>
+              <a:t>How the System Works</a:t>
             </a:r>
           </a:p>
         </p:txBody>
@@ -12362,7 +8345,7 @@
                 </a:solidFill>
                 <a:latin typeface="Calibri"/>
               </a:rPr>
-              <a:t>Angular front end · Node and TypeScript back end · PostgreSQL on Supabase · deployed on Render</a:t>
+              <a:t>The same flow, from both directions.</a:t>
             </a:r>
           </a:p>
         </p:txBody>
@@ -12419,8 +8402,8 @@
         </p:nvSpPr>
         <p:spPr>
           <a:xfrm>
-            <a:off x="658368" y="2011680"/>
-            <a:ext cx="10881360" cy="4389120"/>
+            <a:off x="658368" y="2029968"/>
+            <a:ext cx="5212080" cy="4206240"/>
           </a:xfrm>
           <a:prstGeom prst="rect">
             <a:avLst/>
@@ -12435,129 +8418,216 @@
           <a:p>
             <a:pPr algn="l">
               <a:spcAft>
-                <a:spcPts val="300"/>
-              </a:spcAft>
-            </a:pPr>
-            <a:r>
-              <a:rPr sz="1900" b="1" i="0">
+                <a:spcPts val="600"/>
+              </a:spcAft>
+            </a:pPr>
+            <a:r>
+              <a:rPr sz="1800" b="1" i="0">
                 <a:solidFill>
                   <a:srgbClr val="1F3160"/>
                 </a:solidFill>
                 <a:latin typeface="Calibri"/>
               </a:rPr>
-              <a:t>A guided resume builder</a:t>
+              <a:t>Job seeker</a:t>
             </a:r>
           </a:p>
           <a:p>
             <a:pPr>
               <a:spcAft>
-                <a:spcPts val="1300"/>
+                <a:spcPts val="800"/>
               </a:spcAft>
             </a:pPr>
             <a:r>
               <a:rPr sz="1600" b="0" i="0">
                 <a:solidFill>
-                  <a:srgbClr val="5A6B8C"/>
-                </a:solidFill>
-                <a:latin typeface="Calibri"/>
-              </a:rPr>
-              <a:t>Three content formats across fourteen single-column, parser-safe designs. No tables, no text boxes, no graphics — the design never changes how the resume is read or scored.</a:t>
+                  <a:srgbClr val="1A1A2E"/>
+                </a:solidFill>
+                <a:latin typeface="Calibri"/>
+              </a:rPr>
+              <a:t>↓  Register &amp; verify email</a:t>
             </a:r>
           </a:p>
           <a:p>
             <a:pPr>
               <a:spcAft>
-                <a:spcPts val="300"/>
-              </a:spcAft>
-            </a:pPr>
-            <a:r>
-              <a:rPr sz="1900" b="1" i="0">
+                <a:spcPts val="800"/>
+              </a:spcAft>
+            </a:pPr>
+            <a:r>
+              <a:rPr sz="1600" b="0" i="0">
+                <a:solidFill>
+                  <a:srgbClr val="1A1A2E"/>
+                </a:solidFill>
+                <a:latin typeface="Calibri"/>
+              </a:rPr>
+              <a:t>↓  Build a resume (guided steps)</a:t>
+            </a:r>
+          </a:p>
+          <a:p>
+            <a:pPr>
+              <a:spcAft>
+                <a:spcPts val="800"/>
+              </a:spcAft>
+            </a:pPr>
+            <a:r>
+              <a:rPr sz="1600" b="0" i="0">
+                <a:solidFill>
+                  <a:srgbClr val="1A1A2E"/>
+                </a:solidFill>
+                <a:latin typeface="Calibri"/>
+              </a:rPr>
+              <a:t>↓  Browse postings, see match score</a:t>
+            </a:r>
+          </a:p>
+          <a:p>
+            <a:pPr>
+              <a:spcAft>
+                <a:spcPts val="800"/>
+              </a:spcAft>
+            </a:pPr>
+            <a:r>
+              <a:rPr sz="1600" b="0" i="0">
+                <a:solidFill>
+                  <a:srgbClr val="1A1A2E"/>
+                </a:solidFill>
+                <a:latin typeface="Calibri"/>
+              </a:rPr>
+              <a:t>↓  Apply</a:t>
+            </a:r>
+          </a:p>
+          <a:p>
+            <a:pPr>
+              <a:spcAft>
+                <a:spcPts val="800"/>
+              </a:spcAft>
+            </a:pPr>
+            <a:r>
+              <a:rPr sz="1600" b="0" i="0">
+                <a:solidFill>
+                  <a:srgbClr val="1A1A2E"/>
+                </a:solidFill>
+                <a:latin typeface="Calibri"/>
+              </a:rPr>
+              <a:t>↓  Track status to hired/rejected</a:t>
+            </a:r>
+          </a:p>
+        </p:txBody>
+      </p:sp>
+      <p:sp>
+        <p:nvSpPr>
+          <p:cNvPr id="7" name="TextBox 6"/>
+          <p:cNvSpPr txBox="1"/>
+          <p:nvPr/>
+        </p:nvSpPr>
+        <p:spPr>
+          <a:xfrm>
+            <a:off x="6309360" y="2029968"/>
+            <a:ext cx="5212080" cy="4206240"/>
+          </a:xfrm>
+          <a:prstGeom prst="rect">
+            <a:avLst/>
+          </a:prstGeom>
+          <a:noFill/>
+        </p:spPr>
+        <p:txBody>
+          <a:bodyPr wrap="square" lIns="0" rIns="0" tIns="0" bIns="0" anchor="t">
+            <a:spAutoFit/>
+          </a:bodyPr>
+          <a:lstStyle/>
+          <a:p>
+            <a:pPr algn="l">
+              <a:spcAft>
+                <a:spcPts val="600"/>
+              </a:spcAft>
+            </a:pPr>
+            <a:r>
+              <a:rPr sz="1800" b="1" i="0">
                 <a:solidFill>
                   <a:srgbClr val="1F3160"/>
                 </a:solidFill>
                 <a:latin typeface="Calibri"/>
               </a:rPr>
-              <a:t>A learning hub</a:t>
+              <a:t>Recruiter</a:t>
             </a:r>
           </a:p>
           <a:p>
             <a:pPr>
               <a:spcAft>
-                <a:spcPts val="1300"/>
+                <a:spcPts val="800"/>
               </a:spcAft>
             </a:pPr>
             <a:r>
               <a:rPr sz="1600" b="0" i="0">
                 <a:solidFill>
-                  <a:srgbClr val="5A6B8C"/>
-                </a:solidFill>
-                <a:latin typeface="Calibri"/>
-              </a:rPr>
-              <a:t>Guides on writing a resume and on how automated screening actually reads a document.</a:t>
+                  <a:srgbClr val="1A1A2E"/>
+                </a:solidFill>
+                <a:latin typeface="Calibri"/>
+              </a:rPr>
+              <a:t>↓  Register &amp; get admin approval</a:t>
             </a:r>
           </a:p>
           <a:p>
             <a:pPr>
               <a:spcAft>
-                <a:spcPts val="300"/>
-              </a:spcAft>
-            </a:pPr>
-            <a:r>
-              <a:rPr sz="1900" b="1" i="0">
-                <a:solidFill>
-                  <a:srgbClr val="1F3160"/>
-                </a:solidFill>
-                <a:latin typeface="Calibri"/>
-              </a:rPr>
-              <a:t>An ATS-inspired matching engine</a:t>
+                <a:spcPts val="800"/>
+              </a:spcAft>
+            </a:pPr>
+            <a:r>
+              <a:rPr sz="1600" b="0" i="0">
+                <a:solidFill>
+                  <a:srgbClr val="1A1A2E"/>
+                </a:solidFill>
+                <a:latin typeface="Calibri"/>
+              </a:rPr>
+              <a:t>↓  Create a posting, set weights</a:t>
             </a:r>
           </a:p>
           <a:p>
             <a:pPr>
               <a:spcAft>
-                <a:spcPts val="1300"/>
+                <a:spcPts val="800"/>
               </a:spcAft>
             </a:pPr>
             <a:r>
               <a:rPr sz="1600" b="0" i="0">
                 <a:solidFill>
-                  <a:srgbClr val="5A6B8C"/>
-                </a:solidFill>
-                <a:latin typeface="Calibri"/>
-              </a:rPr>
-              <a:t>A deterministic weighted score, computed only from what the recruiter asked for in the posting, and explained in full to both sides.</a:t>
+                  <a:srgbClr val="1A1A2E"/>
+                </a:solidFill>
+                <a:latin typeface="Calibri"/>
+              </a:rPr>
+              <a:t>↓  View ranked applicant list</a:t>
             </a:r>
           </a:p>
           <a:p>
             <a:pPr>
               <a:spcAft>
-                <a:spcPts val="300"/>
-              </a:spcAft>
-            </a:pPr>
-            <a:r>
-              <a:rPr sz="1900" b="1" i="0">
-                <a:solidFill>
-                  <a:srgbClr val="1F3160"/>
-                </a:solidFill>
-                <a:latin typeface="Calibri"/>
-              </a:rPr>
-              <a:t>A recruiter workspace</a:t>
+                <a:spcPts val="800"/>
+              </a:spcAft>
+            </a:pPr>
+            <a:r>
+              <a:rPr sz="1600" b="0" i="0">
+                <a:solidFill>
+                  <a:srgbClr val="1A1A2E"/>
+                </a:solidFill>
+                <a:latin typeface="Calibri"/>
+              </a:rPr>
+              <a:t>↓  Review score breakdown</a:t>
             </a:r>
           </a:p>
           <a:p>
             <a:pPr>
               <a:spcAft>
-                <a:spcPts val="1300"/>
+                <a:spcPts val="800"/>
               </a:spcAft>
             </a:pPr>
             <a:r>
               <a:rPr sz="1600" b="0" i="0">
                 <a:solidFill>
-                  <a:srgbClr val="5A6B8C"/>
-                </a:solidFill>
-                <a:latin typeface="Calibri"/>
-              </a:rPr>
-              <a:t>Postings with per-opening weights, ranked applicants, score breakdowns, nine tracked statuses with an audit trail, and interview invitations by email.</a:t>
+                  <a:srgbClr val="1A1A2E"/>
+                </a:solidFill>
+                <a:latin typeface="Calibri"/>
+              </a:rPr>
+              <a:t>↓  Update status / send interview invite</a:t>
             </a:r>
           </a:p>
         </p:txBody>
@@ -12614,7 +8684,7 @@
                 </a:solidFill>
                 <a:latin typeface="Calibri"/>
               </a:rPr>
-              <a:t>THE ENGINE</a:t>
+              <a:t>TECHNOLOGY</a:t>
             </a:r>
           </a:p>
         </p:txBody>
@@ -12653,7 +8723,7 @@
                 </a:solidFill>
                 <a:latin typeface="Calibri"/>
               </a:rPr>
-              <a:t>How a compatibility score is produced</a:t>
+              <a:t>System Structure and Technology</a:t>
             </a:r>
           </a:p>
         </p:txBody>
@@ -12692,7 +8762,7 @@
                 </a:solidFill>
                 <a:latin typeface="Calibri"/>
               </a:rPr>
-              <a:t>The formula is published in the paper, in the interface, and to the applicant.</a:t>
+              <a:t>Three layers, one language.</a:t>
             </a:r>
           </a:p>
         </p:txBody>
@@ -12749,8 +8819,8 @@
         </p:nvSpPr>
         <p:spPr>
           <a:xfrm>
-            <a:off x="658368" y="2075688"/>
-            <a:ext cx="10881360" cy="914400"/>
+            <a:off x="658368" y="2048256"/>
+            <a:ext cx="10881360" cy="3840480"/>
           </a:xfrm>
           <a:prstGeom prst="rect">
             <a:avLst/>
@@ -12763,90 +8833,67 @@
           </a:bodyPr>
           <a:lstStyle/>
           <a:p>
-            <a:pPr algn="ctr">
+            <a:pPr algn="l">
+              <a:spcAft>
+                <a:spcPts val="1200"/>
+              </a:spcAft>
+            </a:pPr>
+            <a:r>
+              <a:rPr sz="1800" b="0" i="0">
+                <a:solidFill>
+                  <a:srgbClr val="1A1A2E"/>
+                </a:solidFill>
+                <a:latin typeface="Calibri"/>
+              </a:rPr>
+              <a:t>Frontend — Angular. Builds every screen the user sees: the resume builder, the recruiter dashboard, the applicant lists.</a:t>
+            </a:r>
+          </a:p>
+          <a:p>
+            <a:pPr>
+              <a:spcAft>
+                <a:spcPts val="1200"/>
+              </a:spcAft>
+            </a:pPr>
+            <a:r>
+              <a:rPr sz="1800" b="0" i="0">
+                <a:solidFill>
+                  <a:srgbClr val="1A1A2E"/>
+                </a:solidFill>
+                <a:latin typeface="Calibri"/>
+              </a:rPr>
+              <a:t>Backend — Node.js with TypeScript. Runs the matching engine, checks logins, and talks to the database. Using TypeScript on both front and back end means the same scoring formula is written once and shared, not duplicated and risked drifting apart.</a:t>
+            </a:r>
+          </a:p>
+          <a:p>
+            <a:pPr>
+              <a:spcAft>
+                <a:spcPts val="1200"/>
+              </a:spcAft>
+            </a:pPr>
+            <a:r>
+              <a:rPr sz="1800" b="0" i="0">
+                <a:solidFill>
+                  <a:srgbClr val="1A1A2E"/>
+                </a:solidFill>
+                <a:latin typeface="Calibri"/>
+              </a:rPr>
+              <a:t>Database — PostgreSQL, hosted on Supabase. Stores users, resumes, postings, applications and scores across 24 tables.</a:t>
+            </a:r>
+          </a:p>
+          <a:p>
+            <a:pPr>
               <a:spcAft>
                 <a:spcPts val="0"/>
               </a:spcAft>
             </a:pPr>
             <a:r>
-              <a:rPr sz="3000" b="1" i="0">
-                <a:solidFill>
-                  <a:srgbClr val="1F3160"/>
-                </a:solidFill>
-                <a:latin typeface="Consolas"/>
-              </a:rPr>
-              <a:t>Score  =  ( S x Ws  +  E x We  +  X x Wx )  x  100</a:t>
-            </a:r>
-          </a:p>
-        </p:txBody>
-      </p:sp>
-      <p:sp>
-        <p:nvSpPr>
-          <p:cNvPr id="7" name="TextBox 6"/>
-          <p:cNvSpPr txBox="1"/>
-          <p:nvPr/>
-        </p:nvSpPr>
-        <p:spPr>
-          <a:xfrm>
-            <a:off x="658368" y="3081528"/>
-            <a:ext cx="10881360" cy="2377440"/>
-          </a:xfrm>
-          <a:prstGeom prst="rect">
-            <a:avLst/>
-          </a:prstGeom>
-          <a:noFill/>
-        </p:spPr>
-        <p:txBody>
-          <a:bodyPr wrap="square" lIns="0" rIns="0" tIns="0" bIns="0" anchor="t">
-            <a:spAutoFit/>
-          </a:bodyPr>
-          <a:lstStyle/>
-          <a:p>
-            <a:pPr algn="l">
-              <a:spcAft>
-                <a:spcPts val="1200"/>
-              </a:spcAft>
-            </a:pPr>
-            <a:r>
-              <a:rPr sz="1700" b="0" i="0">
+              <a:rPr sz="1800" b="0" i="0">
                 <a:solidFill>
                   <a:srgbClr val="1A1A2E"/>
                 </a:solidFill>
                 <a:latin typeface="Calibri"/>
               </a:rPr>
-              <a:t>S, E and X are the applicant's skills, education and experience fractions against what the posting asked for. Ws, We and Wx are the weights. The site default is 50 / 25 / 25, and a recruiter can rebalance any opening — each component at least 10%, always totalling 100%.</a:t>
-            </a:r>
-          </a:p>
-          <a:p>
-            <a:pPr>
-              <a:spcAft>
-                <a:spcPts val="1200"/>
-              </a:spcAft>
-            </a:pPr>
-            <a:r>
-              <a:rPr sz="1700" b="0" i="0">
-                <a:solidFill>
-                  <a:srgbClr val="1A1A2E"/>
-                </a:solidFill>
-                <a:latin typeface="Calibri"/>
-              </a:rPr>
-              <a:t>Tiers:  strong match at 80 and above  ·  possible match 50 to 79  ·  related position below 50</a:t>
-            </a:r>
-          </a:p>
-          <a:p>
-            <a:pPr>
-              <a:spcAft>
-                <a:spcPts val="0"/>
-              </a:spcAft>
-            </a:pPr>
-            <a:r>
-              <a:rPr sz="1700" b="0" i="0">
-                <a:solidFill>
-                  <a:srgbClr val="1A1A2E"/>
-                </a:solidFill>
-                <a:latin typeface="Calibri"/>
-              </a:rPr>
-              <a:t>Deterministic. The same resume and the same posting always produce the same number. No machine learning takes any part in a score, a ranking or a recommendation.</a:t>
+              <a:t>How they connect: the frontend calls 56 API endpoints on the backend; the backend reads and writes to PostgreSQL and returns the result. The whole thing is deployed and live on Render.</a:t>
             </a:r>
           </a:p>
         </p:txBody>
@@ -12903,7 +8950,7 @@
                 </a:solidFill>
                 <a:latin typeface="Calibri"/>
               </a:rPr>
-              <a:t>THE VOCABULARY</a:t>
+              <a:t>DATABASE</a:t>
             </a:r>
           </a:p>
         </p:txBody>
@@ -12942,7 +8989,7 @@
                 </a:solidFill>
                 <a:latin typeface="Calibri"/>
               </a:rPr>
-              <a:t>Why 'JS' and 'JavaScript' count as the same skill</a:t>
+              <a:t>Database Design</a:t>
             </a:r>
           </a:p>
         </p:txBody>
@@ -12981,7 +9028,7 @@
                 </a:solidFill>
                 <a:latin typeface="Calibri"/>
               </a:rPr>
-              <a:t>A resume and a posting that mean the same thing must land on the same record, or the match is wrong.</a:t>
+              <a:t>24 tables, 30 foreign keys — generated directly from the live schema.</a:t>
             </a:r>
           </a:p>
         </p:txBody>
@@ -13030,54 +9077,30 @@
           </a:p>
         </p:txBody>
       </p:sp>
-      <p:sp>
-        <p:nvSpPr>
-          <p:cNvPr id="6" name="Rounded Rectangle 5"/>
-          <p:cNvSpPr/>
+      <p:pic>
+        <p:nvPicPr>
+          <p:cNvPr id="6" name="Picture 5" descr="new_fig5.png"/>
+          <p:cNvPicPr>
+            <a:picLocks noChangeAspect="1"/>
+          </p:cNvPicPr>
           <p:nvPr/>
-        </p:nvSpPr>
+        </p:nvPicPr>
+        <p:blipFill>
+          <a:blip r:embed="rId2"/>
+          <a:stretch>
+            <a:fillRect/>
+          </a:stretch>
+        </p:blipFill>
         <p:spPr>
           <a:xfrm>
-            <a:off x="658368" y="2121408"/>
-            <a:ext cx="3456432" cy="2148840"/>
+            <a:off x="2180698" y="2048256"/>
+            <a:ext cx="7836699" cy="4325112"/>
           </a:xfrm>
-          <a:prstGeom prst="roundRect">
-            <a:avLst>
-              <a:gd name="adj" fmla="val 4000"/>
-            </a:avLst>
+          <a:prstGeom prst="rect">
+            <a:avLst/>
           </a:prstGeom>
-          <a:solidFill>
-            <a:srgbClr val="DCE4F5"/>
-          </a:solidFill>
-          <a:ln w="12700">
-            <a:solidFill>
-              <a:srgbClr val="C3CEE6"/>
-            </a:solidFill>
-          </a:ln>
-          <a:effectLst/>
         </p:spPr>
-        <p:style>
-          <a:lnRef idx="1">
-            <a:schemeClr val="accent1"/>
-          </a:lnRef>
-          <a:fillRef idx="3">
-            <a:schemeClr val="accent1"/>
-          </a:fillRef>
-          <a:effectRef idx="2">
-            <a:schemeClr val="accent1"/>
-          </a:effectRef>
-          <a:fontRef idx="minor">
-            <a:schemeClr val="lt1"/>
-          </a:fontRef>
-        </p:style>
-        <p:txBody>
-          <a:bodyPr rtlCol="0" anchor="ctr"/>
-          <a:lstStyle/>
-          <a:p>
-            <a:pPr algn="ctr"/>
-          </a:p>
-        </p:txBody>
-      </p:sp>
+      </p:pic>
       <p:sp>
         <p:nvSpPr>
           <p:cNvPr id="7" name="TextBox 6"/>
@@ -13086,8 +9109,8 @@
         </p:nvSpPr>
         <p:spPr>
           <a:xfrm>
-            <a:off x="859536" y="2377440"/>
-            <a:ext cx="3054096" cy="1737360"/>
+            <a:off x="658368" y="6291072"/>
+            <a:ext cx="10881360" cy="365760"/>
           </a:xfrm>
           <a:prstGeom prst="rect">
             <a:avLst/>
@@ -13102,326 +9125,17 @@
           <a:p>
             <a:pPr algn="ctr">
               <a:spcAft>
-                <a:spcPts val="200"/>
-              </a:spcAft>
-            </a:pPr>
-            <a:r>
-              <a:rPr sz="4200" b="1" i="0">
-                <a:solidFill>
-                  <a:srgbClr val="1F3160"/>
-                </a:solidFill>
-                <a:latin typeface="Calibri"/>
-              </a:rPr>
-              <a:t>223</a:t>
-            </a:r>
-          </a:p>
-          <a:p>
-            <a:pPr algn="ctr">
-              <a:spcAft>
-                <a:spcPts val="600"/>
-              </a:spcAft>
-            </a:pPr>
-            <a:r>
-              <a:rPr sz="1400" b="1" i="0">
-                <a:solidFill>
-                  <a:srgbClr val="2F4B8F"/>
-                </a:solidFill>
-                <a:latin typeface="Calibri"/>
-              </a:rPr>
-              <a:t>VOCABULARY ENTRIES</a:t>
-            </a:r>
-          </a:p>
-          <a:p>
-            <a:pPr algn="ctr">
-              <a:spcAft>
                 <a:spcPts val="0"/>
               </a:spcAft>
             </a:pPr>
             <a:r>
-              <a:rPr sz="1250" b="0" i="0">
+              <a:rPr sz="1250" b="0" i="1">
                 <a:solidFill>
                   <a:srgbClr val="5A6B8C"/>
                 </a:solidFill>
                 <a:latin typeface="Calibri"/>
               </a:rPr>
-              <a:t>aliases and canonical forms</a:t>
-            </a:r>
-          </a:p>
-        </p:txBody>
-      </p:sp>
-      <p:sp>
-        <p:nvSpPr>
-          <p:cNvPr id="8" name="Rounded Rectangle 7"/>
-          <p:cNvSpPr/>
-          <p:nvPr/>
-        </p:nvSpPr>
-        <p:spPr>
-          <a:xfrm>
-            <a:off x="4370832" y="2121408"/>
-            <a:ext cx="3456432" cy="2148840"/>
-          </a:xfrm>
-          <a:prstGeom prst="roundRect">
-            <a:avLst>
-              <a:gd name="adj" fmla="val 4000"/>
-            </a:avLst>
-          </a:prstGeom>
-          <a:solidFill>
-            <a:srgbClr val="DCE4F5"/>
-          </a:solidFill>
-          <a:ln w="12700">
-            <a:solidFill>
-              <a:srgbClr val="C3CEE6"/>
-            </a:solidFill>
-          </a:ln>
-          <a:effectLst/>
-        </p:spPr>
-        <p:style>
-          <a:lnRef idx="1">
-            <a:schemeClr val="accent1"/>
-          </a:lnRef>
-          <a:fillRef idx="3">
-            <a:schemeClr val="accent1"/>
-          </a:fillRef>
-          <a:effectRef idx="2">
-            <a:schemeClr val="accent1"/>
-          </a:effectRef>
-          <a:fontRef idx="minor">
-            <a:schemeClr val="lt1"/>
-          </a:fontRef>
-        </p:style>
-        <p:txBody>
-          <a:bodyPr rtlCol="0" anchor="ctr"/>
-          <a:lstStyle/>
-          <a:p>
-            <a:pPr algn="ctr"/>
-          </a:p>
-        </p:txBody>
-      </p:sp>
-      <p:sp>
-        <p:nvSpPr>
-          <p:cNvPr id="9" name="TextBox 8"/>
-          <p:cNvSpPr txBox="1"/>
-          <p:nvPr/>
-        </p:nvSpPr>
-        <p:spPr>
-          <a:xfrm>
-            <a:off x="4572000" y="2377440"/>
-            <a:ext cx="3054096" cy="1737360"/>
-          </a:xfrm>
-          <a:prstGeom prst="rect">
-            <a:avLst/>
-          </a:prstGeom>
-          <a:noFill/>
-        </p:spPr>
-        <p:txBody>
-          <a:bodyPr wrap="square" lIns="0" rIns="0" tIns="0" bIns="0" anchor="t">
-            <a:spAutoFit/>
-          </a:bodyPr>
-          <a:lstStyle/>
-          <a:p>
-            <a:pPr algn="ctr">
-              <a:spcAft>
-                <a:spcPts val="200"/>
-              </a:spcAft>
-            </a:pPr>
-            <a:r>
-              <a:rPr sz="4200" b="1" i="0">
-                <a:solidFill>
-                  <a:srgbClr val="1F3160"/>
-                </a:solidFill>
-                <a:latin typeface="Calibri"/>
-              </a:rPr>
-              <a:t>104</a:t>
-            </a:r>
-          </a:p>
-          <a:p>
-            <a:pPr algn="ctr">
-              <a:spcAft>
-                <a:spcPts val="600"/>
-              </a:spcAft>
-            </a:pPr>
-            <a:r>
-              <a:rPr sz="1400" b="1" i="0">
-                <a:solidFill>
-                  <a:srgbClr val="2F4B8F"/>
-                </a:solidFill>
-                <a:latin typeface="Calibri"/>
-              </a:rPr>
-              <a:t>CANONICAL SKILLS</a:t>
-            </a:r>
-          </a:p>
-          <a:p>
-            <a:pPr algn="ctr">
-              <a:spcAft>
-                <a:spcPts val="0"/>
-              </a:spcAft>
-            </a:pPr>
-            <a:r>
-              <a:rPr sz="1250" b="0" i="0">
-                <a:solidFill>
-                  <a:srgbClr val="5A6B8C"/>
-                </a:solidFill>
-                <a:latin typeface="Calibri"/>
-              </a:rPr>
-              <a:t>one row per real skill</a:t>
-            </a:r>
-          </a:p>
-        </p:txBody>
-      </p:sp>
-      <p:sp>
-        <p:nvSpPr>
-          <p:cNvPr id="10" name="Rounded Rectangle 9"/>
-          <p:cNvSpPr/>
-          <p:nvPr/>
-        </p:nvSpPr>
-        <p:spPr>
-          <a:xfrm>
-            <a:off x="8083296" y="2121408"/>
-            <a:ext cx="3456432" cy="2148840"/>
-          </a:xfrm>
-          <a:prstGeom prst="roundRect">
-            <a:avLst>
-              <a:gd name="adj" fmla="val 4000"/>
-            </a:avLst>
-          </a:prstGeom>
-          <a:solidFill>
-            <a:srgbClr val="DCE4F5"/>
-          </a:solidFill>
-          <a:ln w="12700">
-            <a:solidFill>
-              <a:srgbClr val="C3CEE6"/>
-            </a:solidFill>
-          </a:ln>
-          <a:effectLst/>
-        </p:spPr>
-        <p:style>
-          <a:lnRef idx="1">
-            <a:schemeClr val="accent1"/>
-          </a:lnRef>
-          <a:fillRef idx="3">
-            <a:schemeClr val="accent1"/>
-          </a:fillRef>
-          <a:effectRef idx="2">
-            <a:schemeClr val="accent1"/>
-          </a:effectRef>
-          <a:fontRef idx="minor">
-            <a:schemeClr val="lt1"/>
-          </a:fontRef>
-        </p:style>
-        <p:txBody>
-          <a:bodyPr rtlCol="0" anchor="ctr"/>
-          <a:lstStyle/>
-          <a:p>
-            <a:pPr algn="ctr"/>
-          </a:p>
-        </p:txBody>
-      </p:sp>
-      <p:sp>
-        <p:nvSpPr>
-          <p:cNvPr id="11" name="TextBox 10"/>
-          <p:cNvSpPr txBox="1"/>
-          <p:nvPr/>
-        </p:nvSpPr>
-        <p:spPr>
-          <a:xfrm>
-            <a:off x="8284464" y="2377440"/>
-            <a:ext cx="3054096" cy="1737360"/>
-          </a:xfrm>
-          <a:prstGeom prst="rect">
-            <a:avLst/>
-          </a:prstGeom>
-          <a:noFill/>
-        </p:spPr>
-        <p:txBody>
-          <a:bodyPr wrap="square" lIns="0" rIns="0" tIns="0" bIns="0" anchor="t">
-            <a:spAutoFit/>
-          </a:bodyPr>
-          <a:lstStyle/>
-          <a:p>
-            <a:pPr algn="ctr">
-              <a:spcAft>
-                <a:spcPts val="200"/>
-              </a:spcAft>
-            </a:pPr>
-            <a:r>
-              <a:rPr sz="4200" b="1" i="0">
-                <a:solidFill>
-                  <a:srgbClr val="1F3160"/>
-                </a:solidFill>
-                <a:latin typeface="Calibri"/>
-              </a:rPr>
-              <a:t>81.7%</a:t>
-            </a:r>
-          </a:p>
-          <a:p>
-            <a:pPr algn="ctr">
-              <a:spcAft>
-                <a:spcPts val="600"/>
-              </a:spcAft>
-            </a:pPr>
-            <a:r>
-              <a:rPr sz="1400" b="1" i="0">
-                <a:solidFill>
-                  <a:srgbClr val="2F4B8F"/>
-                </a:solidFill>
-                <a:latin typeface="Calibri"/>
-              </a:rPr>
-              <a:t>HAVE A SYNONYM</a:t>
-            </a:r>
-          </a:p>
-          <a:p>
-            <a:pPr algn="ctr">
-              <a:spcAft>
-                <a:spcPts val="0"/>
-              </a:spcAft>
-            </a:pPr>
-            <a:r>
-              <a:rPr sz="1250" b="0" i="0">
-                <a:solidFill>
-                  <a:srgbClr val="5A6B8C"/>
-                </a:solidFill>
-                <a:latin typeface="Calibri"/>
-              </a:rPr>
-              <a:t>85 of the 104</a:t>
-            </a:r>
-          </a:p>
-        </p:txBody>
-      </p:sp>
-      <p:sp>
-        <p:nvSpPr>
-          <p:cNvPr id="12" name="TextBox 11"/>
-          <p:cNvSpPr txBox="1"/>
-          <p:nvPr/>
-        </p:nvSpPr>
-        <p:spPr>
-          <a:xfrm>
-            <a:off x="658368" y="4590288"/>
-            <a:ext cx="10881360" cy="1097280"/>
-          </a:xfrm>
-          <a:prstGeom prst="rect">
-            <a:avLst/>
-          </a:prstGeom>
-          <a:noFill/>
-        </p:spPr>
-        <p:txBody>
-          <a:bodyPr wrap="square" lIns="0" rIns="0" tIns="0" bIns="0" anchor="t">
-            <a:spAutoFit/>
-          </a:bodyPr>
-          <a:lstStyle/>
-          <a:p>
-            <a:pPr algn="l">
-              <a:spcAft>
-                <a:spcPts val="0"/>
-              </a:spcAft>
-            </a:pPr>
-            <a:r>
-              <a:rPr sz="1500" b="0" i="0">
-                <a:solidFill>
-                  <a:srgbClr val="1A1A2E"/>
-                </a:solidFill>
-                <a:latin typeface="Calibri"/>
-              </a:rPr>
-              <a:t>The remaining nineteen — Git, Windows, Canva, Linux, PHP, Figma, WordPress and similar product names — have no genuine synonym and match by exact spelling. We say so rather than claiming full coverage.</a:t>
+              <a:t>Every score is traceable: match_scores links one resume to one posting with a timestamped result.</a:t>
             </a:r>
           </a:p>
         </p:txBody>
@@ -13478,7 +9192,7 @@
                 </a:solidFill>
                 <a:latin typeface="Calibri"/>
               </a:rPr>
-              <a:t>THE USERS</a:t>
+              <a:t>LIVE DEMO</a:t>
             </a:r>
           </a:p>
         </p:txBody>
@@ -13517,7 +9231,7 @@
                 </a:solidFill>
                 <a:latin typeface="Calibri"/>
               </a:rPr>
-              <a:t>Who does what in the system</a:t>
+              <a:t>System Demonstration</a:t>
             </a:r>
           </a:p>
         </p:txBody>
@@ -13556,7 +9270,7 @@
                 </a:solidFill>
                 <a:latin typeface="Calibri"/>
               </a:rPr>
-              <a:t>Three actors. Figure 4 of the manuscript.</a:t>
+              <a:t>The one journey that proves the research problem is actually solved.</a:t>
             </a:r>
           </a:p>
         </p:txBody>
@@ -13605,40 +9319,16 @@
           </a:p>
         </p:txBody>
       </p:sp>
-      <p:pic>
-        <p:nvPicPr>
-          <p:cNvPr id="6" name="Picture 5" descr="new_fig4.png"/>
-          <p:cNvPicPr>
-            <a:picLocks noChangeAspect="1"/>
-          </p:cNvPicPr>
+      <p:sp>
+        <p:nvSpPr>
+          <p:cNvPr id="6" name="TextBox 5"/>
+          <p:cNvSpPr txBox="1"/>
           <p:nvPr/>
-        </p:nvPicPr>
-        <p:blipFill>
-          <a:blip r:embed="rId2"/>
-          <a:stretch>
-            <a:fillRect/>
-          </a:stretch>
-        </p:blipFill>
+        </p:nvSpPr>
         <p:spPr>
           <a:xfrm>
-            <a:off x="2051695" y="2048256"/>
-            <a:ext cx="8094705" cy="4325112"/>
-          </a:xfrm>
-          <a:prstGeom prst="rect">
-            <a:avLst/>
-          </a:prstGeom>
-        </p:spPr>
-      </p:pic>
-      <p:sp>
-        <p:nvSpPr>
-          <p:cNvPr id="7" name="TextBox 6"/>
-          <p:cNvSpPr txBox="1"/>
-          <p:nvPr/>
-        </p:nvSpPr>
-        <p:spPr>
-          <a:xfrm>
-            <a:off x="658368" y="6291072"/>
-            <a:ext cx="10881360" cy="365760"/>
+            <a:off x="658368" y="2075688"/>
+            <a:ext cx="10881360" cy="4206240"/>
           </a:xfrm>
           <a:prstGeom prst="rect">
             <a:avLst/>
@@ -13651,19 +9341,99 @@
           </a:bodyPr>
           <a:lstStyle/>
           <a:p>
-            <a:pPr algn="ctr">
-              <a:spcAft>
-                <a:spcPts val="0"/>
-              </a:spcAft>
-            </a:pPr>
-            <a:r>
-              <a:rPr sz="1250" b="0" i="1">
-                <a:solidFill>
-                  <a:srgbClr val="5A6B8C"/>
-                </a:solidFill>
-                <a:latin typeface="Calibri"/>
-              </a:rPr>
-              <a:t>No use case rejects an applicant: the system ranks and explains, and every status change is made by a named recruiter.</a:t>
+            <a:pPr algn="l">
+              <a:spcAft>
+                <a:spcPts val="1100"/>
+              </a:spcAft>
+            </a:pPr>
+            <a:r>
+              <a:rPr sz="1800" b="0" i="0">
+                <a:solidFill>
+                  <a:srgbClr val="1A1A2E"/>
+                </a:solidFill>
+                <a:latin typeface="Calibri"/>
+              </a:rPr>
+              <a:t>1.   Job seeker builds a resume — guided steps, live preview, pick a design</a:t>
+            </a:r>
+          </a:p>
+          <a:p>
+            <a:pPr>
+              <a:spcAft>
+                <a:spcPts val="1100"/>
+              </a:spcAft>
+            </a:pPr>
+            <a:r>
+              <a:rPr sz="1800" b="0" i="0">
+                <a:solidFill>
+                  <a:srgbClr val="1A1A2E"/>
+                </a:solidFill>
+                <a:latin typeface="Calibri"/>
+              </a:rPr>
+              <a:t>2.   Job seeker browses postings and sees a match score before applying</a:t>
+            </a:r>
+          </a:p>
+          <a:p>
+            <a:pPr>
+              <a:spcAft>
+                <a:spcPts val="1100"/>
+              </a:spcAft>
+            </a:pPr>
+            <a:r>
+              <a:rPr sz="1800" b="0" i="0">
+                <a:solidFill>
+                  <a:srgbClr val="1A1A2E"/>
+                </a:solidFill>
+                <a:latin typeface="Calibri"/>
+              </a:rPr>
+              <a:t>3.   Job seeker applies — score breakdown shows exactly which skills are missing</a:t>
+            </a:r>
+          </a:p>
+          <a:p>
+            <a:pPr>
+              <a:spcAft>
+                <a:spcPts val="1100"/>
+              </a:spcAft>
+            </a:pPr>
+            <a:r>
+              <a:rPr sz="1800" b="0" i="0">
+                <a:solidFill>
+                  <a:srgbClr val="1A1A2E"/>
+                </a:solidFill>
+                <a:latin typeface="Calibri"/>
+              </a:rPr>
+              <a:t>4.   Recruiter opens the same posting — sees the ranked applicant list</a:t>
+            </a:r>
+          </a:p>
+          <a:p>
+            <a:pPr>
+              <a:spcAft>
+                <a:spcPts val="1100"/>
+              </a:spcAft>
+            </a:pPr>
+            <a:r>
+              <a:rPr sz="1800" b="0" i="0">
+                <a:solidFill>
+                  <a:srgbClr val="1A1A2E"/>
+                </a:solidFill>
+                <a:latin typeface="Calibri"/>
+              </a:rPr>
+              <a:t>5.   Recruiter opens the applicant's score breakdown — same numbers, same reasons</a:t>
+            </a:r>
+          </a:p>
+          <a:p>
+            <a:pPr>
+              <a:spcAft>
+                <a:spcPts val="1100"/>
+              </a:spcAft>
+            </a:pPr>
+            <a:r>
+              <a:rPr sz="1800" b="0" i="0">
+                <a:solidFill>
+                  <a:srgbClr val="1A1A2E"/>
+                </a:solidFill>
+                <a:latin typeface="Calibri"/>
+              </a:rPr>
+              <a:t>6.   Recruiter changes status and sends an interview invite with a calendar link</a:t>
             </a:r>
           </a:p>
         </p:txBody>

--- a/05_Website_Angular/docs/Linaw-PH-Video-Presentation.pptx
+++ b/05_Website_Angular/docs/Linaw-PH-Video-Presentation.pptx
@@ -20,6 +20,8 @@
     <p:sldId id="268" r:id="rId20"/>
     <p:sldId id="269" r:id="rId21"/>
     <p:sldId id="270" r:id="rId22"/>
+    <p:sldId id="271" r:id="rId23"/>
+    <p:sldId id="272" r:id="rId24"/>
   </p:sldIdLst>
   <p:sldSz cx="12191695" cy="6858000" type="screen4x3"/>
   <p:notesSz cx="6858000" cy="9144000"/>
@@ -516,7 +518,30 @@
           <a:lstStyle/>
           <a:p>
             <a:r>
-              <a:t>TIME: 20-25 sec. SAY: 'Good day. We are Garcia, Santos and Talens, BS Information Technology, Web Development track, School of Computing, Holy Angel University. Our capstone is Linaw PH — a free web-based resume builder and ATS-inspired job matching system for job seekers and partner companies in the Philippines, developed with our partner company Clark Outsourcing.' VISUAL: title card only. TRANSITION: cut straight to the problem — no extra preamble.</a:t>
+              <a:t>TIME: 0:00 – 0:40</a:t>
+            </a:r>
+          </a:p>
+          <a:p/>
+          <a:p>
+            <a:r>
+              <a:t>SAY:</a:t>
+            </a:r>
+          </a:p>
+          <a:p>
+            <a:r>
+              <a:t>"Good day. We are Byrone Garcia, Francis Allen Santos and Isaiah Talens, from the School of Computing at Holy Angel University. Our capstone project is called Linaw PH — a web-based resume builder and ATS-inspired job matching system for job seekers and partner companies in the Philippines. Linaw is the Filipino word for clear, and that is the whole idea of this project: making hiring clear to the person applying."</a:t>
+            </a:r>
+          </a:p>
+          <a:p/>
+          <a:p>
+            <a:r>
+              <a:t>VISUAL: Title slide holds for the full introduction. Do not click through early.</a:t>
+            </a:r>
+          </a:p>
+          <a:p/>
+          <a:p>
+            <a:r>
+              <a:t>TRANSITION: Click to Slide 2.</a:t>
             </a:r>
           </a:p>
         </p:txBody>
@@ -586,7 +611,30 @@
           <a:lstStyle/>
           <a:p>
             <a:r>
-              <a:t>TIME: 75-90 sec. SAY: 'We used a quantitative descriptive design — we're measuring how widely a problem is shared and how highly the system is rated, using closed survey questions, not interviews. We built the system using Waterfall, on purpose: the evaluation needed one finished system that every respondent rates, and an agile, constantly-changing build would have given different people different versions to judge. Five survey instruments went to three groups — job seekers, HR staff, and IT experts — some before the system existed and some after. And before any of that, we ran two hundred thirty-two automated tests and about a hundred twenty browser walkthroughs, so correctness was checked by testing, not left for respondents to discover.' VISUAL: bullets on screen. TRANSITION: 'Here is what those respondents actually said.'</a:t>
+              <a:t>TIME: 8:30 – 9:25</a:t>
+            </a:r>
+          </a:p>
+          <a:p/>
+          <a:p>
+            <a:r>
+              <a:t>SAY:</a:t>
+            </a:r>
+          </a:p>
+          <a:p>
+            <a:r>
+              <a:t>"Before we let anybody evaluate the system, we verified it ourselves. Two hundred and thirty-two automated tests across eleven suites, run in full on every single change to the code. Sixty-one of those cover the matching engine alone — the weights, the tier boundaries, the rounding, the half-credit rule. Fifty-seven start the real server against a temporary database and drive it over HTTP, confirming among other things that one applicant can never read another applicant's resume. Forty-six cover our rule-based resume reader. And one test re-derives every score from a completely independent implementation of the published formula, across four thousand generated pairs, so the written specification and the running code cannot drift apart without us noticing. On top of that, scripted browser walkthroughs make over a hundred and twenty checks across every page and all three account types, down to a three-hundred-and-ninety-pixel phone width. I want to be clear that this is engineering evidence, not research findings — it describes how thoroughly we built the system, not what respondents said about it."</a:t>
+            </a:r>
+          </a:p>
+          <a:p/>
+          <a:p>
+            <a:r>
+              <a:t>VISUAL: Four stat cards. Stress the last sentence — the panel cares about that distinction.</a:t>
+            </a:r>
+          </a:p>
+          <a:p/>
+          <a:p>
+            <a:r>
+              <a:t>TRANSITION: Click to Slide 11 — this is the demo.</a:t>
             </a:r>
           </a:p>
         </p:txBody>
@@ -656,7 +704,117 @@
           <a:lstStyle/>
           <a:p>
             <a:r>
-              <a:t>TIME: 75-90 sec. SAY: 'The people who actually used the system rated it good across the board — 4.28 from job seekers, 4.22 from HR. The IT experts, who inspected the code rather than using it day to day, rated it higher, 4.80. We also ran a System Usability Scale, the one published, industry-standard instrument in our study — we scored 74.7, above the typical average of 68. And on the items we asked twice, before and after using the system, worry about computer screening dropped from 3.93 to 2.65 — a large, statistically significant improvement.' VISUAL: table full-screen. TRANSITION: 'Does that mean we hit every goal we set out to hit?'</a:t>
+              <a:t>TIME: 9:25 – 13:00  (3 min 35 s — the longest single segment, rehearse it against a timer)</a:t>
+            </a:r>
+          </a:p>
+          <a:p/>
+          <a:p>
+            <a:r>
+              <a:t>DEMO SCRIPT — follow this order exactly:</a:t>
+            </a:r>
+          </a:p>
+          <a:p/>
+          <a:p>
+            <a:r>
+              <a:t>1. HOME PAGE (20s)</a:t>
+            </a:r>
+          </a:p>
+          <a:p>
+            <a:r>
+              <a:t>   SAY: "This is the landing page. Everything you will see is free — there is no paid tier."</a:t>
+            </a:r>
+          </a:p>
+          <a:p/>
+          <a:p>
+            <a:r>
+              <a:t>2. SIGN IN AS JOB SEEKER (20s)</a:t>
+            </a:r>
+          </a:p>
+          <a:p>
+            <a:r>
+              <a:t>   SAY: "I will sign in as a job seeker. Accounts are email-verified with a six-digit code, and passwords are stored only as bcrypt hashes."</a:t>
+            </a:r>
+          </a:p>
+          <a:p/>
+          <a:p>
+            <a:r>
+              <a:t>3. RESUME BUILDER (70s)</a:t>
+            </a:r>
+          </a:p>
+          <a:p>
+            <a:r>
+              <a:t>   SAY: "The builder takes you through one step at a time. Watch the skills step — when I add a skill, it asks me where I used it, and I have to pick something already on my resume rather than type one. A skill with a source counts fully in the score. A skill without one still counts, at half — never zero, because a skill you taught yourself is still real."</a:t>
+            </a:r>
+          </a:p>
+          <a:p>
+            <a:r>
+              <a:t>   THEN: show the design picker. "Fourteen designs, all single-column and parser-safe. The design changes how it looks to a person, not how software reads it."</a:t>
+            </a:r>
+          </a:p>
+          <a:p/>
+          <a:p>
+            <a:r>
+              <a:t>4. BROWSE OPENINGS (50s)</a:t>
+            </a:r>
+          </a:p>
+          <a:p>
+            <a:r>
+              <a:t>   SAY: "Now I browse our partner's openings. Every one shows my score against it, computed live from my resume. Here is one where I score strongly, and here is one where I do not."</a:t>
+            </a:r>
+          </a:p>
+          <a:p>
+            <a:r>
+              <a:t>   OPEN THE LOW ONE: "This is the part I most want you to see. It does not reject me. It tells me how many required skills I am missing and what kind they are — and then it recommends related positions I actually fit."</a:t>
+            </a:r>
+          </a:p>
+          <a:p/>
+          <a:p>
+            <a:r>
+              <a:t>5. APPLY (25s)</a:t>
+            </a:r>
+          </a:p>
+          <a:p>
+            <a:r>
+              <a:t>   SAY: "I apply, and the system stores a snapshot of my score at this moment. If I edit my resume tomorrow, it cannot silently reorder a shortlist the recruiter has already worked through."</a:t>
+            </a:r>
+          </a:p>
+          <a:p/>
+          <a:p>
+            <a:r>
+              <a:t>6. SWITCH TO RECRUITER (80s)</a:t>
+            </a:r>
+          </a:p>
+          <a:p>
+            <a:r>
+              <a:t>   SAY: "Same opening, other side. The recruiter sees everyone who applied, ranked, with the breakdown for each. Nobody is hidden and nobody is auto-rejected — every applicant stays on this list whatever their score."</a:t>
+            </a:r>
+          </a:p>
+          <a:p>
+            <a:r>
+              <a:t>   OPEN AN APPLICANT: "Two resumes side by side: the structured one we scored, and the file the applicant uploaded, which we also score so they can see what automated reading makes of their own document. Only the structured one decides the ranking."</a:t>
+            </a:r>
+          </a:p>
+          <a:p/>
+          <a:p>
+            <a:r>
+              <a:t>7. STATUS + INVITATION (55s)</a:t>
+            </a:r>
+          </a:p>
+          <a:p>
+            <a:r>
+              <a:t>   SAY: "I change the status. That writes a row recording who changed it and when. The applicant is emailed and can follow it through ten states. And if I want to interview them, I write a message and attach a proposed date — the email carries a one-click Add to Google Calendar button."</a:t>
+            </a:r>
+          </a:p>
+          <a:p/>
+          <a:p>
+            <a:r>
+              <a:t>VISUAL: Full screen recording. Hide bookmarks bar. Use a clean browser profile. Zoom to 110% so text is readable in the recording.</a:t>
+            </a:r>
+          </a:p>
+          <a:p/>
+          <a:p>
+            <a:r>
+              <a:t>TRANSITION: Return to the deck. Click to Slide 12.</a:t>
             </a:r>
           </a:p>
         </p:txBody>
@@ -726,7 +884,30 @@
           <a:lstStyle/>
           <a:p>
             <a:r>
-              <a:t>TIME: 50-60 sec. SAY: 'Six of our eight objectives are directly supported by respondent data. Two are not — nobody rated the administrator account, because none of our three respondent groups uses it, and no instrument specifically asked whether a low-experience user found the system usable. We say that plainly rather than assume it. That is what an honest capstone looks like.' VISUAL: table on screen. TRANSITION: 'So who actually benefits, and where are the real limits?'</a:t>
+              <a:t>TIME: 13:00 – 14:25</a:t>
+            </a:r>
+          </a:p>
+          <a:p/>
+          <a:p>
+            <a:r>
+              <a:t>SAY:</a:t>
+            </a:r>
+          </a:p>
+          <a:p>
+            <a:r>
+              <a:t>"Now the research side. Our design is quantitative descriptive — we ask how widely a difficulty is shared and how a defined group rates the system against defined criteria, and those are answered by counting and averaging closed responses. The job seeker strand also carries a one-group pretest-posttest structure, which Campbell and Stanley classify as pre-experimental: four items asked before respondents saw the system, and again after they used it. We built the software with the Agile model, in three increments — and importantly, development was complete and frozen before the first evaluation instrument went out, so every respondent rated the same finished system. Sampling was purposive. We did not use Slovin's formula, and the reason is a real one: Slovin bounds the error of an estimate from random sampling, and there is no list of all Filipino job seekers to draw randomly from. Our respondents were forty-six job seekers inside the target population, eleven HR personnel before and ten after, and three IT experts. Five instruments, all closed items, all written by us except the System Usability Scale, which we reproduced without alteration because its published norms are the entire reason for including it."</a:t>
+            </a:r>
+          </a:p>
+          <a:p/>
+          <a:p>
+            <a:r>
+              <a:t>VISUAL: Five grouped points. Slow on the Agile one — panels probe it.</a:t>
+            </a:r>
+          </a:p>
+          <a:p/>
+          <a:p>
+            <a:r>
+              <a:t>TRANSITION: Click to Slide 13.</a:t>
             </a:r>
           </a:p>
         </p:txBody>
@@ -796,7 +977,30 @@
           <a:lstStyle/>
           <a:p>
             <a:r>
-              <a:t>TIME: 55-65 sec. SAY: 'Job seekers get a completely free tool that produces a resume screening software can actually read. Our partner company gets applications that arrive already scored against its own stated requirements. Our contribution to research is a fully transparent, documented scoring formula — nothing hidden, nothing learned by a black-box model. But we're direct about the limits: one partner company, one short session per respondent, no control group. And we do not claim the system saves recruiters time — that was the one claim our own data does not support, and we say so rather than hide it.' VISUAL: bullets. TRANSITION: 'So, to close —'</a:t>
+              <a:t>TIME: 14:25 – 15:55</a:t>
+            </a:r>
+          </a:p>
+          <a:p/>
+          <a:p>
+            <a:r>
+              <a:t>SAY:</a:t>
+            </a:r>
+          </a:p>
+          <a:p>
+            <a:r>
+              <a:t>"Here are the results. Job seekers rated functional suitability 4.30, usability 4.28 and reliability 4.23 — an overall 4.28. HR personnel rated 4.17, 4.22 and 4.33 — an overall 4.22. Both of those sit in the good band. And I want to be precise here: neither group reached the excellent band on any characteristic. The threshold for excellent is 4.50, and no user-group figure touches it. IT experts, who examined the system and its source code rather than using it, rated all five characteristics in the excellent band, with security highest at 4.89 and an overall 4.80. We report these side by side and we deliberately do not pool them, because one group is rating what it used and the other is rating what it inspected — averaging them would produce a figure belonging to neither. The honest headline is this: the two groups who actually used the system both put it in the good band. Only the panel that inspected the code put it in the band above."</a:t>
+            </a:r>
+          </a:p>
+          <a:p/>
+          <a:p>
+            <a:r>
+              <a:t>VISUAL: Chart with band lines marked. Trace the 4.50 line with the cursor.</a:t>
+            </a:r>
+          </a:p>
+          <a:p/>
+          <a:p>
+            <a:r>
+              <a:t>TRANSITION: Click to Slide 14.</a:t>
             </a:r>
           </a:p>
         </p:txBody>
@@ -866,7 +1070,30 @@
           <a:lstStyle/>
           <a:p>
             <a:r>
-              <a:t>TIME: 45-55 sec. SAY: 'Our conclusion: the two-sided hiring problem we set out to study is real, and Linaw PH's transparency and human-control design is its most strongly supported result — stronger than any claim about saving time, which we don't make. Going forward, we recommend adding a relevance measure to the experience score, making the weight control easier to find, and testing this at more than one company.' VISUAL: bullets. TRANSITION: to the closing summary slide.</a:t>
+              <a:t>TIME: 15:55 – 17:00</a:t>
+            </a:r>
+          </a:p>
+          <a:p/>
+          <a:p>
+            <a:r>
+              <a:t>SAY:</a:t>
+            </a:r>
+          </a:p>
+          <a:p>
+            <a:r>
+              <a:t>"We also asked four of the same questions before and after. Two moved significantly. Worry that a computer would reject a resume before a person read it fell from 3.93 to 2.65 — a large effect, with p below point zero zero one. Not being able to tell from a posting whether you qualify fell from 3.96 to 3.43 — a smaller but still significant effect. Both items are worded so that agreeing reports a difficulty, so a fall is an improvement. I should be straightforward about one thing: this compares two groups of forty-six rather than the same forty-six measured twice. Our linking field was an optional email address, and too few respondents supplied one for the paired test we designed, so we report the unpaired form rather than leave the comparison unmade. Separately, the System Usability Scale returned 74.7, above both benchmarks we fixed in advance — the 68 commonly cited as average, and the 70.14 from Bangor and colleagues across more than two thousand administrations."</a:t>
+            </a:r>
+          </a:p>
+          <a:p/>
+          <a:p>
+            <a:r>
+              <a:t>VISUAL: Horizontal bar chart with effect sizes annotated.</a:t>
+            </a:r>
+          </a:p>
+          <a:p/>
+          <a:p>
+            <a:r>
+              <a:t>TRANSITION: Click to Slide 15.</a:t>
             </a:r>
           </a:p>
         </p:txBody>
@@ -936,7 +1163,216 @@
           <a:lstStyle/>
           <a:p>
             <a:r>
-              <a:t>TIME: 25-35 sec. SAY: 'A two-sided hiring problem, a transparent scoring system, built and tested end to end, rated good to excellent by everyone who touched it, with an honest account of its limits. Thank you for watching.' VISUAL: closing card. END OF VIDEO.</a:t>
+              <a:t>TIME: 17:00 – 17:55</a:t>
+            </a:r>
+          </a:p>
+          <a:p/>
+          <a:p>
+            <a:r>
+              <a:t>SAY:</a:t>
+            </a:r>
+          </a:p>
+          <a:p>
+            <a:r>
+              <a:t>"Against our three objectives. Objective one, build the system: every module was built and exercised by real respondents. All forty-six job seekers registered and signed in, thirty-seven built a resume in the builder, thirty-eight applied, and forty-three read something in the learning hub. All ten HR personnel completed every task on their sheet. Objective two, the matching feature: worry about automated screening fell with a large effect, all ten recruiters placed our top-ranked applicant inside their own top three, and every one of the ten rated trust at exactly four out of five — unanimous agreement, with a standard deviation of zero. Objective three, the evaluation: all five ISO characteristics rated across three groups, a System Usability Scale score above both benchmarks, and Cronbach's alpha reported per characteristic — including the two values that came out below point seven, which we report as they stand rather than dropping items to improve them."</a:t>
+            </a:r>
+          </a:p>
+          <a:p/>
+          <a:p>
+            <a:r>
+              <a:t>VISUAL: Three rows. This is where you demonstrate that every claim has a number.</a:t>
+            </a:r>
+          </a:p>
+          <a:p/>
+          <a:p>
+            <a:r>
+              <a:t>TRANSITION: Click to Slide 16.</a:t>
+            </a:r>
+          </a:p>
+        </p:txBody>
+      </p:sp>
+      <p:sp>
+        <p:nvSpPr>
+          <p:cNvPr id="4" name="Slide Number Placeholder 3"/>
+          <p:cNvSpPr>
+            <a:spLocks noGrp="1"/>
+          </p:cNvSpPr>
+          <p:nvPr>
+            <p:ph type="sldNum" idx="5" sz="quarter"/>
+          </p:nvPr>
+        </p:nvSpPr>
+        <p:spPr/>
+      </p:sp>
+    </p:spTree>
+  </p:cSld>
+  <p:clrMapOvr>
+    <a:masterClrMapping/>
+  </p:clrMapOvr>
+</p:notes>
+</file>
+
+<file path=ppt/notesSlides/notesSlide16.xml><?xml version="1.0" encoding="utf-8"?>
+<p:notes xmlns:a="http://schemas.openxmlformats.org/drawingml/2006/main" xmlns:p="http://schemas.openxmlformats.org/presentationml/2006/main" xmlns:r="http://schemas.openxmlformats.org/officeDocument/2006/relationships">
+  <p:cSld>
+    <p:spTree>
+      <p:nvGrpSpPr>
+        <p:cNvPr id="1" name=""/>
+        <p:cNvGrpSpPr/>
+        <p:nvPr/>
+      </p:nvGrpSpPr>
+      <p:grpSpPr>
+        <a:xfrm>
+          <a:off x="0" y="0"/>
+          <a:ext cx="0" cy="0"/>
+          <a:chOff x="0" y="0"/>
+          <a:chExt cx="0" cy="0"/>
+        </a:xfrm>
+      </p:grpSpPr>
+      <p:sp>
+        <p:nvSpPr>
+          <p:cNvPr id="2" name="Slide Image Placeholder 1"/>
+          <p:cNvSpPr>
+            <a:spLocks noGrp="1"/>
+          </p:cNvSpPr>
+          <p:nvPr>
+            <p:ph type="sldImg" idx="2"/>
+          </p:nvPr>
+        </p:nvSpPr>
+        <p:spPr/>
+      </p:sp>
+      <p:sp>
+        <p:nvSpPr>
+          <p:cNvPr id="3" name="Notes Placeholder 2"/>
+          <p:cNvSpPr>
+            <a:spLocks noGrp="1"/>
+          </p:cNvSpPr>
+          <p:nvPr>
+            <p:ph type="body" idx="3" sz="quarter"/>
+          </p:nvPr>
+        </p:nvSpPr>
+        <p:spPr/>
+        <p:txBody>
+          <a:bodyPr/>
+          <a:lstStyle/>
+          <a:p>
+            <a:r>
+              <a:t>TIME: 17:55 – 18:45</a:t>
+            </a:r>
+          </a:p>
+          <a:p/>
+          <a:p>
+            <a:r>
+              <a:t>SAY:</a:t>
+            </a:r>
+          </a:p>
+          <a:p>
+            <a:r>
+              <a:t>"I want to close on what this study does not establish, because a result is only worth as much as the limits you state with it. First and most important: we built this system and we also evaluated it. That is a real source of favourable bias. We put four measures in place against it — responses were confidential, no researcher was present while anyone answered, our invitation said explicitly that critical ratings were as useful as favourable ones, and we published the interpretation scale before collecting any data. Those limit the bias. They do not remove it. Second, this is one company in one industry, and each respondent used the system for a single session of twenty to thirty minutes — enough to judge usability, not enough to judge reliability over time. Third, two of our three score components measure quantity rather than relevance, which four of our ten recruiters spotted independently, and which is now the first item in our recommendations. And finally, we measured the quality of the system, not whether it gets anybody hired. That question is outside what this design can answer."</a:t>
+            </a:r>
+          </a:p>
+          <a:p/>
+          <a:p>
+            <a:r>
+              <a:t>VISUAL: Four grouped points. Deliver this calmly and without hedging.</a:t>
+            </a:r>
+          </a:p>
+          <a:p/>
+          <a:p>
+            <a:r>
+              <a:t>TRANSITION: Click to Slide 17.</a:t>
+            </a:r>
+          </a:p>
+        </p:txBody>
+      </p:sp>
+      <p:sp>
+        <p:nvSpPr>
+          <p:cNvPr id="4" name="Slide Number Placeholder 3"/>
+          <p:cNvSpPr>
+            <a:spLocks noGrp="1"/>
+          </p:cNvSpPr>
+          <p:nvPr>
+            <p:ph type="sldNum" idx="5" sz="quarter"/>
+          </p:nvPr>
+        </p:nvSpPr>
+        <p:spPr/>
+      </p:sp>
+    </p:spTree>
+  </p:cSld>
+  <p:clrMapOvr>
+    <a:masterClrMapping/>
+  </p:clrMapOvr>
+</p:notes>
+</file>
+
+<file path=ppt/notesSlides/notesSlide17.xml><?xml version="1.0" encoding="utf-8"?>
+<p:notes xmlns:a="http://schemas.openxmlformats.org/drawingml/2006/main" xmlns:p="http://schemas.openxmlformats.org/presentationml/2006/main" xmlns:r="http://schemas.openxmlformats.org/officeDocument/2006/relationships">
+  <p:cSld>
+    <p:spTree>
+      <p:nvGrpSpPr>
+        <p:cNvPr id="1" name=""/>
+        <p:cNvGrpSpPr/>
+        <p:nvPr/>
+      </p:nvGrpSpPr>
+      <p:grpSpPr>
+        <a:xfrm>
+          <a:off x="0" y="0"/>
+          <a:ext cx="0" cy="0"/>
+          <a:chOff x="0" y="0"/>
+          <a:chExt cx="0" cy="0"/>
+        </a:xfrm>
+      </p:grpSpPr>
+      <p:sp>
+        <p:nvSpPr>
+          <p:cNvPr id="2" name="Slide Image Placeholder 1"/>
+          <p:cNvSpPr>
+            <a:spLocks noGrp="1"/>
+          </p:cNvSpPr>
+          <p:nvPr>
+            <p:ph type="sldImg" idx="2"/>
+          </p:nvPr>
+        </p:nvSpPr>
+        <p:spPr/>
+      </p:sp>
+      <p:sp>
+        <p:nvSpPr>
+          <p:cNvPr id="3" name="Notes Placeholder 2"/>
+          <p:cNvSpPr>
+            <a:spLocks noGrp="1"/>
+          </p:cNvSpPr>
+          <p:nvPr>
+            <p:ph type="body" idx="3" sz="quarter"/>
+          </p:nvPr>
+        </p:nvSpPr>
+        <p:spPr/>
+        <p:txBody>
+          <a:bodyPr/>
+          <a:lstStyle/>
+          <a:p>
+            <a:r>
+              <a:t>TIME: 18:45 – 19:30</a:t>
+            </a:r>
+          </a:p>
+          <a:p/>
+          <a:p>
+            <a:r>
+              <a:t>SAY:</a:t>
+            </a:r>
+          </a:p>
+          <a:p>
+            <a:r>
+              <a:t>"To conclude. Linaw PH addresses a two-sided problem with a single free platform: job seekers get guided resume creation in a format screening software can read, and recruiters get applications arriving already structured, scored and ranked. What makes it different from the tools we reviewed is that the applicant sees the same score the recruiter sees, with the same reasoning — and that nobody is ever rejected automatically. Job seekers rated it 4.28, HR personnel 4.22, and IT experts 4.80, with a System Usability Scale score of 74.7, above both published benchmarks. The finding supported most consistently across every instrument was the value of transparency and human control. Our recommendations follow directly from what we found: add relevance to the experience component, make the per-posting weight control more visible, collect a proper linking code for paired analysis, and extend the study beyond a single partner company. Thank you for watching."</a:t>
+            </a:r>
+          </a:p>
+          <a:p/>
+          <a:p>
+            <a:r>
+              <a:t>VISUAL: Full-bleed navy closing slide. Hold for three seconds after you stop speaking before ending the recording.</a:t>
+            </a:r>
+          </a:p>
+          <a:p/>
+          <a:p>
+            <a:r>
+              <a:t>TRANSITION: End of presentation.</a:t>
             </a:r>
           </a:p>
         </p:txBody>
@@ -1006,7 +1442,30 @@
           <a:lstStyle/>
           <a:p>
             <a:r>
-              <a:t>TIME: 75-90 sec. SAY: 'New job seekers face two problems at once. Their resumes are hard for both software and people to read, and when they get rejected, nobody tells them why. On the other side, recruiters at our partner company, Clark Outsourcing, screen applications mostly by hand and told us formatting gets in their way more than anything else. We didn't assume this problem — we surveyed 46 job seekers and 11 HR staff before building anything, separately, and neither group saw the other's answers. They described the same problem from opposite ends.' VISUAL: the three stat cards on screen while narrating. TRANSITION: 'So here is what we built to fix it.'</a:t>
+              <a:t>TIME: 0:40 – 1:55</a:t>
+            </a:r>
+          </a:p>
+          <a:p/>
+          <a:p>
+            <a:r>
+              <a:t>SAY:</a:t>
+            </a:r>
+          </a:p>
+          <a:p>
+            <a:r>
+              <a:t>"The problem has two sides. For Filipino job seekers, especially fresh graduates, making a good resume is hard, and the tools that help cost money. Worse, when they finally apply, screening software often filters them out before a person ever reads their application — and nobody tells them why, so they cannot improve. For recruiters, the same problem from the other direction: HR departments receive hundreds of unstructured applications a month and screen them by hand, and proper screening software is priced for large enterprises. Existing platforms only half-solve this. Job boards assume you already know what to search for. Resume tools like Canva and Zety are not built for ATS compatibility or for the Philippine market."</a:t>
+            </a:r>
+          </a:p>
+          <a:p/>
+          <a:p>
+            <a:r>
+              <a:t>VISUAL: Three grouped points appear together. Let the viewer read the bold labels.</a:t>
+            </a:r>
+          </a:p>
+          <a:p/>
+          <a:p>
+            <a:r>
+              <a:t>TRANSITION: Click to Slide 3.</a:t>
             </a:r>
           </a:p>
         </p:txBody>
@@ -1076,7 +1535,30 @@
           <a:lstStyle/>
           <a:p>
             <a:r>
-              <a:t>TIME: 50-60 sec. SAY: 'We built Linaw PH, a free system with two sides. Job seekers get a guided builder that produces a resume screening software can actually read. Recruiters get that same resume already scored and ranked against what their posting asks for. We chose a rule-based formula on purpose, not machine learning — because an applicant deserves to know exactly why they got a number, and a model we can't fully explain can't be shown to the person it judges.' VISUAL: simple before/after split — unstructured resume vs structured score breakdown, if a graphic is available; otherwise stay on the bullets. TRANSITION: 'Here's exactly who this is for and what it does.'</a:t>
+              <a:t>TIME: 1:55 – 3:00</a:t>
+            </a:r>
+          </a:p>
+          <a:p/>
+          <a:p>
+            <a:r>
+              <a:t>SAY:</a:t>
+            </a:r>
+          </a:p>
+          <a:p>
+            <a:r>
+              <a:t>"We did not assume the problem. Before we built anything, we surveyed real job seekers and the HR department of our partner company. A hundred and three valid responses came back, and forty-six of those are inside our target population — students about to graduate, fresh graduates, and people looking for work again. Formatting a resume was rated frustrating at four out of five. Worry about being rejected by a computer, 3.93. And the highest-rated item of all, at 4.43, was wanting to see the same score the company sees. Notice the second column: our target group rates every single item more strongly than the full set of respondents. The people this study is about feel these problems harder than everyone else. On the recruiter side, the two highest-rated items were that poorly formatted resumes make information hard to find, and that they would only trust a score if they could see how it was calculated — both at 4.64."</a:t>
+            </a:r>
+          </a:p>
+          <a:p/>
+          <a:p>
+            <a:r>
+              <a:t>VISUAL: Table builds all at once. Point at the 4.43 row and at the second column.</a:t>
+            </a:r>
+          </a:p>
+          <a:p/>
+          <a:p>
+            <a:r>
+              <a:t>TRANSITION: Click to Slide 4.</a:t>
             </a:r>
           </a:p>
         </p:txBody>
@@ -1146,7 +1628,30 @@
           <a:lstStyle/>
           <a:p>
             <a:r>
-              <a:t>TIME: 70-85 sec. SAY: 'The system serves three account types. Job seekers build resumes and apply. Recruiters post openings, review ranked applicants, and manage the hiring pipeline. An administrator — our research team — approves recruiter access and keeps departments routed correctly. Our scope is one partner company for this evaluation, Clark Outsourcing in Clark Freeport Zone, though the system itself is built to support more than one.' VISUAL: the table stays up the whole time. TRANSITION: 'Let's look at the features that matter most.'</a:t>
+              <a:t>TIME: 3:00 – 4:05</a:t>
+            </a:r>
+          </a:p>
+          <a:p/>
+          <a:p>
+            <a:r>
+              <a:t>SAY:</a:t>
+            </a:r>
+          </a:p>
+          <a:p>
+            <a:r>
+              <a:t>"So we built Linaw PH. It is a free website with two sides. On one side a job seeker builds a resume, guided step by step, in a format screening software can actually read. On the other side, a recruiter posts an opening and receives applicants already scored and ranked, with the reason for each score. The part that matters most, and the part that does not exist in the tools we surveyed, is that both sides see the same number. The applicant is not kept in the dark about how they were judged. And our system never rejects anybody automatically. A low score changes what the system recommends — it never changes whether the application is received. So instead of silence, the applicant gets something they can act on: how many required skills they are missing, what kind they are, and which related openings actually fit them."</a:t>
+            </a:r>
+          </a:p>
+          <a:p/>
+          <a:p>
+            <a:r>
+              <a:t>VISUAL: Four grouped points. Slow down on the second one — it is the contribution.</a:t>
+            </a:r>
+          </a:p>
+          <a:p/>
+          <a:p>
+            <a:r>
+              <a:t>TRANSITION: Click to Slide 5.</a:t>
             </a:r>
           </a:p>
         </p:txBody>
@@ -1216,7 +1721,30 @@
           <a:lstStyle/>
           <a:p>
             <a:r>
-              <a:t>TIME: 70-85 sec. SAY: 'Four features carry the whole system. The guided builder — three resume formats, fourteen designs, all parser-safe. The matching score — transparent, adjustable per job posting, and shown in full to the applicant. The system never auto-rejects — if there's no strong match it still shows the score honestly and suggests related openings. And every application moves through nine tracked stages with a full audit trail, so nothing happens invisibly.' VISUAL: screenshots of the builder and the score breakdown if available. TRANSITION: 'Here's how those pieces actually connect end to end.'</a:t>
+              <a:t>TIME: 4:05 – 4:50</a:t>
+            </a:r>
+          </a:p>
+          <a:p/>
+          <a:p>
+            <a:r>
+              <a:t>SAY:</a:t>
+            </a:r>
+          </a:p>
+          <a:p>
+            <a:r>
+              <a:t>"We have one primary objective and three specific ones. The easy way to remember them is: build it, match with it, measure it. Objective one is to build the system — the guided resume builder, the recruiter dashboard, the learning hub, and the optional AI-assisted extraction. Objective two is the matching feature itself: a transparent, rule-based score that compares the resume against what the posting asks for, and is shown to both sides. Objective three is to evaluate the finished system against the ISO/IEC 25010 software quality standard — functional suitability, usability and reliability from the people who used it, plus security and maintainability from IT experts, because those two are things no amount of ordinary use would reveal."</a:t>
+            </a:r>
+          </a:p>
+          <a:p/>
+          <a:p>
+            <a:r>
+              <a:t>VISUAL: Three numbered blocks. The subtitle is the memory hook.</a:t>
+            </a:r>
+          </a:p>
+          <a:p/>
+          <a:p>
+            <a:r>
+              <a:t>TRANSITION: Click to Slide 6.</a:t>
             </a:r>
           </a:p>
         </p:txBody>
@@ -1286,7 +1814,30 @@
           <a:lstStyle/>
           <a:p>
             <a:r>
-              <a:t>TIME: 45-55 sec. SAY: 'On the job seeker side: register, verify your email, build your resume step by step, then browse postings and see your match score before you even apply. On the recruiter side: once approved, they create a posting, optionally adjust the scoring weights, then get a ranked list of every applicant with a full score breakdown, and manage status from there. Both paths meet at the same database record — the application.' VISUAL: the two-column flow stays on screen. TRANSITION: 'That flow runs on a specific technology stack — quickly, what's under the hood.'</a:t>
+              <a:t>TIME: 4:50 – 5:30</a:t>
+            </a:r>
+          </a:p>
+          <a:p/>
+          <a:p>
+            <a:r>
+              <a:t>SAY:</a:t>
+            </a:r>
+          </a:p>
+          <a:p>
+            <a:r>
+              <a:t>"The system has three account types. A job seeker builds and exports resumes, browses openings with a live match score against each one, applies, and tracks the application — and can withdraw it at any point, which is a status only they control. A recruiter manages the company profile, posts openings and sets the weights for that particular opening, then receives applicants already scored and ranked, reads both resumes side by side, changes the status, and can email an interview invitation. The administrator account is operated by the research team: it approves recruiter access, assigns departments so applications route to the right person, and produces the anonymous totals used to evaluate the study."</a:t>
+            </a:r>
+          </a:p>
+          <a:p/>
+          <a:p>
+            <a:r>
+              <a:t>VISUAL: Three rows. Emphasise that withdraw belongs to the applicant only.</a:t>
+            </a:r>
+          </a:p>
+          <a:p/>
+          <a:p>
+            <a:r>
+              <a:t>TRANSITION: Click to Slide 7.</a:t>
             </a:r>
           </a:p>
         </p:txBody>
@@ -1356,7 +1907,30 @@
           <a:lstStyle/>
           <a:p>
             <a:r>
-              <a:t>TIME: 45-55 sec. SAY: 'In simple terms: Angular builds what you see on screen. Node with TypeScript runs the logic behind it — checking logins, computing scores. PostgreSQL stores everything — users, resumes, postings, applications. We used the same language, TypeScript, on both the browser side and the server side specifically so the scoring formula is written once, not copy-pasted twice where it could quietly go out of sync.' VISUAL: stay on the three-layer text; a simple boxes-and-arrows diagram works if you have one. TRANSITION: 'Here's how that data is actually organised.'</a:t>
+              <a:t>TIME: 5:30 – 6:30</a:t>
+            </a:r>
+          </a:p>
+          <a:p/>
+          <a:p>
+            <a:r>
+              <a:t>SAY:</a:t>
+            </a:r>
+          </a:p>
+          <a:p>
+            <a:r>
+              <a:t>"Here is what is inside. The guided builder takes the user through a resume one step at a time, offering three content formats and fourteen designs — all single-column, with no tables, text boxes or graphics, so the design changes how the resume looks to a person without changing how software reads it. Resumes export as PDF, Word or plain text. There is a learning hub built into the site. There is an optional AI-assisted feature that reads an uploaded resume into the builder to save retyping — and I want to be precise about this: it only reads. It never scores, ranks or recommends. The matching feature computes the compatibility score and shows the breakdown to both sides. When there is no strong match it recommends related positions. Applications move through ten states with a full audit trail. Recruiters can send interview invitations with a one-click add-to-calendar. And the whole thing runs on verified accounts, hashed passwords and role-based access, with applicants able to export or delete all their own data."</a:t>
+            </a:r>
+          </a:p>
+          <a:p/>
+          <a:p>
+            <a:r>
+              <a:t>VISUAL: Nine bullets — do not read every one. Group them as you speak.</a:t>
+            </a:r>
+          </a:p>
+          <a:p/>
+          <a:p>
+            <a:r>
+              <a:t>TRANSITION: Click to Slide 8.</a:t>
             </a:r>
           </a:p>
         </p:txBody>
@@ -1426,7 +2000,30 @@
           <a:lstStyle/>
           <a:p>
             <a:r>
-              <a:t>TIME: 40-50 sec. SAY: 'This is the actual database, twenty-four tables. The important relationships: one user has many resumes; one posting has many applications; every application links one applicant, one resume and one posting, with its score and full status history recorded. Nothing about a hiring decision is invisible or untracked.' VISUAL: full ERD on screen, zoom into the applications/match_scores area if recording lets you. TRANSITION: 'Enough diagrams — let's see it running.'</a:t>
+              <a:t>TIME: 6:30 – 7:45</a:t>
+            </a:r>
+          </a:p>
+          <a:p/>
+          <a:p>
+            <a:r>
+              <a:t>SAY:</a:t>
+            </a:r>
+          </a:p>
+          <a:p>
+            <a:r>
+              <a:t>"This is the heart of the system, and it is deliberately simple arithmetic. The score is skills times their weight, plus education times its weight, plus experience times its weight, plus an optional certificates component — all multiplied by a hundred. By default that is fifty percent skills, twenty-five education, twenty-five experience, with certificates at zero unless a recruiter chooses to give it a share on their own opening. A recruiter can rebalance an opening, but skills, education and experience can never fall below ten percent each, so none of the three can be dropped entirely. Two properties matter for our claims. It is deterministic: the same resume and the same posting always produce the same number. And it is explainable: both the applicant and the recruiter are shown how that number was reached. There is no machine learning anywhere in the scoring — deliberately, because a learned model would give us a score we could not fully explain to the person it is about, which is exactly the opacity we set out to fix."</a:t>
+            </a:r>
+          </a:p>
+          <a:p/>
+          <a:p>
+            <a:r>
+              <a:t>VISUAL: Four stat cards. The formula is the subtitle line under the heading.</a:t>
+            </a:r>
+          </a:p>
+          <a:p/>
+          <a:p>
+            <a:r>
+              <a:t>TRANSITION: Click to Slide 9.</a:t>
             </a:r>
           </a:p>
         </p:txBody>
@@ -1496,7 +2093,30 @@
           <a:lstStyle/>
           <a:p>
             <a:r>
-              <a:t>TIME: 3.5-4.5 min — THIS IS THE LONGEST SLIDE. Keep it on screen while you screen-share/switch to the live system; do not click back to this slide until the demo is done. FULL STEP-BY-STEP SCRIPT IS IN THE COMPANION DEMO SCRIPT DOCUMENT — follow it exactly for what to click and what to say at each step. The one sentence to repeat during the demo: 'Notice the applicant and the recruiter are looking at the exact same score and the exact same reasons.' That single sentence is the whole research problem being solved on screen. TRANSITION after demo: 'Now — how do we know this actually works, and how do we know it's any good?'</a:t>
+              <a:t>TIME: 7:45 – 8:30</a:t>
+            </a:r>
+          </a:p>
+          <a:p/>
+          <a:p>
+            <a:r>
+              <a:t>SAY:</a:t>
+            </a:r>
+          </a:p>
+          <a:p>
+            <a:r>
+              <a:t>"The front end is Angular with TypeScript. The back end is Node and Express, also in TypeScript, and it holds every rule that must not be trusted to the browser — authentication, role-based access control, and the score computation itself. Data lives in PostgreSQL on Supabase. We originally planned MySQL and changed during the design phase, for three reasons: PostgreSQL enforces the permitted application statuses at the database level, it applies schema changes transactionally so a failed migration cannot leave the database half-updated, and Supabase offers it on a managed free tier appropriate to a capstone. Hosting is Render. Email goes through Brevo. And the optional Gemini API reads uploaded resumes into fields — again, it never scores anything."</a:t>
+            </a:r>
+          </a:p>
+          <a:p/>
+          <a:p>
+            <a:r>
+              <a:t>VISUAL: Six rows. The Gemini row is the one to point at.</a:t>
+            </a:r>
+          </a:p>
+          <a:p/>
+          <a:p>
+            <a:r>
+              <a:t>TRANSITION: Click to Slide 10.</a:t>
             </a:r>
           </a:p>
         </p:txBody>
@@ -4580,7 +5200,7 @@
                 </a:solidFill>
                 <a:latin typeface="Calibri"/>
               </a:rPr>
-              <a:t>CAPSTONE VIDEO PRESENTATION</a:t>
+              <a:t>CAPSTONE PROJECT  ·  VIDEO PRESENTATION</a:t>
             </a:r>
           </a:p>
           <a:p>
@@ -4674,7 +5294,7 @@
                 </a:solidFill>
                 <a:latin typeface="Calibri"/>
               </a:rPr>
-              <a:t>Garcia, Byrone  ·  Santos, Francis Allen  ·  Talens, Isaiah</a:t>
+              <a:t>Byrone S. Garcia   ·   Francis Allen L. Santos   ·   Isaiah Genre M. Talens</a:t>
             </a:r>
           </a:p>
           <a:p>
@@ -4690,7 +5310,7 @@
                 </a:solidFill>
                 <a:latin typeface="Calibri"/>
               </a:rPr>
-              <a:t>BS Information Technology, Web Development  ·  School of Computing, Holy Angel University</a:t>
+              <a:t>Adviser: Jeanky S. Mendez, DIT</a:t>
             </a:r>
           </a:p>
           <a:p>
@@ -4706,7 +5326,23 @@
                 </a:solidFill>
                 <a:latin typeface="Calibri"/>
               </a:rPr>
-              <a:t>Adviser: Dr. Jeanky Salenga-Mendez  ·  Partner company: Clark Outsourcing, Clark Freeport Zone</a:t>
+              <a:t>Bachelor of Science in Information Technology, Area of Specialization in Web Development</a:t>
+            </a:r>
+          </a:p>
+          <a:p>
+            <a:pPr>
+              <a:spcAft>
+                <a:spcPts val="500"/>
+              </a:spcAft>
+            </a:pPr>
+            <a:r>
+              <a:rPr sz="1500" b="0" i="0">
+                <a:solidFill>
+                  <a:srgbClr val="5A6B8C"/>
+                </a:solidFill>
+                <a:latin typeface="Calibri"/>
+              </a:rPr>
+              <a:t>School of Computing, Holy Angel University   ·   Partner: Clark Outsourcing</a:t>
             </a:r>
           </a:p>
         </p:txBody>
@@ -4763,7 +5399,7 @@
                 </a:solidFill>
                 <a:latin typeface="Calibri"/>
               </a:rPr>
-              <a:t>METHODOLOGY</a:t>
+              <a:t>VERIFICATION</a:t>
             </a:r>
           </a:p>
         </p:txBody>
@@ -4802,7 +5438,839 @@
                 </a:solidFill>
                 <a:latin typeface="Calibri"/>
               </a:rPr>
-              <a:t>Methodology and Development</a:t>
+              <a:t>How we know the system works</a:t>
+            </a:r>
+          </a:p>
+        </p:txBody>
+      </p:sp>
+      <p:sp>
+        <p:nvSpPr>
+          <p:cNvPr id="4" name="TextBox 3"/>
+          <p:cNvSpPr txBox="1"/>
+          <p:nvPr/>
+        </p:nvSpPr>
+        <p:spPr>
+          <a:xfrm>
+            <a:off x="658368" y="1389888"/>
+            <a:ext cx="10881360" cy="365760"/>
+          </a:xfrm>
+          <a:prstGeom prst="rect">
+            <a:avLst/>
+          </a:prstGeom>
+          <a:noFill/>
+        </p:spPr>
+        <p:txBody>
+          <a:bodyPr wrap="square" lIns="0" rIns="0" tIns="0" bIns="0" anchor="t">
+            <a:spAutoFit/>
+          </a:bodyPr>
+          <a:lstStyle/>
+          <a:p>
+            <a:pPr algn="l">
+              <a:spcAft>
+                <a:spcPts val="0"/>
+              </a:spcAft>
+            </a:pPr>
+            <a:r>
+              <a:rPr sz="1500" b="0" i="1">
+                <a:solidFill>
+                  <a:srgbClr val="5A6B8C"/>
+                </a:solidFill>
+                <a:latin typeface="Calibri"/>
+              </a:rPr>
+              <a:t>Engineering evidence, produced by us — separate from the research data</a:t>
+            </a:r>
+          </a:p>
+        </p:txBody>
+      </p:sp>
+      <p:sp>
+        <p:nvSpPr>
+          <p:cNvPr id="5" name="Rectangle 4"/>
+          <p:cNvSpPr/>
+          <p:nvPr/>
+        </p:nvSpPr>
+        <p:spPr>
+          <a:xfrm>
+            <a:off x="658368" y="1792224"/>
+            <a:ext cx="10881360" cy="20320"/>
+          </a:xfrm>
+          <a:prstGeom prst="rect">
+            <a:avLst/>
+          </a:prstGeom>
+          <a:solidFill>
+            <a:srgbClr val="C3CEE6"/>
+          </a:solidFill>
+          <a:ln>
+            <a:noFill/>
+          </a:ln>
+          <a:effectLst/>
+        </p:spPr>
+        <p:style>
+          <a:lnRef idx="1">
+            <a:schemeClr val="accent1"/>
+          </a:lnRef>
+          <a:fillRef idx="3">
+            <a:schemeClr val="accent1"/>
+          </a:fillRef>
+          <a:effectRef idx="2">
+            <a:schemeClr val="accent1"/>
+          </a:effectRef>
+          <a:fontRef idx="minor">
+            <a:schemeClr val="lt1"/>
+          </a:fontRef>
+        </p:style>
+        <p:txBody>
+          <a:bodyPr rtlCol="0" anchor="ctr"/>
+          <a:lstStyle/>
+          <a:p>
+            <a:pPr algn="ctr"/>
+          </a:p>
+        </p:txBody>
+      </p:sp>
+      <p:sp>
+        <p:nvSpPr>
+          <p:cNvPr id="6" name="Rounded Rectangle 5"/>
+          <p:cNvSpPr/>
+          <p:nvPr/>
+        </p:nvSpPr>
+        <p:spPr>
+          <a:xfrm>
+            <a:off x="658368" y="2121408"/>
+            <a:ext cx="2528316" cy="2148840"/>
+          </a:xfrm>
+          <a:prstGeom prst="roundRect">
+            <a:avLst>
+              <a:gd name="adj" fmla="val 4000"/>
+            </a:avLst>
+          </a:prstGeom>
+          <a:solidFill>
+            <a:srgbClr val="DCE4F5"/>
+          </a:solidFill>
+          <a:ln w="12700">
+            <a:solidFill>
+              <a:srgbClr val="C3CEE6"/>
+            </a:solidFill>
+          </a:ln>
+          <a:effectLst/>
+        </p:spPr>
+        <p:style>
+          <a:lnRef idx="1">
+            <a:schemeClr val="accent1"/>
+          </a:lnRef>
+          <a:fillRef idx="3">
+            <a:schemeClr val="accent1"/>
+          </a:fillRef>
+          <a:effectRef idx="2">
+            <a:schemeClr val="accent1"/>
+          </a:effectRef>
+          <a:fontRef idx="minor">
+            <a:schemeClr val="lt1"/>
+          </a:fontRef>
+        </p:style>
+        <p:txBody>
+          <a:bodyPr rtlCol="0" anchor="ctr"/>
+          <a:lstStyle/>
+          <a:p>
+            <a:pPr algn="ctr"/>
+          </a:p>
+        </p:txBody>
+      </p:sp>
+      <p:sp>
+        <p:nvSpPr>
+          <p:cNvPr id="7" name="TextBox 6"/>
+          <p:cNvSpPr txBox="1"/>
+          <p:nvPr/>
+        </p:nvSpPr>
+        <p:spPr>
+          <a:xfrm>
+            <a:off x="859536" y="2377440"/>
+            <a:ext cx="2125980" cy="1737360"/>
+          </a:xfrm>
+          <a:prstGeom prst="rect">
+            <a:avLst/>
+          </a:prstGeom>
+          <a:noFill/>
+        </p:spPr>
+        <p:txBody>
+          <a:bodyPr wrap="square" lIns="0" rIns="0" tIns="0" bIns="0" anchor="t">
+            <a:spAutoFit/>
+          </a:bodyPr>
+          <a:lstStyle/>
+          <a:p>
+            <a:pPr algn="ctr">
+              <a:spcAft>
+                <a:spcPts val="200"/>
+              </a:spcAft>
+            </a:pPr>
+            <a:r>
+              <a:rPr sz="4200" b="1" i="0">
+                <a:solidFill>
+                  <a:srgbClr val="1F3160"/>
+                </a:solidFill>
+                <a:latin typeface="Calibri"/>
+              </a:rPr>
+              <a:t>232</a:t>
+            </a:r>
+          </a:p>
+          <a:p>
+            <a:pPr algn="ctr">
+              <a:spcAft>
+                <a:spcPts val="600"/>
+              </a:spcAft>
+            </a:pPr>
+            <a:r>
+              <a:rPr sz="1400" b="1" i="0">
+                <a:solidFill>
+                  <a:srgbClr val="2F4B8F"/>
+                </a:solidFill>
+                <a:latin typeface="Calibri"/>
+              </a:rPr>
+              <a:t>AUTOMATED TESTS</a:t>
+            </a:r>
+          </a:p>
+          <a:p>
+            <a:pPr algn="ctr">
+              <a:spcAft>
+                <a:spcPts val="0"/>
+              </a:spcAft>
+            </a:pPr>
+            <a:r>
+              <a:rPr sz="1250" b="0" i="0">
+                <a:solidFill>
+                  <a:srgbClr val="5A6B8C"/>
+                </a:solidFill>
+                <a:latin typeface="Calibri"/>
+              </a:rPr>
+              <a:t>Across eleven suites,
+run in full on every change</a:t>
+            </a:r>
+          </a:p>
+        </p:txBody>
+      </p:sp>
+      <p:sp>
+        <p:nvSpPr>
+          <p:cNvPr id="8" name="Rounded Rectangle 7"/>
+          <p:cNvSpPr/>
+          <p:nvPr/>
+        </p:nvSpPr>
+        <p:spPr>
+          <a:xfrm>
+            <a:off x="3442716" y="2121408"/>
+            <a:ext cx="2528316" cy="2148840"/>
+          </a:xfrm>
+          <a:prstGeom prst="roundRect">
+            <a:avLst>
+              <a:gd name="adj" fmla="val 4000"/>
+            </a:avLst>
+          </a:prstGeom>
+          <a:solidFill>
+            <a:srgbClr val="DCE4F5"/>
+          </a:solidFill>
+          <a:ln w="12700">
+            <a:solidFill>
+              <a:srgbClr val="C3CEE6"/>
+            </a:solidFill>
+          </a:ln>
+          <a:effectLst/>
+        </p:spPr>
+        <p:style>
+          <a:lnRef idx="1">
+            <a:schemeClr val="accent1"/>
+          </a:lnRef>
+          <a:fillRef idx="3">
+            <a:schemeClr val="accent1"/>
+          </a:fillRef>
+          <a:effectRef idx="2">
+            <a:schemeClr val="accent1"/>
+          </a:effectRef>
+          <a:fontRef idx="minor">
+            <a:schemeClr val="lt1"/>
+          </a:fontRef>
+        </p:style>
+        <p:txBody>
+          <a:bodyPr rtlCol="0" anchor="ctr"/>
+          <a:lstStyle/>
+          <a:p>
+            <a:pPr algn="ctr"/>
+          </a:p>
+        </p:txBody>
+      </p:sp>
+      <p:sp>
+        <p:nvSpPr>
+          <p:cNvPr id="9" name="TextBox 8"/>
+          <p:cNvSpPr txBox="1"/>
+          <p:nvPr/>
+        </p:nvSpPr>
+        <p:spPr>
+          <a:xfrm>
+            <a:off x="3643884" y="2377440"/>
+            <a:ext cx="2125980" cy="1737360"/>
+          </a:xfrm>
+          <a:prstGeom prst="rect">
+            <a:avLst/>
+          </a:prstGeom>
+          <a:noFill/>
+        </p:spPr>
+        <p:txBody>
+          <a:bodyPr wrap="square" lIns="0" rIns="0" tIns="0" bIns="0" anchor="t">
+            <a:spAutoFit/>
+          </a:bodyPr>
+          <a:lstStyle/>
+          <a:p>
+            <a:pPr algn="ctr">
+              <a:spcAft>
+                <a:spcPts val="200"/>
+              </a:spcAft>
+            </a:pPr>
+            <a:r>
+              <a:rPr sz="4200" b="1" i="0">
+                <a:solidFill>
+                  <a:srgbClr val="1F3160"/>
+                </a:solidFill>
+                <a:latin typeface="Calibri"/>
+              </a:rPr>
+              <a:t>120+</a:t>
+            </a:r>
+          </a:p>
+          <a:p>
+            <a:pPr algn="ctr">
+              <a:spcAft>
+                <a:spcPts val="600"/>
+              </a:spcAft>
+            </a:pPr>
+            <a:r>
+              <a:rPr sz="1400" b="1" i="0">
+                <a:solidFill>
+                  <a:srgbClr val="2F4B8F"/>
+                </a:solidFill>
+                <a:latin typeface="Calibri"/>
+              </a:rPr>
+              <a:t>BROWSER CHECKS</a:t>
+            </a:r>
+          </a:p>
+          <a:p>
+            <a:pPr algn="ctr">
+              <a:spcAft>
+                <a:spcPts val="0"/>
+              </a:spcAft>
+            </a:pPr>
+            <a:r>
+              <a:rPr sz="1250" b="0" i="0">
+                <a:solidFill>
+                  <a:srgbClr val="5A6B8C"/>
+                </a:solidFill>
+                <a:latin typeface="Calibri"/>
+              </a:rPr>
+              <a:t>Scripted walkthroughs of every
+page, all three accounts,
+down to a 390px phone</a:t>
+            </a:r>
+          </a:p>
+        </p:txBody>
+      </p:sp>
+      <p:sp>
+        <p:nvSpPr>
+          <p:cNvPr id="10" name="Rounded Rectangle 9"/>
+          <p:cNvSpPr/>
+          <p:nvPr/>
+        </p:nvSpPr>
+        <p:spPr>
+          <a:xfrm>
+            <a:off x="6227064" y="2121408"/>
+            <a:ext cx="2528316" cy="2148840"/>
+          </a:xfrm>
+          <a:prstGeom prst="roundRect">
+            <a:avLst>
+              <a:gd name="adj" fmla="val 4000"/>
+            </a:avLst>
+          </a:prstGeom>
+          <a:solidFill>
+            <a:srgbClr val="DCE4F5"/>
+          </a:solidFill>
+          <a:ln w="12700">
+            <a:solidFill>
+              <a:srgbClr val="C3CEE6"/>
+            </a:solidFill>
+          </a:ln>
+          <a:effectLst/>
+        </p:spPr>
+        <p:style>
+          <a:lnRef idx="1">
+            <a:schemeClr val="accent1"/>
+          </a:lnRef>
+          <a:fillRef idx="3">
+            <a:schemeClr val="accent1"/>
+          </a:fillRef>
+          <a:effectRef idx="2">
+            <a:schemeClr val="accent1"/>
+          </a:effectRef>
+          <a:fontRef idx="minor">
+            <a:schemeClr val="lt1"/>
+          </a:fontRef>
+        </p:style>
+        <p:txBody>
+          <a:bodyPr rtlCol="0" anchor="ctr"/>
+          <a:lstStyle/>
+          <a:p>
+            <a:pPr algn="ctr"/>
+          </a:p>
+        </p:txBody>
+      </p:sp>
+      <p:sp>
+        <p:nvSpPr>
+          <p:cNvPr id="11" name="TextBox 10"/>
+          <p:cNvSpPr txBox="1"/>
+          <p:nvPr/>
+        </p:nvSpPr>
+        <p:spPr>
+          <a:xfrm>
+            <a:off x="6428232" y="2377440"/>
+            <a:ext cx="2125980" cy="1737360"/>
+          </a:xfrm>
+          <a:prstGeom prst="rect">
+            <a:avLst/>
+          </a:prstGeom>
+          <a:noFill/>
+        </p:spPr>
+        <p:txBody>
+          <a:bodyPr wrap="square" lIns="0" rIns="0" tIns="0" bIns="0" anchor="t">
+            <a:spAutoFit/>
+          </a:bodyPr>
+          <a:lstStyle/>
+          <a:p>
+            <a:pPr algn="ctr">
+              <a:spcAft>
+                <a:spcPts val="200"/>
+              </a:spcAft>
+            </a:pPr>
+            <a:r>
+              <a:rPr sz="4200" b="1" i="0">
+                <a:solidFill>
+                  <a:srgbClr val="1F3160"/>
+                </a:solidFill>
+                <a:latin typeface="Calibri"/>
+              </a:rPr>
+              <a:t>24</a:t>
+            </a:r>
+          </a:p>
+          <a:p>
+            <a:pPr algn="ctr">
+              <a:spcAft>
+                <a:spcPts val="600"/>
+              </a:spcAft>
+            </a:pPr>
+            <a:r>
+              <a:rPr sz="1400" b="1" i="0">
+                <a:solidFill>
+                  <a:srgbClr val="2F4B8F"/>
+                </a:solidFill>
+                <a:latin typeface="Calibri"/>
+              </a:rPr>
+              <a:t>DATABASE TABLES</a:t>
+            </a:r>
+          </a:p>
+          <a:p>
+            <a:pPr algn="ctr">
+              <a:spcAft>
+                <a:spcPts val="0"/>
+              </a:spcAft>
+            </a:pPr>
+            <a:r>
+              <a:rPr sz="1250" b="0" i="0">
+                <a:solidFill>
+                  <a:srgbClr val="5A6B8C"/>
+                </a:solidFill>
+                <a:latin typeface="Calibri"/>
+              </a:rPr>
+              <a:t>30 foreign keys,
+56 API endpoints</a:t>
+            </a:r>
+          </a:p>
+        </p:txBody>
+      </p:sp>
+      <p:sp>
+        <p:nvSpPr>
+          <p:cNvPr id="12" name="Rounded Rectangle 11"/>
+          <p:cNvSpPr/>
+          <p:nvPr/>
+        </p:nvSpPr>
+        <p:spPr>
+          <a:xfrm>
+            <a:off x="9011412" y="2121408"/>
+            <a:ext cx="2528316" cy="2148840"/>
+          </a:xfrm>
+          <a:prstGeom prst="roundRect">
+            <a:avLst>
+              <a:gd name="adj" fmla="val 4000"/>
+            </a:avLst>
+          </a:prstGeom>
+          <a:solidFill>
+            <a:srgbClr val="DCE4F5"/>
+          </a:solidFill>
+          <a:ln w="12700">
+            <a:solidFill>
+              <a:srgbClr val="C3CEE6"/>
+            </a:solidFill>
+          </a:ln>
+          <a:effectLst/>
+        </p:spPr>
+        <p:style>
+          <a:lnRef idx="1">
+            <a:schemeClr val="accent1"/>
+          </a:lnRef>
+          <a:fillRef idx="3">
+            <a:schemeClr val="accent1"/>
+          </a:fillRef>
+          <a:effectRef idx="2">
+            <a:schemeClr val="accent1"/>
+          </a:effectRef>
+          <a:fontRef idx="minor">
+            <a:schemeClr val="lt1"/>
+          </a:fontRef>
+        </p:style>
+        <p:txBody>
+          <a:bodyPr rtlCol="0" anchor="ctr"/>
+          <a:lstStyle/>
+          <a:p>
+            <a:pPr algn="ctr"/>
+          </a:p>
+        </p:txBody>
+      </p:sp>
+      <p:sp>
+        <p:nvSpPr>
+          <p:cNvPr id="13" name="TextBox 12"/>
+          <p:cNvSpPr txBox="1"/>
+          <p:nvPr/>
+        </p:nvSpPr>
+        <p:spPr>
+          <a:xfrm>
+            <a:off x="9212580" y="2377440"/>
+            <a:ext cx="2125980" cy="1737360"/>
+          </a:xfrm>
+          <a:prstGeom prst="rect">
+            <a:avLst/>
+          </a:prstGeom>
+          <a:noFill/>
+        </p:spPr>
+        <p:txBody>
+          <a:bodyPr wrap="square" lIns="0" rIns="0" tIns="0" bIns="0" anchor="t">
+            <a:spAutoFit/>
+          </a:bodyPr>
+          <a:lstStyle/>
+          <a:p>
+            <a:pPr algn="ctr">
+              <a:spcAft>
+                <a:spcPts val="200"/>
+              </a:spcAft>
+            </a:pPr>
+            <a:r>
+              <a:rPr sz="4200" b="1" i="0">
+                <a:solidFill>
+                  <a:srgbClr val="1F3160"/>
+                </a:solidFill>
+                <a:latin typeface="Calibri"/>
+              </a:rPr>
+              <a:t>104</a:t>
+            </a:r>
+          </a:p>
+          <a:p>
+            <a:pPr algn="ctr">
+              <a:spcAft>
+                <a:spcPts val="600"/>
+              </a:spcAft>
+            </a:pPr>
+            <a:r>
+              <a:rPr sz="1400" b="1" i="0">
+                <a:solidFill>
+                  <a:srgbClr val="2F4B8F"/>
+                </a:solidFill>
+                <a:latin typeface="Calibri"/>
+              </a:rPr>
+              <a:t>SKILLS CATALOGUED</a:t>
+            </a:r>
+          </a:p>
+          <a:p>
+            <a:pPr algn="ctr">
+              <a:spcAft>
+                <a:spcPts val="0"/>
+              </a:spcAft>
+            </a:pPr>
+            <a:r>
+              <a:rPr sz="1250" b="0" i="0">
+                <a:solidFill>
+                  <a:srgbClr val="5A6B8C"/>
+                </a:solidFill>
+                <a:latin typeface="Calibri"/>
+              </a:rPr>
+              <a:t>223 vocabulary entries;
+85 have a synonym (81.7%)</a:t>
+            </a:r>
+          </a:p>
+        </p:txBody>
+      </p:sp>
+      <p:sp>
+        <p:nvSpPr>
+          <p:cNvPr id="14" name="TextBox 13"/>
+          <p:cNvSpPr txBox="1"/>
+          <p:nvPr/>
+        </p:nvSpPr>
+        <p:spPr>
+          <a:xfrm>
+            <a:off x="658368" y="4590288"/>
+            <a:ext cx="10881360" cy="1097280"/>
+          </a:xfrm>
+          <a:prstGeom prst="rect">
+            <a:avLst/>
+          </a:prstGeom>
+          <a:noFill/>
+        </p:spPr>
+        <p:txBody>
+          <a:bodyPr wrap="square" lIns="0" rIns="0" tIns="0" bIns="0" anchor="t">
+            <a:spAutoFit/>
+          </a:bodyPr>
+          <a:lstStyle/>
+          <a:p>
+            <a:pPr algn="l">
+              <a:spcAft>
+                <a:spcPts val="0"/>
+              </a:spcAft>
+            </a:pPr>
+            <a:r>
+              <a:rPr sz="1500" b="0" i="0">
+                <a:solidFill>
+                  <a:srgbClr val="1A1A2E"/>
+                </a:solidFill>
+                <a:latin typeface="Calibri"/>
+              </a:rPr>
+              <a:t>Largest suites: 61 tests on the matching engine, 57 driving the real server over HTTP against a temporary database, 46 on the rule-based resume reader. One test re-derives every score from an independent implementation of the published formula across four thousand generated pairs.</a:t>
+            </a:r>
+          </a:p>
+        </p:txBody>
+      </p:sp>
+    </p:spTree>
+  </p:cSld>
+  <p:clrMapOvr>
+    <a:masterClrMapping/>
+  </p:clrMapOvr>
+</p:sld>
+</file>
+
+<file path=ppt/slides/slide11.xml><?xml version="1.0" encoding="utf-8"?>
+<p:sld xmlns:a="http://schemas.openxmlformats.org/drawingml/2006/main" xmlns:p="http://schemas.openxmlformats.org/presentationml/2006/main" xmlns:r="http://schemas.openxmlformats.org/officeDocument/2006/relationships">
+  <p:cSld>
+    <p:spTree>
+      <p:nvGrpSpPr>
+        <p:cNvPr id="1" name=""/>
+        <p:cNvGrpSpPr/>
+        <p:nvPr/>
+      </p:nvGrpSpPr>
+      <p:grpSpPr/>
+      <p:sp>
+        <p:nvSpPr>
+          <p:cNvPr id="2" name="Rectangle 1"/>
+          <p:cNvSpPr/>
+          <p:nvPr/>
+        </p:nvSpPr>
+        <p:spPr>
+          <a:xfrm>
+            <a:off x="0" y="0"/>
+            <a:ext cx="12191695" cy="6858000"/>
+          </a:xfrm>
+          <a:prstGeom prst="rect">
+            <a:avLst/>
+          </a:prstGeom>
+          <a:solidFill>
+            <a:srgbClr val="1F3160"/>
+          </a:solidFill>
+          <a:ln>
+            <a:noFill/>
+          </a:ln>
+          <a:effectLst/>
+        </p:spPr>
+        <p:style>
+          <a:lnRef idx="1">
+            <a:schemeClr val="accent1"/>
+          </a:lnRef>
+          <a:fillRef idx="3">
+            <a:schemeClr val="accent1"/>
+          </a:fillRef>
+          <a:effectRef idx="2">
+            <a:schemeClr val="accent1"/>
+          </a:effectRef>
+          <a:fontRef idx="minor">
+            <a:schemeClr val="lt1"/>
+          </a:fontRef>
+        </p:style>
+        <p:txBody>
+          <a:bodyPr rtlCol="0" anchor="ctr"/>
+          <a:lstStyle/>
+          <a:p>
+            <a:pPr algn="ctr"/>
+          </a:p>
+        </p:txBody>
+      </p:sp>
+      <p:sp>
+        <p:nvSpPr>
+          <p:cNvPr id="3" name="TextBox 2"/>
+          <p:cNvSpPr txBox="1"/>
+          <p:nvPr/>
+        </p:nvSpPr>
+        <p:spPr>
+          <a:xfrm>
+            <a:off x="1188720" y="2011680"/>
+            <a:ext cx="9784080" cy="2926080"/>
+          </a:xfrm>
+          <a:prstGeom prst="rect">
+            <a:avLst/>
+          </a:prstGeom>
+          <a:noFill/>
+        </p:spPr>
+        <p:txBody>
+          <a:bodyPr wrap="square" lIns="0" rIns="0" tIns="0" bIns="0" anchor="ctr">
+            <a:spAutoFit/>
+          </a:bodyPr>
+          <a:lstStyle/>
+          <a:p>
+            <a:pPr algn="ctr">
+              <a:spcAft>
+                <a:spcPts val="1600"/>
+              </a:spcAft>
+            </a:pPr>
+            <a:r>
+              <a:rPr sz="1300" b="1" i="0">
+                <a:solidFill>
+                  <a:srgbClr val="AFC2E8"/>
+                </a:solidFill>
+                <a:latin typeface="Calibri"/>
+              </a:rPr>
+              <a:t>LIVE DEMONSTRATION</a:t>
+            </a:r>
+          </a:p>
+          <a:p>
+            <a:pPr algn="ctr">
+              <a:spcAft>
+                <a:spcPts val="1400"/>
+              </a:spcAft>
+            </a:pPr>
+            <a:r>
+              <a:rPr sz="3400" b="1" i="0">
+                <a:solidFill>
+                  <a:srgbClr val="FFFFFF"/>
+                </a:solidFill>
+                <a:latin typeface="Calibri"/>
+              </a:rPr>
+              <a:t>Let me show you the system</a:t>
+            </a:r>
+          </a:p>
+          <a:p>
+            <a:pPr algn="ctr">
+              <a:spcAft>
+                <a:spcPts val="0"/>
+              </a:spcAft>
+            </a:pPr>
+            <a:r>
+              <a:rPr sz="1700" b="0" i="1">
+                <a:solidFill>
+                  <a:srgbClr val="D3DEF2"/>
+                </a:solidFill>
+                <a:latin typeface="Calibri"/>
+              </a:rPr>
+              <a:t>Applicant journey, then recruiter journey — one opening, end to end</a:t>
+            </a:r>
+          </a:p>
+        </p:txBody>
+      </p:sp>
+    </p:spTree>
+  </p:cSld>
+  <p:clrMapOvr>
+    <a:masterClrMapping/>
+  </p:clrMapOvr>
+</p:sld>
+</file>
+
+<file path=ppt/slides/slide12.xml><?xml version="1.0" encoding="utf-8"?>
+<p:sld xmlns:a="http://schemas.openxmlformats.org/drawingml/2006/main" xmlns:p="http://schemas.openxmlformats.org/presentationml/2006/main" xmlns:r="http://schemas.openxmlformats.org/officeDocument/2006/relationships">
+  <p:cSld>
+    <p:spTree>
+      <p:nvGrpSpPr>
+        <p:cNvPr id="1" name=""/>
+        <p:cNvGrpSpPr/>
+        <p:nvPr/>
+      </p:nvGrpSpPr>
+      <p:grpSpPr/>
+      <p:sp>
+        <p:nvSpPr>
+          <p:cNvPr id="2" name="TextBox 1"/>
+          <p:cNvSpPr txBox="1"/>
+          <p:nvPr/>
+        </p:nvSpPr>
+        <p:spPr>
+          <a:xfrm>
+            <a:off x="658368" y="384048"/>
+            <a:ext cx="10881360" cy="274320"/>
+          </a:xfrm>
+          <a:prstGeom prst="rect">
+            <a:avLst/>
+          </a:prstGeom>
+          <a:noFill/>
+        </p:spPr>
+        <p:txBody>
+          <a:bodyPr wrap="square" lIns="0" rIns="0" tIns="0" bIns="0" anchor="t">
+            <a:spAutoFit/>
+          </a:bodyPr>
+          <a:lstStyle/>
+          <a:p>
+            <a:pPr algn="l">
+              <a:spcAft>
+                <a:spcPts val="200"/>
+              </a:spcAft>
+            </a:pPr>
+            <a:r>
+              <a:rPr sz="1200" b="1" i="0">
+                <a:solidFill>
+                  <a:srgbClr val="2F4B8F"/>
+                </a:solidFill>
+                <a:latin typeface="Calibri"/>
+              </a:rPr>
+              <a:t>METHODOLOGY</a:t>
+            </a:r>
+          </a:p>
+        </p:txBody>
+      </p:sp>
+      <p:sp>
+        <p:nvSpPr>
+          <p:cNvPr id="3" name="TextBox 2"/>
+          <p:cNvSpPr txBox="1"/>
+          <p:nvPr/>
+        </p:nvSpPr>
+        <p:spPr>
+          <a:xfrm>
+            <a:off x="658368" y="658368"/>
+            <a:ext cx="10881360" cy="685800"/>
+          </a:xfrm>
+          <a:prstGeom prst="rect">
+            <a:avLst/>
+          </a:prstGeom>
+          <a:noFill/>
+        </p:spPr>
+        <p:txBody>
+          <a:bodyPr wrap="square" lIns="0" rIns="0" tIns="0" bIns="0" anchor="t">
+            <a:spAutoFit/>
+          </a:bodyPr>
+          <a:lstStyle/>
+          <a:p>
+            <a:pPr algn="l">
+              <a:spcAft>
+                <a:spcPts val="200"/>
+              </a:spcAft>
+            </a:pPr>
+            <a:r>
+              <a:rPr sz="3100" b="1" i="0">
+                <a:solidFill>
+                  <a:srgbClr val="1F3160"/>
+                </a:solidFill>
+                <a:latin typeface="Calibri"/>
+              </a:rPr>
+              <a:t>How the study was carried out</a:t>
             </a:r>
           </a:p>
         </p:txBody>
@@ -4879,13 +6347,13 @@
               </a:spcAft>
             </a:pPr>
             <a:r>
-              <a:rPr sz="1800" b="1" i="0">
+              <a:rPr sz="1900" b="1" i="0">
                 <a:solidFill>
                   <a:srgbClr val="1F3160"/>
                 </a:solidFill>
                 <a:latin typeface="Calibri"/>
               </a:rPr>
-              <a:t>Quantitative descriptive design</a:t>
+              <a:t>Research design</a:t>
             </a:r>
           </a:p>
           <a:p>
@@ -4895,13 +6363,13 @@
               </a:spcAft>
             </a:pPr>
             <a:r>
-              <a:rPr sz="1500" b="0" i="0">
+              <a:rPr sz="1600" b="0" i="0">
                 <a:solidFill>
                   <a:srgbClr val="5A6B8C"/>
                 </a:solidFill>
                 <a:latin typeface="Calibri"/>
               </a:rPr>
-              <a:t>We measure how widely a difficulty is shared and how highly the finished system is rated — not why, using closed survey items only.</a:t>
+              <a:t>Quantitative descriptive. The job seeker strand additionally carries a one-group pretest-posttest structure (Campbell &amp; Stanley, 1963) — four items asked before the system existed and again after use.</a:t>
             </a:r>
           </a:p>
           <a:p>
@@ -4911,13 +6379,13 @@
               </a:spcAft>
             </a:pPr>
             <a:r>
-              <a:rPr sz="1800" b="1" i="0">
+              <a:rPr sz="1900" b="1" i="0">
                 <a:solidFill>
                   <a:srgbClr val="1F3160"/>
                 </a:solidFill>
                 <a:latin typeface="Calibri"/>
               </a:rPr>
-              <a:t>Waterfall development</a:t>
+              <a:t>Development model</a:t>
             </a:r>
           </a:p>
           <a:p>
@@ -4927,13 +6395,13 @@
               </a:spcAft>
             </a:pPr>
             <a:r>
-              <a:rPr sz="1500" b="0" i="0">
+              <a:rPr sz="1600" b="0" i="0">
                 <a:solidFill>
                   <a:srgbClr val="5A6B8C"/>
                 </a:solidFill>
                 <a:latin typeface="Calibri"/>
               </a:rPr>
-              <a:t>The evaluation needed one finished, unchanging system rated by every respondent — an iterative build would have given different people different versions to judge.</a:t>
+              <a:t>Agile (Pressman, 2014) — built and tested across three increments. Development was complete and frozen before the first evaluation instrument went out.</a:t>
             </a:r>
           </a:p>
           <a:p>
@@ -4943,13 +6411,13 @@
               </a:spcAft>
             </a:pPr>
             <a:r>
-              <a:rPr sz="1800" b="1" i="0">
+              <a:rPr sz="1900" b="1" i="0">
                 <a:solidFill>
                   <a:srgbClr val="1F3160"/>
                 </a:solidFill>
                 <a:latin typeface="Calibri"/>
               </a:rPr>
-              <a:t>Five instruments, three respondent groups</a:t>
+              <a:t>Sampling</a:t>
             </a:r>
           </a:p>
           <a:p>
@@ -4959,13 +6427,13 @@
               </a:spcAft>
             </a:pPr>
             <a:r>
-              <a:rPr sz="1500" b="0" i="0">
+              <a:rPr sz="1600" b="0" i="0">
                 <a:solidFill>
                   <a:srgbClr val="5A6B8C"/>
                 </a:solidFill>
                 <a:latin typeface="Calibri"/>
               </a:rPr>
-              <a:t>46 job seekers and 11 then 10 HR staff, before and after using the system; 3 IT experts inspected the finished build and its source code.</a:t>
+              <a:t>Purposive. No Slovin formula, because Slovin bounds the error of a RANDOM sample and there is no sampling frame of all Filipino job seekers.</a:t>
             </a:r>
           </a:p>
           <a:p>
@@ -4975,13 +6443,13 @@
               </a:spcAft>
             </a:pPr>
             <a:r>
-              <a:rPr sz="1800" b="1" i="0">
+              <a:rPr sz="1900" b="1" i="0">
                 <a:solidFill>
                   <a:srgbClr val="1F3160"/>
                 </a:solidFill>
                 <a:latin typeface="Calibri"/>
               </a:rPr>
-              <a:t>Verified before it was ever evaluated</a:t>
+              <a:t>Respondents</a:t>
             </a:r>
           </a:p>
           <a:p>
@@ -4991,13 +6459,45 @@
               </a:spcAft>
             </a:pPr>
             <a:r>
-              <a:rPr sz="1500" b="0" i="0">
+              <a:rPr sz="1600" b="0" i="0">
                 <a:solidFill>
                   <a:srgbClr val="5A6B8C"/>
                 </a:solidFill>
                 <a:latin typeface="Calibri"/>
               </a:rPr>
-              <a:t>232 automated tests across eleven suites, plus roughly 120 scripted browser checks, all passing before a single respondent touched the system.</a:t>
+              <a:t>46 job seekers within the target population (of 103 valid) · 11 HR personnel before and 10 after · 3 IT experts</a:t>
+            </a:r>
+          </a:p>
+          <a:p>
+            <a:pPr>
+              <a:spcAft>
+                <a:spcPts val="300"/>
+              </a:spcAft>
+            </a:pPr>
+            <a:r>
+              <a:rPr sz="1900" b="1" i="0">
+                <a:solidFill>
+                  <a:srgbClr val="1F3160"/>
+                </a:solidFill>
+                <a:latin typeface="Calibri"/>
+              </a:rPr>
+              <a:t>Instruments</a:t>
+            </a:r>
+          </a:p>
+          <a:p>
+            <a:pPr>
+              <a:spcAft>
+                <a:spcPts val="1300"/>
+              </a:spcAft>
+            </a:pPr>
+            <a:r>
+              <a:rPr sz="1600" b="0" i="0">
+                <a:solidFill>
+                  <a:srgbClr val="5A6B8C"/>
+                </a:solidFill>
+                <a:latin typeface="Calibri"/>
+              </a:rPr>
+              <a:t>Five researcher-made instruments, entirely closed items — plus the ten-item System Usability Scale, reproduced without alteration because its published norms are the reason for including it.</a:t>
             </a:r>
           </a:p>
         </p:txBody>
@@ -5010,7 +6510,7 @@
 </p:sld>
 </file>
 
-<file path=ppt/slides/slide11.xml><?xml version="1.0" encoding="utf-8"?>
+<file path=ppt/slides/slide13.xml><?xml version="1.0" encoding="utf-8"?>
 <p:sld xmlns:a="http://schemas.openxmlformats.org/drawingml/2006/main" xmlns:p="http://schemas.openxmlformats.org/presentationml/2006/main" xmlns:r="http://schemas.openxmlformats.org/officeDocument/2006/relationships">
   <p:cSld>
     <p:spTree>
@@ -5093,7 +6593,7 @@
                 </a:solidFill>
                 <a:latin typeface="Calibri"/>
               </a:rPr>
-              <a:t>Results and Evaluation</a:t>
+              <a:t>ISO/IEC 25010 ratings across all three respondent groups</a:t>
             </a:r>
           </a:p>
         </p:txBody>
@@ -5132,7 +6632,7 @@
                 </a:solidFill>
                 <a:latin typeface="Calibri"/>
               </a:rPr>
-              <a:t>All in the 'good' band or above, on a scale fixed before any data was collected.</a:t>
+              <a:t>Job seekers and HR rated what they USED. IT experts rated what they INSPECTED. The means are reported side by side and deliberately not pooled.</a:t>
             </a:r>
           </a:p>
         </p:txBody>
@@ -5181,496 +6681,69 @@
           </a:p>
         </p:txBody>
       </p:sp>
-      <p:graphicFrame>
-        <p:nvGraphicFramePr>
-          <p:cNvPr id="6" name="Table 5"/>
-          <p:cNvGraphicFramePr>
-            <a:graphicFrameLocks noGrp="1"/>
-          </p:cNvGraphicFramePr>
+      <p:pic>
+        <p:nvPicPr>
+          <p:cNvPr id="6" name="Picture 5" descr="deck_results.png"/>
+          <p:cNvPicPr>
+            <a:picLocks noChangeAspect="1"/>
+          </p:cNvPicPr>
           <p:nvPr/>
-        </p:nvGraphicFramePr>
-        <p:xfrm>
-          <a:off x="658368" y="2103120"/>
-          <a:ext cx="10881358" cy="1792224"/>
-        </p:xfrm>
-        <a:graphic>
-          <a:graphicData uri="http://schemas.openxmlformats.org/drawingml/2006/table">
-            <a:tbl>
-              <a:tblPr firstRow="1" bandRow="1">
-                <a:tableStyleId>{5C22544A-7EE6-4342-B048-85BDC9FD1C3A}</a:tableStyleId>
-              </a:tblPr>
-              <a:tblGrid>
-                <a:gridCol w="3746041"/>
-                <a:gridCol w="2497361"/>
-                <a:gridCol w="2497361"/>
-                <a:gridCol w="2140595"/>
-              </a:tblGrid>
-              <a:tr h="358444">
-                <a:tc>
-                  <a:txBody>
-                    <a:bodyPr/>
-                    <a:lstStyle/>
-                    <a:p>
-                      <a:r>
-                        <a:rPr sz="1400" b="1">
-                          <a:solidFill>
-                            <a:srgbClr val="FFFFFF"/>
-                          </a:solidFill>
-                          <a:latin typeface="Calibri"/>
-                        </a:rPr>
-                        <a:t>Quality characteristic</a:t>
-                      </a:r>
-                    </a:p>
-                  </a:txBody>
-                  <a:tcPr anchor="ctr" marL="100584">
-                    <a:solidFill>
-                      <a:srgbClr val="1F3160"/>
-                    </a:solidFill>
-                  </a:tcPr>
-                </a:tc>
-                <a:tc>
-                  <a:txBody>
-                    <a:bodyPr/>
-                    <a:lstStyle/>
-                    <a:p>
-                      <a:r>
-                        <a:rPr sz="1400" b="1">
-                          <a:solidFill>
-                            <a:srgbClr val="FFFFFF"/>
-                          </a:solidFill>
-                          <a:latin typeface="Calibri"/>
-                        </a:rPr>
-                        <a:t>Job seekers (n=46)</a:t>
-                      </a:r>
-                    </a:p>
-                  </a:txBody>
-                  <a:tcPr anchor="ctr" marL="100584">
-                    <a:solidFill>
-                      <a:srgbClr val="1F3160"/>
-                    </a:solidFill>
-                  </a:tcPr>
-                </a:tc>
-                <a:tc>
-                  <a:txBody>
-                    <a:bodyPr/>
-                    <a:lstStyle/>
-                    <a:p>
-                      <a:r>
-                        <a:rPr sz="1400" b="1">
-                          <a:solidFill>
-                            <a:srgbClr val="FFFFFF"/>
-                          </a:solidFill>
-                          <a:latin typeface="Calibri"/>
-                        </a:rPr>
-                        <a:t>HR personnel (n=10)</a:t>
-                      </a:r>
-                    </a:p>
-                  </a:txBody>
-                  <a:tcPr anchor="ctr" marL="100584">
-                    <a:solidFill>
-                      <a:srgbClr val="1F3160"/>
-                    </a:solidFill>
-                  </a:tcPr>
-                </a:tc>
-                <a:tc>
-                  <a:txBody>
-                    <a:bodyPr/>
-                    <a:lstStyle/>
-                    <a:p>
-                      <a:r>
-                        <a:rPr sz="1400" b="1">
-                          <a:solidFill>
-                            <a:srgbClr val="FFFFFF"/>
-                          </a:solidFill>
-                          <a:latin typeface="Calibri"/>
-                        </a:rPr>
-                        <a:t>IT experts (n=3)</a:t>
-                      </a:r>
-                    </a:p>
-                  </a:txBody>
-                  <a:tcPr anchor="ctr" marL="100584">
-                    <a:solidFill>
-                      <a:srgbClr val="1F3160"/>
-                    </a:solidFill>
-                  </a:tcPr>
-                </a:tc>
-              </a:tr>
-              <a:tr h="358444">
-                <a:tc>
-                  <a:txBody>
-                    <a:bodyPr/>
-                    <a:lstStyle/>
-                    <a:p>
-                      <a:r>
-                        <a:rPr sz="1400">
-                          <a:solidFill>
-                            <a:srgbClr val="1A1A2E"/>
-                          </a:solidFill>
-                          <a:latin typeface="Calibri"/>
-                        </a:rPr>
-                        <a:t>Functional suitability</a:t>
-                      </a:r>
-                    </a:p>
-                  </a:txBody>
-                  <a:tcPr anchor="ctr" marL="100584">
-                    <a:solidFill>
-                      <a:srgbClr val="FFFFFF"/>
-                    </a:solidFill>
-                  </a:tcPr>
-                </a:tc>
-                <a:tc>
-                  <a:txBody>
-                    <a:bodyPr/>
-                    <a:lstStyle/>
-                    <a:p>
-                      <a:pPr algn="ctr"/>
-                      <a:r>
-                        <a:rPr sz="1400">
-                          <a:solidFill>
-                            <a:srgbClr val="1A1A2E"/>
-                          </a:solidFill>
-                          <a:latin typeface="Calibri"/>
-                        </a:rPr>
-                        <a:t>4.30</a:t>
-                      </a:r>
-                    </a:p>
-                  </a:txBody>
-                  <a:tcPr anchor="ctr" marL="100584">
-                    <a:solidFill>
-                      <a:srgbClr val="FFFFFF"/>
-                    </a:solidFill>
-                  </a:tcPr>
-                </a:tc>
-                <a:tc>
-                  <a:txBody>
-                    <a:bodyPr/>
-                    <a:lstStyle/>
-                    <a:p>
-                      <a:pPr algn="ctr"/>
-                      <a:r>
-                        <a:rPr sz="1400">
-                          <a:solidFill>
-                            <a:srgbClr val="1A1A2E"/>
-                          </a:solidFill>
-                          <a:latin typeface="Calibri"/>
-                        </a:rPr>
-                        <a:t>4.17</a:t>
-                      </a:r>
-                    </a:p>
-                  </a:txBody>
-                  <a:tcPr anchor="ctr" marL="100584">
-                    <a:solidFill>
-                      <a:srgbClr val="FFFFFF"/>
-                    </a:solidFill>
-                  </a:tcPr>
-                </a:tc>
-                <a:tc>
-                  <a:txBody>
-                    <a:bodyPr/>
-                    <a:lstStyle/>
-                    <a:p>
-                      <a:pPr algn="ctr"/>
-                      <a:r>
-                        <a:rPr sz="1400">
-                          <a:solidFill>
-                            <a:srgbClr val="1A1A2E"/>
-                          </a:solidFill>
-                          <a:latin typeface="Calibri"/>
-                        </a:rPr>
-                        <a:t>4.78</a:t>
-                      </a:r>
-                    </a:p>
-                  </a:txBody>
-                  <a:tcPr anchor="ctr" marL="100584">
-                    <a:solidFill>
-                      <a:srgbClr val="FFFFFF"/>
-                    </a:solidFill>
-                  </a:tcPr>
-                </a:tc>
-              </a:tr>
-              <a:tr h="358444">
-                <a:tc>
-                  <a:txBody>
-                    <a:bodyPr/>
-                    <a:lstStyle/>
-                    <a:p>
-                      <a:r>
-                        <a:rPr sz="1400">
-                          <a:solidFill>
-                            <a:srgbClr val="1A1A2E"/>
-                          </a:solidFill>
-                          <a:latin typeface="Calibri"/>
-                        </a:rPr>
-                        <a:t>Usability</a:t>
-                      </a:r>
-                    </a:p>
-                  </a:txBody>
-                  <a:tcPr anchor="ctr" marL="100584">
-                    <a:solidFill>
-                      <a:srgbClr val="F3F6FC"/>
-                    </a:solidFill>
-                  </a:tcPr>
-                </a:tc>
-                <a:tc>
-                  <a:txBody>
-                    <a:bodyPr/>
-                    <a:lstStyle/>
-                    <a:p>
-                      <a:pPr algn="ctr"/>
-                      <a:r>
-                        <a:rPr sz="1400">
-                          <a:solidFill>
-                            <a:srgbClr val="1A1A2E"/>
-                          </a:solidFill>
-                          <a:latin typeface="Calibri"/>
-                        </a:rPr>
-                        <a:t>4.28</a:t>
-                      </a:r>
-                    </a:p>
-                  </a:txBody>
-                  <a:tcPr anchor="ctr" marL="100584">
-                    <a:solidFill>
-                      <a:srgbClr val="F3F6FC"/>
-                    </a:solidFill>
-                  </a:tcPr>
-                </a:tc>
-                <a:tc>
-                  <a:txBody>
-                    <a:bodyPr/>
-                    <a:lstStyle/>
-                    <a:p>
-                      <a:pPr algn="ctr"/>
-                      <a:r>
-                        <a:rPr sz="1400">
-                          <a:solidFill>
-                            <a:srgbClr val="1A1A2E"/>
-                          </a:solidFill>
-                          <a:latin typeface="Calibri"/>
-                        </a:rPr>
-                        <a:t>4.22</a:t>
-                      </a:r>
-                    </a:p>
-                  </a:txBody>
-                  <a:tcPr anchor="ctr" marL="100584">
-                    <a:solidFill>
-                      <a:srgbClr val="F3F6FC"/>
-                    </a:solidFill>
-                  </a:tcPr>
-                </a:tc>
-                <a:tc>
-                  <a:txBody>
-                    <a:bodyPr/>
-                    <a:lstStyle/>
-                    <a:p>
-                      <a:pPr algn="ctr"/>
-                      <a:r>
-                        <a:rPr sz="1400">
-                          <a:solidFill>
-                            <a:srgbClr val="1A1A2E"/>
-                          </a:solidFill>
-                          <a:latin typeface="Calibri"/>
-                        </a:rPr>
-                        <a:t>4.67</a:t>
-                      </a:r>
-                    </a:p>
-                  </a:txBody>
-                  <a:tcPr anchor="ctr" marL="100584">
-                    <a:solidFill>
-                      <a:srgbClr val="F3F6FC"/>
-                    </a:solidFill>
-                  </a:tcPr>
-                </a:tc>
-              </a:tr>
-              <a:tr h="358444">
-                <a:tc>
-                  <a:txBody>
-                    <a:bodyPr/>
-                    <a:lstStyle/>
-                    <a:p>
-                      <a:r>
-                        <a:rPr sz="1400">
-                          <a:solidFill>
-                            <a:srgbClr val="1A1A2E"/>
-                          </a:solidFill>
-                          <a:latin typeface="Calibri"/>
-                        </a:rPr>
-                        <a:t>Reliability</a:t>
-                      </a:r>
-                    </a:p>
-                  </a:txBody>
-                  <a:tcPr anchor="ctr" marL="100584">
-                    <a:solidFill>
-                      <a:srgbClr val="FFFFFF"/>
-                    </a:solidFill>
-                  </a:tcPr>
-                </a:tc>
-                <a:tc>
-                  <a:txBody>
-                    <a:bodyPr/>
-                    <a:lstStyle/>
-                    <a:p>
-                      <a:pPr algn="ctr"/>
-                      <a:r>
-                        <a:rPr sz="1400">
-                          <a:solidFill>
-                            <a:srgbClr val="1A1A2E"/>
-                          </a:solidFill>
-                          <a:latin typeface="Calibri"/>
-                        </a:rPr>
-                        <a:t>4.23</a:t>
-                      </a:r>
-                    </a:p>
-                  </a:txBody>
-                  <a:tcPr anchor="ctr" marL="100584">
-                    <a:solidFill>
-                      <a:srgbClr val="FFFFFF"/>
-                    </a:solidFill>
-                  </a:tcPr>
-                </a:tc>
-                <a:tc>
-                  <a:txBody>
-                    <a:bodyPr/>
-                    <a:lstStyle/>
-                    <a:p>
-                      <a:pPr algn="ctr"/>
-                      <a:r>
-                        <a:rPr sz="1400">
-                          <a:solidFill>
-                            <a:srgbClr val="1A1A2E"/>
-                          </a:solidFill>
-                          <a:latin typeface="Calibri"/>
-                        </a:rPr>
-                        <a:t>4.33</a:t>
-                      </a:r>
-                    </a:p>
-                  </a:txBody>
-                  <a:tcPr anchor="ctr" marL="100584">
-                    <a:solidFill>
-                      <a:srgbClr val="FFFFFF"/>
-                    </a:solidFill>
-                  </a:tcPr>
-                </a:tc>
-                <a:tc>
-                  <a:txBody>
-                    <a:bodyPr/>
-                    <a:lstStyle/>
-                    <a:p>
-                      <a:pPr algn="ctr"/>
-                      <a:r>
-                        <a:rPr sz="1400">
-                          <a:solidFill>
-                            <a:srgbClr val="1A1A2E"/>
-                          </a:solidFill>
-                          <a:latin typeface="Calibri"/>
-                        </a:rPr>
-                        <a:t>4.83</a:t>
-                      </a:r>
-                    </a:p>
-                  </a:txBody>
-                  <a:tcPr anchor="ctr" marL="100584">
-                    <a:solidFill>
-                      <a:srgbClr val="FFFFFF"/>
-                    </a:solidFill>
-                  </a:tcPr>
-                </a:tc>
-              </a:tr>
-              <a:tr h="358448">
-                <a:tc>
-                  <a:txBody>
-                    <a:bodyPr/>
-                    <a:lstStyle/>
-                    <a:p>
-                      <a:r>
-                        <a:rPr sz="1400">
-                          <a:solidFill>
-                            <a:srgbClr val="1A1A2E"/>
-                          </a:solidFill>
-                          <a:latin typeface="Calibri"/>
-                        </a:rPr>
-                        <a:t>Overall</a:t>
-                      </a:r>
-                    </a:p>
-                  </a:txBody>
-                  <a:tcPr anchor="ctr" marL="100584">
-                    <a:solidFill>
-                      <a:srgbClr val="F3F6FC"/>
-                    </a:solidFill>
-                  </a:tcPr>
-                </a:tc>
-                <a:tc>
-                  <a:txBody>
-                    <a:bodyPr/>
-                    <a:lstStyle/>
-                    <a:p>
-                      <a:pPr algn="ctr"/>
-                      <a:r>
-                        <a:rPr sz="1400">
-                          <a:solidFill>
-                            <a:srgbClr val="1A1A2E"/>
-                          </a:solidFill>
-                          <a:latin typeface="Calibri"/>
-                        </a:rPr>
-                        <a:t>4.28</a:t>
-                      </a:r>
-                    </a:p>
-                  </a:txBody>
-                  <a:tcPr anchor="ctr" marL="100584">
-                    <a:solidFill>
-                      <a:srgbClr val="F3F6FC"/>
-                    </a:solidFill>
-                  </a:tcPr>
-                </a:tc>
-                <a:tc>
-                  <a:txBody>
-                    <a:bodyPr/>
-                    <a:lstStyle/>
-                    <a:p>
-                      <a:pPr algn="ctr"/>
-                      <a:r>
-                        <a:rPr sz="1400">
-                          <a:solidFill>
-                            <a:srgbClr val="1A1A2E"/>
-                          </a:solidFill>
-                          <a:latin typeface="Calibri"/>
-                        </a:rPr>
-                        <a:t>4.22</a:t>
-                      </a:r>
-                    </a:p>
-                  </a:txBody>
-                  <a:tcPr anchor="ctr" marL="100584">
-                    <a:solidFill>
-                      <a:srgbClr val="F3F6FC"/>
-                    </a:solidFill>
-                  </a:tcPr>
-                </a:tc>
-                <a:tc>
-                  <a:txBody>
-                    <a:bodyPr/>
-                    <a:lstStyle/>
-                    <a:p>
-                      <a:pPr algn="ctr"/>
-                      <a:r>
-                        <a:rPr sz="1400">
-                          <a:solidFill>
-                            <a:srgbClr val="1A1A2E"/>
-                          </a:solidFill>
-                          <a:latin typeface="Calibri"/>
-                        </a:rPr>
-                        <a:t>4.80</a:t>
-                      </a:r>
-                    </a:p>
-                  </a:txBody>
-                  <a:tcPr anchor="ctr" marL="100584">
-                    <a:solidFill>
-                      <a:srgbClr val="F3F6FC"/>
-                    </a:solidFill>
-                  </a:tcPr>
-                </a:tc>
-              </a:tr>
-            </a:tbl>
-          </a:graphicData>
-        </a:graphic>
-      </p:graphicFrame>
+        </p:nvPicPr>
+        <p:blipFill>
+          <a:blip r:embed="rId2"/>
+          <a:stretch>
+            <a:fillRect/>
+          </a:stretch>
+        </p:blipFill>
+        <p:spPr>
+          <a:xfrm>
+            <a:off x="802509" y="2048256"/>
+            <a:ext cx="10593078" cy="4325112"/>
+          </a:xfrm>
+          <a:prstGeom prst="rect">
+            <a:avLst/>
+          </a:prstGeom>
+        </p:spPr>
+      </p:pic>
+      <p:sp>
+        <p:nvSpPr>
+          <p:cNvPr id="7" name="TextBox 6"/>
+          <p:cNvSpPr txBox="1"/>
+          <p:nvPr/>
+        </p:nvSpPr>
+        <p:spPr>
+          <a:xfrm>
+            <a:off x="658368" y="6291072"/>
+            <a:ext cx="10881360" cy="365760"/>
+          </a:xfrm>
+          <a:prstGeom prst="rect">
+            <a:avLst/>
+          </a:prstGeom>
+          <a:noFill/>
+        </p:spPr>
+        <p:txBody>
+          <a:bodyPr wrap="square" lIns="0" rIns="0" tIns="0" bIns="0" anchor="t">
+            <a:spAutoFit/>
+          </a:bodyPr>
+          <a:lstStyle/>
+          <a:p>
+            <a:pPr algn="ctr">
+              <a:spcAft>
+                <a:spcPts val="0"/>
+              </a:spcAft>
+            </a:pPr>
+            <a:r>
+              <a:rPr sz="1250" b="0" i="1">
+                <a:solidFill>
+                  <a:srgbClr val="5A6B8C"/>
+                </a:solidFill>
+                <a:latin typeface="Calibri"/>
+              </a:rPr>
+              <a:t>Job seekers overall 4.28  ·  HR personnel overall 4.22  ·  IT experts overall 4.80</a:t>
+            </a:r>
+          </a:p>
+        </p:txBody>
+      </p:sp>
     </p:spTree>
   </p:cSld>
   <p:clrMapOvr>
@@ -5679,7 +6752,7 @@
 </p:sld>
 </file>
 
-<file path=ppt/slides/slide12.xml><?xml version="1.0" encoding="utf-8"?>
+<file path=ppt/slides/slide14.xml><?xml version="1.0" encoding="utf-8"?>
 <p:sld xmlns:a="http://schemas.openxmlformats.org/drawingml/2006/main" xmlns:p="http://schemas.openxmlformats.org/presentationml/2006/main" xmlns:r="http://schemas.openxmlformats.org/officeDocument/2006/relationships">
   <p:cSld>
     <p:spTree>
@@ -5723,7 +6796,7 @@
                 </a:solidFill>
                 <a:latin typeface="Calibri"/>
               </a:rPr>
-              <a:t>OBJECTIVES VS RESULTS</a:t>
+              <a:t>RESULTS</a:t>
             </a:r>
           </a:p>
         </p:txBody>
@@ -5762,7 +6835,7 @@
                 </a:solidFill>
                 <a:latin typeface="Calibri"/>
               </a:rPr>
-              <a:t>Objective Achievement</a:t>
+              <a:t>What changed after people used the system</a:t>
             </a:r>
           </a:p>
         </p:txBody>
@@ -5801,7 +6874,7 @@
                 </a:solidFill>
                 <a:latin typeface="Calibri"/>
               </a:rPr>
-              <a:t>Six of eight objectives have direct respondent evidence; two — the admin account and low-experience accessibility — do not, and we say so.</a:t>
+              <a:t>Instruments A and C — the four repeated items. Wilcoxon rank-sum (Mann-Whitney U), two-tailed.</a:t>
             </a:r>
           </a:p>
         </p:txBody>
@@ -5850,381 +6923,69 @@
           </a:p>
         </p:txBody>
       </p:sp>
-      <p:graphicFrame>
-        <p:nvGraphicFramePr>
-          <p:cNvPr id="6" name="Table 5"/>
-          <p:cNvGraphicFramePr>
-            <a:graphicFrameLocks noGrp="1"/>
-          </p:cNvGraphicFramePr>
+      <p:pic>
+        <p:nvPicPr>
+          <p:cNvPr id="6" name="Picture 5" descr="deck_beforeafter.png"/>
+          <p:cNvPicPr>
+            <a:picLocks noChangeAspect="1"/>
+          </p:cNvPicPr>
           <p:nvPr/>
-        </p:nvGraphicFramePr>
-        <p:xfrm>
-          <a:off x="658368" y="2103120"/>
-          <a:ext cx="10881359" cy="1792224"/>
-        </p:xfrm>
-        <a:graphic>
-          <a:graphicData uri="http://schemas.openxmlformats.org/drawingml/2006/table">
-            <a:tbl>
-              <a:tblPr firstRow="1" bandRow="1">
-                <a:tableStyleId>{5C22544A-7EE6-4342-B048-85BDC9FD1C3A}</a:tableStyleId>
-              </a:tblPr>
-              <a:tblGrid>
-                <a:gridCol w="2720340"/>
-                <a:gridCol w="4171187"/>
-                <a:gridCol w="3989832"/>
-              </a:tblGrid>
-              <a:tr h="358444">
-                <a:tc>
-                  <a:txBody>
-                    <a:bodyPr/>
-                    <a:lstStyle/>
-                    <a:p>
-                      <a:r>
-                        <a:rPr sz="1400" b="1">
-                          <a:solidFill>
-                            <a:srgbClr val="FFFFFF"/>
-                          </a:solidFill>
-                          <a:latin typeface="Calibri"/>
-                        </a:rPr>
-                        <a:t>Objective</a:t>
-                      </a:r>
-                    </a:p>
-                  </a:txBody>
-                  <a:tcPr anchor="ctr" marL="100584">
-                    <a:solidFill>
-                      <a:srgbClr val="1F3160"/>
-                    </a:solidFill>
-                  </a:tcPr>
-                </a:tc>
-                <a:tc>
-                  <a:txBody>
-                    <a:bodyPr/>
-                    <a:lstStyle/>
-                    <a:p>
-                      <a:r>
-                        <a:rPr sz="1400" b="1">
-                          <a:solidFill>
-                            <a:srgbClr val="FFFFFF"/>
-                          </a:solidFill>
-                          <a:latin typeface="Calibri"/>
-                        </a:rPr>
-                        <a:t>What we did</a:t>
-                      </a:r>
-                    </a:p>
-                  </a:txBody>
-                  <a:tcPr anchor="ctr" marL="100584">
-                    <a:solidFill>
-                      <a:srgbClr val="1F3160"/>
-                    </a:solidFill>
-                  </a:tcPr>
-                </a:tc>
-                <a:tc>
-                  <a:txBody>
-                    <a:bodyPr/>
-                    <a:lstStyle/>
-                    <a:p>
-                      <a:r>
-                        <a:rPr sz="1400" b="1">
-                          <a:solidFill>
-                            <a:srgbClr val="FFFFFF"/>
-                          </a:solidFill>
-                          <a:latin typeface="Calibri"/>
-                        </a:rPr>
-                        <a:t>Result</a:t>
-                      </a:r>
-                    </a:p>
-                  </a:txBody>
-                  <a:tcPr anchor="ctr" marL="100584">
-                    <a:solidFill>
-                      <a:srgbClr val="1F3160"/>
-                    </a:solidFill>
-                  </a:tcPr>
-                </a:tc>
-              </a:tr>
-              <a:tr h="358444">
-                <a:tc>
-                  <a:txBody>
-                    <a:bodyPr/>
-                    <a:lstStyle/>
-                    <a:p>
-                      <a:r>
-                        <a:rPr sz="1400">
-                          <a:solidFill>
-                            <a:srgbClr val="1A1A2E"/>
-                          </a:solidFill>
-                          <a:latin typeface="Calibri"/>
-                        </a:rPr>
-                        <a:t>Guided resume builder</a:t>
-                      </a:r>
-                    </a:p>
-                  </a:txBody>
-                  <a:tcPr anchor="ctr" marL="100584">
-                    <a:solidFill>
-                      <a:srgbClr val="FFFFFF"/>
-                    </a:solidFill>
-                  </a:tcPr>
-                </a:tc>
-                <a:tc>
-                  <a:txBody>
-                    <a:bodyPr/>
-                    <a:lstStyle/>
-                    <a:p>
-                      <a:pPr algn="ctr"/>
-                      <a:r>
-                        <a:rPr sz="1400">
-                          <a:solidFill>
-                            <a:srgbClr val="1A1A2E"/>
-                          </a:solidFill>
-                          <a:latin typeface="Calibri"/>
-                        </a:rPr>
-                        <a:t>3 formats, 14 designs, step-by-step flow</a:t>
-                      </a:r>
-                    </a:p>
-                  </a:txBody>
-                  <a:tcPr anchor="ctr" marL="100584">
-                    <a:solidFill>
-                      <a:srgbClr val="FFFFFF"/>
-                    </a:solidFill>
-                  </a:tcPr>
-                </a:tc>
-                <a:tc>
-                  <a:txBody>
-                    <a:bodyPr/>
-                    <a:lstStyle/>
-                    <a:p>
-                      <a:pPr algn="ctr"/>
-                      <a:r>
-                        <a:rPr sz="1400">
-                          <a:solidFill>
-                            <a:srgbClr val="1A1A2E"/>
-                          </a:solidFill>
-                          <a:latin typeface="Calibri"/>
-                        </a:rPr>
-                        <a:t>Built and rated 4.30 functional suitability by job seekers</a:t>
-                      </a:r>
-                    </a:p>
-                  </a:txBody>
-                  <a:tcPr anchor="ctr" marL="100584">
-                    <a:solidFill>
-                      <a:srgbClr val="FFFFFF"/>
-                    </a:solidFill>
-                  </a:tcPr>
-                </a:tc>
-              </a:tr>
-              <a:tr h="358444">
-                <a:tc>
-                  <a:txBody>
-                    <a:bodyPr/>
-                    <a:lstStyle/>
-                    <a:p>
-                      <a:r>
-                        <a:rPr sz="1400">
-                          <a:solidFill>
-                            <a:srgbClr val="1A1A2E"/>
-                          </a:solidFill>
-                          <a:latin typeface="Calibri"/>
-                        </a:rPr>
-                        <a:t>Transparent matching</a:t>
-                      </a:r>
-                    </a:p>
-                  </a:txBody>
-                  <a:tcPr anchor="ctr" marL="100584">
-                    <a:solidFill>
-                      <a:srgbClr val="F3F6FC"/>
-                    </a:solidFill>
-                  </a:tcPr>
-                </a:tc>
-                <a:tc>
-                  <a:txBody>
-                    <a:bodyPr/>
-                    <a:lstStyle/>
-                    <a:p>
-                      <a:pPr algn="ctr"/>
-                      <a:r>
-                        <a:rPr sz="1400">
-                          <a:solidFill>
-                            <a:srgbClr val="1A1A2E"/>
-                          </a:solidFill>
-                          <a:latin typeface="Calibri"/>
-                        </a:rPr>
-                        <a:t>Published 50/25/25 formula, shown to both sides</a:t>
-                      </a:r>
-                    </a:p>
-                  </a:txBody>
-                  <a:tcPr anchor="ctr" marL="100584">
-                    <a:solidFill>
-                      <a:srgbClr val="F3F6FC"/>
-                    </a:solidFill>
-                  </a:tcPr>
-                </a:tc>
-                <a:tc>
-                  <a:txBody>
-                    <a:bodyPr/>
-                    <a:lstStyle/>
-                    <a:p>
-                      <a:pPr algn="ctr"/>
-                      <a:r>
-                        <a:rPr sz="1400">
-                          <a:solidFill>
-                            <a:srgbClr val="1A1A2E"/>
-                          </a:solidFill>
-                          <a:latin typeface="Calibri"/>
-                        </a:rPr>
-                        <a:t>Rated 4.64 by HR for explainability — the strongest single finding</a:t>
-                      </a:r>
-                    </a:p>
-                  </a:txBody>
-                  <a:tcPr anchor="ctr" marL="100584">
-                    <a:solidFill>
-                      <a:srgbClr val="F3F6FC"/>
-                    </a:solidFill>
-                  </a:tcPr>
-                </a:tc>
-              </a:tr>
-              <a:tr h="358444">
-                <a:tc>
-                  <a:txBody>
-                    <a:bodyPr/>
-                    <a:lstStyle/>
-                    <a:p>
-                      <a:r>
-                        <a:rPr sz="1400">
-                          <a:solidFill>
-                            <a:srgbClr val="1A1A2E"/>
-                          </a:solidFill>
-                          <a:latin typeface="Calibri"/>
-                        </a:rPr>
-                        <a:t>Never auto-reject</a:t>
-                      </a:r>
-                    </a:p>
-                  </a:txBody>
-                  <a:tcPr anchor="ctr" marL="100584">
-                    <a:solidFill>
-                      <a:srgbClr val="FFFFFF"/>
-                    </a:solidFill>
-                  </a:tcPr>
-                </a:tc>
-                <a:tc>
-                  <a:txBody>
-                    <a:bodyPr/>
-                    <a:lstStyle/>
-                    <a:p>
-                      <a:pPr algn="ctr"/>
-                      <a:r>
-                        <a:rPr sz="1400">
-                          <a:solidFill>
-                            <a:srgbClr val="1A1A2E"/>
-                          </a:solidFill>
-                          <a:latin typeface="Calibri"/>
-                        </a:rPr>
-                        <a:t>No strong match still shows score + related jobs</a:t>
-                      </a:r>
-                    </a:p>
-                  </a:txBody>
-                  <a:tcPr anchor="ctr" marL="100584">
-                    <a:solidFill>
-                      <a:srgbClr val="FFFFFF"/>
-                    </a:solidFill>
-                  </a:tcPr>
-                </a:tc>
-                <a:tc>
-                  <a:txBody>
-                    <a:bodyPr/>
-                    <a:lstStyle/>
-                    <a:p>
-                      <a:pPr algn="ctr"/>
-                      <a:r>
-                        <a:rPr sz="1400">
-                          <a:solidFill>
-                            <a:srgbClr val="1A1A2E"/>
-                          </a:solidFill>
-                          <a:latin typeface="Calibri"/>
-                        </a:rPr>
-                        <a:t>Confirmed by design and by every respondent instrument</a:t>
-                      </a:r>
-                    </a:p>
-                  </a:txBody>
-                  <a:tcPr anchor="ctr" marL="100584">
-                    <a:solidFill>
-                      <a:srgbClr val="FFFFFF"/>
-                    </a:solidFill>
-                  </a:tcPr>
-                </a:tc>
-              </a:tr>
-              <a:tr h="358448">
-                <a:tc>
-                  <a:txBody>
-                    <a:bodyPr/>
-                    <a:lstStyle/>
-                    <a:p>
-                      <a:r>
-                        <a:rPr sz="1400">
-                          <a:solidFill>
-                            <a:srgbClr val="1A1A2E"/>
-                          </a:solidFill>
-                          <a:latin typeface="Calibri"/>
-                        </a:rPr>
-                        <a:t>Accessible to low-experience users</a:t>
-                      </a:r>
-                    </a:p>
-                  </a:txBody>
-                  <a:tcPr anchor="ctr" marL="100584">
-                    <a:solidFill>
-                      <a:srgbClr val="F3F6FC"/>
-                    </a:solidFill>
-                  </a:tcPr>
-                </a:tc>
-                <a:tc>
-                  <a:txBody>
-                    <a:bodyPr/>
-                    <a:lstStyle/>
-                    <a:p>
-                      <a:pPr algn="ctr"/>
-                      <a:r>
-                        <a:rPr sz="1400">
-                          <a:solidFill>
-                            <a:srgbClr val="1A1A2E"/>
-                          </a:solidFill>
-                          <a:latin typeface="Calibri"/>
-                        </a:rPr>
-                        <a:t>Mobile-responsive, light/dark mode, guided tour</a:t>
-                      </a:r>
-                    </a:p>
-                  </a:txBody>
-                  <a:tcPr anchor="ctr" marL="100584">
-                    <a:solidFill>
-                      <a:srgbClr val="F3F6FC"/>
-                    </a:solidFill>
-                  </a:tcPr>
-                </a:tc>
-                <a:tc>
-                  <a:txBody>
-                    <a:bodyPr/>
-                    <a:lstStyle/>
-                    <a:p>
-                      <a:pPr algn="ctr"/>
-                      <a:r>
-                        <a:rPr sz="1400">
-                          <a:solidFill>
-                            <a:srgbClr val="1A1A2E"/>
-                          </a:solidFill>
-                          <a:latin typeface="Calibri"/>
-                        </a:rPr>
-                        <a:t>Built; not directly measured by any instrument — an honest gap</a:t>
-                      </a:r>
-                    </a:p>
-                  </a:txBody>
-                  <a:tcPr anchor="ctr" marL="100584">
-                    <a:solidFill>
-                      <a:srgbClr val="F3F6FC"/>
-                    </a:solidFill>
-                  </a:tcPr>
-                </a:tc>
-              </a:tr>
-            </a:tbl>
-          </a:graphicData>
-        </a:graphic>
-      </p:graphicFrame>
+        </p:nvPicPr>
+        <p:blipFill>
+          <a:blip r:embed="rId2"/>
+          <a:stretch>
+            <a:fillRect/>
+          </a:stretch>
+        </p:blipFill>
+        <p:spPr>
+          <a:xfrm>
+            <a:off x="658368" y="2048256"/>
+            <a:ext cx="10881360" cy="4172077"/>
+          </a:xfrm>
+          <a:prstGeom prst="rect">
+            <a:avLst/>
+          </a:prstGeom>
+        </p:spPr>
+      </p:pic>
+      <p:sp>
+        <p:nvSpPr>
+          <p:cNvPr id="7" name="TextBox 6"/>
+          <p:cNvSpPr txBox="1"/>
+          <p:nvPr/>
+        </p:nvSpPr>
+        <p:spPr>
+          <a:xfrm>
+            <a:off x="658368" y="6291072"/>
+            <a:ext cx="10881360" cy="365760"/>
+          </a:xfrm>
+          <a:prstGeom prst="rect">
+            <a:avLst/>
+          </a:prstGeom>
+          <a:noFill/>
+        </p:spPr>
+        <p:txBody>
+          <a:bodyPr wrap="square" lIns="0" rIns="0" tIns="0" bIns="0" anchor="t">
+            <a:spAutoFit/>
+          </a:bodyPr>
+          <a:lstStyle/>
+          <a:p>
+            <a:pPr algn="ctr">
+              <a:spcAft>
+                <a:spcPts val="0"/>
+              </a:spcAft>
+            </a:pPr>
+            <a:r>
+              <a:rPr sz="1250" b="0" i="1">
+                <a:solidFill>
+                  <a:srgbClr val="5A6B8C"/>
+                </a:solidFill>
+                <a:latin typeface="Calibri"/>
+              </a:rPr>
+              <a:t>System Usability Scale: 74.7 — above both published benchmarks (68 and 70.14)</a:t>
+            </a:r>
+          </a:p>
+        </p:txBody>
+      </p:sp>
     </p:spTree>
   </p:cSld>
   <p:clrMapOvr>
@@ -6233,7 +6994,7 @@
 </p:sld>
 </file>
 
-<file path=ppt/slides/slide13.xml><?xml version="1.0" encoding="utf-8"?>
+<file path=ppt/slides/slide15.xml><?xml version="1.0" encoding="utf-8"?>
 <p:sld xmlns:a="http://schemas.openxmlformats.org/drawingml/2006/main" xmlns:p="http://schemas.openxmlformats.org/presentationml/2006/main" xmlns:r="http://schemas.openxmlformats.org/officeDocument/2006/relationships">
   <p:cSld>
     <p:spTree>
@@ -6277,7 +7038,7 @@
                 </a:solidFill>
                 <a:latin typeface="Calibri"/>
               </a:rPr>
-              <a:t>BENEFITS, LIMITS, CONTRIBUTION</a:t>
+              <a:t>OBJECTIVE ACHIEVEMENT</a:t>
             </a:r>
           </a:p>
         </p:txBody>
@@ -6316,7 +7077,7 @@
                 </a:solidFill>
                 <a:latin typeface="Calibri"/>
               </a:rPr>
-              <a:t>Benefits, Limitations, and Contribution</a:t>
+              <a:t>Each objective, and the evidence behind it</a:t>
             </a:r>
           </a:p>
         </p:txBody>
@@ -6365,125 +7126,219 @@
           </a:p>
         </p:txBody>
       </p:sp>
-      <p:sp>
-        <p:nvSpPr>
-          <p:cNvPr id="5" name="TextBox 4"/>
-          <p:cNvSpPr txBox="1"/>
+      <p:graphicFrame>
+        <p:nvGraphicFramePr>
+          <p:cNvPr id="5" name="Table 4"/>
+          <p:cNvGraphicFramePr>
+            <a:graphicFrameLocks noGrp="1"/>
+          </p:cNvGraphicFramePr>
           <p:nvPr/>
-        </p:nvSpPr>
-        <p:spPr>
-          <a:xfrm>
-            <a:off x="658368" y="1645920"/>
-            <a:ext cx="10881360" cy="4389120"/>
-          </a:xfrm>
-          <a:prstGeom prst="rect">
-            <a:avLst/>
-          </a:prstGeom>
-          <a:noFill/>
-        </p:spPr>
-        <p:txBody>
-          <a:bodyPr wrap="square" lIns="0" rIns="0" tIns="0" bIns="0" anchor="t">
-            <a:spAutoFit/>
-          </a:bodyPr>
-          <a:lstStyle/>
-          <a:p>
-            <a:pPr algn="l">
-              <a:spcAft>
-                <a:spcPts val="300"/>
-              </a:spcAft>
-            </a:pPr>
-            <a:r>
-              <a:rPr sz="1800" b="1" i="0">
-                <a:solidFill>
-                  <a:srgbClr val="1F3160"/>
-                </a:solidFill>
-                <a:latin typeface="Calibri"/>
-              </a:rPr>
-              <a:t>Who benefits</a:t>
-            </a:r>
-          </a:p>
-          <a:p>
-            <a:pPr>
-              <a:spcAft>
-                <a:spcPts val="1300"/>
-              </a:spcAft>
-            </a:pPr>
-            <a:r>
-              <a:rPr sz="1500" b="0" i="0">
-                <a:solidFill>
-                  <a:srgbClr val="5A6B8C"/>
-                </a:solidFill>
-                <a:latin typeface="Calibri"/>
-              </a:rPr>
-              <a:t>Job seekers get a free, guided path to an ATS-ready resume. Clark Outsourcing gets applications that arrive pre-scored against its own criteria.</a:t>
-            </a:r>
-          </a:p>
-          <a:p>
-            <a:pPr>
-              <a:spcAft>
-                <a:spcPts val="300"/>
-              </a:spcAft>
-            </a:pPr>
-            <a:r>
-              <a:rPr sz="1800" b="1" i="0">
-                <a:solidFill>
-                  <a:srgbClr val="1F3160"/>
-                </a:solidFill>
-                <a:latin typeface="Calibri"/>
-              </a:rPr>
-              <a:t>Our contribution</a:t>
-            </a:r>
-          </a:p>
-          <a:p>
-            <a:pPr>
-              <a:spcAft>
-                <a:spcPts val="1300"/>
-              </a:spcAft>
-            </a:pPr>
-            <a:r>
-              <a:rPr sz="1500" b="0" i="0">
-                <a:solidFill>
-                  <a:srgbClr val="5A6B8C"/>
-                </a:solidFill>
-                <a:latin typeface="Calibri"/>
-              </a:rPr>
-              <a:t>A working, evaluated system plus a fully documented, deterministic scoring formula — no black box, reusable by future researchers.</a:t>
-            </a:r>
-          </a:p>
-          <a:p>
-            <a:pPr>
-              <a:spcAft>
-                <a:spcPts val="300"/>
-              </a:spcAft>
-            </a:pPr>
-            <a:r>
-              <a:rPr sz="1800" b="1" i="0">
-                <a:solidFill>
-                  <a:srgbClr val="1F3160"/>
-                </a:solidFill>
-                <a:latin typeface="Calibri"/>
-              </a:rPr>
-              <a:t>The honest limits</a:t>
-            </a:r>
-          </a:p>
-          <a:p>
-            <a:pPr>
-              <a:spcAft>
-                <a:spcPts val="1300"/>
-              </a:spcAft>
-            </a:pPr>
-            <a:r>
-              <a:rPr sz="1500" b="0" i="0">
-                <a:solidFill>
-                  <a:srgbClr val="5A6B8C"/>
-                </a:solidFill>
-                <a:latin typeface="Calibri"/>
-              </a:rPr>
-              <a:t>One partner company, one twenty-to-thirty-minute session, no control group. We do not claim the system saves recruiters time — that specific claim tested neutral to weak across every instrument that measured it.</a:t>
-            </a:r>
-          </a:p>
-        </p:txBody>
-      </p:sp>
+        </p:nvGraphicFramePr>
+        <p:xfrm>
+          <a:off x="658368" y="1737360"/>
+          <a:ext cx="10881359" cy="1444752"/>
+        </p:xfrm>
+        <a:graphic>
+          <a:graphicData uri="http://schemas.openxmlformats.org/drawingml/2006/table">
+            <a:tbl>
+              <a:tblPr firstRow="1" bandRow="1">
+                <a:tableStyleId>{5C22544A-7EE6-4342-B048-85BDC9FD1C3A}</a:tableStyleId>
+              </a:tblPr>
+              <a:tblGrid>
+                <a:gridCol w="2436125"/>
+                <a:gridCol w="8445234"/>
+              </a:tblGrid>
+              <a:tr h="361188">
+                <a:tc>
+                  <a:txBody>
+                    <a:bodyPr/>
+                    <a:lstStyle/>
+                    <a:p>
+                      <a:r>
+                        <a:rPr sz="1300" b="1">
+                          <a:solidFill>
+                            <a:srgbClr val="FFFFFF"/>
+                          </a:solidFill>
+                          <a:latin typeface="Calibri"/>
+                        </a:rPr>
+                        <a:t>Objective</a:t>
+                      </a:r>
+                    </a:p>
+                  </a:txBody>
+                  <a:tcPr anchor="ctr" marL="100584">
+                    <a:solidFill>
+                      <a:srgbClr val="1F3160"/>
+                    </a:solidFill>
+                  </a:tcPr>
+                </a:tc>
+                <a:tc>
+                  <a:txBody>
+                    <a:bodyPr/>
+                    <a:lstStyle/>
+                    <a:p>
+                      <a:r>
+                        <a:rPr sz="1300" b="1">
+                          <a:solidFill>
+                            <a:srgbClr val="FFFFFF"/>
+                          </a:solidFill>
+                          <a:latin typeface="Calibri"/>
+                        </a:rPr>
+                        <a:t>Evidence</a:t>
+                      </a:r>
+                    </a:p>
+                  </a:txBody>
+                  <a:tcPr anchor="ctr" marL="100584">
+                    <a:solidFill>
+                      <a:srgbClr val="1F3160"/>
+                    </a:solidFill>
+                  </a:tcPr>
+                </a:tc>
+              </a:tr>
+              <a:tr h="361188">
+                <a:tc>
+                  <a:txBody>
+                    <a:bodyPr/>
+                    <a:lstStyle/>
+                    <a:p>
+                      <a:r>
+                        <a:rPr sz="1300">
+                          <a:solidFill>
+                            <a:srgbClr val="1A1A2E"/>
+                          </a:solidFill>
+                          <a:latin typeface="Calibri"/>
+                        </a:rPr>
+                        <a:t>1. Build the system</a:t>
+                      </a:r>
+                    </a:p>
+                  </a:txBody>
+                  <a:tcPr anchor="ctr" marL="100584">
+                    <a:solidFill>
+                      <a:srgbClr val="FFFFFF"/>
+                    </a:solidFill>
+                  </a:tcPr>
+                </a:tc>
+                <a:tc>
+                  <a:txBody>
+                    <a:bodyPr/>
+                    <a:lstStyle/>
+                    <a:p>
+                      <a:pPr algn="ctr"/>
+                      <a:r>
+                        <a:rPr sz="1300">
+                          <a:solidFill>
+                            <a:srgbClr val="1A1A2E"/>
+                          </a:solidFill>
+                          <a:latin typeface="Calibri"/>
+                        </a:rPr>
+                        <a:t>Every module built and exercised by respondents. All 46 job seekers registered and signed in; 37 built a resume in the builder, 38 applied, 43 read a learning-hub guide. All 10 HR completed all ten tasks. Overall 4.28 and 4.22 — both Good.</a:t>
+                      </a:r>
+                    </a:p>
+                  </a:txBody>
+                  <a:tcPr anchor="ctr" marL="100584">
+                    <a:solidFill>
+                      <a:srgbClr val="FFFFFF"/>
+                    </a:solidFill>
+                  </a:tcPr>
+                </a:tc>
+              </a:tr>
+              <a:tr h="361188">
+                <a:tc>
+                  <a:txBody>
+                    <a:bodyPr/>
+                    <a:lstStyle/>
+                    <a:p>
+                      <a:r>
+                        <a:rPr sz="1300">
+                          <a:solidFill>
+                            <a:srgbClr val="1A1A2E"/>
+                          </a:solidFill>
+                          <a:latin typeface="Calibri"/>
+                        </a:rPr>
+                        <a:t>2. Implement the matching feature</a:t>
+                      </a:r>
+                    </a:p>
+                  </a:txBody>
+                  <a:tcPr anchor="ctr" marL="100584">
+                    <a:solidFill>
+                      <a:srgbClr val="F3F6FC"/>
+                    </a:solidFill>
+                  </a:tcPr>
+                </a:tc>
+                <a:tc>
+                  <a:txBody>
+                    <a:bodyPr/>
+                    <a:lstStyle/>
+                    <a:p>
+                      <a:pPr algn="ctr"/>
+                      <a:r>
+                        <a:rPr sz="1300">
+                          <a:solidFill>
+                            <a:srgbClr val="1A1A2E"/>
+                          </a:solidFill>
+                          <a:latin typeface="Calibri"/>
+                        </a:rPr>
+                        <a:t>Screening awareness fell 3.93 → 2.65, a large effect. All 10 recruiters placed the system's top-ranked applicant inside their own top three, and 5 placed that applicant first. Trust rated 4.00 by all ten, SD 0.00 — unanimous.</a:t>
+                      </a:r>
+                    </a:p>
+                  </a:txBody>
+                  <a:tcPr anchor="ctr" marL="100584">
+                    <a:solidFill>
+                      <a:srgbClr val="F3F6FC"/>
+                    </a:solidFill>
+                  </a:tcPr>
+                </a:tc>
+              </a:tr>
+              <a:tr h="361188">
+                <a:tc>
+                  <a:txBody>
+                    <a:bodyPr/>
+                    <a:lstStyle/>
+                    <a:p>
+                      <a:r>
+                        <a:rPr sz="1300">
+                          <a:solidFill>
+                            <a:srgbClr val="1A1A2E"/>
+                          </a:solidFill>
+                          <a:latin typeface="Calibri"/>
+                        </a:rPr>
+                        <a:t>3. Evaluate against ISO/IEC 25010</a:t>
+                      </a:r>
+                    </a:p>
+                  </a:txBody>
+                  <a:tcPr anchor="ctr" marL="100584">
+                    <a:solidFill>
+                      <a:srgbClr val="FFFFFF"/>
+                    </a:solidFill>
+                  </a:tcPr>
+                </a:tc>
+                <a:tc>
+                  <a:txBody>
+                    <a:bodyPr/>
+                    <a:lstStyle/>
+                    <a:p>
+                      <a:pPr algn="ctr"/>
+                      <a:r>
+                        <a:rPr sz="1300">
+                          <a:solidFill>
+                            <a:srgbClr val="1A1A2E"/>
+                          </a:solidFill>
+                          <a:latin typeface="Calibri"/>
+                        </a:rPr>
+                        <a:t>All five characteristics rated across three respondent groups. Job seekers 4.28, HR 4.22, IT experts 4.80. SUS 74.7, above both benchmarks. Cronbach's alpha reported per characteristic, including the values below 0.70.</a:t>
+                      </a:r>
+                    </a:p>
+                  </a:txBody>
+                  <a:tcPr anchor="ctr" marL="100584">
+                    <a:solidFill>
+                      <a:srgbClr val="FFFFFF"/>
+                    </a:solidFill>
+                  </a:tcPr>
+                </a:tc>
+              </a:tr>
+            </a:tbl>
+          </a:graphicData>
+        </a:graphic>
+      </p:graphicFrame>
     </p:spTree>
   </p:cSld>
   <p:clrMapOvr>
@@ -6492,7 +7347,7 @@
 </p:sld>
 </file>
 
-<file path=ppt/slides/slide14.xml><?xml version="1.0" encoding="utf-8"?>
+<file path=ppt/slides/slide16.xml><?xml version="1.0" encoding="utf-8"?>
 <p:sld xmlns:a="http://schemas.openxmlformats.org/drawingml/2006/main" xmlns:p="http://schemas.openxmlformats.org/presentationml/2006/main" xmlns:r="http://schemas.openxmlformats.org/officeDocument/2006/relationships">
   <p:cSld>
     <p:spTree>
@@ -6536,7 +7391,7 @@
                 </a:solidFill>
                 <a:latin typeface="Calibri"/>
               </a:rPr>
-              <a:t>CONCLUSION</a:t>
+              <a:t>HONEST LIMITS</a:t>
             </a:r>
           </a:p>
         </p:txBody>
@@ -6575,7 +7430,7 @@
                 </a:solidFill>
                 <a:latin typeface="Calibri"/>
               </a:rPr>
-              <a:t>Conclusion and Recommendations</a:t>
+              <a:t>What this study does not establish</a:t>
             </a:r>
           </a:p>
         </p:txBody>
@@ -6658,7 +7513,7 @@
                 </a:solidFill>
                 <a:latin typeface="Calibri"/>
               </a:rPr>
-              <a:t>The problem is real, confirmed on both sides</a:t>
+              <a:t>We built it and we evaluated it</a:t>
             </a:r>
           </a:p>
           <a:p>
@@ -6674,7 +7529,7 @@
                 </a:solidFill>
                 <a:latin typeface="Calibri"/>
               </a:rPr>
-              <a:t>Job seekers and recruiters, surveyed separately and never shown each other's answers, described the same problem independently.</a:t>
+              <a:t>Four measures limit that bias — confidential responses, no researcher present, an invitation asking for critical ratings, and a scale published before data collection. They limit it; they do not remove it.</a:t>
             </a:r>
           </a:p>
           <a:p>
@@ -6690,7 +7545,7 @@
                 </a:solidFill>
                 <a:latin typeface="Calibri"/>
               </a:rPr>
-              <a:t>The system's transparency is its strongest result</a:t>
+              <a:t>One company, one industry, one session</a:t>
             </a:r>
           </a:p>
           <a:p>
@@ -6706,7 +7561,7 @@
                 </a:solidFill>
                 <a:latin typeface="Calibri"/>
               </a:rPr>
-              <a:t>Explainability and human control scored highest across every instrument — stronger evidence than any time-saving claim.</a:t>
+              <a:t>A single-company pilot. Twenty to thirty minutes per respondent — enough to judge usability, not reliability over time.</a:t>
             </a:r>
           </a:p>
           <a:p>
@@ -6722,7 +7577,7 @@
                 </a:solidFill>
                 <a:latin typeface="Calibri"/>
               </a:rPr>
-              <a:t>What we recommend next</a:t>
+              <a:t>Quantity, not relevance</a:t>
             </a:r>
           </a:p>
           <a:p>
@@ -6738,7 +7593,39 @@
                 </a:solidFill>
                 <a:latin typeface="Calibri"/>
               </a:rPr>
-              <a:t>Add a relevance measure to the experience score; make the per-posting weight control easier to find; extend the evaluation beyond one company and one session.</a:t>
+              <a:t>Experience counts months without judging field or recency. Four of ten recruiters identified this independently, and it is our first system recommendation.</a:t>
+            </a:r>
+          </a:p>
+          <a:p>
+            <a:pPr>
+              <a:spcAft>
+                <a:spcPts val="300"/>
+              </a:spcAft>
+            </a:pPr>
+            <a:r>
+              <a:rPr sz="1900" b="1" i="0">
+                <a:solidFill>
+                  <a:srgbClr val="1F3160"/>
+                </a:solidFill>
+                <a:latin typeface="Calibri"/>
+              </a:rPr>
+              <a:t>Quality, not employment</a:t>
+            </a:r>
+          </a:p>
+          <a:p>
+            <a:pPr>
+              <a:spcAft>
+                <a:spcPts val="1300"/>
+              </a:spcAft>
+            </a:pPr>
+            <a:r>
+              <a:rPr sz="1600" b="0" i="0">
+                <a:solidFill>
+                  <a:srgbClr val="5A6B8C"/>
+                </a:solidFill>
+                <a:latin typeface="Calibri"/>
+              </a:rPr>
+              <a:t>We measure whether the system is good, not whether it gets anyone hired. No claim of that kind can be made from this design.</a:t>
             </a:r>
           </a:p>
         </p:txBody>
@@ -6751,7 +7638,7 @@
 </p:sld>
 </file>
 
-<file path=ppt/slides/slide15.xml><?xml version="1.0" encoding="utf-8"?>
+<file path=ppt/slides/slide17.xml><?xml version="1.0" encoding="utf-8"?>
 <p:sld xmlns:a="http://schemas.openxmlformats.org/drawingml/2006/main" xmlns:p="http://schemas.openxmlformats.org/presentationml/2006/main" xmlns:r="http://schemas.openxmlformats.org/officeDocument/2006/relationships">
   <p:cSld>
     <p:spTree>
@@ -6839,7 +7726,7 @@
                 </a:solidFill>
                 <a:latin typeface="Calibri"/>
               </a:rPr>
-              <a:t>SUMMARY</a:t>
+              <a:t>CONCLUSION</a:t>
             </a:r>
           </a:p>
           <a:p>
@@ -6855,7 +7742,7 @@
                 </a:solidFill>
                 <a:latin typeface="Calibri"/>
               </a:rPr>
-              <a:t>Problem → Solution → System → Result → Impact</a:t>
+              <a:t>A low score should be advice, not silence</a:t>
             </a:r>
           </a:p>
           <a:p>
@@ -6871,7 +7758,7 @@
                 </a:solidFill>
                 <a:latin typeface="Calibri"/>
               </a:rPr>
-              <a:t>Linaw means clarity. The system doesn't decide who gets hired — it makes the reasoning visible to the person it's about.</a:t>
+              <a:t>Linaw PH — free, transparent, and always leaving the decision to a person</a:t>
             </a:r>
           </a:p>
         </p:txBody>
@@ -6928,7 +7815,7 @@
                 </a:solidFill>
                 <a:latin typeface="Calibri"/>
               </a:rPr>
-              <a:t>THE PROBLEM</a:t>
+              <a:t>BACKGROUND</a:t>
             </a:r>
           </a:p>
         </p:txBody>
@@ -6967,7 +7854,7 @@
                 </a:solidFill>
                 <a:latin typeface="Calibri"/>
               </a:rPr>
-              <a:t>Background and Problem</a:t>
+              <a:t>The problem, on both sides of the hiring process</a:t>
             </a:r>
           </a:p>
         </p:txBody>
@@ -7006,7 +7893,7 @@
                 </a:solidFill>
                 <a:latin typeface="Calibri"/>
               </a:rPr>
-              <a:t>Measured directly, before the system existed — not assumed.</a:t>
+              <a:t>Two problems that are really one problem, seen from two sides</a:t>
             </a:r>
           </a:p>
         </p:txBody>
@@ -7089,7 +7976,7 @@
                 </a:solidFill>
                 <a:latin typeface="Calibri"/>
               </a:rPr>
-              <a:t>Job seekers can't get past the resume</a:t>
+              <a:t>Job seekers</a:t>
             </a:r>
           </a:p>
           <a:p>
@@ -7105,7 +7992,7 @@
                 </a:solidFill>
                 <a:latin typeface="Calibri"/>
               </a:rPr>
-              <a:t>Many Filipino job seekers, especially fresh graduates, write resumes without guidance, in layouts automated screening reads poorly. 80.4% have never paid for help with a resume.</a:t>
+              <a:t>Good resume tools sit behind paywalls. Applications are filtered by software before a person reads them — and nobody explains why, so the applicant cannot improve.</a:t>
             </a:r>
           </a:p>
           <a:p>
@@ -7121,7 +8008,7 @@
                 </a:solidFill>
                 <a:latin typeface="Calibri"/>
               </a:rPr>
-              <a:t>...and they're told nothing when it fails</a:t>
+              <a:t>Recruiters</a:t>
             </a:r>
           </a:p>
           <a:p>
@@ -7137,7 +8024,7 @@
                 </a:solidFill>
                 <a:latin typeface="Calibri"/>
               </a:rPr>
-              <a:t>Of those who had applied for work, 48.7% are told why an application failed never or rarely.</a:t>
+              <a:t>HR departments receive large volumes of unstructured applications and screen them by hand. Commercial ATS software is priced for large enterprises.</a:t>
             </a:r>
           </a:p>
           <a:p>
@@ -7153,7 +8040,7 @@
                 </a:solidFill>
                 <a:latin typeface="Calibri"/>
               </a:rPr>
-              <a:t>Recruiters have the mirror problem</a:t>
+              <a:t>Existing platforms only half-solve it</a:t>
             </a:r>
           </a:p>
           <a:p>
@@ -7169,7 +8056,7 @@
                 </a:solidFill>
                 <a:latin typeface="Calibri"/>
               </a:rPr>
-              <a:t>HR staff at our partner company screen mostly by hand, and rated poor formatting getting in their way at 4.64 out of 5 — the strongest finding in the whole recruiter survey.</a:t>
+              <a:t>JobStreet, Indeed and LinkedIn are keyword listing sites that assume you already know what to search. Canva and Zety are not built for ATS compatibility or the Philippine context.</a:t>
             </a:r>
           </a:p>
         </p:txBody>
@@ -7226,7 +8113,7 @@
                 </a:solidFill>
                 <a:latin typeface="Calibri"/>
               </a:rPr>
-              <a:t>THE SOLUTION</a:t>
+              <a:t>REQUIREMENT ANALYSIS</a:t>
             </a:r>
           </a:p>
         </p:txBody>
@@ -7265,7 +8152,7 @@
                 </a:solidFill>
                 <a:latin typeface="Calibri"/>
               </a:rPr>
-              <a:t>What We Developed</a:t>
+              <a:t>We confirmed the problem before building anything</a:t>
             </a:r>
           </a:p>
         </p:txBody>
@@ -7304,7 +8191,7 @@
                 </a:solidFill>
                 <a:latin typeface="Calibri"/>
               </a:rPr>
-              <a:t>Linaw means clarity — the system's one design commitment, in one word.</a:t>
+              <a:t>Instruments A and B, administered while the system was still in development</a:t>
             </a:r>
           </a:p>
         </p:txBody>
@@ -7353,93 +8240,521 @@
           </a:p>
         </p:txBody>
       </p:sp>
-      <p:sp>
-        <p:nvSpPr>
-          <p:cNvPr id="6" name="TextBox 5"/>
-          <p:cNvSpPr txBox="1"/>
+      <p:graphicFrame>
+        <p:nvGraphicFramePr>
+          <p:cNvPr id="6" name="Table 5"/>
+          <p:cNvGraphicFramePr>
+            <a:graphicFrameLocks noGrp="1"/>
+          </p:cNvGraphicFramePr>
           <p:nvPr/>
-        </p:nvSpPr>
-        <p:spPr>
-          <a:xfrm>
-            <a:off x="658368" y="2075688"/>
-            <a:ext cx="10881360" cy="4206240"/>
-          </a:xfrm>
-          <a:prstGeom prst="rect">
-            <a:avLst/>
-          </a:prstGeom>
-          <a:noFill/>
-        </p:spPr>
-        <p:txBody>
-          <a:bodyPr wrap="square" lIns="0" rIns="0" tIns="0" bIns="0" anchor="t">
-            <a:spAutoFit/>
-          </a:bodyPr>
-          <a:lstStyle/>
-          <a:p>
-            <a:pPr algn="l">
-              <a:spcAft>
-                <a:spcPts val="1400"/>
-              </a:spcAft>
-            </a:pPr>
-            <a:r>
-              <a:rPr sz="1900" b="1" i="0">
-                <a:solidFill>
-                  <a:srgbClr val="1F3160"/>
-                </a:solidFill>
-                <a:latin typeface="Calibri"/>
-              </a:rPr>
-              <a:t>Linaw PH gives job seekers a guided resume builder and gives recruiters a scored, ranked applicant list — built from the same transparent formula on both sides.</a:t>
-            </a:r>
-          </a:p>
-          <a:p>
-            <a:pPr>
-              <a:spcAft>
-                <a:spcPts val="1000"/>
-              </a:spcAft>
-            </a:pPr>
-            <a:r>
-              <a:rPr sz="1800" b="0" i="0">
-                <a:solidFill>
-                  <a:srgbClr val="1A1A2E"/>
-                </a:solidFill>
-                <a:latin typeface="Calibri"/>
-              </a:rPr>
-              <a:t>•   A rule-based, published score — not a black box. The same resume and posting always give the same result, and the formula is shown to both sides.</a:t>
-            </a:r>
-          </a:p>
-          <a:p>
-            <a:pPr>
-              <a:spcAft>
-                <a:spcPts val="1000"/>
-              </a:spcAft>
-            </a:pPr>
-            <a:r>
-              <a:rPr sz="1800" b="0" i="0">
-                <a:solidFill>
-                  <a:srgbClr val="1A1A2E"/>
-                </a:solidFill>
-                <a:latin typeface="Calibri"/>
-              </a:rPr>
-              <a:t>•   The applicant sees exactly what the recruiter sees — the score, and which required skills their resume is missing.</a:t>
-            </a:r>
-          </a:p>
-          <a:p>
-            <a:pPr>
-              <a:spcAft>
-                <a:spcPts val="0"/>
-              </a:spcAft>
-            </a:pPr>
-            <a:r>
-              <a:rPr sz="1800" b="0" i="0">
-                <a:solidFill>
-                  <a:srgbClr val="1A1A2E"/>
-                </a:solidFill>
-                <a:latin typeface="Calibri"/>
-              </a:rPr>
-              <a:t>•   The system never rejects anyone automatically. It ranks and explains; a named recruiter always makes the final call.</a:t>
-            </a:r>
-          </a:p>
-        </p:txBody>
-      </p:sp>
+        </p:nvGraphicFramePr>
+        <p:xfrm>
+          <a:off x="658368" y="2103120"/>
+          <a:ext cx="10881360" cy="2487168"/>
+        </p:xfrm>
+        <a:graphic>
+          <a:graphicData uri="http://schemas.openxmlformats.org/drawingml/2006/table">
+            <a:tbl>
+              <a:tblPr firstRow="1" bandRow="1">
+                <a:tableStyleId>{5C22544A-7EE6-4342-B048-85BDC9FD1C3A}</a:tableStyleId>
+              </a:tblPr>
+              <a:tblGrid>
+                <a:gridCol w="6166104"/>
+                <a:gridCol w="2357628"/>
+                <a:gridCol w="2357628"/>
+              </a:tblGrid>
+              <a:tr h="355309">
+                <a:tc>
+                  <a:txBody>
+                    <a:bodyPr/>
+                    <a:lstStyle/>
+                    <a:p>
+                      <a:r>
+                        <a:rPr sz="1400" b="1">
+                          <a:solidFill>
+                            <a:srgbClr val="FFFFFF"/>
+                          </a:solidFill>
+                          <a:latin typeface="Calibri"/>
+                        </a:rPr>
+                        <a:t>What we asked</a:t>
+                      </a:r>
+                    </a:p>
+                  </a:txBody>
+                  <a:tcPr anchor="ctr" marL="100584">
+                    <a:solidFill>
+                      <a:srgbClr val="1F3160"/>
+                    </a:solidFill>
+                  </a:tcPr>
+                </a:tc>
+                <a:tc>
+                  <a:txBody>
+                    <a:bodyPr/>
+                    <a:lstStyle/>
+                    <a:p>
+                      <a:r>
+                        <a:rPr sz="1400" b="1">
+                          <a:solidFill>
+                            <a:srgbClr val="FFFFFF"/>
+                          </a:solidFill>
+                          <a:latin typeface="Calibri"/>
+                        </a:rPr>
+                        <a:t>Target group (n = 46)</a:t>
+                      </a:r>
+                    </a:p>
+                  </a:txBody>
+                  <a:tcPr anchor="ctr" marL="100584">
+                    <a:solidFill>
+                      <a:srgbClr val="1F3160"/>
+                    </a:solidFill>
+                  </a:tcPr>
+                </a:tc>
+                <a:tc>
+                  <a:txBody>
+                    <a:bodyPr/>
+                    <a:lstStyle/>
+                    <a:p>
+                      <a:r>
+                        <a:rPr sz="1400" b="1">
+                          <a:solidFill>
+                            <a:srgbClr val="FFFFFF"/>
+                          </a:solidFill>
+                          <a:latin typeface="Calibri"/>
+                        </a:rPr>
+                        <a:t>All valid (n = 103)</a:t>
+                      </a:r>
+                    </a:p>
+                  </a:txBody>
+                  <a:tcPr anchor="ctr" marL="100584">
+                    <a:solidFill>
+                      <a:srgbClr val="1F3160"/>
+                    </a:solidFill>
+                  </a:tcPr>
+                </a:tc>
+              </a:tr>
+              <a:tr h="355309">
+                <a:tc>
+                  <a:txBody>
+                    <a:bodyPr/>
+                    <a:lstStyle/>
+                    <a:p>
+                      <a:r>
+                        <a:rPr sz="1400">
+                          <a:solidFill>
+                            <a:srgbClr val="1A1A2E"/>
+                          </a:solidFill>
+                          <a:latin typeface="Calibri"/>
+                        </a:rPr>
+                        <a:t>"Formatting a resume is frustrating"</a:t>
+                      </a:r>
+                    </a:p>
+                  </a:txBody>
+                  <a:tcPr anchor="ctr" marL="100584">
+                    <a:solidFill>
+                      <a:srgbClr val="FFFFFF"/>
+                    </a:solidFill>
+                  </a:tcPr>
+                </a:tc>
+                <a:tc>
+                  <a:txBody>
+                    <a:bodyPr/>
+                    <a:lstStyle/>
+                    <a:p>
+                      <a:pPr algn="ctr"/>
+                      <a:r>
+                        <a:rPr sz="1400">
+                          <a:solidFill>
+                            <a:srgbClr val="1A1A2E"/>
+                          </a:solidFill>
+                          <a:latin typeface="Calibri"/>
+                        </a:rPr>
+                        <a:t>4.00</a:t>
+                      </a:r>
+                    </a:p>
+                  </a:txBody>
+                  <a:tcPr anchor="ctr" marL="100584">
+                    <a:solidFill>
+                      <a:srgbClr val="FFFFFF"/>
+                    </a:solidFill>
+                  </a:tcPr>
+                </a:tc>
+                <a:tc>
+                  <a:txBody>
+                    <a:bodyPr/>
+                    <a:lstStyle/>
+                    <a:p>
+                      <a:pPr algn="ctr"/>
+                      <a:r>
+                        <a:rPr sz="1400">
+                          <a:solidFill>
+                            <a:srgbClr val="1A1A2E"/>
+                          </a:solidFill>
+                          <a:latin typeface="Calibri"/>
+                        </a:rPr>
+                        <a:t>3.54</a:t>
+                      </a:r>
+                    </a:p>
+                  </a:txBody>
+                  <a:tcPr anchor="ctr" marL="100584">
+                    <a:solidFill>
+                      <a:srgbClr val="FFFFFF"/>
+                    </a:solidFill>
+                  </a:tcPr>
+                </a:tc>
+              </a:tr>
+              <a:tr h="355309">
+                <a:tc>
+                  <a:txBody>
+                    <a:bodyPr/>
+                    <a:lstStyle/>
+                    <a:p>
+                      <a:r>
+                        <a:rPr sz="1400">
+                          <a:solidFill>
+                            <a:srgbClr val="1A1A2E"/>
+                          </a:solidFill>
+                          <a:latin typeface="Calibri"/>
+                        </a:rPr>
+                        <a:t>"I cannot tell from a posting whether I qualify"</a:t>
+                      </a:r>
+                    </a:p>
+                  </a:txBody>
+                  <a:tcPr anchor="ctr" marL="100584">
+                    <a:solidFill>
+                      <a:srgbClr val="F3F6FC"/>
+                    </a:solidFill>
+                  </a:tcPr>
+                </a:tc>
+                <a:tc>
+                  <a:txBody>
+                    <a:bodyPr/>
+                    <a:lstStyle/>
+                    <a:p>
+                      <a:pPr algn="ctr"/>
+                      <a:r>
+                        <a:rPr sz="1400">
+                          <a:solidFill>
+                            <a:srgbClr val="1A1A2E"/>
+                          </a:solidFill>
+                          <a:latin typeface="Calibri"/>
+                        </a:rPr>
+                        <a:t>3.96</a:t>
+                      </a:r>
+                    </a:p>
+                  </a:txBody>
+                  <a:tcPr anchor="ctr" marL="100584">
+                    <a:solidFill>
+                      <a:srgbClr val="F3F6FC"/>
+                    </a:solidFill>
+                  </a:tcPr>
+                </a:tc>
+                <a:tc>
+                  <a:txBody>
+                    <a:bodyPr/>
+                    <a:lstStyle/>
+                    <a:p>
+                      <a:pPr algn="ctr"/>
+                      <a:r>
+                        <a:rPr sz="1400">
+                          <a:solidFill>
+                            <a:srgbClr val="1A1A2E"/>
+                          </a:solidFill>
+                          <a:latin typeface="Calibri"/>
+                        </a:rPr>
+                        <a:t>3.17</a:t>
+                      </a:r>
+                    </a:p>
+                  </a:txBody>
+                  <a:tcPr anchor="ctr" marL="100584">
+                    <a:solidFill>
+                      <a:srgbClr val="F3F6FC"/>
+                    </a:solidFill>
+                  </a:tcPr>
+                </a:tc>
+              </a:tr>
+              <a:tr h="355309">
+                <a:tc>
+                  <a:txBody>
+                    <a:bodyPr/>
+                    <a:lstStyle/>
+                    <a:p>
+                      <a:r>
+                        <a:rPr sz="1400">
+                          <a:solidFill>
+                            <a:srgbClr val="1A1A2E"/>
+                          </a:solidFill>
+                          <a:latin typeface="Calibri"/>
+                        </a:rPr>
+                        <a:t>"I worry a computer rejects me before a person reads it"</a:t>
+                      </a:r>
+                    </a:p>
+                  </a:txBody>
+                  <a:tcPr anchor="ctr" marL="100584">
+                    <a:solidFill>
+                      <a:srgbClr val="FFFFFF"/>
+                    </a:solidFill>
+                  </a:tcPr>
+                </a:tc>
+                <a:tc>
+                  <a:txBody>
+                    <a:bodyPr/>
+                    <a:lstStyle/>
+                    <a:p>
+                      <a:pPr algn="ctr"/>
+                      <a:r>
+                        <a:rPr sz="1400">
+                          <a:solidFill>
+                            <a:srgbClr val="1A1A2E"/>
+                          </a:solidFill>
+                          <a:latin typeface="Calibri"/>
+                        </a:rPr>
+                        <a:t>3.93</a:t>
+                      </a:r>
+                    </a:p>
+                  </a:txBody>
+                  <a:tcPr anchor="ctr" marL="100584">
+                    <a:solidFill>
+                      <a:srgbClr val="FFFFFF"/>
+                    </a:solidFill>
+                  </a:tcPr>
+                </a:tc>
+                <a:tc>
+                  <a:txBody>
+                    <a:bodyPr/>
+                    <a:lstStyle/>
+                    <a:p>
+                      <a:pPr algn="ctr"/>
+                      <a:r>
+                        <a:rPr sz="1400">
+                          <a:solidFill>
+                            <a:srgbClr val="1A1A2E"/>
+                          </a:solidFill>
+                          <a:latin typeface="Calibri"/>
+                        </a:rPr>
+                        <a:t>3.24</a:t>
+                      </a:r>
+                    </a:p>
+                  </a:txBody>
+                  <a:tcPr anchor="ctr" marL="100584">
+                    <a:solidFill>
+                      <a:srgbClr val="FFFFFF"/>
+                    </a:solidFill>
+                  </a:tcPr>
+                </a:tc>
+              </a:tr>
+              <a:tr h="355309">
+                <a:tc>
+                  <a:txBody>
+                    <a:bodyPr/>
+                    <a:lstStyle/>
+                    <a:p>
+                      <a:r>
+                        <a:rPr sz="1400">
+                          <a:solidFill>
+                            <a:srgbClr val="1A1A2E"/>
+                          </a:solidFill>
+                          <a:latin typeface="Calibri"/>
+                        </a:rPr>
+                        <a:t>"I want to see the same score the company sees"</a:t>
+                      </a:r>
+                    </a:p>
+                  </a:txBody>
+                  <a:tcPr anchor="ctr" marL="100584">
+                    <a:solidFill>
+                      <a:srgbClr val="F3F6FC"/>
+                    </a:solidFill>
+                  </a:tcPr>
+                </a:tc>
+                <a:tc>
+                  <a:txBody>
+                    <a:bodyPr/>
+                    <a:lstStyle/>
+                    <a:p>
+                      <a:pPr algn="ctr"/>
+                      <a:r>
+                        <a:rPr sz="1400">
+                          <a:solidFill>
+                            <a:srgbClr val="1A1A2E"/>
+                          </a:solidFill>
+                          <a:latin typeface="Calibri"/>
+                        </a:rPr>
+                        <a:t>4.43</a:t>
+                      </a:r>
+                    </a:p>
+                  </a:txBody>
+                  <a:tcPr anchor="ctr" marL="100584">
+                    <a:solidFill>
+                      <a:srgbClr val="F3F6FC"/>
+                    </a:solidFill>
+                  </a:tcPr>
+                </a:tc>
+                <a:tc>
+                  <a:txBody>
+                    <a:bodyPr/>
+                    <a:lstStyle/>
+                    <a:p>
+                      <a:pPr algn="ctr"/>
+                      <a:r>
+                        <a:rPr sz="1400">
+                          <a:solidFill>
+                            <a:srgbClr val="1A1A2E"/>
+                          </a:solidFill>
+                          <a:latin typeface="Calibri"/>
+                        </a:rPr>
+                        <a:t>3.92</a:t>
+                      </a:r>
+                    </a:p>
+                  </a:txBody>
+                  <a:tcPr anchor="ctr" marL="100584">
+                    <a:solidFill>
+                      <a:srgbClr val="F3F6FC"/>
+                    </a:solidFill>
+                  </a:tcPr>
+                </a:tc>
+              </a:tr>
+              <a:tr h="355309">
+                <a:tc>
+                  <a:txBody>
+                    <a:bodyPr/>
+                    <a:lstStyle/>
+                    <a:p>
+                      <a:r>
+                        <a:rPr sz="1400">
+                          <a:solidFill>
+                            <a:srgbClr val="1A1A2E"/>
+                          </a:solidFill>
+                          <a:latin typeface="Calibri"/>
+                        </a:rPr>
+                        <a:t>"Tell me exactly which required skills I am missing"</a:t>
+                      </a:r>
+                    </a:p>
+                  </a:txBody>
+                  <a:tcPr anchor="ctr" marL="100584">
+                    <a:solidFill>
+                      <a:srgbClr val="FFFFFF"/>
+                    </a:solidFill>
+                  </a:tcPr>
+                </a:tc>
+                <a:tc>
+                  <a:txBody>
+                    <a:bodyPr/>
+                    <a:lstStyle/>
+                    <a:p>
+                      <a:pPr algn="ctr"/>
+                      <a:r>
+                        <a:rPr sz="1400">
+                          <a:solidFill>
+                            <a:srgbClr val="1A1A2E"/>
+                          </a:solidFill>
+                          <a:latin typeface="Calibri"/>
+                        </a:rPr>
+                        <a:t>4.39</a:t>
+                      </a:r>
+                    </a:p>
+                  </a:txBody>
+                  <a:tcPr anchor="ctr" marL="100584">
+                    <a:solidFill>
+                      <a:srgbClr val="FFFFFF"/>
+                    </a:solidFill>
+                  </a:tcPr>
+                </a:tc>
+                <a:tc>
+                  <a:txBody>
+                    <a:bodyPr/>
+                    <a:lstStyle/>
+                    <a:p>
+                      <a:pPr algn="ctr"/>
+                      <a:r>
+                        <a:rPr sz="1400">
+                          <a:solidFill>
+                            <a:srgbClr val="1A1A2E"/>
+                          </a:solidFill>
+                          <a:latin typeface="Calibri"/>
+                        </a:rPr>
+                        <a:t>3.91</a:t>
+                      </a:r>
+                    </a:p>
+                  </a:txBody>
+                  <a:tcPr anchor="ctr" marL="100584">
+                    <a:solidFill>
+                      <a:srgbClr val="FFFFFF"/>
+                    </a:solidFill>
+                  </a:tcPr>
+                </a:tc>
+              </a:tr>
+              <a:tr h="355314">
+                <a:tc>
+                  <a:txBody>
+                    <a:bodyPr/>
+                    <a:lstStyle/>
+                    <a:p>
+                      <a:r>
+                        <a:rPr sz="1400">
+                          <a:solidFill>
+                            <a:srgbClr val="1A1A2E"/>
+                          </a:solidFill>
+                          <a:latin typeface="Calibri"/>
+                        </a:rPr>
+                        <a:t>Never paid for resume help</a:t>
+                      </a:r>
+                    </a:p>
+                  </a:txBody>
+                  <a:tcPr anchor="ctr" marL="100584">
+                    <a:solidFill>
+                      <a:srgbClr val="F3F6FC"/>
+                    </a:solidFill>
+                  </a:tcPr>
+                </a:tc>
+                <a:tc>
+                  <a:txBody>
+                    <a:bodyPr/>
+                    <a:lstStyle/>
+                    <a:p>
+                      <a:pPr algn="ctr"/>
+                      <a:r>
+                        <a:rPr sz="1400">
+                          <a:solidFill>
+                            <a:srgbClr val="1A1A2E"/>
+                          </a:solidFill>
+                          <a:latin typeface="Calibri"/>
+                        </a:rPr>
+                        <a:t>80.4%</a:t>
+                      </a:r>
+                    </a:p>
+                  </a:txBody>
+                  <a:tcPr anchor="ctr" marL="100584">
+                    <a:solidFill>
+                      <a:srgbClr val="F3F6FC"/>
+                    </a:solidFill>
+                  </a:tcPr>
+                </a:tc>
+                <a:tc>
+                  <a:txBody>
+                    <a:bodyPr/>
+                    <a:lstStyle/>
+                    <a:p>
+                      <a:pPr algn="ctr"/>
+                      <a:r>
+                        <a:rPr sz="1400">
+                          <a:solidFill>
+                            <a:srgbClr val="1A1A2E"/>
+                          </a:solidFill>
+                          <a:latin typeface="Calibri"/>
+                        </a:rPr>
+                        <a:t>—</a:t>
+                      </a:r>
+                    </a:p>
+                  </a:txBody>
+                  <a:tcPr anchor="ctr" marL="100584">
+                    <a:solidFill>
+                      <a:srgbClr val="F3F6FC"/>
+                    </a:solidFill>
+                  </a:tcPr>
+                </a:tc>
+              </a:tr>
+            </a:tbl>
+          </a:graphicData>
+        </a:graphic>
+      </p:graphicFrame>
     </p:spTree>
   </p:cSld>
   <p:clrMapOvr>
@@ -7492,7 +8807,7 @@
                 </a:solidFill>
                 <a:latin typeface="Calibri"/>
               </a:rPr>
-              <a:t>OBJECTIVES, SCOPE, USERS</a:t>
+              <a:t>THE SOLUTION</a:t>
             </a:r>
           </a:p>
         </p:txBody>
@@ -7531,7 +8846,298 @@
                 </a:solidFill>
                 <a:latin typeface="Calibri"/>
               </a:rPr>
-              <a:t>Who It's For, and What It Set Out to Do</a:t>
+              <a:t>What Linaw PH is</a:t>
+            </a:r>
+          </a:p>
+        </p:txBody>
+      </p:sp>
+      <p:sp>
+        <p:nvSpPr>
+          <p:cNvPr id="4" name="Rectangle 3"/>
+          <p:cNvSpPr/>
+          <p:nvPr/>
+        </p:nvSpPr>
+        <p:spPr>
+          <a:xfrm>
+            <a:off x="658368" y="1316736"/>
+            <a:ext cx="10881360" cy="20320"/>
+          </a:xfrm>
+          <a:prstGeom prst="rect">
+            <a:avLst/>
+          </a:prstGeom>
+          <a:solidFill>
+            <a:srgbClr val="C3CEE6"/>
+          </a:solidFill>
+          <a:ln>
+            <a:noFill/>
+          </a:ln>
+          <a:effectLst/>
+        </p:spPr>
+        <p:style>
+          <a:lnRef idx="1">
+            <a:schemeClr val="accent1"/>
+          </a:lnRef>
+          <a:fillRef idx="3">
+            <a:schemeClr val="accent1"/>
+          </a:fillRef>
+          <a:effectRef idx="2">
+            <a:schemeClr val="accent1"/>
+          </a:effectRef>
+          <a:fontRef idx="minor">
+            <a:schemeClr val="lt1"/>
+          </a:fontRef>
+        </p:style>
+        <p:txBody>
+          <a:bodyPr rtlCol="0" anchor="ctr"/>
+          <a:lstStyle/>
+          <a:p>
+            <a:pPr algn="ctr"/>
+          </a:p>
+        </p:txBody>
+      </p:sp>
+      <p:sp>
+        <p:nvSpPr>
+          <p:cNvPr id="5" name="TextBox 4"/>
+          <p:cNvSpPr txBox="1"/>
+          <p:nvPr/>
+        </p:nvSpPr>
+        <p:spPr>
+          <a:xfrm>
+            <a:off x="658368" y="1645920"/>
+            <a:ext cx="10881360" cy="4389120"/>
+          </a:xfrm>
+          <a:prstGeom prst="rect">
+            <a:avLst/>
+          </a:prstGeom>
+          <a:noFill/>
+        </p:spPr>
+        <p:txBody>
+          <a:bodyPr wrap="square" lIns="0" rIns="0" tIns="0" bIns="0" anchor="t">
+            <a:spAutoFit/>
+          </a:bodyPr>
+          <a:lstStyle/>
+          <a:p>
+            <a:pPr algn="l">
+              <a:spcAft>
+                <a:spcPts val="300"/>
+              </a:spcAft>
+            </a:pPr>
+            <a:r>
+              <a:rPr sz="1900" b="1" i="0">
+                <a:solidFill>
+                  <a:srgbClr val="1F3160"/>
+                </a:solidFill>
+                <a:latin typeface="Calibri"/>
+              </a:rPr>
+              <a:t>A free website with two sides</a:t>
+            </a:r>
+          </a:p>
+          <a:p>
+            <a:pPr>
+              <a:spcAft>
+                <a:spcPts val="1300"/>
+              </a:spcAft>
+            </a:pPr>
+            <a:r>
+              <a:rPr sz="1600" b="0" i="0">
+                <a:solidFill>
+                  <a:srgbClr val="5A6B8C"/>
+                </a:solidFill>
+                <a:latin typeface="Calibri"/>
+              </a:rPr>
+              <a:t>On one side a job seeker builds a resume that screening software can actually read. On the other, a recruiter posts an opening and receives applicants already scored and ranked.</a:t>
+            </a:r>
+          </a:p>
+          <a:p>
+            <a:pPr>
+              <a:spcAft>
+                <a:spcPts val="300"/>
+              </a:spcAft>
+            </a:pPr>
+            <a:r>
+              <a:rPr sz="1900" b="1" i="0">
+                <a:solidFill>
+                  <a:srgbClr val="1F3160"/>
+                </a:solidFill>
+                <a:latin typeface="Calibri"/>
+              </a:rPr>
+              <a:t>Both sides see the same score</a:t>
+            </a:r>
+          </a:p>
+          <a:p>
+            <a:pPr>
+              <a:spcAft>
+                <a:spcPts val="1300"/>
+              </a:spcAft>
+            </a:pPr>
+            <a:r>
+              <a:rPr sz="1600" b="0" i="0">
+                <a:solidFill>
+                  <a:srgbClr val="5A6B8C"/>
+                </a:solidFill>
+                <a:latin typeface="Calibri"/>
+              </a:rPr>
+              <a:t>The same number and the same breakdown go to the recruiter AND to the applicant. That is the part that does not exist anywhere else.</a:t>
+            </a:r>
+          </a:p>
+          <a:p>
+            <a:pPr>
+              <a:spcAft>
+                <a:spcPts val="300"/>
+              </a:spcAft>
+            </a:pPr>
+            <a:r>
+              <a:rPr sz="1900" b="1" i="0">
+                <a:solidFill>
+                  <a:srgbClr val="1F3160"/>
+                </a:solidFill>
+                <a:latin typeface="Calibri"/>
+              </a:rPr>
+              <a:t>Nothing is ever auto-rejected</a:t>
+            </a:r>
+          </a:p>
+          <a:p>
+            <a:pPr>
+              <a:spcAft>
+                <a:spcPts val="1300"/>
+              </a:spcAft>
+            </a:pPr>
+            <a:r>
+              <a:rPr sz="1600" b="0" i="0">
+                <a:solidFill>
+                  <a:srgbClr val="5A6B8C"/>
+                </a:solidFill>
+                <a:latin typeface="Calibri"/>
+              </a:rPr>
+              <a:t>A low score changes what the system recommends, never whether the application is received. A named person makes every decision.</a:t>
+            </a:r>
+          </a:p>
+          <a:p>
+            <a:pPr>
+              <a:spcAft>
+                <a:spcPts val="300"/>
+              </a:spcAft>
+            </a:pPr>
+            <a:r>
+              <a:rPr sz="1900" b="1" i="0">
+                <a:solidFill>
+                  <a:srgbClr val="1F3160"/>
+                </a:solidFill>
+                <a:latin typeface="Calibri"/>
+              </a:rPr>
+              <a:t>A low score becomes advice</a:t>
+            </a:r>
+          </a:p>
+          <a:p>
+            <a:pPr>
+              <a:spcAft>
+                <a:spcPts val="1300"/>
+              </a:spcAft>
+            </a:pPr>
+            <a:r>
+              <a:rPr sz="1600" b="0" i="0">
+                <a:solidFill>
+                  <a:srgbClr val="5A6B8C"/>
+                </a:solidFill>
+                <a:latin typeface="Calibri"/>
+              </a:rPr>
+              <a:t>The system states how many required skills are missing and of what kind, then recommends related positions the applicant does fit.</a:t>
+            </a:r>
+          </a:p>
+        </p:txBody>
+      </p:sp>
+    </p:spTree>
+  </p:cSld>
+  <p:clrMapOvr>
+    <a:masterClrMapping/>
+  </p:clrMapOvr>
+</p:sld>
+</file>
+
+<file path=ppt/slides/slide5.xml><?xml version="1.0" encoding="utf-8"?>
+<p:sld xmlns:a="http://schemas.openxmlformats.org/drawingml/2006/main" xmlns:p="http://schemas.openxmlformats.org/presentationml/2006/main" xmlns:r="http://schemas.openxmlformats.org/officeDocument/2006/relationships">
+  <p:cSld>
+    <p:spTree>
+      <p:nvGrpSpPr>
+        <p:cNvPr id="1" name=""/>
+        <p:cNvGrpSpPr/>
+        <p:nvPr/>
+      </p:nvGrpSpPr>
+      <p:grpSpPr/>
+      <p:sp>
+        <p:nvSpPr>
+          <p:cNvPr id="2" name="TextBox 1"/>
+          <p:cNvSpPr txBox="1"/>
+          <p:nvPr/>
+        </p:nvSpPr>
+        <p:spPr>
+          <a:xfrm>
+            <a:off x="658368" y="384048"/>
+            <a:ext cx="10881360" cy="274320"/>
+          </a:xfrm>
+          <a:prstGeom prst="rect">
+            <a:avLst/>
+          </a:prstGeom>
+          <a:noFill/>
+        </p:spPr>
+        <p:txBody>
+          <a:bodyPr wrap="square" lIns="0" rIns="0" tIns="0" bIns="0" anchor="t">
+            <a:spAutoFit/>
+          </a:bodyPr>
+          <a:lstStyle/>
+          <a:p>
+            <a:pPr algn="l">
+              <a:spcAft>
+                <a:spcPts val="200"/>
+              </a:spcAft>
+            </a:pPr>
+            <a:r>
+              <a:rPr sz="1200" b="1" i="0">
+                <a:solidFill>
+                  <a:srgbClr val="2F4B8F"/>
+                </a:solidFill>
+                <a:latin typeface="Calibri"/>
+              </a:rPr>
+              <a:t>OBJECTIVES</a:t>
+            </a:r>
+          </a:p>
+        </p:txBody>
+      </p:sp>
+      <p:sp>
+        <p:nvSpPr>
+          <p:cNvPr id="3" name="TextBox 2"/>
+          <p:cNvSpPr txBox="1"/>
+          <p:nvPr/>
+        </p:nvSpPr>
+        <p:spPr>
+          <a:xfrm>
+            <a:off x="658368" y="658368"/>
+            <a:ext cx="10881360" cy="685800"/>
+          </a:xfrm>
+          <a:prstGeom prst="rect">
+            <a:avLst/>
+          </a:prstGeom>
+          <a:noFill/>
+        </p:spPr>
+        <p:txBody>
+          <a:bodyPr wrap="square" lIns="0" rIns="0" tIns="0" bIns="0" anchor="t">
+            <a:spAutoFit/>
+          </a:bodyPr>
+          <a:lstStyle/>
+          <a:p>
+            <a:pPr algn="l">
+              <a:spcAft>
+                <a:spcPts val="200"/>
+              </a:spcAft>
+            </a:pPr>
+            <a:r>
+              <a:rPr sz="3100" b="1" i="0">
+                <a:solidFill>
+                  <a:srgbClr val="1F3160"/>
+                </a:solidFill>
+                <a:latin typeface="Calibri"/>
+              </a:rPr>
+              <a:t>One primary objective, three specific ones</a:t>
             </a:r>
           </a:p>
         </p:txBody>
@@ -7570,7 +9176,7 @@
                 </a:solidFill>
                 <a:latin typeface="Calibri"/>
               </a:rPr>
-              <a:t>Scope: one partner company (Clark Outsourcing) piloted this version; the system is designed to support more.</a:t>
+              <a:t>Build it  ·  Match with it  ·  Measure it</a:t>
             </a:r>
           </a:p>
         </p:txBody>
@@ -7619,311 +9225,125 @@
           </a:p>
         </p:txBody>
       </p:sp>
-      <p:graphicFrame>
-        <p:nvGraphicFramePr>
-          <p:cNvPr id="6" name="Table 5"/>
-          <p:cNvGraphicFramePr>
-            <a:graphicFrameLocks noGrp="1"/>
-          </p:cNvGraphicFramePr>
+      <p:sp>
+        <p:nvSpPr>
+          <p:cNvPr id="6" name="TextBox 5"/>
+          <p:cNvSpPr txBox="1"/>
           <p:nvPr/>
-        </p:nvGraphicFramePr>
-        <p:xfrm>
-          <a:off x="658368" y="2103120"/>
-          <a:ext cx="10881360" cy="1444752"/>
-        </p:xfrm>
-        <a:graphic>
-          <a:graphicData uri="http://schemas.openxmlformats.org/drawingml/2006/table">
-            <a:tbl>
-              <a:tblPr firstRow="1" bandRow="1">
-                <a:tableStyleId>{5C22544A-7EE6-4342-B048-85BDC9FD1C3A}</a:tableStyleId>
-              </a:tblPr>
-              <a:tblGrid>
-                <a:gridCol w="2176272"/>
-                <a:gridCol w="5259324"/>
-                <a:gridCol w="3445764"/>
-              </a:tblGrid>
-              <a:tr h="361188">
-                <a:tc>
-                  <a:txBody>
-                    <a:bodyPr/>
-                    <a:lstStyle/>
-                    <a:p>
-                      <a:r>
-                        <a:rPr sz="1400" b="1">
-                          <a:solidFill>
-                            <a:srgbClr val="FFFFFF"/>
-                          </a:solidFill>
-                          <a:latin typeface="Calibri"/>
-                        </a:rPr>
-                        <a:t>User</a:t>
-                      </a:r>
-                    </a:p>
-                  </a:txBody>
-                  <a:tcPr anchor="ctr" marL="100584">
-                    <a:solidFill>
-                      <a:srgbClr val="1F3160"/>
-                    </a:solidFill>
-                  </a:tcPr>
-                </a:tc>
-                <a:tc>
-                  <a:txBody>
-                    <a:bodyPr/>
-                    <a:lstStyle/>
-                    <a:p>
-                      <a:r>
-                        <a:rPr sz="1400" b="1">
-                          <a:solidFill>
-                            <a:srgbClr val="FFFFFF"/>
-                          </a:solidFill>
-                          <a:latin typeface="Calibri"/>
-                        </a:rPr>
-                        <a:t>What they get</a:t>
-                      </a:r>
-                    </a:p>
-                  </a:txBody>
-                  <a:tcPr anchor="ctr" marL="100584">
-                    <a:solidFill>
-                      <a:srgbClr val="1F3160"/>
-                    </a:solidFill>
-                  </a:tcPr>
-                </a:tc>
-                <a:tc>
-                  <a:txBody>
-                    <a:bodyPr/>
-                    <a:lstStyle/>
-                    <a:p>
-                      <a:r>
-                        <a:rPr sz="1400" b="1">
-                          <a:solidFill>
-                            <a:srgbClr val="FFFFFF"/>
-                          </a:solidFill>
-                          <a:latin typeface="Calibri"/>
-                        </a:rPr>
-                        <a:t>Objective it answers</a:t>
-                      </a:r>
-                    </a:p>
-                  </a:txBody>
-                  <a:tcPr anchor="ctr" marL="100584">
-                    <a:solidFill>
-                      <a:srgbClr val="1F3160"/>
-                    </a:solidFill>
-                  </a:tcPr>
-                </a:tc>
-              </a:tr>
-              <a:tr h="361188">
-                <a:tc>
-                  <a:txBody>
-                    <a:bodyPr/>
-                    <a:lstStyle/>
-                    <a:p>
-                      <a:r>
-                        <a:rPr sz="1400">
-                          <a:solidFill>
-                            <a:srgbClr val="1A1A2E"/>
-                          </a:solidFill>
-                          <a:latin typeface="Calibri"/>
-                        </a:rPr>
-                        <a:t>Job seeker</a:t>
-                      </a:r>
-                    </a:p>
-                  </a:txBody>
-                  <a:tcPr anchor="ctr" marL="100584">
-                    <a:solidFill>
-                      <a:srgbClr val="FFFFFF"/>
-                    </a:solidFill>
-                  </a:tcPr>
-                </a:tc>
-                <a:tc>
-                  <a:txBody>
-                    <a:bodyPr/>
-                    <a:lstStyle/>
-                    <a:p>
-                      <a:pPr algn="ctr"/>
-                      <a:r>
-                        <a:rPr sz="1400">
-                          <a:solidFill>
-                            <a:srgbClr val="1A1A2E"/>
-                          </a:solidFill>
-                          <a:latin typeface="Calibri"/>
-                        </a:rPr>
-                        <a:t>Guided builder, 14 designs, match score with a skills breakdown, application tracking</a:t>
-                      </a:r>
-                    </a:p>
-                  </a:txBody>
-                  <a:tcPr anchor="ctr" marL="100584">
-                    <a:solidFill>
-                      <a:srgbClr val="FFFFFF"/>
-                    </a:solidFill>
-                  </a:tcPr>
-                </a:tc>
-                <a:tc>
-                  <a:txBody>
-                    <a:bodyPr/>
-                    <a:lstStyle/>
-                    <a:p>
-                      <a:pPr algn="ctr"/>
-                      <a:r>
-                        <a:rPr sz="1400">
-                          <a:solidFill>
-                            <a:srgbClr val="1A1A2E"/>
-                          </a:solidFill>
-                          <a:latin typeface="Calibri"/>
-                        </a:rPr>
-                        <a:t>Build a free, guided resume tool</a:t>
-                      </a:r>
-                    </a:p>
-                  </a:txBody>
-                  <a:tcPr anchor="ctr" marL="100584">
-                    <a:solidFill>
-                      <a:srgbClr val="FFFFFF"/>
-                    </a:solidFill>
-                  </a:tcPr>
-                </a:tc>
-              </a:tr>
-              <a:tr h="361188">
-                <a:tc>
-                  <a:txBody>
-                    <a:bodyPr/>
-                    <a:lstStyle/>
-                    <a:p>
-                      <a:r>
-                        <a:rPr sz="1400">
-                          <a:solidFill>
-                            <a:srgbClr val="1A1A2E"/>
-                          </a:solidFill>
-                          <a:latin typeface="Calibri"/>
-                        </a:rPr>
-                        <a:t>Recruiter / HR</a:t>
-                      </a:r>
-                    </a:p>
-                  </a:txBody>
-                  <a:tcPr anchor="ctr" marL="100584">
-                    <a:solidFill>
-                      <a:srgbClr val="F3F6FC"/>
-                    </a:solidFill>
-                  </a:tcPr>
-                </a:tc>
-                <a:tc>
-                  <a:txBody>
-                    <a:bodyPr/>
-                    <a:lstStyle/>
-                    <a:p>
-                      <a:pPr algn="ctr"/>
-                      <a:r>
-                        <a:rPr sz="1400">
-                          <a:solidFill>
-                            <a:srgbClr val="1A1A2E"/>
-                          </a:solidFill>
-                          <a:latin typeface="Calibri"/>
-                        </a:rPr>
-                        <a:t>Company profile, postings with adjustable weights, ranked applicants, status tracking, interview invites</a:t>
-                      </a:r>
-                    </a:p>
-                  </a:txBody>
-                  <a:tcPr anchor="ctr" marL="100584">
-                    <a:solidFill>
-                      <a:srgbClr val="F3F6FC"/>
-                    </a:solidFill>
-                  </a:tcPr>
-                </a:tc>
-                <a:tc>
-                  <a:txBody>
-                    <a:bodyPr/>
-                    <a:lstStyle/>
-                    <a:p>
-                      <a:pPr algn="ctr"/>
-                      <a:r>
-                        <a:rPr sz="1400">
-                          <a:solidFill>
-                            <a:srgbClr val="1A1A2E"/>
-                          </a:solidFill>
-                          <a:latin typeface="Calibri"/>
-                        </a:rPr>
-                        <a:t>Automate scoring without removing human judgement</a:t>
-                      </a:r>
-                    </a:p>
-                  </a:txBody>
-                  <a:tcPr anchor="ctr" marL="100584">
-                    <a:solidFill>
-                      <a:srgbClr val="F3F6FC"/>
-                    </a:solidFill>
-                  </a:tcPr>
-                </a:tc>
-              </a:tr>
-              <a:tr h="361188">
-                <a:tc>
-                  <a:txBody>
-                    <a:bodyPr/>
-                    <a:lstStyle/>
-                    <a:p>
-                      <a:r>
-                        <a:rPr sz="1400">
-                          <a:solidFill>
-                            <a:srgbClr val="1A1A2E"/>
-                          </a:solidFill>
-                          <a:latin typeface="Calibri"/>
-                        </a:rPr>
-                        <a:t>Administrator</a:t>
-                      </a:r>
-                    </a:p>
-                  </a:txBody>
-                  <a:tcPr anchor="ctr" marL="100584">
-                    <a:solidFill>
-                      <a:srgbClr val="FFFFFF"/>
-                    </a:solidFill>
-                  </a:tcPr>
-                </a:tc>
-                <a:tc>
-                  <a:txBody>
-                    <a:bodyPr/>
-                    <a:lstStyle/>
-                    <a:p>
-                      <a:pPr algn="ctr"/>
-                      <a:r>
-                        <a:rPr sz="1400">
-                          <a:solidFill>
-                            <a:srgbClr val="1A1A2E"/>
-                          </a:solidFill>
-                          <a:latin typeface="Calibri"/>
-                        </a:rPr>
-                        <a:t>Approves recruiter access, assigns departments, views anonymised study metrics</a:t>
-                      </a:r>
-                    </a:p>
-                  </a:txBody>
-                  <a:tcPr anchor="ctr" marL="100584">
-                    <a:solidFill>
-                      <a:srgbClr val="FFFFFF"/>
-                    </a:solidFill>
-                  </a:tcPr>
-                </a:tc>
-                <a:tc>
-                  <a:txBody>
-                    <a:bodyPr/>
-                    <a:lstStyle/>
-                    <a:p>
-                      <a:pPr algn="ctr"/>
-                      <a:r>
-                        <a:rPr sz="1400">
-                          <a:solidFill>
-                            <a:srgbClr val="1A1A2E"/>
-                          </a:solidFill>
-                          <a:latin typeface="Calibri"/>
-                        </a:rPr>
-                        <a:t>Keep access controlled and departments routed correctly</a:t>
-                      </a:r>
-                    </a:p>
-                  </a:txBody>
-                  <a:tcPr anchor="ctr" marL="100584">
-                    <a:solidFill>
-                      <a:srgbClr val="FFFFFF"/>
-                    </a:solidFill>
-                  </a:tcPr>
-                </a:tc>
-              </a:tr>
-            </a:tbl>
-          </a:graphicData>
-        </a:graphic>
-      </p:graphicFrame>
+        </p:nvSpPr>
+        <p:spPr>
+          <a:xfrm>
+            <a:off x="658368" y="2011680"/>
+            <a:ext cx="10881360" cy="4389120"/>
+          </a:xfrm>
+          <a:prstGeom prst="rect">
+            <a:avLst/>
+          </a:prstGeom>
+          <a:noFill/>
+        </p:spPr>
+        <p:txBody>
+          <a:bodyPr wrap="square" lIns="0" rIns="0" tIns="0" bIns="0" anchor="t">
+            <a:spAutoFit/>
+          </a:bodyPr>
+          <a:lstStyle/>
+          <a:p>
+            <a:pPr algn="l">
+              <a:spcAft>
+                <a:spcPts val="300"/>
+              </a:spcAft>
+            </a:pPr>
+            <a:r>
+              <a:rPr sz="1900" b="1" i="0">
+                <a:solidFill>
+                  <a:srgbClr val="1F3160"/>
+                </a:solidFill>
+                <a:latin typeface="Calibri"/>
+              </a:rPr>
+              <a:t>1. Build the system</a:t>
+            </a:r>
+          </a:p>
+          <a:p>
+            <a:pPr>
+              <a:spcAft>
+                <a:spcPts val="1300"/>
+              </a:spcAft>
+            </a:pPr>
+            <a:r>
+              <a:rPr sz="1600" b="0" i="0">
+                <a:solidFill>
+                  <a:srgbClr val="5A6B8C"/>
+                </a:solidFill>
+                <a:latin typeface="Calibri"/>
+              </a:rPr>
+              <a:t>A free web-based resume builder and ATS-inspired job matching system — guided builder, centralised recruiter dashboard, in-app learning hub, and an optional AI-assisted resume extraction feature.</a:t>
+            </a:r>
+          </a:p>
+          <a:p>
+            <a:pPr>
+              <a:spcAft>
+                <a:spcPts val="300"/>
+              </a:spcAft>
+            </a:pPr>
+            <a:r>
+              <a:rPr sz="1900" b="1" i="0">
+                <a:solidFill>
+                  <a:srgbClr val="1F3160"/>
+                </a:solidFill>
+                <a:latin typeface="Calibri"/>
+              </a:rPr>
+              <a:t>2. Implement the matching feature</a:t>
+            </a:r>
+          </a:p>
+          <a:p>
+            <a:pPr>
+              <a:spcAft>
+                <a:spcPts val="1300"/>
+              </a:spcAft>
+            </a:pPr>
+            <a:r>
+              <a:rPr sz="1600" b="0" i="0">
+                <a:solidFill>
+                  <a:srgbClr val="5A6B8C"/>
+                </a:solidFill>
+                <a:latin typeface="Calibri"/>
+              </a:rPr>
+              <a:t>A transparent, rule-based compatibility score comparing a structured resume against a posting's required skills, educational level and work experience — presented to BOTH the recruiter and the applicant, with related-position recommendations.</a:t>
+            </a:r>
+          </a:p>
+          <a:p>
+            <a:pPr>
+              <a:spcAft>
+                <a:spcPts val="300"/>
+              </a:spcAft>
+            </a:pPr>
+            <a:r>
+              <a:rPr sz="1900" b="1" i="0">
+                <a:solidFill>
+                  <a:srgbClr val="1F3160"/>
+                </a:solidFill>
+                <a:latin typeface="Calibri"/>
+              </a:rPr>
+              <a:t>3. Evaluate against ISO/IEC 25010</a:t>
+            </a:r>
+          </a:p>
+          <a:p>
+            <a:pPr>
+              <a:spcAft>
+                <a:spcPts val="1300"/>
+              </a:spcAft>
+            </a:pPr>
+            <a:r>
+              <a:rPr sz="1600" b="0" i="0">
+                <a:solidFill>
+                  <a:srgbClr val="5A6B8C"/>
+                </a:solidFill>
+                <a:latin typeface="Calibri"/>
+              </a:rPr>
+              <a:t>Functional suitability, usability and reliability from job seekers and HR personnel; security and maintainability from IT experts.</a:t>
+            </a:r>
+          </a:p>
+        </p:txBody>
+      </p:sp>
     </p:spTree>
   </p:cSld>
   <p:clrMapOvr>
@@ -7932,7 +9352,7 @@
 </p:sld>
 </file>
 
-<file path=ppt/slides/slide5.xml><?xml version="1.0" encoding="utf-8"?>
+<file path=ppt/slides/slide6.xml><?xml version="1.0" encoding="utf-8"?>
 <p:sld xmlns:a="http://schemas.openxmlformats.org/drawingml/2006/main" xmlns:p="http://schemas.openxmlformats.org/presentationml/2006/main" xmlns:r="http://schemas.openxmlformats.org/officeDocument/2006/relationships">
   <p:cSld>
     <p:spTree>
@@ -7976,7 +9396,7 @@
                 </a:solidFill>
                 <a:latin typeface="Calibri"/>
               </a:rPr>
-              <a:t>FEATURES</a:t>
+              <a:t>SCOPE</a:t>
             </a:r>
           </a:p>
         </p:txBody>
@@ -8015,7 +9435,7 @@
                 </a:solidFill>
                 <a:latin typeface="Calibri"/>
               </a:rPr>
-              <a:t>Key System Features</a:t>
+              <a:t>Three account types, and what each one can do</a:t>
             </a:r>
           </a:p>
         </p:txBody>
@@ -8064,6 +9484,359 @@
           </a:p>
         </p:txBody>
       </p:sp>
+      <p:graphicFrame>
+        <p:nvGraphicFramePr>
+          <p:cNvPr id="5" name="Table 4"/>
+          <p:cNvGraphicFramePr>
+            <a:graphicFrameLocks noGrp="1"/>
+          </p:cNvGraphicFramePr>
+          <p:nvPr/>
+        </p:nvGraphicFramePr>
+        <p:xfrm>
+          <a:off x="658368" y="1737360"/>
+          <a:ext cx="10881359" cy="1444752"/>
+        </p:xfrm>
+        <a:graphic>
+          <a:graphicData uri="http://schemas.openxmlformats.org/drawingml/2006/table">
+            <a:tbl>
+              <a:tblPr firstRow="1" bandRow="1">
+                <a:tableStyleId>{5C22544A-7EE6-4342-B048-85BDC9FD1C3A}</a:tableStyleId>
+              </a:tblPr>
+              <a:tblGrid>
+                <a:gridCol w="2111308"/>
+                <a:gridCol w="8770051"/>
+              </a:tblGrid>
+              <a:tr h="361188">
+                <a:tc>
+                  <a:txBody>
+                    <a:bodyPr/>
+                    <a:lstStyle/>
+                    <a:p>
+                      <a:r>
+                        <a:rPr sz="1500" b="1">
+                          <a:solidFill>
+                            <a:srgbClr val="FFFFFF"/>
+                          </a:solidFill>
+                          <a:latin typeface="Calibri"/>
+                        </a:rPr>
+                        <a:t>Account</a:t>
+                      </a:r>
+                    </a:p>
+                  </a:txBody>
+                  <a:tcPr anchor="ctr" marL="100584">
+                    <a:solidFill>
+                      <a:srgbClr val="1F3160"/>
+                    </a:solidFill>
+                  </a:tcPr>
+                </a:tc>
+                <a:tc>
+                  <a:txBody>
+                    <a:bodyPr/>
+                    <a:lstStyle/>
+                    <a:p>
+                      <a:r>
+                        <a:rPr sz="1500" b="1">
+                          <a:solidFill>
+                            <a:srgbClr val="FFFFFF"/>
+                          </a:solidFill>
+                          <a:latin typeface="Calibri"/>
+                        </a:rPr>
+                        <a:t>What they can do</a:t>
+                      </a:r>
+                    </a:p>
+                  </a:txBody>
+                  <a:tcPr anchor="ctr" marL="100584">
+                    <a:solidFill>
+                      <a:srgbClr val="1F3160"/>
+                    </a:solidFill>
+                  </a:tcPr>
+                </a:tc>
+              </a:tr>
+              <a:tr h="361188">
+                <a:tc>
+                  <a:txBody>
+                    <a:bodyPr/>
+                    <a:lstStyle/>
+                    <a:p>
+                      <a:r>
+                        <a:rPr sz="1500">
+                          <a:solidFill>
+                            <a:srgbClr val="1A1A2E"/>
+                          </a:solidFill>
+                          <a:latin typeface="Calibri"/>
+                        </a:rPr>
+                        <a:t>Job Seeker</a:t>
+                      </a:r>
+                    </a:p>
+                  </a:txBody>
+                  <a:tcPr anchor="ctr" marL="100584">
+                    <a:solidFill>
+                      <a:srgbClr val="FFFFFF"/>
+                    </a:solidFill>
+                  </a:tcPr>
+                </a:tc>
+                <a:tc>
+                  <a:txBody>
+                    <a:bodyPr/>
+                    <a:lstStyle/>
+                    <a:p>
+                      <a:pPr algn="ctr"/>
+                      <a:r>
+                        <a:rPr sz="1500">
+                          <a:solidFill>
+                            <a:srgbClr val="1A1A2E"/>
+                          </a:solidFill>
+                          <a:latin typeface="Calibri"/>
+                        </a:rPr>
+                        <a:t>Build, save and export resumes  ·  browse openings with a live match score  ·  save openings and get alerts  ·  apply  ·  track and withdraw</a:t>
+                      </a:r>
+                    </a:p>
+                  </a:txBody>
+                  <a:tcPr anchor="ctr" marL="100584">
+                    <a:solidFill>
+                      <a:srgbClr val="FFFFFF"/>
+                    </a:solidFill>
+                  </a:tcPr>
+                </a:tc>
+              </a:tr>
+              <a:tr h="361188">
+                <a:tc>
+                  <a:txBody>
+                    <a:bodyPr/>
+                    <a:lstStyle/>
+                    <a:p>
+                      <a:r>
+                        <a:rPr sz="1500">
+                          <a:solidFill>
+                            <a:srgbClr val="1A1A2E"/>
+                          </a:solidFill>
+                          <a:latin typeface="Calibri"/>
+                        </a:rPr>
+                        <a:t>Recruiter / HR</a:t>
+                      </a:r>
+                    </a:p>
+                  </a:txBody>
+                  <a:tcPr anchor="ctr" marL="100584">
+                    <a:solidFill>
+                      <a:srgbClr val="F3F6FC"/>
+                    </a:solidFill>
+                  </a:tcPr>
+                </a:tc>
+                <a:tc>
+                  <a:txBody>
+                    <a:bodyPr/>
+                    <a:lstStyle/>
+                    <a:p>
+                      <a:pPr algn="ctr"/>
+                      <a:r>
+                        <a:rPr sz="1500">
+                          <a:solidFill>
+                            <a:srgbClr val="1A1A2E"/>
+                          </a:solidFill>
+                          <a:latin typeface="Calibri"/>
+                        </a:rPr>
+                        <a:t>Company profile  ·  post openings with per-opening weights  ·  receive applicants already scored and ranked  ·  read both resumes  ·  change status  ·  email an interview invitation</a:t>
+                      </a:r>
+                    </a:p>
+                  </a:txBody>
+                  <a:tcPr anchor="ctr" marL="100584">
+                    <a:solidFill>
+                      <a:srgbClr val="F3F6FC"/>
+                    </a:solidFill>
+                  </a:tcPr>
+                </a:tc>
+              </a:tr>
+              <a:tr h="361188">
+                <a:tc>
+                  <a:txBody>
+                    <a:bodyPr/>
+                    <a:lstStyle/>
+                    <a:p>
+                      <a:r>
+                        <a:rPr sz="1500">
+                          <a:solidFill>
+                            <a:srgbClr val="1A1A2E"/>
+                          </a:solidFill>
+                          <a:latin typeface="Calibri"/>
+                        </a:rPr>
+                        <a:t>Administrator</a:t>
+                      </a:r>
+                    </a:p>
+                  </a:txBody>
+                  <a:tcPr anchor="ctr" marL="100584">
+                    <a:solidFill>
+                      <a:srgbClr val="FFFFFF"/>
+                    </a:solidFill>
+                  </a:tcPr>
+                </a:tc>
+                <a:tc>
+                  <a:txBody>
+                    <a:bodyPr/>
+                    <a:lstStyle/>
+                    <a:p>
+                      <a:pPr algn="ctr"/>
+                      <a:r>
+                        <a:rPr sz="1500">
+                          <a:solidFill>
+                            <a:srgbClr val="1A1A2E"/>
+                          </a:solidFill>
+                          <a:latin typeface="Calibri"/>
+                        </a:rPr>
+                        <a:t>Approve recruiter access  ·  assign departments so applications reach the right person  ·  anonymous aggregated metrics for the study</a:t>
+                      </a:r>
+                    </a:p>
+                  </a:txBody>
+                  <a:tcPr anchor="ctr" marL="100584">
+                    <a:solidFill>
+                      <a:srgbClr val="FFFFFF"/>
+                    </a:solidFill>
+                  </a:tcPr>
+                </a:tc>
+              </a:tr>
+            </a:tbl>
+          </a:graphicData>
+        </a:graphic>
+      </p:graphicFrame>
+    </p:spTree>
+  </p:cSld>
+  <p:clrMapOvr>
+    <a:masterClrMapping/>
+  </p:clrMapOvr>
+</p:sld>
+</file>
+
+<file path=ppt/slides/slide7.xml><?xml version="1.0" encoding="utf-8"?>
+<p:sld xmlns:a="http://schemas.openxmlformats.org/drawingml/2006/main" xmlns:p="http://schemas.openxmlformats.org/presentationml/2006/main" xmlns:r="http://schemas.openxmlformats.org/officeDocument/2006/relationships">
+  <p:cSld>
+    <p:spTree>
+      <p:nvGrpSpPr>
+        <p:cNvPr id="1" name=""/>
+        <p:cNvGrpSpPr/>
+        <p:nvPr/>
+      </p:nvGrpSpPr>
+      <p:grpSpPr/>
+      <p:sp>
+        <p:nvSpPr>
+          <p:cNvPr id="2" name="TextBox 1"/>
+          <p:cNvSpPr txBox="1"/>
+          <p:nvPr/>
+        </p:nvSpPr>
+        <p:spPr>
+          <a:xfrm>
+            <a:off x="658368" y="384048"/>
+            <a:ext cx="10881360" cy="274320"/>
+          </a:xfrm>
+          <a:prstGeom prst="rect">
+            <a:avLst/>
+          </a:prstGeom>
+          <a:noFill/>
+        </p:spPr>
+        <p:txBody>
+          <a:bodyPr wrap="square" lIns="0" rIns="0" tIns="0" bIns="0" anchor="t">
+            <a:spAutoFit/>
+          </a:bodyPr>
+          <a:lstStyle/>
+          <a:p>
+            <a:pPr algn="l">
+              <a:spcAft>
+                <a:spcPts val="200"/>
+              </a:spcAft>
+            </a:pPr>
+            <a:r>
+              <a:rPr sz="1200" b="1" i="0">
+                <a:solidFill>
+                  <a:srgbClr val="2F4B8F"/>
+                </a:solidFill>
+                <a:latin typeface="Calibri"/>
+              </a:rPr>
+              <a:t>FEATURES</a:t>
+            </a:r>
+          </a:p>
+        </p:txBody>
+      </p:sp>
+      <p:sp>
+        <p:nvSpPr>
+          <p:cNvPr id="3" name="TextBox 2"/>
+          <p:cNvSpPr txBox="1"/>
+          <p:nvPr/>
+        </p:nvSpPr>
+        <p:spPr>
+          <a:xfrm>
+            <a:off x="658368" y="658368"/>
+            <a:ext cx="10881360" cy="685800"/>
+          </a:xfrm>
+          <a:prstGeom prst="rect">
+            <a:avLst/>
+          </a:prstGeom>
+          <a:noFill/>
+        </p:spPr>
+        <p:txBody>
+          <a:bodyPr wrap="square" lIns="0" rIns="0" tIns="0" bIns="0" anchor="t">
+            <a:spAutoFit/>
+          </a:bodyPr>
+          <a:lstStyle/>
+          <a:p>
+            <a:pPr algn="l">
+              <a:spcAft>
+                <a:spcPts val="200"/>
+              </a:spcAft>
+            </a:pPr>
+            <a:r>
+              <a:rPr sz="3100" b="1" i="0">
+                <a:solidFill>
+                  <a:srgbClr val="1F3160"/>
+                </a:solidFill>
+                <a:latin typeface="Calibri"/>
+              </a:rPr>
+              <a:t>What is inside the system</a:t>
+            </a:r>
+          </a:p>
+        </p:txBody>
+      </p:sp>
+      <p:sp>
+        <p:nvSpPr>
+          <p:cNvPr id="4" name="Rectangle 3"/>
+          <p:cNvSpPr/>
+          <p:nvPr/>
+        </p:nvSpPr>
+        <p:spPr>
+          <a:xfrm>
+            <a:off x="658368" y="1316736"/>
+            <a:ext cx="10881360" cy="20320"/>
+          </a:xfrm>
+          <a:prstGeom prst="rect">
+            <a:avLst/>
+          </a:prstGeom>
+          <a:solidFill>
+            <a:srgbClr val="C3CEE6"/>
+          </a:solidFill>
+          <a:ln>
+            <a:noFill/>
+          </a:ln>
+          <a:effectLst/>
+        </p:spPr>
+        <p:style>
+          <a:lnRef idx="1">
+            <a:schemeClr val="accent1"/>
+          </a:lnRef>
+          <a:fillRef idx="3">
+            <a:schemeClr val="accent1"/>
+          </a:fillRef>
+          <a:effectRef idx="2">
+            <a:schemeClr val="accent1"/>
+          </a:effectRef>
+          <a:fontRef idx="minor">
+            <a:schemeClr val="lt1"/>
+          </a:fontRef>
+        </p:style>
+        <p:txBody>
+          <a:bodyPr rtlCol="0" anchor="ctr"/>
+          <a:lstStyle/>
+          <a:p>
+            <a:pPr algn="ctr"/>
+          </a:p>
+        </p:txBody>
+      </p:sp>
       <p:sp>
         <p:nvSpPr>
           <p:cNvPr id="5" name="TextBox 4"/>
@@ -8088,129 +9861,145 @@
           <a:p>
             <a:pPr algn="l">
               <a:spcAft>
-                <a:spcPts val="300"/>
-              </a:spcAft>
-            </a:pPr>
-            <a:r>
-              <a:rPr sz="1800" b="1" i="0">
-                <a:solidFill>
-                  <a:srgbClr val="1F3160"/>
-                </a:solidFill>
-                <a:latin typeface="Calibri"/>
-              </a:rPr>
-              <a:t>Guided resume builder</a:t>
+                <a:spcPts val="1100"/>
+              </a:spcAft>
+            </a:pPr>
+            <a:r>
+              <a:rPr sz="1700" b="0" i="0">
+                <a:solidFill>
+                  <a:srgbClr val="1A1A2E"/>
+                </a:solidFill>
+                <a:latin typeface="Calibri"/>
+              </a:rPr>
+              <a:t>•   Guided step-by-step resume builder, with three content formats and fourteen parser-safe designs</a:t>
             </a:r>
           </a:p>
           <a:p>
             <a:pPr>
               <a:spcAft>
-                <a:spcPts val="1300"/>
-              </a:spcAft>
-            </a:pPr>
-            <a:r>
-              <a:rPr sz="1500" b="0" i="0">
-                <a:solidFill>
-                  <a:srgbClr val="5A6B8C"/>
-                </a:solidFill>
-                <a:latin typeface="Calibri"/>
-              </a:rPr>
-              <a:t>Three content formats, 14 single-column parser-safe designs. Why it matters: the design never changes how the resume is scored — only how it looks.</a:t>
+                <a:spcPts val="1100"/>
+              </a:spcAft>
+            </a:pPr>
+            <a:r>
+              <a:rPr sz="1700" b="0" i="0">
+                <a:solidFill>
+                  <a:srgbClr val="1A1A2E"/>
+                </a:solidFill>
+                <a:latin typeface="Calibri"/>
+              </a:rPr>
+              <a:t>•   Export in PDF, Word and plain text</a:t>
             </a:r>
           </a:p>
           <a:p>
             <a:pPr>
               <a:spcAft>
-                <a:spcPts val="300"/>
-              </a:spcAft>
-            </a:pPr>
-            <a:r>
-              <a:rPr sz="1800" b="1" i="0">
-                <a:solidFill>
-                  <a:srgbClr val="1F3160"/>
-                </a:solidFill>
-                <a:latin typeface="Calibri"/>
-              </a:rPr>
-              <a:t>Transparent matching score</a:t>
+                <a:spcPts val="1100"/>
+              </a:spcAft>
+            </a:pPr>
+            <a:r>
+              <a:rPr sz="1700" b="0" i="0">
+                <a:solidFill>
+                  <a:srgbClr val="1A1A2E"/>
+                </a:solidFill>
+                <a:latin typeface="Calibri"/>
+              </a:rPr>
+              <a:t>•   In-app learning hub on resume writing and how ATS software reads a resume</a:t>
             </a:r>
           </a:p>
           <a:p>
             <a:pPr>
               <a:spcAft>
-                <a:spcPts val="1300"/>
-              </a:spcAft>
-            </a:pPr>
-            <a:r>
-              <a:rPr sz="1500" b="0" i="0">
-                <a:solidFill>
-                  <a:srgbClr val="5A6B8C"/>
-                </a:solidFill>
-                <a:latin typeface="Calibri"/>
-              </a:rPr>
-              <a:t>50/25/25 skills-education-experience split by default, adjustable per posting. Why it matters: both sides see the same number and the same formula behind it.</a:t>
+                <a:spcPts val="1100"/>
+              </a:spcAft>
+            </a:pPr>
+            <a:r>
+              <a:rPr sz="1700" b="0" i="0">
+                <a:solidFill>
+                  <a:srgbClr val="1A1A2E"/>
+                </a:solidFill>
+                <a:latin typeface="Calibri"/>
+              </a:rPr>
+              <a:t>•   Optional AI-assisted extraction — reads an uploaded file into fields, and never scores anything</a:t>
             </a:r>
           </a:p>
           <a:p>
             <a:pPr>
               <a:spcAft>
-                <a:spcPts val="300"/>
-              </a:spcAft>
-            </a:pPr>
-            <a:r>
-              <a:rPr sz="1800" b="1" i="0">
-                <a:solidFill>
-                  <a:srgbClr val="1F3160"/>
-                </a:solidFill>
-                <a:latin typeface="Calibri"/>
-              </a:rPr>
-              <a:t>Never auto-rejects</a:t>
+                <a:spcPts val="1100"/>
+              </a:spcAft>
+            </a:pPr>
+            <a:r>
+              <a:rPr sz="1700" b="0" i="0">
+                <a:solidFill>
+                  <a:srgbClr val="1A1A2E"/>
+                </a:solidFill>
+                <a:latin typeface="Calibri"/>
+              </a:rPr>
+              <a:t>•   ATS-inspired compatibility score, shown with its breakdown to both sides</a:t>
             </a:r>
           </a:p>
           <a:p>
             <a:pPr>
               <a:spcAft>
-                <a:spcPts val="1300"/>
-              </a:spcAft>
-            </a:pPr>
-            <a:r>
-              <a:rPr sz="1500" b="0" i="0">
-                <a:solidFill>
-                  <a:srgbClr val="5A6B8C"/>
-                </a:solidFill>
-                <a:latin typeface="Calibri"/>
-              </a:rPr>
-              <a:t>No strong match still returns related openings and a skills gap, not a rejection. Why it matters: this is the system's central design commitment, drawn directly from fairness research.</a:t>
+                <a:spcPts val="1100"/>
+              </a:spcAft>
+            </a:pPr>
+            <a:r>
+              <a:rPr sz="1700" b="0" i="0">
+                <a:solidFill>
+                  <a:srgbClr val="1A1A2E"/>
+                </a:solidFill>
+                <a:latin typeface="Calibri"/>
+              </a:rPr>
+              <a:t>•   Related-position recommendations when there is no strong match</a:t>
             </a:r>
           </a:p>
           <a:p>
             <a:pPr>
               <a:spcAft>
-                <a:spcPts val="300"/>
-              </a:spcAft>
-            </a:pPr>
-            <a:r>
-              <a:rPr sz="1800" b="1" i="0">
-                <a:solidFill>
-                  <a:srgbClr val="1F3160"/>
-                </a:solidFill>
-                <a:latin typeface="Calibri"/>
-              </a:rPr>
-              <a:t>Full status tracking with an audit trail</a:t>
+                <a:spcPts val="1100"/>
+              </a:spcAft>
+            </a:pPr>
+            <a:r>
+              <a:rPr sz="1700" b="0" i="0">
+                <a:solidFill>
+                  <a:srgbClr val="1A1A2E"/>
+                </a:solidFill>
+                <a:latin typeface="Calibri"/>
+              </a:rPr>
+              <a:t>•   Ten application states, with an audit trail recording who changed what and when</a:t>
             </a:r>
           </a:p>
           <a:p>
             <a:pPr>
               <a:spcAft>
-                <a:spcPts val="1300"/>
-              </a:spcAft>
-            </a:pPr>
-            <a:r>
-              <a:rPr sz="1500" b="0" i="0">
-                <a:solidFill>
-                  <a:srgbClr val="5A6B8C"/>
-                </a:solidFill>
-                <a:latin typeface="Calibri"/>
-              </a:rPr>
-              <a:t>Nine tracked stages, every change recorded with who made it. Why it matters: recruiters and applicants both see the real hiring pipeline, not a black box.</a:t>
+                <a:spcPts val="1100"/>
+              </a:spcAft>
+            </a:pPr>
+            <a:r>
+              <a:rPr sz="1700" b="0" i="0">
+                <a:solidFill>
+                  <a:srgbClr val="1A1A2E"/>
+                </a:solidFill>
+                <a:latin typeface="Calibri"/>
+              </a:rPr>
+              <a:t>•   Interview invitations with a one-click Add to Google Calendar</a:t>
+            </a:r>
+          </a:p>
+          <a:p>
+            <a:pPr>
+              <a:spcAft>
+                <a:spcPts val="1100"/>
+              </a:spcAft>
+            </a:pPr>
+            <a:r>
+              <a:rPr sz="1700" b="0" i="0">
+                <a:solidFill>
+                  <a:srgbClr val="1A1A2E"/>
+                </a:solidFill>
+                <a:latin typeface="Calibri"/>
+              </a:rPr>
+              <a:t>•   Email-verified accounts, hashed passwords, role-based access, and applicant-facing data export and deletion</a:t>
             </a:r>
           </a:p>
         </p:txBody>
@@ -8223,7 +10012,7 @@
 </p:sld>
 </file>
 
-<file path=ppt/slides/slide6.xml><?xml version="1.0" encoding="utf-8"?>
+<file path=ppt/slides/slide8.xml><?xml version="1.0" encoding="utf-8"?>
 <p:sld xmlns:a="http://schemas.openxmlformats.org/drawingml/2006/main" xmlns:p="http://schemas.openxmlformats.org/presentationml/2006/main" xmlns:r="http://schemas.openxmlformats.org/officeDocument/2006/relationships">
   <p:cSld>
     <p:spTree>
@@ -8267,7 +10056,7 @@
                 </a:solidFill>
                 <a:latin typeface="Calibri"/>
               </a:rPr>
-              <a:t>SYSTEM FLOW</a:t>
+              <a:t>THE MATCHING ENGINE</a:t>
             </a:r>
           </a:p>
         </p:txBody>
@@ -8306,7 +10095,7 @@
                 </a:solidFill>
                 <a:latin typeface="Calibri"/>
               </a:rPr>
-              <a:t>How the System Works</a:t>
+              <a:t>How the score is computed</a:t>
             </a:r>
           </a:p>
         </p:txBody>
@@ -8345,7 +10134,7 @@
                 </a:solidFill>
                 <a:latin typeface="Calibri"/>
               </a:rPr>
-              <a:t>The same flow, from both directions.</a:t>
+              <a:t>Score = ( S × Ws + E × We + X × Wx + C × Wc ) × 100</a:t>
             </a:r>
           </a:p>
         </p:txBody>
@@ -8396,14 +10185,62 @@
       </p:sp>
       <p:sp>
         <p:nvSpPr>
-          <p:cNvPr id="6" name="TextBox 5"/>
+          <p:cNvPr id="6" name="Rounded Rectangle 5"/>
+          <p:cNvSpPr/>
+          <p:nvPr/>
+        </p:nvSpPr>
+        <p:spPr>
+          <a:xfrm>
+            <a:off x="658368" y="2121408"/>
+            <a:ext cx="2528316" cy="2148840"/>
+          </a:xfrm>
+          <a:prstGeom prst="roundRect">
+            <a:avLst>
+              <a:gd name="adj" fmla="val 4000"/>
+            </a:avLst>
+          </a:prstGeom>
+          <a:solidFill>
+            <a:srgbClr val="DCE4F5"/>
+          </a:solidFill>
+          <a:ln w="12700">
+            <a:solidFill>
+              <a:srgbClr val="C3CEE6"/>
+            </a:solidFill>
+          </a:ln>
+          <a:effectLst/>
+        </p:spPr>
+        <p:style>
+          <a:lnRef idx="1">
+            <a:schemeClr val="accent1"/>
+          </a:lnRef>
+          <a:fillRef idx="3">
+            <a:schemeClr val="accent1"/>
+          </a:fillRef>
+          <a:effectRef idx="2">
+            <a:schemeClr val="accent1"/>
+          </a:effectRef>
+          <a:fontRef idx="minor">
+            <a:schemeClr val="lt1"/>
+          </a:fontRef>
+        </p:style>
+        <p:txBody>
+          <a:bodyPr rtlCol="0" anchor="ctr"/>
+          <a:lstStyle/>
+          <a:p>
+            <a:pPr algn="ctr"/>
+          </a:p>
+        </p:txBody>
+      </p:sp>
+      <p:sp>
+        <p:nvSpPr>
+          <p:cNvPr id="7" name="TextBox 6"/>
           <p:cNvSpPr txBox="1"/>
           <p:nvPr/>
         </p:nvSpPr>
         <p:spPr>
           <a:xfrm>
-            <a:off x="658368" y="2029968"/>
-            <a:ext cx="5212080" cy="4206240"/>
+            <a:off x="859536" y="2377440"/>
+            <a:ext cx="2125980" cy="1737360"/>
           </a:xfrm>
           <a:prstGeom prst="rect">
             <a:avLst/>
@@ -8416,113 +10253,114 @@
           </a:bodyPr>
           <a:lstStyle/>
           <a:p>
-            <a:pPr algn="l">
+            <a:pPr algn="ctr">
+              <a:spcAft>
+                <a:spcPts val="200"/>
+              </a:spcAft>
+            </a:pPr>
+            <a:r>
+              <a:rPr sz="4200" b="1" i="0">
+                <a:solidFill>
+                  <a:srgbClr val="1F3160"/>
+                </a:solidFill>
+                <a:latin typeface="Calibri"/>
+              </a:rPr>
+              <a:t>50%</a:t>
+            </a:r>
+          </a:p>
+          <a:p>
+            <a:pPr algn="ctr">
               <a:spcAft>
                 <a:spcPts val="600"/>
               </a:spcAft>
             </a:pPr>
             <a:r>
-              <a:rPr sz="1800" b="1" i="0">
-                <a:solidFill>
-                  <a:srgbClr val="1F3160"/>
-                </a:solidFill>
-                <a:latin typeface="Calibri"/>
-              </a:rPr>
-              <a:t>Job seeker</a:t>
-            </a:r>
-          </a:p>
-          <a:p>
-            <a:pPr>
-              <a:spcAft>
-                <a:spcPts val="800"/>
-              </a:spcAft>
-            </a:pPr>
-            <a:r>
-              <a:rPr sz="1600" b="0" i="0">
-                <a:solidFill>
-                  <a:srgbClr val="1A1A2E"/>
-                </a:solidFill>
-                <a:latin typeface="Calibri"/>
-              </a:rPr>
-              <a:t>↓  Register &amp; verify email</a:t>
-            </a:r>
-          </a:p>
-          <a:p>
-            <a:pPr>
-              <a:spcAft>
-                <a:spcPts val="800"/>
-              </a:spcAft>
-            </a:pPr>
-            <a:r>
-              <a:rPr sz="1600" b="0" i="0">
-                <a:solidFill>
-                  <a:srgbClr val="1A1A2E"/>
-                </a:solidFill>
-                <a:latin typeface="Calibri"/>
-              </a:rPr>
-              <a:t>↓  Build a resume (guided steps)</a:t>
-            </a:r>
-          </a:p>
-          <a:p>
-            <a:pPr>
-              <a:spcAft>
-                <a:spcPts val="800"/>
-              </a:spcAft>
-            </a:pPr>
-            <a:r>
-              <a:rPr sz="1600" b="0" i="0">
-                <a:solidFill>
-                  <a:srgbClr val="1A1A2E"/>
-                </a:solidFill>
-                <a:latin typeface="Calibri"/>
-              </a:rPr>
-              <a:t>↓  Browse postings, see match score</a:t>
-            </a:r>
-          </a:p>
-          <a:p>
-            <a:pPr>
-              <a:spcAft>
-                <a:spcPts val="800"/>
-              </a:spcAft>
-            </a:pPr>
-            <a:r>
-              <a:rPr sz="1600" b="0" i="0">
-                <a:solidFill>
-                  <a:srgbClr val="1A1A2E"/>
-                </a:solidFill>
-                <a:latin typeface="Calibri"/>
-              </a:rPr>
-              <a:t>↓  Apply</a:t>
-            </a:r>
-          </a:p>
-          <a:p>
-            <a:pPr>
-              <a:spcAft>
-                <a:spcPts val="800"/>
-              </a:spcAft>
-            </a:pPr>
-            <a:r>
-              <a:rPr sz="1600" b="0" i="0">
-                <a:solidFill>
-                  <a:srgbClr val="1A1A2E"/>
-                </a:solidFill>
-                <a:latin typeface="Calibri"/>
-              </a:rPr>
-              <a:t>↓  Track status to hired/rejected</a:t>
-            </a:r>
-          </a:p>
-        </p:txBody>
-      </p:sp>
-      <p:sp>
-        <p:nvSpPr>
-          <p:cNvPr id="7" name="TextBox 6"/>
+              <a:rPr sz="1400" b="1" i="0">
+                <a:solidFill>
+                  <a:srgbClr val="2F4B8F"/>
+                </a:solidFill>
+                <a:latin typeface="Calibri"/>
+              </a:rPr>
+              <a:t>SKILLS</a:t>
+            </a:r>
+          </a:p>
+          <a:p>
+            <a:pPr algn="ctr">
+              <a:spcAft>
+                <a:spcPts val="0"/>
+              </a:spcAft>
+            </a:pPr>
+            <a:r>
+              <a:rPr sz="1250" b="0" i="0">
+                <a:solidFill>
+                  <a:srgbClr val="5A6B8C"/>
+                </a:solidFill>
+                <a:latin typeface="Calibri"/>
+              </a:rPr>
+              <a:t>Proportion of required skills
+the resume lists</a:t>
+            </a:r>
+          </a:p>
+        </p:txBody>
+      </p:sp>
+      <p:sp>
+        <p:nvSpPr>
+          <p:cNvPr id="8" name="Rounded Rectangle 7"/>
+          <p:cNvSpPr/>
+          <p:nvPr/>
+        </p:nvSpPr>
+        <p:spPr>
+          <a:xfrm>
+            <a:off x="3442716" y="2121408"/>
+            <a:ext cx="2528316" cy="2148840"/>
+          </a:xfrm>
+          <a:prstGeom prst="roundRect">
+            <a:avLst>
+              <a:gd name="adj" fmla="val 4000"/>
+            </a:avLst>
+          </a:prstGeom>
+          <a:solidFill>
+            <a:srgbClr val="DCE4F5"/>
+          </a:solidFill>
+          <a:ln w="12700">
+            <a:solidFill>
+              <a:srgbClr val="C3CEE6"/>
+            </a:solidFill>
+          </a:ln>
+          <a:effectLst/>
+        </p:spPr>
+        <p:style>
+          <a:lnRef idx="1">
+            <a:schemeClr val="accent1"/>
+          </a:lnRef>
+          <a:fillRef idx="3">
+            <a:schemeClr val="accent1"/>
+          </a:fillRef>
+          <a:effectRef idx="2">
+            <a:schemeClr val="accent1"/>
+          </a:effectRef>
+          <a:fontRef idx="minor">
+            <a:schemeClr val="lt1"/>
+          </a:fontRef>
+        </p:style>
+        <p:txBody>
+          <a:bodyPr rtlCol="0" anchor="ctr"/>
+          <a:lstStyle/>
+          <a:p>
+            <a:pPr algn="ctr"/>
+          </a:p>
+        </p:txBody>
+      </p:sp>
+      <p:sp>
+        <p:nvSpPr>
+          <p:cNvPr id="9" name="TextBox 8"/>
           <p:cNvSpPr txBox="1"/>
           <p:nvPr/>
         </p:nvSpPr>
         <p:spPr>
           <a:xfrm>
-            <a:off x="6309360" y="2029968"/>
-            <a:ext cx="5212080" cy="4206240"/>
+            <a:off x="3643884" y="2377440"/>
+            <a:ext cx="2125980" cy="1737360"/>
           </a:xfrm>
           <a:prstGeom prst="rect">
             <a:avLst/>
@@ -8535,99 +10373,332 @@
           </a:bodyPr>
           <a:lstStyle/>
           <a:p>
+            <a:pPr algn="ctr">
+              <a:spcAft>
+                <a:spcPts val="200"/>
+              </a:spcAft>
+            </a:pPr>
+            <a:r>
+              <a:rPr sz="4200" b="1" i="0">
+                <a:solidFill>
+                  <a:srgbClr val="1F3160"/>
+                </a:solidFill>
+                <a:latin typeface="Calibri"/>
+              </a:rPr>
+              <a:t>25%</a:t>
+            </a:r>
+          </a:p>
+          <a:p>
+            <a:pPr algn="ctr">
+              <a:spcAft>
+                <a:spcPts val="600"/>
+              </a:spcAft>
+            </a:pPr>
+            <a:r>
+              <a:rPr sz="1400" b="1" i="0">
+                <a:solidFill>
+                  <a:srgbClr val="2F4B8F"/>
+                </a:solidFill>
+                <a:latin typeface="Calibri"/>
+              </a:rPr>
+              <a:t>EDUCATION</a:t>
+            </a:r>
+          </a:p>
+          <a:p>
+            <a:pPr algn="ctr">
+              <a:spcAft>
+                <a:spcPts val="0"/>
+              </a:spcAft>
+            </a:pPr>
+            <a:r>
+              <a:rPr sz="1250" b="0" i="0">
+                <a:solidFill>
+                  <a:srgbClr val="5A6B8C"/>
+                </a:solidFill>
+                <a:latin typeface="Calibri"/>
+              </a:rPr>
+              <a:t>Highest level attained
+over the level required</a:t>
+            </a:r>
+          </a:p>
+        </p:txBody>
+      </p:sp>
+      <p:sp>
+        <p:nvSpPr>
+          <p:cNvPr id="10" name="Rounded Rectangle 9"/>
+          <p:cNvSpPr/>
+          <p:nvPr/>
+        </p:nvSpPr>
+        <p:spPr>
+          <a:xfrm>
+            <a:off x="6227064" y="2121408"/>
+            <a:ext cx="2528316" cy="2148840"/>
+          </a:xfrm>
+          <a:prstGeom prst="roundRect">
+            <a:avLst>
+              <a:gd name="adj" fmla="val 4000"/>
+            </a:avLst>
+          </a:prstGeom>
+          <a:solidFill>
+            <a:srgbClr val="DCE4F5"/>
+          </a:solidFill>
+          <a:ln w="12700">
+            <a:solidFill>
+              <a:srgbClr val="C3CEE6"/>
+            </a:solidFill>
+          </a:ln>
+          <a:effectLst/>
+        </p:spPr>
+        <p:style>
+          <a:lnRef idx="1">
+            <a:schemeClr val="accent1"/>
+          </a:lnRef>
+          <a:fillRef idx="3">
+            <a:schemeClr val="accent1"/>
+          </a:fillRef>
+          <a:effectRef idx="2">
+            <a:schemeClr val="accent1"/>
+          </a:effectRef>
+          <a:fontRef idx="minor">
+            <a:schemeClr val="lt1"/>
+          </a:fontRef>
+        </p:style>
+        <p:txBody>
+          <a:bodyPr rtlCol="0" anchor="ctr"/>
+          <a:lstStyle/>
+          <a:p>
+            <a:pPr algn="ctr"/>
+          </a:p>
+        </p:txBody>
+      </p:sp>
+      <p:sp>
+        <p:nvSpPr>
+          <p:cNvPr id="11" name="TextBox 10"/>
+          <p:cNvSpPr txBox="1"/>
+          <p:nvPr/>
+        </p:nvSpPr>
+        <p:spPr>
+          <a:xfrm>
+            <a:off x="6428232" y="2377440"/>
+            <a:ext cx="2125980" cy="1737360"/>
+          </a:xfrm>
+          <a:prstGeom prst="rect">
+            <a:avLst/>
+          </a:prstGeom>
+          <a:noFill/>
+        </p:spPr>
+        <p:txBody>
+          <a:bodyPr wrap="square" lIns="0" rIns="0" tIns="0" bIns="0" anchor="t">
+            <a:spAutoFit/>
+          </a:bodyPr>
+          <a:lstStyle/>
+          <a:p>
+            <a:pPr algn="ctr">
+              <a:spcAft>
+                <a:spcPts val="200"/>
+              </a:spcAft>
+            </a:pPr>
+            <a:r>
+              <a:rPr sz="4200" b="1" i="0">
+                <a:solidFill>
+                  <a:srgbClr val="1F3160"/>
+                </a:solidFill>
+                <a:latin typeface="Calibri"/>
+              </a:rPr>
+              <a:t>25%</a:t>
+            </a:r>
+          </a:p>
+          <a:p>
+            <a:pPr algn="ctr">
+              <a:spcAft>
+                <a:spcPts val="600"/>
+              </a:spcAft>
+            </a:pPr>
+            <a:r>
+              <a:rPr sz="1400" b="1" i="0">
+                <a:solidFill>
+                  <a:srgbClr val="2F4B8F"/>
+                </a:solidFill>
+                <a:latin typeface="Calibri"/>
+              </a:rPr>
+              <a:t>EXPERIENCE</a:t>
+            </a:r>
+          </a:p>
+          <a:p>
+            <a:pPr algn="ctr">
+              <a:spcAft>
+                <a:spcPts val="0"/>
+              </a:spcAft>
+            </a:pPr>
+            <a:r>
+              <a:rPr sz="1250" b="0" i="0">
+                <a:solidFill>
+                  <a:srgbClr val="5A6B8C"/>
+                </a:solidFill>
+                <a:latin typeface="Calibri"/>
+              </a:rPr>
+              <a:t>Total months over
+the months required</a:t>
+            </a:r>
+          </a:p>
+        </p:txBody>
+      </p:sp>
+      <p:sp>
+        <p:nvSpPr>
+          <p:cNvPr id="12" name="Rounded Rectangle 11"/>
+          <p:cNvSpPr/>
+          <p:nvPr/>
+        </p:nvSpPr>
+        <p:spPr>
+          <a:xfrm>
+            <a:off x="9011412" y="2121408"/>
+            <a:ext cx="2528316" cy="2148840"/>
+          </a:xfrm>
+          <a:prstGeom prst="roundRect">
+            <a:avLst>
+              <a:gd name="adj" fmla="val 4000"/>
+            </a:avLst>
+          </a:prstGeom>
+          <a:solidFill>
+            <a:srgbClr val="DCE4F5"/>
+          </a:solidFill>
+          <a:ln w="12700">
+            <a:solidFill>
+              <a:srgbClr val="C3CEE6"/>
+            </a:solidFill>
+          </a:ln>
+          <a:effectLst/>
+        </p:spPr>
+        <p:style>
+          <a:lnRef idx="1">
+            <a:schemeClr val="accent1"/>
+          </a:lnRef>
+          <a:fillRef idx="3">
+            <a:schemeClr val="accent1"/>
+          </a:fillRef>
+          <a:effectRef idx="2">
+            <a:schemeClr val="accent1"/>
+          </a:effectRef>
+          <a:fontRef idx="minor">
+            <a:schemeClr val="lt1"/>
+          </a:fontRef>
+        </p:style>
+        <p:txBody>
+          <a:bodyPr rtlCol="0" anchor="ctr"/>
+          <a:lstStyle/>
+          <a:p>
+            <a:pPr algn="ctr"/>
+          </a:p>
+        </p:txBody>
+      </p:sp>
+      <p:sp>
+        <p:nvSpPr>
+          <p:cNvPr id="13" name="TextBox 12"/>
+          <p:cNvSpPr txBox="1"/>
+          <p:nvPr/>
+        </p:nvSpPr>
+        <p:spPr>
+          <a:xfrm>
+            <a:off x="9212580" y="2377440"/>
+            <a:ext cx="2125980" cy="1737360"/>
+          </a:xfrm>
+          <a:prstGeom prst="rect">
+            <a:avLst/>
+          </a:prstGeom>
+          <a:noFill/>
+        </p:spPr>
+        <p:txBody>
+          <a:bodyPr wrap="square" lIns="0" rIns="0" tIns="0" bIns="0" anchor="t">
+            <a:spAutoFit/>
+          </a:bodyPr>
+          <a:lstStyle/>
+          <a:p>
+            <a:pPr algn="ctr">
+              <a:spcAft>
+                <a:spcPts val="200"/>
+              </a:spcAft>
+            </a:pPr>
+            <a:r>
+              <a:rPr sz="4200" b="1" i="0">
+                <a:solidFill>
+                  <a:srgbClr val="1F3160"/>
+                </a:solidFill>
+                <a:latin typeface="Calibri"/>
+              </a:rPr>
+              <a:t>0%</a:t>
+            </a:r>
+          </a:p>
+          <a:p>
+            <a:pPr algn="ctr">
+              <a:spcAft>
+                <a:spcPts val="600"/>
+              </a:spcAft>
+            </a:pPr>
+            <a:r>
+              <a:rPr sz="1400" b="1" i="0">
+                <a:solidFill>
+                  <a:srgbClr val="2F4B8F"/>
+                </a:solidFill>
+                <a:latin typeface="Calibri"/>
+              </a:rPr>
+              <a:t>CERTIFICATES</a:t>
+            </a:r>
+          </a:p>
+          <a:p>
+            <a:pPr algn="ctr">
+              <a:spcAft>
+                <a:spcPts val="0"/>
+              </a:spcAft>
+            </a:pPr>
+            <a:r>
+              <a:rPr sz="1250" b="0" i="0">
+                <a:solidFill>
+                  <a:srgbClr val="5A6B8C"/>
+                </a:solidFill>
+                <a:latin typeface="Calibri"/>
+              </a:rPr>
+              <a:t>Optional fourth component,
+zero unless a recruiter
+gives it a share</a:t>
+            </a:r>
+          </a:p>
+        </p:txBody>
+      </p:sp>
+      <p:sp>
+        <p:nvSpPr>
+          <p:cNvPr id="14" name="TextBox 13"/>
+          <p:cNvSpPr txBox="1"/>
+          <p:nvPr/>
+        </p:nvSpPr>
+        <p:spPr>
+          <a:xfrm>
+            <a:off x="658368" y="4590288"/>
+            <a:ext cx="10881360" cy="1097280"/>
+          </a:xfrm>
+          <a:prstGeom prst="rect">
+            <a:avLst/>
+          </a:prstGeom>
+          <a:noFill/>
+        </p:spPr>
+        <p:txBody>
+          <a:bodyPr wrap="square" lIns="0" rIns="0" tIns="0" bIns="0" anchor="t">
+            <a:spAutoFit/>
+          </a:bodyPr>
+          <a:lstStyle/>
+          <a:p>
             <a:pPr algn="l">
               <a:spcAft>
-                <a:spcPts val="600"/>
-              </a:spcAft>
-            </a:pPr>
-            <a:r>
-              <a:rPr sz="1800" b="1" i="0">
-                <a:solidFill>
-                  <a:srgbClr val="1F3160"/>
-                </a:solidFill>
-                <a:latin typeface="Calibri"/>
-              </a:rPr>
-              <a:t>Recruiter</a:t>
-            </a:r>
-          </a:p>
-          <a:p>
-            <a:pPr>
-              <a:spcAft>
-                <a:spcPts val="800"/>
-              </a:spcAft>
-            </a:pPr>
-            <a:r>
-              <a:rPr sz="1600" b="0" i="0">
+                <a:spcPts val="0"/>
+              </a:spcAft>
+            </a:pPr>
+            <a:r>
+              <a:rPr sz="1500" b="0" i="0">
                 <a:solidFill>
                   <a:srgbClr val="1A1A2E"/>
                 </a:solidFill>
                 <a:latin typeface="Calibri"/>
               </a:rPr>
-              <a:t>↓  Register &amp; get admin approval</a:t>
-            </a:r>
-          </a:p>
-          <a:p>
-            <a:pPr>
-              <a:spcAft>
-                <a:spcPts val="800"/>
-              </a:spcAft>
-            </a:pPr>
-            <a:r>
-              <a:rPr sz="1600" b="0" i="0">
-                <a:solidFill>
-                  <a:srgbClr val="1A1A2E"/>
-                </a:solidFill>
-                <a:latin typeface="Calibri"/>
-              </a:rPr>
-              <a:t>↓  Create a posting, set weights</a:t>
-            </a:r>
-          </a:p>
-          <a:p>
-            <a:pPr>
-              <a:spcAft>
-                <a:spcPts val="800"/>
-              </a:spcAft>
-            </a:pPr>
-            <a:r>
-              <a:rPr sz="1600" b="0" i="0">
-                <a:solidFill>
-                  <a:srgbClr val="1A1A2E"/>
-                </a:solidFill>
-                <a:latin typeface="Calibri"/>
-              </a:rPr>
-              <a:t>↓  View ranked applicant list</a:t>
-            </a:r>
-          </a:p>
-          <a:p>
-            <a:pPr>
-              <a:spcAft>
-                <a:spcPts val="800"/>
-              </a:spcAft>
-            </a:pPr>
-            <a:r>
-              <a:rPr sz="1600" b="0" i="0">
-                <a:solidFill>
-                  <a:srgbClr val="1A1A2E"/>
-                </a:solidFill>
-                <a:latin typeface="Calibri"/>
-              </a:rPr>
-              <a:t>↓  Review score breakdown</a:t>
-            </a:r>
-          </a:p>
-          <a:p>
-            <a:pPr>
-              <a:spcAft>
-                <a:spcPts val="800"/>
-              </a:spcAft>
-            </a:pPr>
-            <a:r>
-              <a:rPr sz="1600" b="0" i="0">
-                <a:solidFill>
-                  <a:srgbClr val="1A1A2E"/>
-                </a:solidFill>
-                <a:latin typeface="Calibri"/>
-              </a:rPr>
-              <a:t>↓  Update status / send interview invite</a:t>
+              <a:t>Deterministic and explainable — the same resume and posting always produce the same number, and both sides are shown how it was reached. Tiers: strong at 80 and above, possible 50 to 79, related below 50. A recruiter may rebalance an opening, but skills, education and experience may never fall below 10% each. No machine learning takes any part in computing a score.</a:t>
             </a:r>
           </a:p>
         </p:txBody>
@@ -8640,7 +10711,7 @@
 </p:sld>
 </file>
 
-<file path=ppt/slides/slide7.xml><?xml version="1.0" encoding="utf-8"?>
+<file path=ppt/slides/slide9.xml><?xml version="1.0" encoding="utf-8"?>
 <p:sld xmlns:a="http://schemas.openxmlformats.org/drawingml/2006/main" xmlns:p="http://schemas.openxmlformats.org/presentationml/2006/main" xmlns:r="http://schemas.openxmlformats.org/officeDocument/2006/relationships">
   <p:cSld>
     <p:spTree>
@@ -8723,59 +10794,20 @@
                 </a:solidFill>
                 <a:latin typeface="Calibri"/>
               </a:rPr>
-              <a:t>System Structure and Technology</a:t>
-            </a:r>
-          </a:p>
-        </p:txBody>
-      </p:sp>
-      <p:sp>
-        <p:nvSpPr>
-          <p:cNvPr id="4" name="TextBox 3"/>
-          <p:cNvSpPr txBox="1"/>
+              <a:t>What the system is built with</a:t>
+            </a:r>
+          </a:p>
+        </p:txBody>
+      </p:sp>
+      <p:sp>
+        <p:nvSpPr>
+          <p:cNvPr id="4" name="Rectangle 3"/>
+          <p:cNvSpPr/>
           <p:nvPr/>
         </p:nvSpPr>
         <p:spPr>
           <a:xfrm>
-            <a:off x="658368" y="1389888"/>
-            <a:ext cx="10881360" cy="365760"/>
-          </a:xfrm>
-          <a:prstGeom prst="rect">
-            <a:avLst/>
-          </a:prstGeom>
-          <a:noFill/>
-        </p:spPr>
-        <p:txBody>
-          <a:bodyPr wrap="square" lIns="0" rIns="0" tIns="0" bIns="0" anchor="t">
-            <a:spAutoFit/>
-          </a:bodyPr>
-          <a:lstStyle/>
-          <a:p>
-            <a:pPr algn="l">
-              <a:spcAft>
-                <a:spcPts val="0"/>
-              </a:spcAft>
-            </a:pPr>
-            <a:r>
-              <a:rPr sz="1500" b="0" i="1">
-                <a:solidFill>
-                  <a:srgbClr val="5A6B8C"/>
-                </a:solidFill>
-                <a:latin typeface="Calibri"/>
-              </a:rPr>
-              <a:t>Three layers, one language.</a:t>
-            </a:r>
-          </a:p>
-        </p:txBody>
-      </p:sp>
-      <p:sp>
-        <p:nvSpPr>
-          <p:cNvPr id="5" name="Rectangle 4"/>
-          <p:cNvSpPr/>
-          <p:nvPr/>
-        </p:nvSpPr>
-        <p:spPr>
-          <a:xfrm>
-            <a:off x="658368" y="1792224"/>
+            <a:off x="658368" y="1316736"/>
             <a:ext cx="10881360" cy="20320"/>
           </a:xfrm>
           <a:prstGeom prst="rect">
@@ -8811,633 +10843,521 @@
           </a:p>
         </p:txBody>
       </p:sp>
-      <p:sp>
-        <p:nvSpPr>
-          <p:cNvPr id="6" name="TextBox 5"/>
-          <p:cNvSpPr txBox="1"/>
+      <p:graphicFrame>
+        <p:nvGraphicFramePr>
+          <p:cNvPr id="5" name="Table 4"/>
+          <p:cNvGraphicFramePr>
+            <a:graphicFrameLocks noGrp="1"/>
+          </p:cNvGraphicFramePr>
           <p:nvPr/>
-        </p:nvSpPr>
-        <p:spPr>
-          <a:xfrm>
-            <a:off x="658368" y="2048256"/>
-            <a:ext cx="10881360" cy="3840480"/>
-          </a:xfrm>
-          <a:prstGeom prst="rect">
-            <a:avLst/>
-          </a:prstGeom>
-          <a:noFill/>
-        </p:spPr>
-        <p:txBody>
-          <a:bodyPr wrap="square" lIns="0" rIns="0" tIns="0" bIns="0" anchor="t">
-            <a:spAutoFit/>
-          </a:bodyPr>
-          <a:lstStyle/>
-          <a:p>
-            <a:pPr algn="l">
-              <a:spcAft>
-                <a:spcPts val="1200"/>
-              </a:spcAft>
-            </a:pPr>
-            <a:r>
-              <a:rPr sz="1800" b="0" i="0">
-                <a:solidFill>
-                  <a:srgbClr val="1A1A2E"/>
-                </a:solidFill>
-                <a:latin typeface="Calibri"/>
-              </a:rPr>
-              <a:t>Frontend — Angular. Builds every screen the user sees: the resume builder, the recruiter dashboard, the applicant lists.</a:t>
-            </a:r>
-          </a:p>
-          <a:p>
-            <a:pPr>
-              <a:spcAft>
-                <a:spcPts val="1200"/>
-              </a:spcAft>
-            </a:pPr>
-            <a:r>
-              <a:rPr sz="1800" b="0" i="0">
-                <a:solidFill>
-                  <a:srgbClr val="1A1A2E"/>
-                </a:solidFill>
-                <a:latin typeface="Calibri"/>
-              </a:rPr>
-              <a:t>Backend — Node.js with TypeScript. Runs the matching engine, checks logins, and talks to the database. Using TypeScript on both front and back end means the same scoring formula is written once and shared, not duplicated and risked drifting apart.</a:t>
-            </a:r>
-          </a:p>
-          <a:p>
-            <a:pPr>
-              <a:spcAft>
-                <a:spcPts val="1200"/>
-              </a:spcAft>
-            </a:pPr>
-            <a:r>
-              <a:rPr sz="1800" b="0" i="0">
-                <a:solidFill>
-                  <a:srgbClr val="1A1A2E"/>
-                </a:solidFill>
-                <a:latin typeface="Calibri"/>
-              </a:rPr>
-              <a:t>Database — PostgreSQL, hosted on Supabase. Stores users, resumes, postings, applications and scores across 24 tables.</a:t>
-            </a:r>
-          </a:p>
-          <a:p>
-            <a:pPr>
-              <a:spcAft>
-                <a:spcPts val="0"/>
-              </a:spcAft>
-            </a:pPr>
-            <a:r>
-              <a:rPr sz="1800" b="0" i="0">
-                <a:solidFill>
-                  <a:srgbClr val="1A1A2E"/>
-                </a:solidFill>
-                <a:latin typeface="Calibri"/>
-              </a:rPr>
-              <a:t>How they connect: the frontend calls 56 API endpoints on the backend; the backend reads and writes to PostgreSQL and returns the result. The whole thing is deployed and live on Render.</a:t>
-            </a:r>
-          </a:p>
-        </p:txBody>
-      </p:sp>
-    </p:spTree>
-  </p:cSld>
-  <p:clrMapOvr>
-    <a:masterClrMapping/>
-  </p:clrMapOvr>
-</p:sld>
-</file>
-
-<file path=ppt/slides/slide8.xml><?xml version="1.0" encoding="utf-8"?>
-<p:sld xmlns:a="http://schemas.openxmlformats.org/drawingml/2006/main" xmlns:p="http://schemas.openxmlformats.org/presentationml/2006/main" xmlns:r="http://schemas.openxmlformats.org/officeDocument/2006/relationships">
-  <p:cSld>
-    <p:spTree>
-      <p:nvGrpSpPr>
-        <p:cNvPr id="1" name=""/>
-        <p:cNvGrpSpPr/>
-        <p:nvPr/>
-      </p:nvGrpSpPr>
-      <p:grpSpPr/>
-      <p:sp>
-        <p:nvSpPr>
-          <p:cNvPr id="2" name="TextBox 1"/>
-          <p:cNvSpPr txBox="1"/>
-          <p:nvPr/>
-        </p:nvSpPr>
-        <p:spPr>
-          <a:xfrm>
-            <a:off x="658368" y="384048"/>
-            <a:ext cx="10881360" cy="274320"/>
-          </a:xfrm>
-          <a:prstGeom prst="rect">
-            <a:avLst/>
-          </a:prstGeom>
-          <a:noFill/>
-        </p:spPr>
-        <p:txBody>
-          <a:bodyPr wrap="square" lIns="0" rIns="0" tIns="0" bIns="0" anchor="t">
-            <a:spAutoFit/>
-          </a:bodyPr>
-          <a:lstStyle/>
-          <a:p>
-            <a:pPr algn="l">
-              <a:spcAft>
-                <a:spcPts val="200"/>
-              </a:spcAft>
-            </a:pPr>
-            <a:r>
-              <a:rPr sz="1200" b="1" i="0">
-                <a:solidFill>
-                  <a:srgbClr val="2F4B8F"/>
-                </a:solidFill>
-                <a:latin typeface="Calibri"/>
-              </a:rPr>
-              <a:t>DATABASE</a:t>
-            </a:r>
-          </a:p>
-        </p:txBody>
-      </p:sp>
-      <p:sp>
-        <p:nvSpPr>
-          <p:cNvPr id="3" name="TextBox 2"/>
-          <p:cNvSpPr txBox="1"/>
-          <p:nvPr/>
-        </p:nvSpPr>
-        <p:spPr>
-          <a:xfrm>
-            <a:off x="658368" y="658368"/>
-            <a:ext cx="10881360" cy="685800"/>
-          </a:xfrm>
-          <a:prstGeom prst="rect">
-            <a:avLst/>
-          </a:prstGeom>
-          <a:noFill/>
-        </p:spPr>
-        <p:txBody>
-          <a:bodyPr wrap="square" lIns="0" rIns="0" tIns="0" bIns="0" anchor="t">
-            <a:spAutoFit/>
-          </a:bodyPr>
-          <a:lstStyle/>
-          <a:p>
-            <a:pPr algn="l">
-              <a:spcAft>
-                <a:spcPts val="200"/>
-              </a:spcAft>
-            </a:pPr>
-            <a:r>
-              <a:rPr sz="3100" b="1" i="0">
-                <a:solidFill>
-                  <a:srgbClr val="1F3160"/>
-                </a:solidFill>
-                <a:latin typeface="Calibri"/>
-              </a:rPr>
-              <a:t>Database Design</a:t>
-            </a:r>
-          </a:p>
-        </p:txBody>
-      </p:sp>
-      <p:sp>
-        <p:nvSpPr>
-          <p:cNvPr id="4" name="TextBox 3"/>
-          <p:cNvSpPr txBox="1"/>
-          <p:nvPr/>
-        </p:nvSpPr>
-        <p:spPr>
-          <a:xfrm>
-            <a:off x="658368" y="1389888"/>
-            <a:ext cx="10881360" cy="365760"/>
-          </a:xfrm>
-          <a:prstGeom prst="rect">
-            <a:avLst/>
-          </a:prstGeom>
-          <a:noFill/>
-        </p:spPr>
-        <p:txBody>
-          <a:bodyPr wrap="square" lIns="0" rIns="0" tIns="0" bIns="0" anchor="t">
-            <a:spAutoFit/>
-          </a:bodyPr>
-          <a:lstStyle/>
-          <a:p>
-            <a:pPr algn="l">
-              <a:spcAft>
-                <a:spcPts val="0"/>
-              </a:spcAft>
-            </a:pPr>
-            <a:r>
-              <a:rPr sz="1500" b="0" i="1">
-                <a:solidFill>
-                  <a:srgbClr val="5A6B8C"/>
-                </a:solidFill>
-                <a:latin typeface="Calibri"/>
-              </a:rPr>
-              <a:t>24 tables, 30 foreign keys — generated directly from the live schema.</a:t>
-            </a:r>
-          </a:p>
-        </p:txBody>
-      </p:sp>
-      <p:sp>
-        <p:nvSpPr>
-          <p:cNvPr id="5" name="Rectangle 4"/>
-          <p:cNvSpPr/>
-          <p:nvPr/>
-        </p:nvSpPr>
-        <p:spPr>
-          <a:xfrm>
-            <a:off x="658368" y="1792224"/>
-            <a:ext cx="10881360" cy="20320"/>
-          </a:xfrm>
-          <a:prstGeom prst="rect">
-            <a:avLst/>
-          </a:prstGeom>
-          <a:solidFill>
-            <a:srgbClr val="C3CEE6"/>
-          </a:solidFill>
-          <a:ln>
-            <a:noFill/>
-          </a:ln>
-          <a:effectLst/>
-        </p:spPr>
-        <p:style>
-          <a:lnRef idx="1">
-            <a:schemeClr val="accent1"/>
-          </a:lnRef>
-          <a:fillRef idx="3">
-            <a:schemeClr val="accent1"/>
-          </a:fillRef>
-          <a:effectRef idx="2">
-            <a:schemeClr val="accent1"/>
-          </a:effectRef>
-          <a:fontRef idx="minor">
-            <a:schemeClr val="lt1"/>
-          </a:fontRef>
-        </p:style>
-        <p:txBody>
-          <a:bodyPr rtlCol="0" anchor="ctr"/>
-          <a:lstStyle/>
-          <a:p>
-            <a:pPr algn="ctr"/>
-          </a:p>
-        </p:txBody>
-      </p:sp>
-      <p:pic>
-        <p:nvPicPr>
-          <p:cNvPr id="6" name="Picture 5" descr="new_fig5.png"/>
-          <p:cNvPicPr>
-            <a:picLocks noChangeAspect="1"/>
-          </p:cNvPicPr>
-          <p:nvPr/>
-        </p:nvPicPr>
-        <p:blipFill>
-          <a:blip r:embed="rId2"/>
-          <a:stretch>
-            <a:fillRect/>
-          </a:stretch>
-        </p:blipFill>
-        <p:spPr>
-          <a:xfrm>
-            <a:off x="2180698" y="2048256"/>
-            <a:ext cx="7836699" cy="4325112"/>
-          </a:xfrm>
-          <a:prstGeom prst="rect">
-            <a:avLst/>
-          </a:prstGeom>
-        </p:spPr>
-      </p:pic>
-      <p:sp>
-        <p:nvSpPr>
-          <p:cNvPr id="7" name="TextBox 6"/>
-          <p:cNvSpPr txBox="1"/>
-          <p:nvPr/>
-        </p:nvSpPr>
-        <p:spPr>
-          <a:xfrm>
-            <a:off x="658368" y="6291072"/>
-            <a:ext cx="10881360" cy="365760"/>
-          </a:xfrm>
-          <a:prstGeom prst="rect">
-            <a:avLst/>
-          </a:prstGeom>
-          <a:noFill/>
-        </p:spPr>
-        <p:txBody>
-          <a:bodyPr wrap="square" lIns="0" rIns="0" tIns="0" bIns="0" anchor="t">
-            <a:spAutoFit/>
-          </a:bodyPr>
-          <a:lstStyle/>
-          <a:p>
-            <a:pPr algn="ctr">
-              <a:spcAft>
-                <a:spcPts val="0"/>
-              </a:spcAft>
-            </a:pPr>
-            <a:r>
-              <a:rPr sz="1250" b="0" i="1">
-                <a:solidFill>
-                  <a:srgbClr val="5A6B8C"/>
-                </a:solidFill>
-                <a:latin typeface="Calibri"/>
-              </a:rPr>
-              <a:t>Every score is traceable: match_scores links one resume to one posting with a timestamped result.</a:t>
-            </a:r>
-          </a:p>
-        </p:txBody>
-      </p:sp>
-    </p:spTree>
-  </p:cSld>
-  <p:clrMapOvr>
-    <a:masterClrMapping/>
-  </p:clrMapOvr>
-</p:sld>
-</file>
-
-<file path=ppt/slides/slide9.xml><?xml version="1.0" encoding="utf-8"?>
-<p:sld xmlns:a="http://schemas.openxmlformats.org/drawingml/2006/main" xmlns:p="http://schemas.openxmlformats.org/presentationml/2006/main" xmlns:r="http://schemas.openxmlformats.org/officeDocument/2006/relationships">
-  <p:cSld>
-    <p:spTree>
-      <p:nvGrpSpPr>
-        <p:cNvPr id="1" name=""/>
-        <p:cNvGrpSpPr/>
-        <p:nvPr/>
-      </p:nvGrpSpPr>
-      <p:grpSpPr/>
-      <p:sp>
-        <p:nvSpPr>
-          <p:cNvPr id="2" name="TextBox 1"/>
-          <p:cNvSpPr txBox="1"/>
-          <p:nvPr/>
-        </p:nvSpPr>
-        <p:spPr>
-          <a:xfrm>
-            <a:off x="658368" y="384048"/>
-            <a:ext cx="10881360" cy="274320"/>
-          </a:xfrm>
-          <a:prstGeom prst="rect">
-            <a:avLst/>
-          </a:prstGeom>
-          <a:noFill/>
-        </p:spPr>
-        <p:txBody>
-          <a:bodyPr wrap="square" lIns="0" rIns="0" tIns="0" bIns="0" anchor="t">
-            <a:spAutoFit/>
-          </a:bodyPr>
-          <a:lstStyle/>
-          <a:p>
-            <a:pPr algn="l">
-              <a:spcAft>
-                <a:spcPts val="200"/>
-              </a:spcAft>
-            </a:pPr>
-            <a:r>
-              <a:rPr sz="1200" b="1" i="0">
-                <a:solidFill>
-                  <a:srgbClr val="2F4B8F"/>
-                </a:solidFill>
-                <a:latin typeface="Calibri"/>
-              </a:rPr>
-              <a:t>LIVE DEMO</a:t>
-            </a:r>
-          </a:p>
-        </p:txBody>
-      </p:sp>
-      <p:sp>
-        <p:nvSpPr>
-          <p:cNvPr id="3" name="TextBox 2"/>
-          <p:cNvSpPr txBox="1"/>
-          <p:nvPr/>
-        </p:nvSpPr>
-        <p:spPr>
-          <a:xfrm>
-            <a:off x="658368" y="658368"/>
-            <a:ext cx="10881360" cy="685800"/>
-          </a:xfrm>
-          <a:prstGeom prst="rect">
-            <a:avLst/>
-          </a:prstGeom>
-          <a:noFill/>
-        </p:spPr>
-        <p:txBody>
-          <a:bodyPr wrap="square" lIns="0" rIns="0" tIns="0" bIns="0" anchor="t">
-            <a:spAutoFit/>
-          </a:bodyPr>
-          <a:lstStyle/>
-          <a:p>
-            <a:pPr algn="l">
-              <a:spcAft>
-                <a:spcPts val="200"/>
-              </a:spcAft>
-            </a:pPr>
-            <a:r>
-              <a:rPr sz="3100" b="1" i="0">
-                <a:solidFill>
-                  <a:srgbClr val="1F3160"/>
-                </a:solidFill>
-                <a:latin typeface="Calibri"/>
-              </a:rPr>
-              <a:t>System Demonstration</a:t>
-            </a:r>
-          </a:p>
-        </p:txBody>
-      </p:sp>
-      <p:sp>
-        <p:nvSpPr>
-          <p:cNvPr id="4" name="TextBox 3"/>
-          <p:cNvSpPr txBox="1"/>
-          <p:nvPr/>
-        </p:nvSpPr>
-        <p:spPr>
-          <a:xfrm>
-            <a:off x="658368" y="1389888"/>
-            <a:ext cx="10881360" cy="365760"/>
-          </a:xfrm>
-          <a:prstGeom prst="rect">
-            <a:avLst/>
-          </a:prstGeom>
-          <a:noFill/>
-        </p:spPr>
-        <p:txBody>
-          <a:bodyPr wrap="square" lIns="0" rIns="0" tIns="0" bIns="0" anchor="t">
-            <a:spAutoFit/>
-          </a:bodyPr>
-          <a:lstStyle/>
-          <a:p>
-            <a:pPr algn="l">
-              <a:spcAft>
-                <a:spcPts val="0"/>
-              </a:spcAft>
-            </a:pPr>
-            <a:r>
-              <a:rPr sz="1500" b="0" i="1">
-                <a:solidFill>
-                  <a:srgbClr val="5A6B8C"/>
-                </a:solidFill>
-                <a:latin typeface="Calibri"/>
-              </a:rPr>
-              <a:t>The one journey that proves the research problem is actually solved.</a:t>
-            </a:r>
-          </a:p>
-        </p:txBody>
-      </p:sp>
-      <p:sp>
-        <p:nvSpPr>
-          <p:cNvPr id="5" name="Rectangle 4"/>
-          <p:cNvSpPr/>
-          <p:nvPr/>
-        </p:nvSpPr>
-        <p:spPr>
-          <a:xfrm>
-            <a:off x="658368" y="1792224"/>
-            <a:ext cx="10881360" cy="20320"/>
-          </a:xfrm>
-          <a:prstGeom prst="rect">
-            <a:avLst/>
-          </a:prstGeom>
-          <a:solidFill>
-            <a:srgbClr val="C3CEE6"/>
-          </a:solidFill>
-          <a:ln>
-            <a:noFill/>
-          </a:ln>
-          <a:effectLst/>
-        </p:spPr>
-        <p:style>
-          <a:lnRef idx="1">
-            <a:schemeClr val="accent1"/>
-          </a:lnRef>
-          <a:fillRef idx="3">
-            <a:schemeClr val="accent1"/>
-          </a:fillRef>
-          <a:effectRef idx="2">
-            <a:schemeClr val="accent1"/>
-          </a:effectRef>
-          <a:fontRef idx="minor">
-            <a:schemeClr val="lt1"/>
-          </a:fontRef>
-        </p:style>
-        <p:txBody>
-          <a:bodyPr rtlCol="0" anchor="ctr"/>
-          <a:lstStyle/>
-          <a:p>
-            <a:pPr algn="ctr"/>
-          </a:p>
-        </p:txBody>
-      </p:sp>
-      <p:sp>
-        <p:nvSpPr>
-          <p:cNvPr id="6" name="TextBox 5"/>
-          <p:cNvSpPr txBox="1"/>
-          <p:nvPr/>
-        </p:nvSpPr>
-        <p:spPr>
-          <a:xfrm>
-            <a:off x="658368" y="2075688"/>
-            <a:ext cx="10881360" cy="4206240"/>
-          </a:xfrm>
-          <a:prstGeom prst="rect">
-            <a:avLst/>
-          </a:prstGeom>
-          <a:noFill/>
-        </p:spPr>
-        <p:txBody>
-          <a:bodyPr wrap="square" lIns="0" rIns="0" tIns="0" bIns="0" anchor="t">
-            <a:spAutoFit/>
-          </a:bodyPr>
-          <a:lstStyle/>
-          <a:p>
-            <a:pPr algn="l">
-              <a:spcAft>
-                <a:spcPts val="1100"/>
-              </a:spcAft>
-            </a:pPr>
-            <a:r>
-              <a:rPr sz="1800" b="0" i="0">
-                <a:solidFill>
-                  <a:srgbClr val="1A1A2E"/>
-                </a:solidFill>
-                <a:latin typeface="Calibri"/>
-              </a:rPr>
-              <a:t>1.   Job seeker builds a resume — guided steps, live preview, pick a design</a:t>
-            </a:r>
-          </a:p>
-          <a:p>
-            <a:pPr>
-              <a:spcAft>
-                <a:spcPts val="1100"/>
-              </a:spcAft>
-            </a:pPr>
-            <a:r>
-              <a:rPr sz="1800" b="0" i="0">
-                <a:solidFill>
-                  <a:srgbClr val="1A1A2E"/>
-                </a:solidFill>
-                <a:latin typeface="Calibri"/>
-              </a:rPr>
-              <a:t>2.   Job seeker browses postings and sees a match score before applying</a:t>
-            </a:r>
-          </a:p>
-          <a:p>
-            <a:pPr>
-              <a:spcAft>
-                <a:spcPts val="1100"/>
-              </a:spcAft>
-            </a:pPr>
-            <a:r>
-              <a:rPr sz="1800" b="0" i="0">
-                <a:solidFill>
-                  <a:srgbClr val="1A1A2E"/>
-                </a:solidFill>
-                <a:latin typeface="Calibri"/>
-              </a:rPr>
-              <a:t>3.   Job seeker applies — score breakdown shows exactly which skills are missing</a:t>
-            </a:r>
-          </a:p>
-          <a:p>
-            <a:pPr>
-              <a:spcAft>
-                <a:spcPts val="1100"/>
-              </a:spcAft>
-            </a:pPr>
-            <a:r>
-              <a:rPr sz="1800" b="0" i="0">
-                <a:solidFill>
-                  <a:srgbClr val="1A1A2E"/>
-                </a:solidFill>
-                <a:latin typeface="Calibri"/>
-              </a:rPr>
-              <a:t>4.   Recruiter opens the same posting — sees the ranked applicant list</a:t>
-            </a:r>
-          </a:p>
-          <a:p>
-            <a:pPr>
-              <a:spcAft>
-                <a:spcPts val="1100"/>
-              </a:spcAft>
-            </a:pPr>
-            <a:r>
-              <a:rPr sz="1800" b="0" i="0">
-                <a:solidFill>
-                  <a:srgbClr val="1A1A2E"/>
-                </a:solidFill>
-                <a:latin typeface="Calibri"/>
-              </a:rPr>
-              <a:t>5.   Recruiter opens the applicant's score breakdown — same numbers, same reasons</a:t>
-            </a:r>
-          </a:p>
-          <a:p>
-            <a:pPr>
-              <a:spcAft>
-                <a:spcPts val="1100"/>
-              </a:spcAft>
-            </a:pPr>
-            <a:r>
-              <a:rPr sz="1800" b="0" i="0">
-                <a:solidFill>
-                  <a:srgbClr val="1A1A2E"/>
-                </a:solidFill>
-                <a:latin typeface="Calibri"/>
-              </a:rPr>
-              <a:t>6.   Recruiter changes status and sends an interview invite with a calendar link</a:t>
-            </a:r>
-          </a:p>
-        </p:txBody>
-      </p:sp>
+        </p:nvGraphicFramePr>
+        <p:xfrm>
+          <a:off x="658368" y="1737360"/>
+          <a:ext cx="10881358" cy="2487168"/>
+        </p:xfrm>
+        <a:graphic>
+          <a:graphicData uri="http://schemas.openxmlformats.org/drawingml/2006/table">
+            <a:tbl>
+              <a:tblPr firstRow="1" bandRow="1">
+                <a:tableStyleId>{5C22544A-7EE6-4342-B048-85BDC9FD1C3A}</a:tableStyleId>
+              </a:tblPr>
+              <a:tblGrid>
+                <a:gridCol w="1577008"/>
+                <a:gridCol w="2680914"/>
+                <a:gridCol w="6623436"/>
+              </a:tblGrid>
+              <a:tr h="355309">
+                <a:tc>
+                  <a:txBody>
+                    <a:bodyPr/>
+                    <a:lstStyle/>
+                    <a:p>
+                      <a:r>
+                        <a:rPr sz="1350" b="1">
+                          <a:solidFill>
+                            <a:srgbClr val="FFFFFF"/>
+                          </a:solidFill>
+                          <a:latin typeface="Calibri"/>
+                        </a:rPr>
+                        <a:t>Layer</a:t>
+                      </a:r>
+                    </a:p>
+                  </a:txBody>
+                  <a:tcPr anchor="ctr" marL="100584">
+                    <a:solidFill>
+                      <a:srgbClr val="1F3160"/>
+                    </a:solidFill>
+                  </a:tcPr>
+                </a:tc>
+                <a:tc>
+                  <a:txBody>
+                    <a:bodyPr/>
+                    <a:lstStyle/>
+                    <a:p>
+                      <a:r>
+                        <a:rPr sz="1350" b="1">
+                          <a:solidFill>
+                            <a:srgbClr val="FFFFFF"/>
+                          </a:solidFill>
+                          <a:latin typeface="Calibri"/>
+                        </a:rPr>
+                        <a:t>Technology</a:t>
+                      </a:r>
+                    </a:p>
+                  </a:txBody>
+                  <a:tcPr anchor="ctr" marL="100584">
+                    <a:solidFill>
+                      <a:srgbClr val="1F3160"/>
+                    </a:solidFill>
+                  </a:tcPr>
+                </a:tc>
+                <a:tc>
+                  <a:txBody>
+                    <a:bodyPr/>
+                    <a:lstStyle/>
+                    <a:p>
+                      <a:r>
+                        <a:rPr sz="1350" b="1">
+                          <a:solidFill>
+                            <a:srgbClr val="FFFFFF"/>
+                          </a:solidFill>
+                          <a:latin typeface="Calibri"/>
+                        </a:rPr>
+                        <a:t>Why</a:t>
+                      </a:r>
+                    </a:p>
+                  </a:txBody>
+                  <a:tcPr anchor="ctr" marL="100584">
+                    <a:solidFill>
+                      <a:srgbClr val="1F3160"/>
+                    </a:solidFill>
+                  </a:tcPr>
+                </a:tc>
+              </a:tr>
+              <a:tr h="355309">
+                <a:tc>
+                  <a:txBody>
+                    <a:bodyPr/>
+                    <a:lstStyle/>
+                    <a:p>
+                      <a:r>
+                        <a:rPr sz="1350">
+                          <a:solidFill>
+                            <a:srgbClr val="1A1A2E"/>
+                          </a:solidFill>
+                          <a:latin typeface="Calibri"/>
+                        </a:rPr>
+                        <a:t>Front end</a:t>
+                      </a:r>
+                    </a:p>
+                  </a:txBody>
+                  <a:tcPr anchor="ctr" marL="100584">
+                    <a:solidFill>
+                      <a:srgbClr val="FFFFFF"/>
+                    </a:solidFill>
+                  </a:tcPr>
+                </a:tc>
+                <a:tc>
+                  <a:txBody>
+                    <a:bodyPr/>
+                    <a:lstStyle/>
+                    <a:p>
+                      <a:pPr algn="ctr"/>
+                      <a:r>
+                        <a:rPr sz="1350">
+                          <a:solidFill>
+                            <a:srgbClr val="1A1A2E"/>
+                          </a:solidFill>
+                          <a:latin typeface="Calibri"/>
+                        </a:rPr>
+                        <a:t>Angular + TypeScript</a:t>
+                      </a:r>
+                    </a:p>
+                  </a:txBody>
+                  <a:tcPr anchor="ctr" marL="100584">
+                    <a:solidFill>
+                      <a:srgbClr val="FFFFFF"/>
+                    </a:solidFill>
+                  </a:tcPr>
+                </a:tc>
+                <a:tc>
+                  <a:txBody>
+                    <a:bodyPr/>
+                    <a:lstStyle/>
+                    <a:p>
+                      <a:pPr algn="ctr"/>
+                      <a:r>
+                        <a:rPr sz="1350">
+                          <a:solidFill>
+                            <a:srgbClr val="1A1A2E"/>
+                          </a:solidFill>
+                          <a:latin typeface="Calibri"/>
+                        </a:rPr>
+                        <a:t>Splits a large site into manageable components; TypeScript catches mistakes before the program runs</a:t>
+                      </a:r>
+                    </a:p>
+                  </a:txBody>
+                  <a:tcPr anchor="ctr" marL="100584">
+                    <a:solidFill>
+                      <a:srgbClr val="FFFFFF"/>
+                    </a:solidFill>
+                  </a:tcPr>
+                </a:tc>
+              </a:tr>
+              <a:tr h="355309">
+                <a:tc>
+                  <a:txBody>
+                    <a:bodyPr/>
+                    <a:lstStyle/>
+                    <a:p>
+                      <a:r>
+                        <a:rPr sz="1350">
+                          <a:solidFill>
+                            <a:srgbClr val="1A1A2E"/>
+                          </a:solidFill>
+                          <a:latin typeface="Calibri"/>
+                        </a:rPr>
+                        <a:t>Back end</a:t>
+                      </a:r>
+                    </a:p>
+                  </a:txBody>
+                  <a:tcPr anchor="ctr" marL="100584">
+                    <a:solidFill>
+                      <a:srgbClr val="F3F6FC"/>
+                    </a:solidFill>
+                  </a:tcPr>
+                </a:tc>
+                <a:tc>
+                  <a:txBody>
+                    <a:bodyPr/>
+                    <a:lstStyle/>
+                    <a:p>
+                      <a:pPr algn="ctr"/>
+                      <a:r>
+                        <a:rPr sz="1350">
+                          <a:solidFill>
+                            <a:srgbClr val="1A1A2E"/>
+                          </a:solidFill>
+                          <a:latin typeface="Calibri"/>
+                        </a:rPr>
+                        <a:t>Node.js + Express (TypeScript)</a:t>
+                      </a:r>
+                    </a:p>
+                  </a:txBody>
+                  <a:tcPr anchor="ctr" marL="100584">
+                    <a:solidFill>
+                      <a:srgbClr val="F3F6FC"/>
+                    </a:solidFill>
+                  </a:tcPr>
+                </a:tc>
+                <a:tc>
+                  <a:txBody>
+                    <a:bodyPr/>
+                    <a:lstStyle/>
+                    <a:p>
+                      <a:pPr algn="ctr"/>
+                      <a:r>
+                        <a:rPr sz="1350">
+                          <a:solidFill>
+                            <a:srgbClr val="1A1A2E"/>
+                          </a:solidFill>
+                          <a:latin typeface="Calibri"/>
+                        </a:rPr>
+                        <a:t>Holds every rule that must not be trusted to the browser — authentication, access control, scoring</a:t>
+                      </a:r>
+                    </a:p>
+                  </a:txBody>
+                  <a:tcPr anchor="ctr" marL="100584">
+                    <a:solidFill>
+                      <a:srgbClr val="F3F6FC"/>
+                    </a:solidFill>
+                  </a:tcPr>
+                </a:tc>
+              </a:tr>
+              <a:tr h="355309">
+                <a:tc>
+                  <a:txBody>
+                    <a:bodyPr/>
+                    <a:lstStyle/>
+                    <a:p>
+                      <a:r>
+                        <a:rPr sz="1350">
+                          <a:solidFill>
+                            <a:srgbClr val="1A1A2E"/>
+                          </a:solidFill>
+                          <a:latin typeface="Calibri"/>
+                        </a:rPr>
+                        <a:t>Database</a:t>
+                      </a:r>
+                    </a:p>
+                  </a:txBody>
+                  <a:tcPr anchor="ctr" marL="100584">
+                    <a:solidFill>
+                      <a:srgbClr val="FFFFFF"/>
+                    </a:solidFill>
+                  </a:tcPr>
+                </a:tc>
+                <a:tc>
+                  <a:txBody>
+                    <a:bodyPr/>
+                    <a:lstStyle/>
+                    <a:p>
+                      <a:pPr algn="ctr"/>
+                      <a:r>
+                        <a:rPr sz="1350">
+                          <a:solidFill>
+                            <a:srgbClr val="1A1A2E"/>
+                          </a:solidFill>
+                          <a:latin typeface="Calibri"/>
+                        </a:rPr>
+                        <a:t>PostgreSQL on Supabase</a:t>
+                      </a:r>
+                    </a:p>
+                  </a:txBody>
+                  <a:tcPr anchor="ctr" marL="100584">
+                    <a:solidFill>
+                      <a:srgbClr val="FFFFFF"/>
+                    </a:solidFill>
+                  </a:tcPr>
+                </a:tc>
+                <a:tc>
+                  <a:txBody>
+                    <a:bodyPr/>
+                    <a:lstStyle/>
+                    <a:p>
+                      <a:pPr algn="ctr"/>
+                      <a:r>
+                        <a:rPr sz="1350">
+                          <a:solidFill>
+                            <a:srgbClr val="1A1A2E"/>
+                          </a:solidFill>
+                          <a:latin typeface="Calibri"/>
+                        </a:rPr>
+                        <a:t>Enforces valid statuses at the database level; transactional migrations; managed free tier</a:t>
+                      </a:r>
+                    </a:p>
+                  </a:txBody>
+                  <a:tcPr anchor="ctr" marL="100584">
+                    <a:solidFill>
+                      <a:srgbClr val="FFFFFF"/>
+                    </a:solidFill>
+                  </a:tcPr>
+                </a:tc>
+              </a:tr>
+              <a:tr h="355309">
+                <a:tc>
+                  <a:txBody>
+                    <a:bodyPr/>
+                    <a:lstStyle/>
+                    <a:p>
+                      <a:r>
+                        <a:rPr sz="1350">
+                          <a:solidFill>
+                            <a:srgbClr val="1A1A2E"/>
+                          </a:solidFill>
+                          <a:latin typeface="Calibri"/>
+                        </a:rPr>
+                        <a:t>Hosting</a:t>
+                      </a:r>
+                    </a:p>
+                  </a:txBody>
+                  <a:tcPr anchor="ctr" marL="100584">
+                    <a:solidFill>
+                      <a:srgbClr val="F3F6FC"/>
+                    </a:solidFill>
+                  </a:tcPr>
+                </a:tc>
+                <a:tc>
+                  <a:txBody>
+                    <a:bodyPr/>
+                    <a:lstStyle/>
+                    <a:p>
+                      <a:pPr algn="ctr"/>
+                      <a:r>
+                        <a:rPr sz="1350">
+                          <a:solidFill>
+                            <a:srgbClr val="1A1A2E"/>
+                          </a:solidFill>
+                          <a:latin typeface="Calibri"/>
+                        </a:rPr>
+                        <a:t>Render</a:t>
+                      </a:r>
+                    </a:p>
+                  </a:txBody>
+                  <a:tcPr anchor="ctr" marL="100584">
+                    <a:solidFill>
+                      <a:srgbClr val="F3F6FC"/>
+                    </a:solidFill>
+                  </a:tcPr>
+                </a:tc>
+                <a:tc>
+                  <a:txBody>
+                    <a:bodyPr/>
+                    <a:lstStyle/>
+                    <a:p>
+                      <a:pPr algn="ctr"/>
+                      <a:r>
+                        <a:rPr sz="1350">
+                          <a:solidFill>
+                            <a:srgbClr val="1A1A2E"/>
+                          </a:solidFill>
+                          <a:latin typeface="Calibri"/>
+                        </a:rPr>
+                        <a:t>Free tier, deploys straight from the repository</a:t>
+                      </a:r>
+                    </a:p>
+                  </a:txBody>
+                  <a:tcPr anchor="ctr" marL="100584">
+                    <a:solidFill>
+                      <a:srgbClr val="F3F6FC"/>
+                    </a:solidFill>
+                  </a:tcPr>
+                </a:tc>
+              </a:tr>
+              <a:tr h="355309">
+                <a:tc>
+                  <a:txBody>
+                    <a:bodyPr/>
+                    <a:lstStyle/>
+                    <a:p>
+                      <a:r>
+                        <a:rPr sz="1350">
+                          <a:solidFill>
+                            <a:srgbClr val="1A1A2E"/>
+                          </a:solidFill>
+                          <a:latin typeface="Calibri"/>
+                        </a:rPr>
+                        <a:t>Email</a:t>
+                      </a:r>
+                    </a:p>
+                  </a:txBody>
+                  <a:tcPr anchor="ctr" marL="100584">
+                    <a:solidFill>
+                      <a:srgbClr val="FFFFFF"/>
+                    </a:solidFill>
+                  </a:tcPr>
+                </a:tc>
+                <a:tc>
+                  <a:txBody>
+                    <a:bodyPr/>
+                    <a:lstStyle/>
+                    <a:p>
+                      <a:pPr algn="ctr"/>
+                      <a:r>
+                        <a:rPr sz="1350">
+                          <a:solidFill>
+                            <a:srgbClr val="1A1A2E"/>
+                          </a:solidFill>
+                          <a:latin typeface="Calibri"/>
+                        </a:rPr>
+                        <a:t>Brevo / SMTP</a:t>
+                      </a:r>
+                    </a:p>
+                  </a:txBody>
+                  <a:tcPr anchor="ctr" marL="100584">
+                    <a:solidFill>
+                      <a:srgbClr val="FFFFFF"/>
+                    </a:solidFill>
+                  </a:tcPr>
+                </a:tc>
+                <a:tc>
+                  <a:txBody>
+                    <a:bodyPr/>
+                    <a:lstStyle/>
+                    <a:p>
+                      <a:pPr algn="ctr"/>
+                      <a:r>
+                        <a:rPr sz="1350">
+                          <a:solidFill>
+                            <a:srgbClr val="1A1A2E"/>
+                          </a:solidFill>
+                          <a:latin typeface="Calibri"/>
+                        </a:rPr>
+                        <a:t>Verification codes, alerts and interview invitations</a:t>
+                      </a:r>
+                    </a:p>
+                  </a:txBody>
+                  <a:tcPr anchor="ctr" marL="100584">
+                    <a:solidFill>
+                      <a:srgbClr val="FFFFFF"/>
+                    </a:solidFill>
+                  </a:tcPr>
+                </a:tc>
+              </a:tr>
+              <a:tr h="355314">
+                <a:tc>
+                  <a:txBody>
+                    <a:bodyPr/>
+                    <a:lstStyle/>
+                    <a:p>
+                      <a:r>
+                        <a:rPr sz="1350">
+                          <a:solidFill>
+                            <a:srgbClr val="1A1A2E"/>
+                          </a:solidFill>
+                          <a:latin typeface="Calibri"/>
+                        </a:rPr>
+                        <a:t>AI (optional)</a:t>
+                      </a:r>
+                    </a:p>
+                  </a:txBody>
+                  <a:tcPr anchor="ctr" marL="100584">
+                    <a:solidFill>
+                      <a:srgbClr val="F3F6FC"/>
+                    </a:solidFill>
+                  </a:tcPr>
+                </a:tc>
+                <a:tc>
+                  <a:txBody>
+                    <a:bodyPr/>
+                    <a:lstStyle/>
+                    <a:p>
+                      <a:pPr algn="ctr"/>
+                      <a:r>
+                        <a:rPr sz="1350">
+                          <a:solidFill>
+                            <a:srgbClr val="1A1A2E"/>
+                          </a:solidFill>
+                          <a:latin typeface="Calibri"/>
+                        </a:rPr>
+                        <a:t>Google Gemini API</a:t>
+                      </a:r>
+                    </a:p>
+                  </a:txBody>
+                  <a:tcPr anchor="ctr" marL="100584">
+                    <a:solidFill>
+                      <a:srgbClr val="F3F6FC"/>
+                    </a:solidFill>
+                  </a:tcPr>
+                </a:tc>
+                <a:tc>
+                  <a:txBody>
+                    <a:bodyPr/>
+                    <a:lstStyle/>
+                    <a:p>
+                      <a:pPr algn="ctr"/>
+                      <a:r>
+                        <a:rPr sz="1350">
+                          <a:solidFill>
+                            <a:srgbClr val="1A1A2E"/>
+                          </a:solidFill>
+                          <a:latin typeface="Calibri"/>
+                        </a:rPr>
+                        <a:t>Reads an uploaded resume into fields. Never scores, ranks or recommends</a:t>
+                      </a:r>
+                    </a:p>
+                  </a:txBody>
+                  <a:tcPr anchor="ctr" marL="100584">
+                    <a:solidFill>
+                      <a:srgbClr val="F3F6FC"/>
+                    </a:solidFill>
+                  </a:tcPr>
+                </a:tc>
+              </a:tr>
+            </a:tbl>
+          </a:graphicData>
+        </a:graphic>
+      </p:graphicFrame>
     </p:spTree>
   </p:cSld>
   <p:clrMapOvr>

--- a/05_Website_Angular/docs/Linaw-PH-Video-Presentation.pptx
+++ b/05_Website_Angular/docs/Linaw-PH-Video-Presentation.pptx
@@ -1267,7 +1267,7 @@
           </a:p>
           <a:p>
             <a:r>
-              <a:t>"I want to close on what this study does not establish, because a result is only worth as much as the limits you state with it. First and most important: we built this system and we also evaluated it. That is a real source of favourable bias. We put four measures in place against it — responses were confidential, no researcher was present while anyone answered, our invitation said explicitly that critical ratings were as useful as favourable ones, and we published the interpretation scale before collecting any data. Those limit the bias. They do not remove it. Second, this is one company in one industry, and each respondent used the system for a single session of twenty to thirty minutes — enough to judge usability, not enough to judge reliability over time. Third, two of our three score components measure quantity rather than relevance, which four of our ten recruiters spotted independently, and which is now the first item in our recommendations. And finally, we measured the quality of the system, not whether it gets anybody hired. That question is outside what this design can answer."</a:t>
+              <a:t>"I want to close on what this study does not establish, because a result is only worth as much as the limits you state with it. First: every rating in this study came from someone outside our team — forty-six job seekers, eleven HR personnel and three IT experts. None of us rated our own system. What remains is that we wrote the instruments and recruited the respondents, and they knew whose system they were rating, which is a documented source of favourable response. We put four measures in place against it — responses were confidential, no researcher was present while anyone answered, our invitation said explicitly that critical ratings were as useful as favourable ones, and we published the interpretation scale before collecting any data. Those limit it. They do not remove it. Second, this is one company in one industry, and each respondent used the system for a single session of twenty to thirty minutes — enough to judge usability, not enough to judge reliability over time. Third, two of our three score components measure quantity rather than relevance, which four of our ten recruiters spotted independently, and which is now the first item in our recommendations. And finally, we measured the quality of the system, not whether it gets anybody hired. That question is outside what this design can answer."</a:t>
             </a:r>
           </a:p>
           <a:p/>
@@ -7513,7 +7513,7 @@
                 </a:solidFill>
                 <a:latin typeface="Calibri"/>
               </a:rPr>
-              <a:t>We built it and we evaluated it</a:t>
+              <a:t>Rated by outsiders — but not an independent study</a:t>
             </a:r>
           </a:p>
           <a:p>
@@ -7529,7 +7529,7 @@
                 </a:solidFill>
                 <a:latin typeface="Calibri"/>
               </a:rPr>
-              <a:t>Four measures limit that bias — confidential responses, no researcher present, an invitation asking for critical ratings, and a scale published before data collection. They limit it; they do not remove it.</a:t>
+              <a:t>Every rating came from an external respondent: 46 job seekers, 11 HR personnel and 3 IT experts. No researcher rated our own system. What remains is that we wrote the instruments and recruited the respondents, who knew whose system they were rating. Four measures limit that: confidential responses, no researcher present, an invitation asking for critical ratings, and a scale published before data collection.</a:t>
             </a:r>
           </a:p>
           <a:p>
